--- a/docs/monthly-report-sample/report_2026-10.pptx
+++ b/docs/monthly-report-sample/report_2026-10.pptx
@@ -146,6 +146,23 @@
           <c:marker>
             <c:symbol val="none"/>
           </c:marker>
+          <c:dPt>
+            <c:idx val="5"/>
+            <c:marker>
+              <c:symbol val="circle"/>
+              <c:size val="9"/>
+              <c:spPr>
+                <a:solidFill>
+                  <a:srgbClr val="1B7F8C"/>
+                </a:solidFill>
+                <a:ln>
+                  <a:solidFill>
+                    <a:srgbClr val="1B7F8C"/>
+                  </a:solidFill>
+                </a:ln>
+              </c:spPr>
+            </c:marker>
+          </c:dPt>
           <c:cat>
             <c:strRef>
               <c:f>Sheet1!$A$2:$A$32</c:f>
@@ -472,99 +489,247 @@
           </c:cat>
           <c:val>
             <c:numRef>
-              <c:f>Sheet1!$C$2:$C$32</c:f>
+              <c:f>Sheet1!$C$2:$C$31</c:f>
+              <c:numCache>
+                <c:formatCode>General</c:formatCode>
+                <c:ptCount val="30"/>
+                <c:pt idx="0">
+                  <c:v>1250.0</c:v>
+                </c:pt>
+                <c:pt idx="1">
+                  <c:v>1390.24</c:v>
+                </c:pt>
+                <c:pt idx="2">
+                  <c:v>1465.96</c:v>
+                </c:pt>
+                <c:pt idx="3">
+                  <c:v>1881.42</c:v>
+                </c:pt>
+                <c:pt idx="4">
+                  <c:v>1838.65</c:v>
+                </c:pt>
+                <c:pt idx="5">
+                  <c:v>1981.97</c:v>
+                </c:pt>
+                <c:pt idx="6">
+                  <c:v>0.0</c:v>
+                </c:pt>
+                <c:pt idx="7">
+                  <c:v>1212.26</c:v>
+                </c:pt>
+                <c:pt idx="8">
+                  <c:v>1047.71</c:v>
+                </c:pt>
+                <c:pt idx="9">
+                  <c:v>1107.8</c:v>
+                </c:pt>
+                <c:pt idx="10">
+                  <c:v>1454.55</c:v>
+                </c:pt>
+                <c:pt idx="11">
+                  <c:v>1891.53</c:v>
+                </c:pt>
+                <c:pt idx="12">
+                  <c:v>2008.74</c:v>
+                </c:pt>
+                <c:pt idx="13">
+                  <c:v>1415.63</c:v>
+                </c:pt>
+                <c:pt idx="14">
+                  <c:v>1253.27</c:v>
+                </c:pt>
+                <c:pt idx="15">
+                  <c:v>1094.08</c:v>
+                </c:pt>
+                <c:pt idx="16">
+                  <c:v>1592.91</c:v>
+                </c:pt>
+                <c:pt idx="17">
+                  <c:v>1839.95</c:v>
+                </c:pt>
+                <c:pt idx="18">
+                  <c:v>1648.79</c:v>
+                </c:pt>
+                <c:pt idx="19">
+                  <c:v>1099.31</c:v>
+                </c:pt>
+                <c:pt idx="20">
+                  <c:v>1295.03</c:v>
+                </c:pt>
+                <c:pt idx="21">
+                  <c:v>0.0</c:v>
+                </c:pt>
+                <c:pt idx="22">
+                  <c:v>1097.83</c:v>
+                </c:pt>
+                <c:pt idx="23">
+                  <c:v>1651.48</c:v>
+                </c:pt>
+                <c:pt idx="24">
+                  <c:v>2077.77</c:v>
+                </c:pt>
+                <c:pt idx="25">
+                  <c:v>1355.29</c:v>
+                </c:pt>
+                <c:pt idx="26">
+                  <c:v>1790.66</c:v>
+                </c:pt>
+                <c:pt idx="27">
+                  <c:v>1082.55</c:v>
+                </c:pt>
+                <c:pt idx="28">
+                  <c:v>1139.63</c:v>
+                </c:pt>
+                <c:pt idx="29">
+                  <c:v>1001.1</c:v>
+                </c:pt>
+              </c:numCache>
+            </c:numRef>
+          </c:val>
+          <c:smooth val="0"/>
+        </c:ser>
+        <c:ser>
+          <c:idx val="2"/>
+          <c:order val="2"/>
+          <c:tx>
+            <c:strRef>
+              <c:f>Sheet1!$D$1</c:f>
+              <c:strCache>
+                <c:ptCount val="1"/>
+                <c:pt idx="0">
+                  <c:v>Day with no data</c:v>
+                </c:pt>
+              </c:strCache>
+            </c:strRef>
+          </c:tx>
+          <c:spPr>
+            <a:ln>
+              <a:noFill/>
+            </a:ln>
+          </c:spPr>
+          <c:marker>
+            <c:symbol val="x"/>
+            <c:size val="10"/>
+            <c:spPr>
+              <a:ln>
+                <a:solidFill>
+                  <a:srgbClr val="B44A1E"/>
+                </a:solidFill>
+              </a:ln>
+            </c:spPr>
+          </c:marker>
+          <c:cat>
+            <c:strRef>
+              <c:f>Sheet1!$A$2:$A$32</c:f>
+              <c:strCache>
+                <c:ptCount val="31"/>
+                <c:pt idx="0">
+                  <c:v>1</c:v>
+                </c:pt>
+                <c:pt idx="1">
+                  <c:v>2</c:v>
+                </c:pt>
+                <c:pt idx="2">
+                  <c:v>3</c:v>
+                </c:pt>
+                <c:pt idx="3">
+                  <c:v>4</c:v>
+                </c:pt>
+                <c:pt idx="4">
+                  <c:v>5</c:v>
+                </c:pt>
+                <c:pt idx="5">
+                  <c:v>6</c:v>
+                </c:pt>
+                <c:pt idx="6">
+                  <c:v>7</c:v>
+                </c:pt>
+                <c:pt idx="7">
+                  <c:v>8</c:v>
+                </c:pt>
+                <c:pt idx="8">
+                  <c:v>9</c:v>
+                </c:pt>
+                <c:pt idx="9">
+                  <c:v>10</c:v>
+                </c:pt>
+                <c:pt idx="10">
+                  <c:v>11</c:v>
+                </c:pt>
+                <c:pt idx="11">
+                  <c:v>12</c:v>
+                </c:pt>
+                <c:pt idx="12">
+                  <c:v>13</c:v>
+                </c:pt>
+                <c:pt idx="13">
+                  <c:v>14</c:v>
+                </c:pt>
+                <c:pt idx="14">
+                  <c:v>15</c:v>
+                </c:pt>
+                <c:pt idx="15">
+                  <c:v>16</c:v>
+                </c:pt>
+                <c:pt idx="16">
+                  <c:v>17</c:v>
+                </c:pt>
+                <c:pt idx="17">
+                  <c:v>18</c:v>
+                </c:pt>
+                <c:pt idx="18">
+                  <c:v>19</c:v>
+                </c:pt>
+                <c:pt idx="19">
+                  <c:v>20</c:v>
+                </c:pt>
+                <c:pt idx="20">
+                  <c:v>21</c:v>
+                </c:pt>
+                <c:pt idx="21">
+                  <c:v>22</c:v>
+                </c:pt>
+                <c:pt idx="22">
+                  <c:v>23</c:v>
+                </c:pt>
+                <c:pt idx="23">
+                  <c:v>24</c:v>
+                </c:pt>
+                <c:pt idx="24">
+                  <c:v>25</c:v>
+                </c:pt>
+                <c:pt idx="25">
+                  <c:v>26</c:v>
+                </c:pt>
+                <c:pt idx="26">
+                  <c:v>27</c:v>
+                </c:pt>
+                <c:pt idx="27">
+                  <c:v>28</c:v>
+                </c:pt>
+                <c:pt idx="28">
+                  <c:v>29</c:v>
+                </c:pt>
+                <c:pt idx="29">
+                  <c:v>30</c:v>
+                </c:pt>
+                <c:pt idx="30">
+                  <c:v>31</c:v>
+                </c:pt>
+              </c:strCache>
+            </c:strRef>
+          </c:cat>
+          <c:val>
+            <c:numRef>
+              <c:f>Sheet1!$D$2:$D$32</c:f>
               <c:numCache>
                 <c:formatCode>General</c:formatCode>
                 <c:ptCount val="31"/>
-                <c:pt idx="0">
-                  <c:v>1250.0</c:v>
-                </c:pt>
-                <c:pt idx="1">
-                  <c:v>1390.24</c:v>
-                </c:pt>
-                <c:pt idx="2">
-                  <c:v>1465.96</c:v>
-                </c:pt>
-                <c:pt idx="3">
-                  <c:v>1881.42</c:v>
-                </c:pt>
-                <c:pt idx="4">
-                  <c:v>1838.65</c:v>
-                </c:pt>
-                <c:pt idx="5">
-                  <c:v>1981.97</c:v>
-                </c:pt>
-                <c:pt idx="6">
+                <c:pt idx="13">
                   <c:v>0.0</c:v>
                 </c:pt>
-                <c:pt idx="7">
-                  <c:v>1212.26</c:v>
-                </c:pt>
-                <c:pt idx="8">
-                  <c:v>1047.71</c:v>
-                </c:pt>
-                <c:pt idx="9">
-                  <c:v>1107.8</c:v>
-                </c:pt>
-                <c:pt idx="10">
-                  <c:v>1454.55</c:v>
-                </c:pt>
-                <c:pt idx="11">
-                  <c:v>1891.53</c:v>
-                </c:pt>
-                <c:pt idx="12">
-                  <c:v>2008.74</c:v>
-                </c:pt>
-                <c:pt idx="13">
-                  <c:v>1415.63</c:v>
-                </c:pt>
                 <c:pt idx="14">
-                  <c:v>1253.27</c:v>
-                </c:pt>
-                <c:pt idx="15">
-                  <c:v>1094.08</c:v>
-                </c:pt>
-                <c:pt idx="16">
-                  <c:v>1592.91</c:v>
-                </c:pt>
-                <c:pt idx="17">
-                  <c:v>1839.95</c:v>
-                </c:pt>
-                <c:pt idx="18">
-                  <c:v>1648.79</c:v>
-                </c:pt>
-                <c:pt idx="19">
-                  <c:v>1099.31</c:v>
-                </c:pt>
-                <c:pt idx="20">
-                  <c:v>1295.03</c:v>
-                </c:pt>
-                <c:pt idx="21">
                   <c:v>0.0</c:v>
-                </c:pt>
-                <c:pt idx="22">
-                  <c:v>1097.83</c:v>
-                </c:pt>
-                <c:pt idx="23">
-                  <c:v>1651.48</c:v>
-                </c:pt>
-                <c:pt idx="24">
-                  <c:v>2077.77</c:v>
-                </c:pt>
-                <c:pt idx="25">
-                  <c:v>1355.29</c:v>
-                </c:pt>
-                <c:pt idx="26">
-                  <c:v>1790.66</c:v>
-                </c:pt>
-                <c:pt idx="27">
-                  <c:v>1082.55</c:v>
-                </c:pt>
-                <c:pt idx="28">
-                  <c:v>1139.63</c:v>
-                </c:pt>
-                <c:pt idx="29">
-                  <c:v>1001.1</c:v>
                 </c:pt>
               </c:numCache>
             </c:numRef>
@@ -614,7 +779,28 @@
             </a:ln>
           </c:spPr>
         </c:majorGridlines>
-        <c:numFmt formatCode="#,##0" sourceLinked="0"/>
+        <c:title>
+          <c:tx>
+            <c:rich>
+              <a:bodyPr/>
+              <a:lstStyle/>
+              <a:p>
+                <a:r>
+                  <a:rPr sz="1200" b="0" i="0">
+                    <a:solidFill>
+                      <a:srgbClr val="5B6470"/>
+                    </a:solidFill>
+                    <a:latin typeface="Calibri"/>
+                  </a:rPr>
+                  <a:t>Net sales ($)</a:t>
+                </a:r>
+              </a:p>
+            </c:rich>
+          </c:tx>
+          <c:layout/>
+          <c:overlay val="0"/>
+        </c:title>
+        <c:numFmt formatCode="&quot;$&quot;#,##0" sourceLinked="0"/>
         <c:majorTickMark val="out"/>
         <c:minorTickMark val="none"/>
         <c:tickLblPos val="nextTo"/>
@@ -663,9 +849,9 @@
   <c:chart>
     <c:autoTitleDeleted val="1"/>
     <c:plotArea>
-      <c:barChart>
-        <c:barDir val="col"/>
-        <c:grouping val="clustered"/>
+      <c:lineChart>
+        <c:grouping val="standard"/>
+        <c:varyColors val="0"/>
         <c:ser>
           <c:idx val="0"/>
           <c:order val="0"/>
@@ -675,16 +861,38 @@
               <c:strCache>
                 <c:ptCount val="1"/>
                 <c:pt idx="0">
-                  <c:v>Orders</c:v>
+                  <c:v>October 2026</c:v>
                 </c:pt>
               </c:strCache>
             </c:strRef>
           </c:tx>
           <c:spPr>
-            <a:solidFill>
-              <a:srgbClr val="1B7F8C"/>
-            </a:solidFill>
+            <a:ln w="31750">
+              <a:solidFill>
+                <a:srgbClr val="1B7F8C"/>
+              </a:solidFill>
+            </a:ln>
           </c:spPr>
+          <c:marker>
+            <c:symbol val="none"/>
+          </c:marker>
+          <c:dPt>
+            <c:idx val="5"/>
+            <c:marker>
+              <c:symbol val="circle"/>
+              <c:size val="9"/>
+              <c:spPr>
+                <a:solidFill>
+                  <a:srgbClr val="1B7F8C"/>
+                </a:solidFill>
+                <a:ln>
+                  <a:solidFill>
+                    <a:srgbClr val="1B7F8C"/>
+                  </a:solidFill>
+                </a:ln>
+              </c:spPr>
+            </c:marker>
+          </c:dPt>
           <c:cat>
             <c:strRef>
               <c:f>Sheet1!$A$2:$A$32</c:f>
@@ -793,101 +1001,252 @@
                 <c:formatCode>General</c:formatCode>
                 <c:ptCount val="31"/>
                 <c:pt idx="0">
-                  <c:v>19</c:v>
+                  <c:v>19.0</c:v>
                 </c:pt>
                 <c:pt idx="1">
-                  <c:v>27</c:v>
+                  <c:v>27.0</c:v>
                 </c:pt>
                 <c:pt idx="2">
-                  <c:v>21</c:v>
+                  <c:v>21.0</c:v>
                 </c:pt>
                 <c:pt idx="3">
-                  <c:v>21</c:v>
+                  <c:v>21.0</c:v>
                 </c:pt>
                 <c:pt idx="4">
-                  <c:v>16</c:v>
+                  <c:v>16.0</c:v>
                 </c:pt>
                 <c:pt idx="5">
-                  <c:v>0</c:v>
+                  <c:v>0.0</c:v>
                 </c:pt>
                 <c:pt idx="6">
-                  <c:v>21</c:v>
+                  <c:v>21.0</c:v>
                 </c:pt>
                 <c:pt idx="7">
-                  <c:v>20</c:v>
+                  <c:v>20.0</c:v>
                 </c:pt>
                 <c:pt idx="8">
-                  <c:v>30</c:v>
+                  <c:v>30.0</c:v>
                 </c:pt>
                 <c:pt idx="9">
-                  <c:v>21</c:v>
+                  <c:v>21.0</c:v>
                 </c:pt>
                 <c:pt idx="10">
-                  <c:v>21</c:v>
+                  <c:v>21.0</c:v>
                 </c:pt>
                 <c:pt idx="11">
-                  <c:v>22</c:v>
+                  <c:v>22.0</c:v>
                 </c:pt>
                 <c:pt idx="12">
-                  <c:v>21</c:v>
+                  <c:v>21.0</c:v>
                 </c:pt>
                 <c:pt idx="15">
-                  <c:v>26</c:v>
+                  <c:v>26.0</c:v>
                 </c:pt>
                 <c:pt idx="16">
-                  <c:v>21</c:v>
+                  <c:v>21.0</c:v>
                 </c:pt>
                 <c:pt idx="17">
-                  <c:v>20</c:v>
+                  <c:v>20.0</c:v>
                 </c:pt>
                 <c:pt idx="18">
-                  <c:v>18</c:v>
+                  <c:v>18.0</c:v>
                 </c:pt>
                 <c:pt idx="19">
-                  <c:v>15</c:v>
+                  <c:v>15.0</c:v>
                 </c:pt>
                 <c:pt idx="20">
-                  <c:v>23</c:v>
+                  <c:v>23.0</c:v>
                 </c:pt>
                 <c:pt idx="21">
-                  <c:v>22</c:v>
+                  <c:v>22.0</c:v>
                 </c:pt>
                 <c:pt idx="22">
-                  <c:v>27</c:v>
+                  <c:v>27.0</c:v>
                 </c:pt>
                 <c:pt idx="23">
-                  <c:v>24</c:v>
+                  <c:v>24.0</c:v>
                 </c:pt>
                 <c:pt idx="24">
-                  <c:v>27</c:v>
+                  <c:v>27.0</c:v>
                 </c:pt>
                 <c:pt idx="25">
-                  <c:v>21</c:v>
+                  <c:v>21.0</c:v>
                 </c:pt>
                 <c:pt idx="26">
-                  <c:v>20</c:v>
+                  <c:v>20.0</c:v>
                 </c:pt>
                 <c:pt idx="27">
-                  <c:v>17</c:v>
+                  <c:v>17.0</c:v>
                 </c:pt>
                 <c:pt idx="28">
-                  <c:v>16</c:v>
+                  <c:v>16.0</c:v>
                 </c:pt>
                 <c:pt idx="29">
-                  <c:v>20</c:v>
+                  <c:v>20.0</c:v>
                 </c:pt>
                 <c:pt idx="30">
-                  <c:v>30</c:v>
+                  <c:v>30.0</c:v>
                 </c:pt>
               </c:numCache>
             </c:numRef>
           </c:val>
+          <c:smooth val="0"/>
         </c:ser>
-        <c:axId val="-2068027336"/>
-        <c:axId val="-2113994440"/>
-      </c:barChart>
+        <c:ser>
+          <c:idx val="1"/>
+          <c:order val="1"/>
+          <c:tx>
+            <c:strRef>
+              <c:f>Sheet1!$C$1</c:f>
+              <c:strCache>
+                <c:ptCount val="1"/>
+                <c:pt idx="0">
+                  <c:v>Day with no data</c:v>
+                </c:pt>
+              </c:strCache>
+            </c:strRef>
+          </c:tx>
+          <c:spPr>
+            <a:ln>
+              <a:noFill/>
+            </a:ln>
+          </c:spPr>
+          <c:marker>
+            <c:symbol val="x"/>
+            <c:size val="10"/>
+            <c:spPr>
+              <a:ln>
+                <a:solidFill>
+                  <a:srgbClr val="B44A1E"/>
+                </a:solidFill>
+              </a:ln>
+            </c:spPr>
+          </c:marker>
+          <c:cat>
+            <c:strRef>
+              <c:f>Sheet1!$A$2:$A$32</c:f>
+              <c:strCache>
+                <c:ptCount val="31"/>
+                <c:pt idx="0">
+                  <c:v>1</c:v>
+                </c:pt>
+                <c:pt idx="1">
+                  <c:v>2</c:v>
+                </c:pt>
+                <c:pt idx="2">
+                  <c:v>3</c:v>
+                </c:pt>
+                <c:pt idx="3">
+                  <c:v>4</c:v>
+                </c:pt>
+                <c:pt idx="4">
+                  <c:v>5</c:v>
+                </c:pt>
+                <c:pt idx="5">
+                  <c:v>6</c:v>
+                </c:pt>
+                <c:pt idx="6">
+                  <c:v>7</c:v>
+                </c:pt>
+                <c:pt idx="7">
+                  <c:v>8</c:v>
+                </c:pt>
+                <c:pt idx="8">
+                  <c:v>9</c:v>
+                </c:pt>
+                <c:pt idx="9">
+                  <c:v>10</c:v>
+                </c:pt>
+                <c:pt idx="10">
+                  <c:v>11</c:v>
+                </c:pt>
+                <c:pt idx="11">
+                  <c:v>12</c:v>
+                </c:pt>
+                <c:pt idx="12">
+                  <c:v>13</c:v>
+                </c:pt>
+                <c:pt idx="13">
+                  <c:v>14</c:v>
+                </c:pt>
+                <c:pt idx="14">
+                  <c:v>15</c:v>
+                </c:pt>
+                <c:pt idx="15">
+                  <c:v>16</c:v>
+                </c:pt>
+                <c:pt idx="16">
+                  <c:v>17</c:v>
+                </c:pt>
+                <c:pt idx="17">
+                  <c:v>18</c:v>
+                </c:pt>
+                <c:pt idx="18">
+                  <c:v>19</c:v>
+                </c:pt>
+                <c:pt idx="19">
+                  <c:v>20</c:v>
+                </c:pt>
+                <c:pt idx="20">
+                  <c:v>21</c:v>
+                </c:pt>
+                <c:pt idx="21">
+                  <c:v>22</c:v>
+                </c:pt>
+                <c:pt idx="22">
+                  <c:v>23</c:v>
+                </c:pt>
+                <c:pt idx="23">
+                  <c:v>24</c:v>
+                </c:pt>
+                <c:pt idx="24">
+                  <c:v>25</c:v>
+                </c:pt>
+                <c:pt idx="25">
+                  <c:v>26</c:v>
+                </c:pt>
+                <c:pt idx="26">
+                  <c:v>27</c:v>
+                </c:pt>
+                <c:pt idx="27">
+                  <c:v>28</c:v>
+                </c:pt>
+                <c:pt idx="28">
+                  <c:v>29</c:v>
+                </c:pt>
+                <c:pt idx="29">
+                  <c:v>30</c:v>
+                </c:pt>
+                <c:pt idx="30">
+                  <c:v>31</c:v>
+                </c:pt>
+              </c:strCache>
+            </c:strRef>
+          </c:cat>
+          <c:val>
+            <c:numRef>
+              <c:f>Sheet1!$C$2:$C$32</c:f>
+              <c:numCache>
+                <c:formatCode>General</c:formatCode>
+                <c:ptCount val="31"/>
+                <c:pt idx="13">
+                  <c:v>0.0</c:v>
+                </c:pt>
+                <c:pt idx="14">
+                  <c:v>0.0</c:v>
+                </c:pt>
+              </c:numCache>
+            </c:numRef>
+          </c:val>
+          <c:smooth val="0"/>
+        </c:ser>
+        <c:marker val="1"/>
+        <c:smooth val="0"/>
+        <c:axId val="2118791784"/>
+        <c:axId val="2140495176"/>
+      </c:lineChart>
       <c:catAx>
-        <c:axId val="-2068027336"/>
+        <c:axId val="2118791784"/>
         <c:scaling>
           <c:orientation val="minMax"/>
         </c:scaling>
@@ -903,7 +1262,7 @@
             </a:solidFill>
           </a:ln>
         </c:spPr>
-        <c:crossAx val="-2113994440"/>
+        <c:crossAx val="2140495176"/>
         <c:crosses val="autoZero"/>
         <c:auto val="1"/>
         <c:lblAlgn val="ctr"/>
@@ -911,7 +1270,7 @@
         <c:noMultiLvlLbl val="0"/>
       </c:catAx>
       <c:valAx>
-        <c:axId val="-2113994440"/>
+        <c:axId val="2140495176"/>
         <c:scaling/>
         <c:delete val="0"/>
         <c:axPos val="l"/>
@@ -924,6 +1283,27 @@
             </a:ln>
           </c:spPr>
         </c:majorGridlines>
+        <c:title>
+          <c:tx>
+            <c:rich>
+              <a:bodyPr/>
+              <a:lstStyle/>
+              <a:p>
+                <a:r>
+                  <a:rPr sz="1200" b="0" i="0">
+                    <a:solidFill>
+                      <a:srgbClr val="5B6470"/>
+                    </a:solidFill>
+                    <a:latin typeface="Calibri"/>
+                  </a:rPr>
+                  <a:t>Orders</a:t>
+                </a:r>
+              </a:p>
+            </c:rich>
+          </c:tx>
+          <c:layout/>
+          <c:overlay val="0"/>
+        </c:title>
         <c:numFmt formatCode="#,##0" sourceLinked="0"/>
         <c:majorTickMark val="out"/>
         <c:minorTickMark val="none"/>
@@ -933,11 +1313,18 @@
             <a:noFill/>
           </a:ln>
         </c:spPr>
-        <c:crossAx val="-2068027336"/>
+        <c:crossAx val="2118791784"/>
         <c:crosses val="autoZero"/>
       </c:valAx>
     </c:plotArea>
+    <c:legend>
+      <c:legendPos val="b"/>
+      <c:layout/>
+      <c:overlay val="0"/>
+    </c:legend>
+    <c:plotVisOnly val="1"/>
     <c:dispBlanksAs val="gap"/>
+    <c:showDLblsOverMax val="0"/>
   </c:chart>
   <c:txPr>
     <a:bodyPr/>
@@ -4002,7 +4389,7 @@
                 </a:solidFill>
                 <a:latin typeface="Calibri"/>
               </a:rPr>
-              <a:t>Demo store, October 2026</a:t>
+              <a:t>Example Outfitters, October 2026</a:t>
             </a:r>
           </a:p>
         </p:txBody>
@@ -4041,7 +4428,7 @@
                 </a:solidFill>
                 <a:latin typeface="Calibri"/>
               </a:rPr>
-              <a:t>Invented orders from a fixed seed. Not a real store.</a:t>
+              <a:t>Sample report: the orders are invented, not a real store.</a:t>
             </a:r>
           </a:p>
         </p:txBody>
@@ -4076,8 +4463,8 @@
         </p:nvSpPr>
         <p:spPr>
           <a:xfrm>
-            <a:off x="548640" y="320040"/>
-            <a:ext cx="11094415" cy="914400"/>
+            <a:off x="548640" y="274320"/>
+            <a:ext cx="11094415" cy="1005840"/>
           </a:xfrm>
         </p:spPr>
         <p:txBody>
@@ -4086,13 +4473,13 @@
           <a:p>
             <a:pPr algn="l"/>
             <a:r>
-              <a:rPr sz="2800" b="1" i="0">
+              <a:rPr sz="2400" b="1" i="0">
                 <a:solidFill>
                   <a:srgbClr val="1F3A5F"/>
                 </a:solidFill>
                 <a:latin typeface="Calibri"/>
               </a:rPr>
-              <a:t>Net sales fell 1.8% on September 2026 to USD 40,249.02</a:t>
+              <a:t>Net sales fell 1.8% from September (October is missing 2 days)</a:t>
             </a:r>
           </a:p>
         </p:txBody>
@@ -4116,12 +4503,12 @@
                 <a:tableStyleId>{5C22544A-7EE6-4342-B048-85BDC9FD1C3A}</a:tableStyleId>
               </a:tblPr>
               <a:tblGrid>
-                <a:gridCol w="2730932"/>
-                <a:gridCol w="1877516"/>
-                <a:gridCol w="1877516"/>
-                <a:gridCol w="1706833"/>
-                <a:gridCol w="1194783"/>
-                <a:gridCol w="1706833"/>
+                <a:gridCol w="2411829"/>
+                <a:gridCol w="1607886"/>
+                <a:gridCol w="1607886"/>
+                <a:gridCol w="1447097"/>
+                <a:gridCol w="1045126"/>
+                <a:gridCol w="2974589"/>
               </a:tblGrid>
               <a:tr h="530352">
                 <a:tc>
@@ -4131,7 +4518,7 @@
                     <a:p>
                       <a:pPr algn="l"/>
                       <a:r>
-                        <a:rPr sz="1500" b="1" i="0">
+                        <a:rPr sz="1400" b="1" i="0">
                           <a:solidFill>
                             <a:srgbClr val="FFFFFF"/>
                           </a:solidFill>
@@ -4154,7 +4541,7 @@
                     <a:p>
                       <a:pPr algn="r"/>
                       <a:r>
-                        <a:rPr sz="1500" b="1" i="0">
+                        <a:rPr sz="1400" b="1" i="0">
                           <a:solidFill>
                             <a:srgbClr val="FFFFFF"/>
                           </a:solidFill>
@@ -4177,7 +4564,7 @@
                     <a:p>
                       <a:pPr algn="r"/>
                       <a:r>
-                        <a:rPr sz="1500" b="1" i="0">
+                        <a:rPr sz="1400" b="1" i="0">
                           <a:solidFill>
                             <a:srgbClr val="FFFFFF"/>
                           </a:solidFill>
@@ -4200,7 +4587,7 @@
                     <a:p>
                       <a:pPr algn="r"/>
                       <a:r>
-                        <a:rPr sz="1500" b="1" i="0">
+                        <a:rPr sz="1400" b="1" i="0">
                           <a:solidFill>
                             <a:srgbClr val="FFFFFF"/>
                           </a:solidFill>
@@ -4223,7 +4610,7 @@
                     <a:p>
                       <a:pPr algn="r"/>
                       <a:r>
-                        <a:rPr sz="1500" b="1" i="0">
+                        <a:rPr sz="1400" b="1" i="0">
                           <a:solidFill>
                             <a:srgbClr val="FFFFFF"/>
                           </a:solidFill>
@@ -4246,7 +4633,7 @@
                     <a:p>
                       <a:pPr algn="r"/>
                       <a:r>
-                        <a:rPr sz="1500" b="1" i="0">
+                        <a:rPr sz="1400" b="1" i="0">
                           <a:solidFill>
                             <a:srgbClr val="FFFFFF"/>
                           </a:solidFill>
@@ -4271,7 +4658,7 @@
                     <a:p>
                       <a:pPr algn="l"/>
                       <a:r>
-                        <a:rPr sz="1500" b="0" i="0">
+                        <a:rPr sz="1400" b="0" i="0">
                           <a:solidFill>
                             <a:srgbClr val="2B2F36"/>
                           </a:solidFill>
@@ -4294,7 +4681,7 @@
                     <a:p>
                       <a:pPr algn="r"/>
                       <a:r>
-                        <a:rPr sz="1500" b="0" i="0">
+                        <a:rPr sz="1400" b="0" i="0">
                           <a:solidFill>
                             <a:srgbClr val="2B2F36"/>
                           </a:solidFill>
@@ -4317,7 +4704,7 @@
                     <a:p>
                       <a:pPr algn="r"/>
                       <a:r>
-                        <a:rPr sz="1500" b="0" i="0">
+                        <a:rPr sz="1400" b="0" i="0">
                           <a:solidFill>
                             <a:srgbClr val="2B2F36"/>
                           </a:solidFill>
@@ -4340,7 +4727,7 @@
                     <a:p>
                       <a:pPr algn="r"/>
                       <a:r>
-                        <a:rPr sz="1500" b="0" i="0">
+                        <a:rPr sz="1400" b="0" i="0">
                           <a:solidFill>
                             <a:srgbClr val="2B2F36"/>
                           </a:solidFill>
@@ -4363,7 +4750,7 @@
                     <a:p>
                       <a:pPr algn="r"/>
                       <a:r>
-                        <a:rPr sz="1500" b="0" i="0">
+                        <a:rPr sz="1400" b="0" i="0">
                           <a:solidFill>
                             <a:srgbClr val="2B2F36"/>
                           </a:solidFill>
@@ -4386,13 +4773,13 @@
                     <a:p>
                       <a:pPr algn="r"/>
                       <a:r>
-                        <a:rPr sz="1500" b="0" i="0">
+                        <a:rPr sz="1400" b="0" i="0">
                           <a:solidFill>
                             <a:srgbClr val="2B2F36"/>
                           </a:solidFill>
                           <a:latin typeface="Calibri"/>
                         </a:rPr>
-                        <a:t>partial data</a:t>
+                        <a:t>October partial: 2 days missing</a:t>
                       </a:r>
                     </a:p>
                   </a:txBody>
@@ -4411,7 +4798,7 @@
                     <a:p>
                       <a:pPr algn="l"/>
                       <a:r>
-                        <a:rPr sz="1500" b="0" i="0">
+                        <a:rPr sz="1400" b="0" i="0">
                           <a:solidFill>
                             <a:srgbClr val="2B2F36"/>
                           </a:solidFill>
@@ -4434,13 +4821,13 @@
                     <a:p>
                       <a:pPr algn="r"/>
                       <a:r>
-                        <a:rPr sz="1500" b="0" i="0">
+                        <a:rPr sz="1400" b="0" i="0">
                           <a:solidFill>
                             <a:srgbClr val="2B2F36"/>
                           </a:solidFill>
                           <a:latin typeface="Calibri"/>
                         </a:rPr>
-                        <a:t>USD 42,374.92</a:t>
+                        <a:t>$42,374.92</a:t>
                       </a:r>
                     </a:p>
                   </a:txBody>
@@ -4457,13 +4844,13 @@
                     <a:p>
                       <a:pPr algn="r"/>
                       <a:r>
-                        <a:rPr sz="1500" b="0" i="0">
+                        <a:rPr sz="1400" b="0" i="0">
                           <a:solidFill>
                             <a:srgbClr val="2B2F36"/>
                           </a:solidFill>
                           <a:latin typeface="Calibri"/>
                         </a:rPr>
-                        <a:t>USD 42,639.05</a:t>
+                        <a:t>$42,639.05</a:t>
                       </a:r>
                     </a:p>
                   </a:txBody>
@@ -4480,13 +4867,13 @@
                     <a:p>
                       <a:pPr algn="r"/>
                       <a:r>
-                        <a:rPr sz="1500" b="0" i="0">
+                        <a:rPr sz="1400" b="0" i="0">
                           <a:solidFill>
                             <a:srgbClr val="2B2F36"/>
                           </a:solidFill>
                           <a:latin typeface="Calibri"/>
                         </a:rPr>
-                        <a:t>-USD 264.13</a:t>
+                        <a:t>-$264.13</a:t>
                       </a:r>
                     </a:p>
                   </a:txBody>
@@ -4503,7 +4890,7 @@
                     <a:p>
                       <a:pPr algn="r"/>
                       <a:r>
-                        <a:rPr sz="1500" b="0" i="0">
+                        <a:rPr sz="1400" b="0" i="0">
                           <a:solidFill>
                             <a:srgbClr val="2B2F36"/>
                           </a:solidFill>
@@ -4526,13 +4913,13 @@
                     <a:p>
                       <a:pPr algn="r"/>
                       <a:r>
-                        <a:rPr sz="1500" b="0" i="0">
+                        <a:rPr sz="1400" b="0" i="0">
                           <a:solidFill>
                             <a:srgbClr val="2B2F36"/>
                           </a:solidFill>
                           <a:latin typeface="Calibri"/>
                         </a:rPr>
-                        <a:t>partial data</a:t>
+                        <a:t>October partial: 2 days missing</a:t>
                       </a:r>
                     </a:p>
                   </a:txBody>
@@ -4551,7 +4938,7 @@
                     <a:p>
                       <a:pPr algn="l"/>
                       <a:r>
-                        <a:rPr sz="1500" b="0" i="0">
+                        <a:rPr sz="1400" b="0" i="0">
                           <a:solidFill>
                             <a:srgbClr val="2B2F36"/>
                           </a:solidFill>
@@ -4574,13 +4961,13 @@
                     <a:p>
                       <a:pPr algn="r"/>
                       <a:r>
-                        <a:rPr sz="1500" b="0" i="0">
+                        <a:rPr sz="1400" b="0" i="0">
                           <a:solidFill>
                             <a:srgbClr val="2B2F36"/>
                           </a:solidFill>
                           <a:latin typeface="Calibri"/>
                         </a:rPr>
-                        <a:t>USD 2,125.90</a:t>
+                        <a:t>$2,125.90</a:t>
                       </a:r>
                     </a:p>
                   </a:txBody>
@@ -4597,13 +4984,13 @@
                     <a:p>
                       <a:pPr algn="r"/>
                       <a:r>
-                        <a:rPr sz="1500" b="0" i="0">
+                        <a:rPr sz="1400" b="0" i="0">
                           <a:solidFill>
                             <a:srgbClr val="2B2F36"/>
                           </a:solidFill>
                           <a:latin typeface="Calibri"/>
                         </a:rPr>
-                        <a:t>USD 1,672.94</a:t>
+                        <a:t>$1,672.94</a:t>
                       </a:r>
                     </a:p>
                   </a:txBody>
@@ -4620,13 +5007,13 @@
                     <a:p>
                       <a:pPr algn="r"/>
                       <a:r>
-                        <a:rPr sz="1500" b="0" i="0">
+                        <a:rPr sz="1400" b="0" i="0">
                           <a:solidFill>
                             <a:srgbClr val="2B2F36"/>
                           </a:solidFill>
                           <a:latin typeface="Calibri"/>
                         </a:rPr>
-                        <a:t>+USD 452.96</a:t>
+                        <a:t>+$452.96</a:t>
                       </a:r>
                     </a:p>
                   </a:txBody>
@@ -4643,7 +5030,7 @@
                     <a:p>
                       <a:pPr algn="r"/>
                       <a:r>
-                        <a:rPr sz="1500" b="0" i="0">
+                        <a:rPr sz="1400" b="0" i="0">
                           <a:solidFill>
                             <a:srgbClr val="2B2F36"/>
                           </a:solidFill>
@@ -4666,13 +5053,13 @@
                     <a:p>
                       <a:pPr algn="r"/>
                       <a:r>
-                        <a:rPr sz="1500" b="0" i="0">
+                        <a:rPr sz="1400" b="0" i="0">
                           <a:solidFill>
                             <a:srgbClr val="2B2F36"/>
                           </a:solidFill>
                           <a:latin typeface="Calibri"/>
                         </a:rPr>
-                        <a:t>partial data</a:t>
+                        <a:t>October partial: 2 days missing</a:t>
                       </a:r>
                     </a:p>
                   </a:txBody>
@@ -4691,7 +5078,7 @@
                     <a:p>
                       <a:pPr algn="l"/>
                       <a:r>
-                        <a:rPr sz="1500" b="0" i="0">
+                        <a:rPr sz="1400" b="0" i="0">
                           <a:solidFill>
                             <a:srgbClr val="2B2F36"/>
                           </a:solidFill>
@@ -4714,13 +5101,13 @@
                     <a:p>
                       <a:pPr algn="r"/>
                       <a:r>
-                        <a:rPr sz="1500" b="0" i="0">
+                        <a:rPr sz="1400" b="0" i="0">
                           <a:solidFill>
                             <a:srgbClr val="2B2F36"/>
                           </a:solidFill>
                           <a:latin typeface="Calibri"/>
                         </a:rPr>
-                        <a:t>USD 40,249.02</a:t>
+                        <a:t>$40,249.02</a:t>
                       </a:r>
                     </a:p>
                   </a:txBody>
@@ -4737,13 +5124,13 @@
                     <a:p>
                       <a:pPr algn="r"/>
                       <a:r>
-                        <a:rPr sz="1500" b="0" i="0">
+                        <a:rPr sz="1400" b="0" i="0">
                           <a:solidFill>
                             <a:srgbClr val="2B2F36"/>
                           </a:solidFill>
                           <a:latin typeface="Calibri"/>
                         </a:rPr>
-                        <a:t>USD 40,966.11</a:t>
+                        <a:t>$40,966.11</a:t>
                       </a:r>
                     </a:p>
                   </a:txBody>
@@ -4760,13 +5147,13 @@
                     <a:p>
                       <a:pPr algn="r"/>
                       <a:r>
-                        <a:rPr sz="1500" b="0" i="0">
+                        <a:rPr sz="1400" b="0" i="0">
                           <a:solidFill>
                             <a:srgbClr val="2B2F36"/>
                           </a:solidFill>
                           <a:latin typeface="Calibri"/>
                         </a:rPr>
-                        <a:t>-USD 717.09</a:t>
+                        <a:t>-$717.09</a:t>
                       </a:r>
                     </a:p>
                   </a:txBody>
@@ -4783,7 +5170,7 @@
                     <a:p>
                       <a:pPr algn="r"/>
                       <a:r>
-                        <a:rPr sz="1500" b="0" i="0">
+                        <a:rPr sz="1400" b="0" i="0">
                           <a:solidFill>
                             <a:srgbClr val="2B2F36"/>
                           </a:solidFill>
@@ -4806,13 +5193,13 @@
                     <a:p>
                       <a:pPr algn="r"/>
                       <a:r>
-                        <a:rPr sz="1500" b="0" i="0">
+                        <a:rPr sz="1400" b="0" i="0">
                           <a:solidFill>
                             <a:srgbClr val="2B2F36"/>
                           </a:solidFill>
                           <a:latin typeface="Calibri"/>
                         </a:rPr>
-                        <a:t>partial data</a:t>
+                        <a:t>October partial: 2 days missing</a:t>
                       </a:r>
                     </a:p>
                   </a:txBody>
@@ -4831,7 +5218,7 @@
                     <a:p>
                       <a:pPr algn="l"/>
                       <a:r>
-                        <a:rPr sz="1500" b="0" i="0">
+                        <a:rPr sz="1400" b="0" i="0">
                           <a:solidFill>
                             <a:srgbClr val="2B2F36"/>
                           </a:solidFill>
@@ -4854,13 +5241,13 @@
                     <a:p>
                       <a:pPr algn="r"/>
                       <a:r>
-                        <a:rPr sz="1500" b="0" i="0">
+                        <a:rPr sz="1400" b="0" i="0">
                           <a:solidFill>
                             <a:srgbClr val="2B2F36"/>
                           </a:solidFill>
                           <a:latin typeface="Calibri"/>
                         </a:rPr>
-                        <a:t>USD 69.81</a:t>
+                        <a:t>$69.81</a:t>
                       </a:r>
                     </a:p>
                   </a:txBody>
@@ -4877,13 +5264,13 @@
                     <a:p>
                       <a:pPr algn="r"/>
                       <a:r>
-                        <a:rPr sz="1500" b="0" i="0">
+                        <a:rPr sz="1400" b="0" i="0">
                           <a:solidFill>
                             <a:srgbClr val="2B2F36"/>
                           </a:solidFill>
                           <a:latin typeface="Calibri"/>
                         </a:rPr>
-                        <a:t>USD 72.39</a:t>
+                        <a:t>$72.39</a:t>
                       </a:r>
                     </a:p>
                   </a:txBody>
@@ -4900,13 +5287,13 @@
                     <a:p>
                       <a:pPr algn="r"/>
                       <a:r>
-                        <a:rPr sz="1500" b="0" i="0">
+                        <a:rPr sz="1400" b="0" i="0">
                           <a:solidFill>
                             <a:srgbClr val="2B2F36"/>
                           </a:solidFill>
                           <a:latin typeface="Calibri"/>
                         </a:rPr>
-                        <a:t>-USD 2.58</a:t>
+                        <a:t>-$2.58</a:t>
                       </a:r>
                     </a:p>
                   </a:txBody>
@@ -4923,7 +5310,7 @@
                     <a:p>
                       <a:pPr algn="r"/>
                       <a:r>
-                        <a:rPr sz="1500" b="0" i="0">
+                        <a:rPr sz="1400" b="0" i="0">
                           <a:solidFill>
                             <a:srgbClr val="2B2F36"/>
                           </a:solidFill>
@@ -4946,13 +5333,13 @@
                     <a:p>
                       <a:pPr algn="r"/>
                       <a:r>
-                        <a:rPr sz="1500" b="0" i="0">
+                        <a:rPr sz="1400" b="0" i="0">
                           <a:solidFill>
                             <a:srgbClr val="2B2F36"/>
                           </a:solidFill>
                           <a:latin typeface="Calibri"/>
                         </a:rPr>
-                        <a:t>partial data</a:t>
+                        <a:t>October partial: 2 days missing</a:t>
                       </a:r>
                     </a:p>
                   </a:txBody>
@@ -4971,7 +5358,7 @@
                     <a:p>
                       <a:pPr algn="l"/>
                       <a:r>
-                        <a:rPr sz="1500" b="0" i="0">
+                        <a:rPr sz="1400" b="0" i="0">
                           <a:solidFill>
                             <a:srgbClr val="2B2F36"/>
                           </a:solidFill>
@@ -4994,7 +5381,7 @@
                     <a:p>
                       <a:pPr algn="r"/>
                       <a:r>
-                        <a:rPr sz="1500" b="0" i="0">
+                        <a:rPr sz="1400" b="0" i="0">
                           <a:solidFill>
                             <a:srgbClr val="2B2F36"/>
                           </a:solidFill>
@@ -5017,7 +5404,7 @@
                     <a:p>
                       <a:pPr algn="r"/>
                       <a:r>
-                        <a:rPr sz="1500" b="0" i="0">
+                        <a:rPr sz="1400" b="0" i="0">
                           <a:solidFill>
                             <a:srgbClr val="2B2F36"/>
                           </a:solidFill>
@@ -5040,7 +5427,7 @@
                     <a:p>
                       <a:pPr algn="r"/>
                       <a:r>
-                        <a:rPr sz="1500" b="0" i="0">
+                        <a:rPr sz="1400" b="0" i="0">
                           <a:solidFill>
                             <a:srgbClr val="2B2F36"/>
                           </a:solidFill>
@@ -5063,13 +5450,13 @@
                     <a:p>
                       <a:pPr algn="r"/>
                       <a:r>
-                        <a:rPr sz="1500" b="0" i="0">
+                        <a:rPr sz="1400" b="0" i="0">
                           <a:solidFill>
                             <a:srgbClr val="2B2F36"/>
                           </a:solidFill>
                           <a:latin typeface="Calibri"/>
                         </a:rPr>
-                        <a:t>+7.2%</a:t>
+                        <a:t>+7.1%</a:t>
                       </a:r>
                     </a:p>
                   </a:txBody>
@@ -5086,13 +5473,13 @@
                     <a:p>
                       <a:pPr algn="r"/>
                       <a:r>
-                        <a:rPr sz="1500" b="0" i="0">
+                        <a:rPr sz="1400" b="0" i="0">
                           <a:solidFill>
                             <a:srgbClr val="2B2F36"/>
                           </a:solidFill>
                           <a:latin typeface="Calibri"/>
                         </a:rPr>
-                        <a:t>partial data</a:t>
+                        <a:t>October partial: 2 days missing</a:t>
                       </a:r>
                     </a:p>
                   </a:txBody>
@@ -5115,8 +5502,8 @@
         </p:nvSpPr>
         <p:spPr>
           <a:xfrm>
-            <a:off x="548640" y="6355080"/>
-            <a:ext cx="11094415" cy="320040"/>
+            <a:off x="548640" y="5989320"/>
+            <a:ext cx="11094415" cy="731520"/>
           </a:xfrm>
           <a:prstGeom prst="rect">
             <a:avLst/>
@@ -5141,7 +5528,23 @@
                 </a:solidFill>
                 <a:latin typeface="Calibri"/>
               </a:rPr>
-              <a:t>Source: stored daily snapshots. Change % is the change over the previous month's value, n/a when that value is zero or absent.</a:t>
+              <a:t>Source: the store's daily order records.</a:t>
+            </a:r>
+          </a:p>
+          <a:p>
+            <a:pPr>
+              <a:spcAft>
+                <a:spcPts val="0"/>
+              </a:spcAft>
+            </a:pPr>
+            <a:r>
+              <a:rPr sz="1100" b="0" i="0">
+                <a:solidFill>
+                  <a:srgbClr val="5B6470"/>
+                </a:solidFill>
+                <a:latin typeface="Calibri"/>
+              </a:rPr>
+              <a:t>Change % is the change over September's figure, n/a when that was zero. Buyers per active day is the average of each day's distinct buyers, over days with orders. Average order value is gross sales divided by orders.</a:t>
             </a:r>
           </a:p>
         </p:txBody>
@@ -5176,8 +5579,8 @@
         </p:nvSpPr>
         <p:spPr>
           <a:xfrm>
-            <a:off x="548640" y="320040"/>
-            <a:ext cx="11094415" cy="914400"/>
+            <a:off x="548640" y="274320"/>
+            <a:ext cx="11094415" cy="1005840"/>
           </a:xfrm>
         </p:spPr>
         <p:txBody>
@@ -5192,7 +5595,7 @@
                 </a:solidFill>
                 <a:latin typeface="Calibri"/>
               </a:rPr>
-              <a:t>Net sales by day, October 2026</a:t>
+              <a:t>Net sales by day in October</a:t>
             </a:r>
           </a:p>
         </p:txBody>
@@ -5223,8 +5626,8 @@
         </p:nvSpPr>
         <p:spPr>
           <a:xfrm>
-            <a:off x="548640" y="6355080"/>
-            <a:ext cx="11094415" cy="320040"/>
+            <a:off x="548640" y="5989320"/>
+            <a:ext cx="11094415" cy="731520"/>
           </a:xfrm>
           <a:prstGeom prst="rect">
             <a:avLst/>
@@ -5249,7 +5652,39 @@
                 </a:solidFill>
                 <a:latin typeface="Calibri"/>
               </a:rPr>
-              <a:t>Day of the month on the horizontal axis, net sales in USD. Gaps in the line are days with no snapshot and no sync run: 2026-10-14, 2026-10-15.</a:t>
+              <a:t>Day of the month across, net sales in dollars up.</a:t>
+            </a:r>
+          </a:p>
+          <a:p>
+            <a:pPr>
+              <a:spcAft>
+                <a:spcPts val="0"/>
+              </a:spcAft>
+            </a:pPr>
+            <a:r>
+              <a:rPr sz="1100" b="0" i="0">
+                <a:solidFill>
+                  <a:srgbClr val="5B6470"/>
+                </a:solidFill>
+                <a:latin typeface="Calibri"/>
+              </a:rPr>
+              <a:t>A dot on the zero line is a day with no orders.</a:t>
+            </a:r>
+          </a:p>
+          <a:p>
+            <a:pPr>
+              <a:spcAft>
+                <a:spcPts val="0"/>
+              </a:spcAft>
+            </a:pPr>
+            <a:r>
+              <a:rPr sz="1100" b="0" i="0">
+                <a:solidFill>
+                  <a:srgbClr val="5B6470"/>
+                </a:solidFill>
+                <a:latin typeface="Calibri"/>
+              </a:rPr>
+              <a:t>A break in the line with an X on the zero line is a day with no data (Oct 14, Oct 15). 29 of 31 days are plotted.</a:t>
             </a:r>
           </a:p>
         </p:txBody>
@@ -5284,8 +5719,8 @@
         </p:nvSpPr>
         <p:spPr>
           <a:xfrm>
-            <a:off x="548640" y="320040"/>
-            <a:ext cx="11094415" cy="914400"/>
+            <a:off x="548640" y="274320"/>
+            <a:ext cx="11094415" cy="1005840"/>
           </a:xfrm>
         </p:spPr>
         <p:txBody>
@@ -5300,14 +5735,14 @@
                 </a:solidFill>
                 <a:latin typeface="Calibri"/>
               </a:rPr>
-              <a:t>Orders by day, October 2026</a:t>
+              <a:t>Orders by day in October</a:t>
             </a:r>
           </a:p>
         </p:txBody>
       </p:sp>
       <p:graphicFrame>
         <p:nvGraphicFramePr>
-          <p:cNvPr id="3" name="Chart 2" descr="Column chart of orders for each day of October 2026"/>
+          <p:cNvPr id="3" name="Chart 2" descr="Line chart of orders for each day of October 2026"/>
           <p:cNvGraphicFramePr>
             <a:graphicFrameLocks noGrp="1"/>
           </p:cNvGraphicFramePr>
@@ -5331,8 +5766,8 @@
         </p:nvSpPr>
         <p:spPr>
           <a:xfrm>
-            <a:off x="548640" y="6355080"/>
-            <a:ext cx="11094415" cy="320040"/>
+            <a:off x="548640" y="5989320"/>
+            <a:ext cx="11094415" cy="731520"/>
           </a:xfrm>
           <a:prstGeom prst="rect">
             <a:avLst/>
@@ -5357,7 +5792,39 @@
                 </a:solidFill>
                 <a:latin typeface="Calibri"/>
               </a:rPr>
-              <a:t>Day of the month on the horizontal axis. A day with no column had no orders or no data. Days with no snapshot and no sync run: 2026-10-14, 2026-10-15.</a:t>
+              <a:t>Day of the month across, orders up.</a:t>
+            </a:r>
+          </a:p>
+          <a:p>
+            <a:pPr>
+              <a:spcAft>
+                <a:spcPts val="0"/>
+              </a:spcAft>
+            </a:pPr>
+            <a:r>
+              <a:rPr sz="1100" b="0" i="0">
+                <a:solidFill>
+                  <a:srgbClr val="5B6470"/>
+                </a:solidFill>
+                <a:latin typeface="Calibri"/>
+              </a:rPr>
+              <a:t>A dot on the zero line is a day with no orders.</a:t>
+            </a:r>
+          </a:p>
+          <a:p>
+            <a:pPr>
+              <a:spcAft>
+                <a:spcPts val="0"/>
+              </a:spcAft>
+            </a:pPr>
+            <a:r>
+              <a:rPr sz="1100" b="0" i="0">
+                <a:solidFill>
+                  <a:srgbClr val="5B6470"/>
+                </a:solidFill>
+                <a:latin typeface="Calibri"/>
+              </a:rPr>
+              <a:t>A break in the line with an X on the zero line is a day with no data (Oct 14, Oct 15). 29 of 31 days are plotted.</a:t>
             </a:r>
           </a:p>
         </p:txBody>
@@ -5392,8 +5859,8 @@
         </p:nvSpPr>
         <p:spPr>
           <a:xfrm>
-            <a:off x="548640" y="320040"/>
-            <a:ext cx="11094415" cy="914400"/>
+            <a:off x="548640" y="274320"/>
+            <a:ext cx="11094415" cy="1005840"/>
           </a:xfrm>
         </p:spPr>
         <p:txBody>
@@ -5408,7 +5875,7 @@
                 </a:solidFill>
                 <a:latin typeface="Calibri"/>
               </a:rPr>
-              <a:t>Average order value fell 3.6% on September 2026 to USD 69.81</a:t>
+              <a:t>Order value, buyers and best days in October</a:t>
             </a:r>
           </a:p>
         </p:txBody>
@@ -5422,8 +5889,8 @@
           <p:nvPr/>
         </p:nvGraphicFramePr>
         <p:xfrm>
-          <a:off x="548640" y="1463040"/>
-          <a:ext cx="11094414" cy="1508760"/>
+          <a:off x="548640" y="1371600"/>
+          <a:ext cx="11094413" cy="1508760"/>
         </p:xfrm>
         <a:graphic>
           <a:graphicData uri="http://schemas.openxmlformats.org/drawingml/2006/table">
@@ -5432,11 +5899,12 @@
                 <a:tableStyleId>{5C22544A-7EE6-4342-B048-85BDC9FD1C3A}</a:tableStyleId>
               </a:tblPr>
               <a:tblGrid>
-                <a:gridCol w="3251811"/>
-                <a:gridCol w="2295396"/>
-                <a:gridCol w="2295396"/>
-                <a:gridCol w="1912830"/>
-                <a:gridCol w="1338981"/>
+                <a:gridCol w="2411829"/>
+                <a:gridCol w="1607886"/>
+                <a:gridCol w="1607886"/>
+                <a:gridCol w="1447097"/>
+                <a:gridCol w="1045126"/>
+                <a:gridCol w="2974589"/>
               </a:tblGrid>
               <a:tr h="502920">
                 <a:tc>
@@ -5446,7 +5914,7 @@
                     <a:p>
                       <a:pPr algn="l"/>
                       <a:r>
-                        <a:rPr sz="1600" b="1" i="0">
+                        <a:rPr sz="1400" b="1" i="0">
                           <a:solidFill>
                             <a:srgbClr val="FFFFFF"/>
                           </a:solidFill>
@@ -5469,7 +5937,7 @@
                     <a:p>
                       <a:pPr algn="r"/>
                       <a:r>
-                        <a:rPr sz="1600" b="1" i="0">
+                        <a:rPr sz="1400" b="1" i="0">
                           <a:solidFill>
                             <a:srgbClr val="FFFFFF"/>
                           </a:solidFill>
@@ -5492,7 +5960,7 @@
                     <a:p>
                       <a:pPr algn="r"/>
                       <a:r>
-                        <a:rPr sz="1600" b="1" i="0">
+                        <a:rPr sz="1400" b="1" i="0">
                           <a:solidFill>
                             <a:srgbClr val="FFFFFF"/>
                           </a:solidFill>
@@ -5515,7 +5983,7 @@
                     <a:p>
                       <a:pPr algn="r"/>
                       <a:r>
-                        <a:rPr sz="1600" b="1" i="0">
+                        <a:rPr sz="1400" b="1" i="0">
                           <a:solidFill>
                             <a:srgbClr val="FFFFFF"/>
                           </a:solidFill>
@@ -5538,13 +6006,36 @@
                     <a:p>
                       <a:pPr algn="r"/>
                       <a:r>
-                        <a:rPr sz="1600" b="1" i="0">
+                        <a:rPr sz="1400" b="1" i="0">
                           <a:solidFill>
                             <a:srgbClr val="FFFFFF"/>
                           </a:solidFill>
                           <a:latin typeface="Calibri"/>
                         </a:rPr>
                         <a:t>Change %</a:t>
+                      </a:r>
+                    </a:p>
+                  </a:txBody>
+                  <a:tcPr anchor="ctr">
+                    <a:solidFill>
+                      <a:srgbClr val="1F3A5F"/>
+                    </a:solidFill>
+                  </a:tcPr>
+                </a:tc>
+                <a:tc>
+                  <a:txBody>
+                    <a:bodyPr/>
+                    <a:lstStyle/>
+                    <a:p>
+                      <a:pPr algn="r"/>
+                      <a:r>
+                        <a:rPr sz="1400" b="1" i="0">
+                          <a:solidFill>
+                            <a:srgbClr val="FFFFFF"/>
+                          </a:solidFill>
+                          <a:latin typeface="Calibri"/>
+                        </a:rPr>
+                        <a:t>Note</a:t>
                       </a:r>
                     </a:p>
                   </a:txBody>
@@ -5563,7 +6054,7 @@
                     <a:p>
                       <a:pPr algn="l"/>
                       <a:r>
-                        <a:rPr sz="1600" b="0" i="0">
+                        <a:rPr sz="1400" b="0" i="0">
                           <a:solidFill>
                             <a:srgbClr val="2B2F36"/>
                           </a:solidFill>
@@ -5586,13 +6077,13 @@
                     <a:p>
                       <a:pPr algn="r"/>
                       <a:r>
-                        <a:rPr sz="1600" b="0" i="0">
+                        <a:rPr sz="1400" b="0" i="0">
                           <a:solidFill>
                             <a:srgbClr val="2B2F36"/>
                           </a:solidFill>
                           <a:latin typeface="Calibri"/>
                         </a:rPr>
-                        <a:t>USD 69.81</a:t>
+                        <a:t>$69.81</a:t>
                       </a:r>
                     </a:p>
                   </a:txBody>
@@ -5609,13 +6100,13 @@
                     <a:p>
                       <a:pPr algn="r"/>
                       <a:r>
-                        <a:rPr sz="1600" b="0" i="0">
+                        <a:rPr sz="1400" b="0" i="0">
                           <a:solidFill>
                             <a:srgbClr val="2B2F36"/>
                           </a:solidFill>
                           <a:latin typeface="Calibri"/>
                         </a:rPr>
-                        <a:t>USD 72.39</a:t>
+                        <a:t>$72.39</a:t>
                       </a:r>
                     </a:p>
                   </a:txBody>
@@ -5632,13 +6123,13 @@
                     <a:p>
                       <a:pPr algn="r"/>
                       <a:r>
-                        <a:rPr sz="1600" b="0" i="0">
+                        <a:rPr sz="1400" b="0" i="0">
                           <a:solidFill>
                             <a:srgbClr val="2B2F36"/>
                           </a:solidFill>
                           <a:latin typeface="Calibri"/>
                         </a:rPr>
-                        <a:t>-USD 2.58</a:t>
+                        <a:t>-$2.58</a:t>
                       </a:r>
                     </a:p>
                   </a:txBody>
@@ -5655,13 +6146,36 @@
                     <a:p>
                       <a:pPr algn="r"/>
                       <a:r>
-                        <a:rPr sz="1600" b="0" i="0">
+                        <a:rPr sz="1400" b="0" i="0">
                           <a:solidFill>
                             <a:srgbClr val="2B2F36"/>
                           </a:solidFill>
                           <a:latin typeface="Calibri"/>
                         </a:rPr>
                         <a:t>-3.6%</a:t>
+                      </a:r>
+                    </a:p>
+                  </a:txBody>
+                  <a:tcPr anchor="ctr">
+                    <a:solidFill>
+                      <a:srgbClr val="FFFFFF"/>
+                    </a:solidFill>
+                  </a:tcPr>
+                </a:tc>
+                <a:tc>
+                  <a:txBody>
+                    <a:bodyPr/>
+                    <a:lstStyle/>
+                    <a:p>
+                      <a:pPr algn="r"/>
+                      <a:r>
+                        <a:rPr sz="1400" b="0" i="0">
+                          <a:solidFill>
+                            <a:srgbClr val="2B2F36"/>
+                          </a:solidFill>
+                          <a:latin typeface="Calibri"/>
+                        </a:rPr>
+                        <a:t>October partial: 2 days missing</a:t>
                       </a:r>
                     </a:p>
                   </a:txBody>
@@ -5680,7 +6194,7 @@
                     <a:p>
                       <a:pPr algn="l"/>
                       <a:r>
-                        <a:rPr sz="1600" b="0" i="0">
+                        <a:rPr sz="1400" b="0" i="0">
                           <a:solidFill>
                             <a:srgbClr val="2B2F36"/>
                           </a:solidFill>
@@ -5703,7 +6217,7 @@
                     <a:p>
                       <a:pPr algn="r"/>
                       <a:r>
-                        <a:rPr sz="1600" b="0" i="0">
+                        <a:rPr sz="1400" b="0" i="0">
                           <a:solidFill>
                             <a:srgbClr val="2B2F36"/>
                           </a:solidFill>
@@ -5726,7 +6240,7 @@
                     <a:p>
                       <a:pPr algn="r"/>
                       <a:r>
-                        <a:rPr sz="1600" b="0" i="0">
+                        <a:rPr sz="1400" b="0" i="0">
                           <a:solidFill>
                             <a:srgbClr val="2B2F36"/>
                           </a:solidFill>
@@ -5749,7 +6263,7 @@
                     <a:p>
                       <a:pPr algn="r"/>
                       <a:r>
-                        <a:rPr sz="1600" b="0" i="0">
+                        <a:rPr sz="1400" b="0" i="0">
                           <a:solidFill>
                             <a:srgbClr val="2B2F36"/>
                           </a:solidFill>
@@ -5772,13 +6286,36 @@
                     <a:p>
                       <a:pPr algn="r"/>
                       <a:r>
-                        <a:rPr sz="1600" b="0" i="0">
+                        <a:rPr sz="1400" b="0" i="0">
                           <a:solidFill>
                             <a:srgbClr val="2B2F36"/>
                           </a:solidFill>
                           <a:latin typeface="Calibri"/>
                         </a:rPr>
-                        <a:t>+7.2%</a:t>
+                        <a:t>+7.1%</a:t>
+                      </a:r>
+                    </a:p>
+                  </a:txBody>
+                  <a:tcPr anchor="ctr">
+                    <a:solidFill>
+                      <a:srgbClr val="F1F4F7"/>
+                    </a:solidFill>
+                  </a:tcPr>
+                </a:tc>
+                <a:tc>
+                  <a:txBody>
+                    <a:bodyPr/>
+                    <a:lstStyle/>
+                    <a:p>
+                      <a:pPr algn="r"/>
+                      <a:r>
+                        <a:rPr sz="1400" b="0" i="0">
+                          <a:solidFill>
+                            <a:srgbClr val="2B2F36"/>
+                          </a:solidFill>
+                          <a:latin typeface="Calibri"/>
+                        </a:rPr>
+                        <a:t>October partial: 2 days missing</a:t>
                       </a:r>
                     </a:p>
                   </a:txBody>
@@ -5801,7 +6338,7 @@
         </p:nvSpPr>
         <p:spPr>
           <a:xfrm>
-            <a:off x="548640" y="3246120"/>
+            <a:off x="548640" y="3063240"/>
             <a:ext cx="11094415" cy="365760"/>
           </a:xfrm>
           <a:prstGeom prst="rect">
@@ -5841,8 +6378,8 @@
           <p:nvPr/>
         </p:nvGraphicFramePr>
         <p:xfrm>
-          <a:off x="548640" y="3657600"/>
-          <a:ext cx="11094414" cy="1828800"/>
+          <a:off x="548640" y="3474720"/>
+          <a:ext cx="5486399" cy="1828800"/>
         </p:xfrm>
         <a:graphic>
           <a:graphicData uri="http://schemas.openxmlformats.org/drawingml/2006/table">
@@ -5851,9 +6388,9 @@
                 <a:tableStyleId>{5C22544A-7EE6-4342-B048-85BDC9FD1C3A}</a:tableStyleId>
               </a:tblPr>
               <a:tblGrid>
-                <a:gridCol w="1584916"/>
-                <a:gridCol w="4754749"/>
-                <a:gridCol w="4754749"/>
+                <a:gridCol w="914400"/>
+                <a:gridCol w="2011680"/>
+                <a:gridCol w="2560319"/>
               </a:tblGrid>
               <a:tr h="457200">
                 <a:tc>
@@ -5863,7 +6400,7 @@
                     <a:p>
                       <a:pPr algn="l"/>
                       <a:r>
-                        <a:rPr sz="1600" b="1" i="0">
+                        <a:rPr sz="1500" b="1" i="0">
                           <a:solidFill>
                             <a:srgbClr val="FFFFFF"/>
                           </a:solidFill>
@@ -5886,7 +6423,7 @@
                     <a:p>
                       <a:pPr algn="l"/>
                       <a:r>
-                        <a:rPr sz="1600" b="1" i="0">
+                        <a:rPr sz="1500" b="1" i="0">
                           <a:solidFill>
                             <a:srgbClr val="FFFFFF"/>
                           </a:solidFill>
@@ -5909,7 +6446,7 @@
                     <a:p>
                       <a:pPr algn="r"/>
                       <a:r>
-                        <a:rPr sz="1600" b="1" i="0">
+                        <a:rPr sz="1500" b="1" i="0">
                           <a:solidFill>
                             <a:srgbClr val="FFFFFF"/>
                           </a:solidFill>
@@ -5934,7 +6471,7 @@
                     <a:p>
                       <a:pPr algn="l"/>
                       <a:r>
-                        <a:rPr sz="1600" b="0" i="0">
+                        <a:rPr sz="1500" b="0" i="0">
                           <a:solidFill>
                             <a:srgbClr val="2B2F36"/>
                           </a:solidFill>
@@ -5957,13 +6494,13 @@
                     <a:p>
                       <a:pPr algn="l"/>
                       <a:r>
-                        <a:rPr sz="1600" b="0" i="0">
+                        <a:rPr sz="1500" b="0" i="0">
                           <a:solidFill>
                             <a:srgbClr val="2B2F36"/>
                           </a:solidFill>
                           <a:latin typeface="Calibri"/>
                         </a:rPr>
-                        <a:t>2026-10-31</a:t>
+                        <a:t>Oct 31</a:t>
                       </a:r>
                     </a:p>
                   </a:txBody>
@@ -5980,13 +6517,13 @@
                     <a:p>
                       <a:pPr algn="r"/>
                       <a:r>
-                        <a:rPr sz="1600" b="0" i="0">
+                        <a:rPr sz="1500" b="0" i="0">
                           <a:solidFill>
                             <a:srgbClr val="2B2F36"/>
                           </a:solidFill>
                           <a:latin typeface="Calibri"/>
                         </a:rPr>
-                        <a:t>USD 2,187.62</a:t>
+                        <a:t>$2,187.62</a:t>
                       </a:r>
                     </a:p>
                   </a:txBody>
@@ -6005,7 +6542,7 @@
                     <a:p>
                       <a:pPr algn="l"/>
                       <a:r>
-                        <a:rPr sz="1600" b="0" i="0">
+                        <a:rPr sz="1500" b="0" i="0">
                           <a:solidFill>
                             <a:srgbClr val="2B2F36"/>
                           </a:solidFill>
@@ -6028,13 +6565,13 @@
                     <a:p>
                       <a:pPr algn="l"/>
                       <a:r>
-                        <a:rPr sz="1600" b="0" i="0">
+                        <a:rPr sz="1500" b="0" i="0">
                           <a:solidFill>
                             <a:srgbClr val="2B2F36"/>
                           </a:solidFill>
                           <a:latin typeface="Calibri"/>
                         </a:rPr>
-                        <a:t>2026-10-09</a:t>
+                        <a:t>Oct 9</a:t>
                       </a:r>
                     </a:p>
                   </a:txBody>
@@ -6051,13 +6588,13 @@
                     <a:p>
                       <a:pPr algn="r"/>
                       <a:r>
-                        <a:rPr sz="1600" b="0" i="0">
+                        <a:rPr sz="1500" b="0" i="0">
                           <a:solidFill>
                             <a:srgbClr val="2B2F36"/>
                           </a:solidFill>
                           <a:latin typeface="Calibri"/>
                         </a:rPr>
-                        <a:t>USD 2,016.71</a:t>
+                        <a:t>$2,016.71</a:t>
                       </a:r>
                     </a:p>
                   </a:txBody>
@@ -6076,7 +6613,7 @@
                     <a:p>
                       <a:pPr algn="l"/>
                       <a:r>
-                        <a:rPr sz="1600" b="0" i="0">
+                        <a:rPr sz="1500" b="0" i="0">
                           <a:solidFill>
                             <a:srgbClr val="2B2F36"/>
                           </a:solidFill>
@@ -6099,13 +6636,13 @@
                     <a:p>
                       <a:pPr algn="l"/>
                       <a:r>
-                        <a:rPr sz="1600" b="0" i="0">
+                        <a:rPr sz="1500" b="0" i="0">
                           <a:solidFill>
                             <a:srgbClr val="2B2F36"/>
                           </a:solidFill>
                           <a:latin typeface="Calibri"/>
                         </a:rPr>
-                        <a:t>2026-10-23</a:t>
+                        <a:t>Oct 23</a:t>
                       </a:r>
                     </a:p>
                   </a:txBody>
@@ -6122,13 +6659,13 @@
                     <a:p>
                       <a:pPr algn="r"/>
                       <a:r>
-                        <a:rPr sz="1600" b="0" i="0">
+                        <a:rPr sz="1500" b="0" i="0">
                           <a:solidFill>
                             <a:srgbClr val="2B2F36"/>
                           </a:solidFill>
                           <a:latin typeface="Calibri"/>
                         </a:rPr>
-                        <a:t>USD 1,879.87</a:t>
+                        <a:t>$1,879.87</a:t>
                       </a:r>
                     </a:p>
                   </a:txBody>
@@ -6151,8 +6688,8 @@
         </p:nvSpPr>
         <p:spPr>
           <a:xfrm>
-            <a:off x="548640" y="6355080"/>
-            <a:ext cx="11094415" cy="320040"/>
+            <a:off x="548640" y="5989320"/>
+            <a:ext cx="11094415" cy="731520"/>
           </a:xfrm>
           <a:prstGeom prst="rect">
             <a:avLst/>
@@ -6177,7 +6714,7 @@
                 </a:solidFill>
                 <a:latin typeface="Calibri"/>
               </a:rPr>
-              <a:t>Average order value is gross sales over orders for the month. Buyers per active day is the mean of the daily distinct buyer counts, which cannot be summed across days.</a:t>
+              <a:t>Change % is the change over September's figure, n/a when that was zero. Buyers per active day is the average of each day's distinct buyers, over days with orders. Average order value is gross sales divided by orders.</a:t>
             </a:r>
           </a:p>
         </p:txBody>
@@ -6212,8 +6749,8 @@
         </p:nvSpPr>
         <p:spPr>
           <a:xfrm>
-            <a:off x="548640" y="320040"/>
-            <a:ext cx="11094415" cy="914400"/>
+            <a:off x="548640" y="274320"/>
+            <a:ext cx="11094415" cy="1005840"/>
           </a:xfrm>
         </p:spPr>
         <p:txBody>
@@ -6222,13 +6759,13 @@
           <a:p>
             <a:pPr algn="l"/>
             <a:r>
-              <a:rPr sz="2800" b="1" i="0">
+              <a:rPr sz="2400" b="1" i="0">
                 <a:solidFill>
                   <a:srgbClr val="1F3A5F"/>
                 </a:solidFill>
                 <a:latin typeface="Calibri"/>
               </a:rPr>
-              <a:t>What the numbers say</a:t>
+              <a:t>Refunds moved most, up 27.1% from September (October is missing 2 days)</a:t>
             </a:r>
           </a:p>
         </p:txBody>
@@ -6242,7 +6779,7 @@
         <p:spPr>
           <a:xfrm>
             <a:off x="548640" y="1463040"/>
-            <a:ext cx="11094415" cy="4023360"/>
+            <a:ext cx="11094415" cy="4297680"/>
           </a:xfrm>
           <a:prstGeom prst="rect">
             <a:avLst/>
@@ -6267,7 +6804,7 @@
                 </a:solidFill>
                 <a:latin typeface="Calibri"/>
               </a:rPr>
-              <a:t>Net sales were USD 40,249.02 in October 2026, down 1.8% on September 2026 (USD 40,966.11).</a:t>
+              <a:t>Net sales were $40,249.02 in October, down 1.8% from September ($40,966.11), and October is missing 2 days.</a:t>
             </a:r>
           </a:p>
           <a:p>
@@ -6283,7 +6820,7 @@
                 </a:solidFill>
                 <a:latin typeface="Calibri"/>
               </a:rPr>
-              <a:t>Orders were 607 in October 2026, up 3.1% on September 2026 (589).</a:t>
+              <a:t>Orders were 607 in October, up 3.1% from September (589), and October is missing 2 days.</a:t>
             </a:r>
           </a:p>
           <a:p>
@@ -6299,7 +6836,7 @@
                 </a:solidFill>
                 <a:latin typeface="Calibri"/>
               </a:rPr>
-              <a:t>Average order value was USD 69.81, down 3.6% on September 2026.</a:t>
+              <a:t>Average order value was $69.81 in October, down 3.6% from September ($72.39), and October is missing 2 days.</a:t>
             </a:r>
           </a:p>
           <a:p>
@@ -6315,7 +6852,7 @@
                 </a:solidFill>
                 <a:latin typeface="Calibri"/>
               </a:rPr>
-              <a:t>Refunds were USD 2,125.90.</a:t>
+              <a:t>Refunds were $2,125.90 in October, up 27.1% from September ($1,672.94), and October is missing 2 days.</a:t>
             </a:r>
           </a:p>
           <a:p>
@@ -6331,7 +6868,7 @@
                 </a:solidFill>
                 <a:latin typeface="Calibri"/>
               </a:rPr>
-              <a:t>The best day was 2026-10-31 with net sales of USD 2,187.62.</a:t>
+              <a:t>The biggest move was Refunds, up 27.1% from September, and October is missing 2 days.</a:t>
             </a:r>
           </a:p>
           <a:p>
@@ -6347,7 +6884,23 @@
                 </a:solidFill>
                 <a:latin typeface="Calibri"/>
               </a:rPr>
-              <a:t>2 days have no data (2026-10-14, 2026-10-15), so the totals are understated.</a:t>
+              <a:t>The best day was Oct 31 with net sales of $2,187.62.</a:t>
+            </a:r>
+          </a:p>
+          <a:p>
+            <a:pPr>
+              <a:spcAft>
+                <a:spcPts val="1200"/>
+              </a:spcAft>
+            </a:pPr>
+            <a:r>
+              <a:rPr sz="2000" b="0" i="0">
+                <a:solidFill>
+                  <a:srgbClr val="2B2F36"/>
+                </a:solidFill>
+                <a:latin typeface="Calibri"/>
+              </a:rPr>
+              <a:t>2 days have no data (Oct 14, Oct 15), so the totals are understated.</a:t>
             </a:r>
           </a:p>
         </p:txBody>
@@ -6360,8 +6913,8 @@
         </p:nvSpPr>
         <p:spPr>
           <a:xfrm>
-            <a:off x="548640" y="5760720"/>
-            <a:ext cx="11094415" cy="548640"/>
+            <a:off x="548640" y="5989320"/>
+            <a:ext cx="11094415" cy="731520"/>
           </a:xfrm>
           <a:prstGeom prst="rect">
             <a:avLst/>
@@ -6380,13 +6933,13 @@
               </a:spcAft>
             </a:pPr>
             <a:r>
-              <a:rPr sz="1300" b="0" i="1">
+              <a:rPr sz="1100" b="0" i="0">
                 <a:solidFill>
                   <a:srgbClr val="5B6470"/>
                 </a:solidFill>
                 <a:latin typeface="Calibri"/>
               </a:rPr>
-              <a:t>Written by a fixed template from the computed figures (no model key is set). No model was used.</a:t>
+              <a:t>Narrative written from the computed figures on the previous slides.</a:t>
             </a:r>
           </a:p>
         </p:txBody>
@@ -6421,8 +6974,8 @@
         </p:nvSpPr>
         <p:spPr>
           <a:xfrm>
-            <a:off x="548640" y="320040"/>
-            <a:ext cx="11094415" cy="914400"/>
+            <a:off x="548640" y="274320"/>
+            <a:ext cx="11094415" cy="1005840"/>
           </a:xfrm>
         </p:spPr>
         <p:txBody>
@@ -6437,7 +6990,7 @@
                 </a:solidFill>
                 <a:latin typeface="Calibri"/>
               </a:rPr>
-              <a:t>Data health: 28 of 31 days have data in October 2026</a:t>
+              <a:t>Data health: October is missing 2 of 31 days</a:t>
             </a:r>
           </a:p>
         </p:txBody>
@@ -6472,6 +7025,15 @@
                     <a:lstStyle/>
                     <a:p>
                       <a:pPr algn="l"/>
+                      <a:r>
+                        <a:rPr sz="1500" b="1" i="0">
+                          <a:solidFill>
+                            <a:srgbClr val="FFFFFF"/>
+                          </a:solidFill>
+                          <a:latin typeface="Calibri"/>
+                        </a:rPr>
+                        <a:t>Count</a:t>
+                      </a:r>
                     </a:p>
                   </a:txBody>
                   <a:tcPr anchor="ctr">
@@ -6541,7 +7103,7 @@
                           </a:solidFill>
                           <a:latin typeface="Calibri"/>
                         </a:rPr>
-                        <a:t>Days expected</a:t>
+                        <a:t>Days in the month</a:t>
                       </a:r>
                     </a:p>
                   </a:txBody>
@@ -6612,7 +7174,7 @@
                           </a:solidFill>
                           <a:latin typeface="Calibri"/>
                         </a:rPr>
-                        <a:t>Days with snapshots</a:t>
+                        <a:t>Days with orders</a:t>
                       </a:r>
                     </a:p>
                   </a:txBody>
@@ -6683,7 +7245,7 @@
                           </a:solidFill>
                           <a:latin typeface="Calibri"/>
                         </a:rPr>
-                        <a:t>Days with no orders (a sync ran)</a:t>
+                        <a:t>Days with no orders</a:t>
                       </a:r>
                     </a:p>
                   </a:txBody>
@@ -6754,7 +7316,7 @@
                           </a:solidFill>
                           <a:latin typeface="Calibri"/>
                         </a:rPr>
-                        <a:t>Days missing (no snapshot, no sync)</a:t>
+                        <a:t>Days with no data</a:t>
                       </a:r>
                     </a:p>
                   </a:txBody>
@@ -6825,7 +7387,7 @@
                           </a:solidFill>
                           <a:latin typeface="Calibri"/>
                         </a:rPr>
-                        <a:t>Snapshot rows used</a:t>
+                        <a:t>Stored daily figures used</a:t>
                       </a:r>
                     </a:p>
                   </a:txBody>
@@ -6896,7 +7458,7 @@
                           </a:solidFill>
                           <a:latin typeface="Calibri"/>
                         </a:rPr>
-                        <a:t>First and last day with data</a:t>
+                        <a:t>First and last day with orders</a:t>
                       </a:r>
                     </a:p>
                   </a:txBody>
@@ -6919,7 +7481,7 @@
                           </a:solidFill>
                           <a:latin typeface="Calibri"/>
                         </a:rPr>
-                        <a:t>2026-10-01 to 2026-10-31</a:t>
+                        <a:t>Oct 1 to Oct 31</a:t>
                       </a:r>
                     </a:p>
                   </a:txBody>
@@ -6942,7 +7504,7 @@
                           </a:solidFill>
                           <a:latin typeface="Calibri"/>
                         </a:rPr>
-                        <a:t>2026-09-01 to 2026-09-30</a:t>
+                        <a:t>Sep 1 to Sep 30</a:t>
                       </a:r>
                     </a:p>
                   </a:txBody>
@@ -6965,8 +7527,8 @@
         </p:nvSpPr>
         <p:spPr>
           <a:xfrm>
-            <a:off x="548640" y="4572000"/>
-            <a:ext cx="11094415" cy="1645920"/>
+            <a:off x="548640" y="4526280"/>
+            <a:ext cx="11094415" cy="1463040"/>
           </a:xfrm>
           <a:prstGeom prst="rect">
             <a:avLst/>
@@ -6991,7 +7553,7 @@
                 </a:solidFill>
                 <a:latin typeface="Calibri"/>
               </a:rPr>
-              <a:t>Missing days in October 2026: 2026-10-14, 2026-10-15.</a:t>
+              <a:t>Days with no data in October: Oct 14, Oct 15.</a:t>
             </a:r>
           </a:p>
           <a:p>
@@ -7007,7 +7569,7 @@
                 </a:solidFill>
                 <a:latin typeface="Calibri"/>
               </a:rPr>
-              <a:t>Missing days in September 2026: none.</a:t>
+              <a:t>Days with no data in September: none.</a:t>
             </a:r>
           </a:p>
           <a:p>
@@ -7023,7 +7585,7 @@
                 </a:solidFill>
                 <a:latin typeface="Calibri"/>
               </a:rPr>
-              <a:t>Totals for a month with missing days are understated, so its changes are marked partial data.</a:t>
+              <a:t>A month with days missing is understated, so its changes are marked partial.</a:t>
             </a:r>
           </a:p>
         </p:txBody>
@@ -7036,8 +7598,8 @@
         </p:nvSpPr>
         <p:spPr>
           <a:xfrm>
-            <a:off x="548640" y="6355080"/>
-            <a:ext cx="11094415" cy="320040"/>
+            <a:off x="548640" y="5989320"/>
+            <a:ext cx="11094415" cy="731520"/>
           </a:xfrm>
           <a:prstGeom prst="rect">
             <a:avLst/>
@@ -7062,7 +7624,23 @@
                 </a:solidFill>
                 <a:latin typeface="Calibri"/>
               </a:rPr>
-              <a:t>A day counts as a quiet day only when a succeeded or partial sync run's window covers it.</a:t>
+              <a:t>Days with orders, days with no orders and days with no data add up to the days in the month.</a:t>
+            </a:r>
+          </a:p>
+          <a:p>
+            <a:pPr>
+              <a:spcAft>
+                <a:spcPts val="0"/>
+              </a:spcAft>
+            </a:pPr>
+            <a:r>
+              <a:rPr sz="1100" b="0" i="0">
+                <a:solidFill>
+                  <a:srgbClr val="5B6470"/>
+                </a:solidFill>
+                <a:latin typeface="Calibri"/>
+              </a:rPr>
+              <a:t>A day with no orders is one where a data pull ran and found none. A day with no data is one no data pull covered.</a:t>
             </a:r>
           </a:p>
         </p:txBody>

--- a/docs/monthly-report-sample/report_2026-10.pptx
+++ b/docs/monthly-report-sample/report_2026-10.pptx
@@ -386,6 +386,40 @@
           <c:marker>
             <c:symbol val="none"/>
           </c:marker>
+          <c:dPt>
+            <c:idx val="6"/>
+            <c:marker>
+              <c:symbol val="circle"/>
+              <c:size val="9"/>
+              <c:spPr>
+                <a:solidFill>
+                  <a:srgbClr val="8A94A0"/>
+                </a:solidFill>
+                <a:ln>
+                  <a:solidFill>
+                    <a:srgbClr val="8A94A0"/>
+                  </a:solidFill>
+                </a:ln>
+              </c:spPr>
+            </c:marker>
+          </c:dPt>
+          <c:dPt>
+            <c:idx val="21"/>
+            <c:marker>
+              <c:symbol val="circle"/>
+              <c:size val="9"/>
+              <c:spPr>
+                <a:solidFill>
+                  <a:srgbClr val="8A94A0"/>
+                </a:solidFill>
+                <a:ln>
+                  <a:solidFill>
+                    <a:srgbClr val="8A94A0"/>
+                  </a:solidFill>
+                </a:ln>
+              </c:spPr>
+            </c:marker>
+          </c:dPt>
           <c:cat>
             <c:strRef>
               <c:f>Sheet1!$A$2:$A$32</c:f>
@@ -4479,7 +4513,7 @@
                 </a:solidFill>
                 <a:latin typeface="Calibri"/>
               </a:rPr>
-              <a:t>Net sales fell 1.8% from September (October is missing 2 days)</a:t>
+              <a:t>October net sales total is 1.8% below September, but October is missing 2 days: per reported day it is up 1.6%</a:t>
             </a:r>
           </a:p>
         </p:txBody>
@@ -4779,7 +4813,7 @@
                           </a:solidFill>
                           <a:latin typeface="Calibri"/>
                         </a:rPr>
-                        <a:t>October partial: 2 days missing</a:t>
+                        <a:t>October partial: 2 days missing; per reported day up 6.6%</a:t>
                       </a:r>
                     </a:p>
                   </a:txBody>
@@ -4919,7 +4953,7 @@
                           </a:solidFill>
                           <a:latin typeface="Calibri"/>
                         </a:rPr>
-                        <a:t>October partial: 2 days missing</a:t>
+                        <a:t>October partial: 2 days missing; per reported day up 2.8%</a:t>
                       </a:r>
                     </a:p>
                   </a:txBody>
@@ -5059,7 +5093,7 @@
                           </a:solidFill>
                           <a:latin typeface="Calibri"/>
                         </a:rPr>
-                        <a:t>October partial: 2 days missing</a:t>
+                        <a:t>October partial: 2 days missing; per reported day up 31.5%</a:t>
                       </a:r>
                     </a:p>
                   </a:txBody>
@@ -5199,7 +5233,7 @@
                           </a:solidFill>
                           <a:latin typeface="Calibri"/>
                         </a:rPr>
-                        <a:t>October partial: 2 days missing</a:t>
+                        <a:t>October partial: 2 days missing; per reported day up 1.6%</a:t>
                       </a:r>
                     </a:p>
                   </a:txBody>
@@ -5545,6 +5579,22 @@
                 <a:latin typeface="Calibri"/>
               </a:rPr>
               <a:t>Change % is the change over September's figure, n/a when that was zero. Buyers per active day is the average of each day's distinct buyers, over days with orders. Average order value is gross sales divided by orders.</a:t>
+            </a:r>
+          </a:p>
+          <a:p>
+            <a:pPr>
+              <a:spcAft>
+                <a:spcPts val="0"/>
+              </a:spcAft>
+            </a:pPr>
+            <a:r>
+              <a:rPr sz="1100" b="0" i="0">
+                <a:solidFill>
+                  <a:srgbClr val="5B6470"/>
+                </a:solidFill>
+                <a:latin typeface="Calibri"/>
+              </a:rPr>
+              <a:t>Per reported day divides a total by the days with orders plus the days with no orders, so months with different numbers of days with data can be compared.</a:t>
             </a:r>
           </a:p>
         </p:txBody>
@@ -5668,7 +5718,7 @@
                 </a:solidFill>
                 <a:latin typeface="Calibri"/>
               </a:rPr>
-              <a:t>A dot on the zero line is a day with no orders.</a:t>
+              <a:t>A dot on the zero line is a day with no orders, on either line.</a:t>
             </a:r>
           </a:p>
           <a:p>
@@ -5808,7 +5858,7 @@
                 </a:solidFill>
                 <a:latin typeface="Calibri"/>
               </a:rPr>
-              <a:t>A dot on the zero line is a day with no orders.</a:t>
+              <a:t>A dot on the zero line is a day with no orders, on either line.</a:t>
             </a:r>
           </a:p>
           <a:p>
@@ -6765,7 +6815,7 @@
                 </a:solidFill>
                 <a:latin typeface="Calibri"/>
               </a:rPr>
-              <a:t>Refunds moved most, up 27.1% from September (October is missing 2 days)</a:t>
+              <a:t>October refunds total is 27.1% above September, but October is missing 2 days: per reported day it is up 31.5%</a:t>
             </a:r>
           </a:p>
         </p:txBody>
@@ -6779,7 +6829,7 @@
         <p:spPr>
           <a:xfrm>
             <a:off x="548640" y="1463040"/>
-            <a:ext cx="11094415" cy="4297680"/>
+            <a:ext cx="11094415" cy="4389120"/>
           </a:xfrm>
           <a:prstGeom prst="rect">
             <a:avLst/>
@@ -6794,43 +6844,43 @@
           <a:p>
             <a:pPr>
               <a:spcAft>
-                <a:spcPts val="1200"/>
+                <a:spcPts val="800"/>
               </a:spcAft>
             </a:pPr>
             <a:r>
-              <a:rPr sz="2000" b="0" i="0">
+              <a:rPr sz="1800" b="0" i="0">
                 <a:solidFill>
                   <a:srgbClr val="2B2F36"/>
                 </a:solidFill>
                 <a:latin typeface="Calibri"/>
               </a:rPr>
-              <a:t>Net sales were $40,249.02 in October, down 1.8% from September ($40,966.11), and October is missing 2 days.</a:t>
+              <a:t>Net sales total was $40,249.02 in October, 1.8% below September ($40,966.11), but October is missing 2 days: per reported day, net sales are up 1.6% ($1,387.90 against $1,365.54).</a:t>
             </a:r>
           </a:p>
           <a:p>
             <a:pPr>
               <a:spcAft>
-                <a:spcPts val="1200"/>
+                <a:spcPts val="800"/>
               </a:spcAft>
             </a:pPr>
             <a:r>
-              <a:rPr sz="2000" b="0" i="0">
+              <a:rPr sz="1800" b="0" i="0">
                 <a:solidFill>
                   <a:srgbClr val="2B2F36"/>
                 </a:solidFill>
                 <a:latin typeface="Calibri"/>
               </a:rPr>
-              <a:t>Orders were 607 in October, up 3.1% from September (589), and October is missing 2 days.</a:t>
+              <a:t>Orders total was 607 in October, 3.1% above September (589), but October is missing 2 days: per reported day, orders are up 6.6% (20.93 against 19.63).</a:t>
             </a:r>
           </a:p>
           <a:p>
             <a:pPr>
               <a:spcAft>
-                <a:spcPts val="1200"/>
+                <a:spcPts val="800"/>
               </a:spcAft>
             </a:pPr>
             <a:r>
-              <a:rPr sz="2000" b="0" i="0">
+              <a:rPr sz="1800" b="0" i="0">
                 <a:solidFill>
                   <a:srgbClr val="2B2F36"/>
                 </a:solidFill>
@@ -6842,43 +6892,43 @@
           <a:p>
             <a:pPr>
               <a:spcAft>
-                <a:spcPts val="1200"/>
+                <a:spcPts val="800"/>
               </a:spcAft>
             </a:pPr>
             <a:r>
-              <a:rPr sz="2000" b="0" i="0">
+              <a:rPr sz="1800" b="0" i="0">
                 <a:solidFill>
                   <a:srgbClr val="2B2F36"/>
                 </a:solidFill>
                 <a:latin typeface="Calibri"/>
               </a:rPr>
-              <a:t>Refunds were $2,125.90 in October, up 27.1% from September ($1,672.94), and October is missing 2 days.</a:t>
+              <a:t>Refunds total was $2,125.90 in October, 27.1% above September ($1,672.94), but October is missing 2 days: per reported day, refunds are up 31.5% ($73.31 against $55.76).</a:t>
             </a:r>
           </a:p>
           <a:p>
             <a:pPr>
               <a:spcAft>
-                <a:spcPts val="1200"/>
+                <a:spcPts val="800"/>
               </a:spcAft>
             </a:pPr>
             <a:r>
-              <a:rPr sz="2000" b="0" i="0">
+              <a:rPr sz="1800" b="0" i="0">
                 <a:solidFill>
                   <a:srgbClr val="2B2F36"/>
                 </a:solidFill>
                 <a:latin typeface="Calibri"/>
               </a:rPr>
-              <a:t>The biggest move was Refunds, up 27.1% from September, and October is missing 2 days.</a:t>
+              <a:t>The biggest move was Refunds, 27.1% above September in total, but October is missing 2 days: per reported day it is up 31.5%.</a:t>
             </a:r>
           </a:p>
           <a:p>
             <a:pPr>
               <a:spcAft>
-                <a:spcPts val="1200"/>
+                <a:spcPts val="800"/>
               </a:spcAft>
             </a:pPr>
             <a:r>
-              <a:rPr sz="2000" b="0" i="0">
+              <a:rPr sz="1800" b="0" i="0">
                 <a:solidFill>
                   <a:srgbClr val="2B2F36"/>
                 </a:solidFill>
@@ -6890,11 +6940,11 @@
           <a:p>
             <a:pPr>
               <a:spcAft>
-                <a:spcPts val="1200"/>
+                <a:spcPts val="800"/>
               </a:spcAft>
             </a:pPr>
             <a:r>
-              <a:rPr sz="2000" b="0" i="0">
+              <a:rPr sz="1800" b="0" i="0">
                 <a:solidFill>
                   <a:srgbClr val="2B2F36"/>
                 </a:solidFill>

--- a/docs/monthly-report-sample/report_2026-10.pptx
+++ b/docs/monthly-report-sample/report_2026-10.pptx
@@ -12,6 +12,7 @@
     <p:sldId id="260" r:id="rId11"/>
     <p:sldId id="261" r:id="rId12"/>
     <p:sldId id="262" r:id="rId13"/>
+    <p:sldId id="263" r:id="rId14"/>
   </p:sldIdLst>
   <p:sldSz cx="12191695" cy="6858000" type="screen4x3"/>
   <p:notesSz cx="6858000" cy="9144000"/>
@@ -910,18 +911,238 @@
           <c:marker>
             <c:symbol val="none"/>
           </c:marker>
+          <c:cat>
+            <c:strRef>
+              <c:f>Sheet1!$A$2:$A$32</c:f>
+              <c:strCache>
+                <c:ptCount val="31"/>
+                <c:pt idx="0">
+                  <c:v>1</c:v>
+                </c:pt>
+                <c:pt idx="1">
+                  <c:v>2</c:v>
+                </c:pt>
+                <c:pt idx="2">
+                  <c:v>3</c:v>
+                </c:pt>
+                <c:pt idx="3">
+                  <c:v>4</c:v>
+                </c:pt>
+                <c:pt idx="4">
+                  <c:v>5</c:v>
+                </c:pt>
+                <c:pt idx="5">
+                  <c:v>6</c:v>
+                </c:pt>
+                <c:pt idx="6">
+                  <c:v>7</c:v>
+                </c:pt>
+                <c:pt idx="7">
+                  <c:v>8</c:v>
+                </c:pt>
+                <c:pt idx="8">
+                  <c:v>9</c:v>
+                </c:pt>
+                <c:pt idx="9">
+                  <c:v>10</c:v>
+                </c:pt>
+                <c:pt idx="10">
+                  <c:v>11</c:v>
+                </c:pt>
+                <c:pt idx="11">
+                  <c:v>12</c:v>
+                </c:pt>
+                <c:pt idx="12">
+                  <c:v>13</c:v>
+                </c:pt>
+                <c:pt idx="13">
+                  <c:v>14</c:v>
+                </c:pt>
+                <c:pt idx="14">
+                  <c:v>15</c:v>
+                </c:pt>
+                <c:pt idx="15">
+                  <c:v>16</c:v>
+                </c:pt>
+                <c:pt idx="16">
+                  <c:v>17</c:v>
+                </c:pt>
+                <c:pt idx="17">
+                  <c:v>18</c:v>
+                </c:pt>
+                <c:pt idx="18">
+                  <c:v>19</c:v>
+                </c:pt>
+                <c:pt idx="19">
+                  <c:v>20</c:v>
+                </c:pt>
+                <c:pt idx="20">
+                  <c:v>21</c:v>
+                </c:pt>
+                <c:pt idx="21">
+                  <c:v>22</c:v>
+                </c:pt>
+                <c:pt idx="22">
+                  <c:v>23</c:v>
+                </c:pt>
+                <c:pt idx="23">
+                  <c:v>24</c:v>
+                </c:pt>
+                <c:pt idx="24">
+                  <c:v>25</c:v>
+                </c:pt>
+                <c:pt idx="25">
+                  <c:v>26</c:v>
+                </c:pt>
+                <c:pt idx="26">
+                  <c:v>27</c:v>
+                </c:pt>
+                <c:pt idx="27">
+                  <c:v>28</c:v>
+                </c:pt>
+                <c:pt idx="28">
+                  <c:v>29</c:v>
+                </c:pt>
+                <c:pt idx="29">
+                  <c:v>30</c:v>
+                </c:pt>
+                <c:pt idx="30">
+                  <c:v>31</c:v>
+                </c:pt>
+              </c:strCache>
+            </c:strRef>
+          </c:cat>
+          <c:val>
+            <c:numRef>
+              <c:f>Sheet1!$B$2:$B$32</c:f>
+              <c:numCache>
+                <c:formatCode>General</c:formatCode>
+                <c:ptCount val="31"/>
+                <c:pt idx="0">
+                  <c:v>626.0</c:v>
+                </c:pt>
+                <c:pt idx="1">
+                  <c:v>954.0</c:v>
+                </c:pt>
+                <c:pt idx="5">
+                  <c:v>521.0</c:v>
+                </c:pt>
+                <c:pt idx="6">
+                  <c:v>669.0</c:v>
+                </c:pt>
+                <c:pt idx="7">
+                  <c:v>627.0</c:v>
+                </c:pt>
+                <c:pt idx="8">
+                  <c:v>1348.0</c:v>
+                </c:pt>
+                <c:pt idx="9">
+                  <c:v>611.0</c:v>
+                </c:pt>
+                <c:pt idx="10">
+                  <c:v>635.0</c:v>
+                </c:pt>
+                <c:pt idx="11">
+                  <c:v>785.0</c:v>
+                </c:pt>
+                <c:pt idx="12">
+                  <c:v>792.0</c:v>
+                </c:pt>
+                <c:pt idx="13">
+                  <c:v>506.0</c:v>
+                </c:pt>
+                <c:pt idx="14">
+                  <c:v>777.0</c:v>
+                </c:pt>
+                <c:pt idx="15">
+                  <c:v>876.0</c:v>
+                </c:pt>
+                <c:pt idx="16">
+                  <c:v>757.0</c:v>
+                </c:pt>
+                <c:pt idx="17">
+                  <c:v>887.0</c:v>
+                </c:pt>
+                <c:pt idx="18">
+                  <c:v>756.0</c:v>
+                </c:pt>
+                <c:pt idx="19">
+                  <c:v>676.0</c:v>
+                </c:pt>
+                <c:pt idx="20">
+                  <c:v>1052.0</c:v>
+                </c:pt>
+                <c:pt idx="21">
+                  <c:v>668.0</c:v>
+                </c:pt>
+                <c:pt idx="22">
+                  <c:v>890.0</c:v>
+                </c:pt>
+                <c:pt idx="23">
+                  <c:v>689.0</c:v>
+                </c:pt>
+                <c:pt idx="24">
+                  <c:v>1037.0</c:v>
+                </c:pt>
+                <c:pt idx="25">
+                  <c:v>850.0</c:v>
+                </c:pt>
+                <c:pt idx="26">
+                  <c:v>850.0</c:v>
+                </c:pt>
+                <c:pt idx="27">
+                  <c:v>770.0</c:v>
+                </c:pt>
+                <c:pt idx="28">
+                  <c:v>504.0</c:v>
+                </c:pt>
+                <c:pt idx="29">
+                  <c:v>686.0</c:v>
+                </c:pt>
+                <c:pt idx="30">
+                  <c:v>1013.0</c:v>
+                </c:pt>
+              </c:numCache>
+            </c:numRef>
+          </c:val>
+          <c:smooth val="0"/>
+        </c:ser>
+        <c:ser>
+          <c:idx val="1"/>
+          <c:order val="1"/>
+          <c:tx>
+            <c:strRef>
+              <c:f>Sheet1!$C$1</c:f>
+              <c:strCache>
+                <c:ptCount val="1"/>
+                <c:pt idx="0">
+                  <c:v>September 2026</c:v>
+                </c:pt>
+              </c:strCache>
+            </c:strRef>
+          </c:tx>
+          <c:spPr>
+            <a:ln w="31750">
+              <a:solidFill>
+                <a:srgbClr val="8A94A0"/>
+              </a:solidFill>
+            </a:ln>
+          </c:spPr>
+          <c:marker>
+            <c:symbol val="none"/>
+          </c:marker>
           <c:dPt>
-            <c:idx val="5"/>
+            <c:idx val="14"/>
             <c:marker>
               <c:symbol val="circle"/>
               <c:size val="9"/>
               <c:spPr>
                 <a:solidFill>
-                  <a:srgbClr val="1B7F8C"/>
+                  <a:srgbClr val="8A94A0"/>
                 </a:solidFill>
                 <a:ln>
                   <a:solidFill>
-                    <a:srgbClr val="1B7F8C"/>
+                    <a:srgbClr val="8A94A0"/>
                   </a:solidFill>
                 </a:ln>
               </c:spPr>
@@ -1030,96 +1251,99 @@
           </c:cat>
           <c:val>
             <c:numRef>
-              <c:f>Sheet1!$B$2:$B$32</c:f>
+              <c:f>Sheet1!$C$2:$C$31</c:f>
               <c:numCache>
                 <c:formatCode>General</c:formatCode>
-                <c:ptCount val="31"/>
+                <c:ptCount val="30"/>
                 <c:pt idx="0">
-                  <c:v>19.0</c:v>
+                  <c:v>514.0</c:v>
                 </c:pt>
                 <c:pt idx="1">
-                  <c:v>27.0</c:v>
+                  <c:v>641.0</c:v>
                 </c:pt>
                 <c:pt idx="2">
-                  <c:v>21.0</c:v>
+                  <c:v>579.0</c:v>
                 </c:pt>
                 <c:pt idx="3">
-                  <c:v>21.0</c:v>
+                  <c:v>1078.0</c:v>
                 </c:pt>
                 <c:pt idx="4">
-                  <c:v>16.0</c:v>
+                  <c:v>1136.0</c:v>
                 </c:pt>
                 <c:pt idx="5">
+                  <c:v>1283.0</c:v>
+                </c:pt>
+                <c:pt idx="6">
+                  <c:v>512.0</c:v>
+                </c:pt>
+                <c:pt idx="7">
+                  <c:v>892.0</c:v>
+                </c:pt>
+                <c:pt idx="8">
+                  <c:v>643.0</c:v>
+                </c:pt>
+                <c:pt idx="9">
+                  <c:v>776.0</c:v>
+                </c:pt>
+                <c:pt idx="10">
+                  <c:v>724.0</c:v>
+                </c:pt>
+                <c:pt idx="11">
+                  <c:v>1138.0</c:v>
+                </c:pt>
+                <c:pt idx="12">
+                  <c:v>1237.0</c:v>
+                </c:pt>
+                <c:pt idx="13">
+                  <c:v>886.0</c:v>
+                </c:pt>
+                <c:pt idx="14">
                   <c:v>0.0</c:v>
                 </c:pt>
-                <c:pt idx="6">
-                  <c:v>21.0</c:v>
-                </c:pt>
-                <c:pt idx="7">
-                  <c:v>20.0</c:v>
-                </c:pt>
-                <c:pt idx="8">
-                  <c:v>30.0</c:v>
-                </c:pt>
-                <c:pt idx="9">
-                  <c:v>21.0</c:v>
-                </c:pt>
-                <c:pt idx="10">
-                  <c:v>21.0</c:v>
-                </c:pt>
-                <c:pt idx="11">
-                  <c:v>22.0</c:v>
-                </c:pt>
-                <c:pt idx="12">
-                  <c:v>21.0</c:v>
-                </c:pt>
                 <c:pt idx="15">
-                  <c:v>26.0</c:v>
+                  <c:v>714.0</c:v>
                 </c:pt>
                 <c:pt idx="16">
-                  <c:v>21.0</c:v>
+                  <c:v>871.0</c:v>
                 </c:pt>
                 <c:pt idx="17">
-                  <c:v>20.0</c:v>
+                  <c:v>1045.0</c:v>
                 </c:pt>
                 <c:pt idx="18">
-                  <c:v>18.0</c:v>
+                  <c:v>928.0</c:v>
                 </c:pt>
                 <c:pt idx="19">
-                  <c:v>15.0</c:v>
+                  <c:v>768.0</c:v>
                 </c:pt>
                 <c:pt idx="20">
-                  <c:v>23.0</c:v>
+                  <c:v>843.0</c:v>
                 </c:pt>
                 <c:pt idx="21">
-                  <c:v>22.0</c:v>
+                  <c:v>605.0</c:v>
                 </c:pt>
                 <c:pt idx="22">
-                  <c:v>27.0</c:v>
+                  <c:v>731.0</c:v>
                 </c:pt>
                 <c:pt idx="23">
-                  <c:v>24.0</c:v>
+                  <c:v>820.0</c:v>
                 </c:pt>
                 <c:pt idx="24">
-                  <c:v>27.0</c:v>
+                  <c:v>889.0</c:v>
                 </c:pt>
                 <c:pt idx="25">
-                  <c:v>21.0</c:v>
+                  <c:v>916.0</c:v>
                 </c:pt>
                 <c:pt idx="26">
-                  <c:v>20.0</c:v>
+                  <c:v>983.0</c:v>
                 </c:pt>
                 <c:pt idx="27">
-                  <c:v>17.0</c:v>
+                  <c:v>561.0</c:v>
                 </c:pt>
                 <c:pt idx="28">
-                  <c:v>16.0</c:v>
+                  <c:v>590.0</c:v>
                 </c:pt>
                 <c:pt idx="29">
-                  <c:v>20.0</c:v>
-                </c:pt>
-                <c:pt idx="30">
-                  <c:v>30.0</c:v>
+                  <c:v>573.0</c:v>
                 </c:pt>
               </c:numCache>
             </c:numRef>
@@ -1127,11 +1351,11 @@
           <c:smooth val="0"/>
         </c:ser>
         <c:ser>
-          <c:idx val="1"/>
-          <c:order val="1"/>
+          <c:idx val="2"/>
+          <c:order val="2"/>
           <c:tx>
             <c:strRef>
-              <c:f>Sheet1!$C$1</c:f>
+              <c:f>Sheet1!$D$1</c:f>
               <c:strCache>
                 <c:ptCount val="1"/>
                 <c:pt idx="0">
@@ -1259,7 +1483,774 @@
           </c:cat>
           <c:val>
             <c:numRef>
-              <c:f>Sheet1!$C$2:$C$32</c:f>
+              <c:f>Sheet1!$D$2:$D$32</c:f>
+              <c:numCache>
+                <c:formatCode>General</c:formatCode>
+                <c:ptCount val="31"/>
+                <c:pt idx="2">
+                  <c:v>0.0</c:v>
+                </c:pt>
+                <c:pt idx="3">
+                  <c:v>0.0</c:v>
+                </c:pt>
+                <c:pt idx="4">
+                  <c:v>0.0</c:v>
+                </c:pt>
+              </c:numCache>
+            </c:numRef>
+          </c:val>
+          <c:smooth val="0"/>
+        </c:ser>
+        <c:marker val="1"/>
+        <c:smooth val="0"/>
+        <c:axId val="2118791784"/>
+        <c:axId val="2140495176"/>
+      </c:lineChart>
+      <c:catAx>
+        <c:axId val="2118791784"/>
+        <c:scaling>
+          <c:orientation val="minMax"/>
+        </c:scaling>
+        <c:delete val="0"/>
+        <c:axPos val="b"/>
+        <c:majorTickMark val="out"/>
+        <c:minorTickMark val="none"/>
+        <c:tickLblPos val="nextTo"/>
+        <c:spPr>
+          <a:ln>
+            <a:solidFill>
+              <a:srgbClr val="8A94A0"/>
+            </a:solidFill>
+          </a:ln>
+        </c:spPr>
+        <c:crossAx val="2140495176"/>
+        <c:crosses val="autoZero"/>
+        <c:auto val="1"/>
+        <c:lblAlgn val="ctr"/>
+        <c:lblOffset val="100"/>
+        <c:noMultiLvlLbl val="0"/>
+      </c:catAx>
+      <c:valAx>
+        <c:axId val="2140495176"/>
+        <c:scaling/>
+        <c:delete val="0"/>
+        <c:axPos val="l"/>
+        <c:majorGridlines>
+          <c:spPr>
+            <a:ln>
+              <a:solidFill>
+                <a:srgbClr val="D9DEE4"/>
+              </a:solidFill>
+            </a:ln>
+          </c:spPr>
+        </c:majorGridlines>
+        <c:title>
+          <c:tx>
+            <c:rich>
+              <a:bodyPr/>
+              <a:lstStyle/>
+              <a:p>
+                <a:r>
+                  <a:rPr sz="1200" b="0" i="0">
+                    <a:solidFill>
+                      <a:srgbClr val="5B6470"/>
+                    </a:solidFill>
+                    <a:latin typeface="Calibri"/>
+                  </a:rPr>
+                  <a:t>Sessions</a:t>
+                </a:r>
+              </a:p>
+            </c:rich>
+          </c:tx>
+          <c:layout/>
+          <c:overlay val="0"/>
+        </c:title>
+        <c:numFmt formatCode="#,##0" sourceLinked="0"/>
+        <c:majorTickMark val="out"/>
+        <c:minorTickMark val="none"/>
+        <c:tickLblPos val="nextTo"/>
+        <c:spPr>
+          <a:ln>
+            <a:noFill/>
+          </a:ln>
+        </c:spPr>
+        <c:crossAx val="2118791784"/>
+        <c:crosses val="autoZero"/>
+      </c:valAx>
+    </c:plotArea>
+    <c:legend>
+      <c:legendPos val="b"/>
+      <c:layout/>
+      <c:overlay val="0"/>
+    </c:legend>
+    <c:plotVisOnly val="1"/>
+    <c:dispBlanksAs val="gap"/>
+    <c:showDLblsOverMax val="0"/>
+  </c:chart>
+  <c:txPr>
+    <a:bodyPr/>
+    <a:lstStyle/>
+    <a:p>
+      <a:pPr>
+        <a:defRPr sz="1200">
+          <a:solidFill>
+            <a:srgbClr val="2B2F36"/>
+          </a:solidFill>
+          <a:latin typeface="Calibri"/>
+        </a:defRPr>
+      </a:pPr>
+      <a:endParaRPr lang="en-US"/>
+    </a:p>
+  </c:txPr>
+  <c:externalData r:id="rId1">
+    <c:autoUpdate val="0"/>
+  </c:externalData>
+</c:chartSpace>
+</file>
+
+<file path=ppt/charts/chart3.xml><?xml version="1.0" encoding="utf-8"?>
+<c:chartSpace xmlns:c="http://schemas.openxmlformats.org/drawingml/2006/chart" xmlns:a="http://schemas.openxmlformats.org/drawingml/2006/main" xmlns:r="http://schemas.openxmlformats.org/officeDocument/2006/relationships">
+  <c:date1904 val="0"/>
+  <c:chart>
+    <c:autoTitleDeleted val="1"/>
+    <c:plotArea>
+      <c:lineChart>
+        <c:grouping val="standard"/>
+        <c:varyColors val="0"/>
+        <c:ser>
+          <c:idx val="0"/>
+          <c:order val="0"/>
+          <c:tx>
+            <c:strRef>
+              <c:f>Sheet1!$B$1</c:f>
+              <c:strCache>
+                <c:ptCount val="1"/>
+                <c:pt idx="0">
+                  <c:v>October 2026</c:v>
+                </c:pt>
+              </c:strCache>
+            </c:strRef>
+          </c:tx>
+          <c:spPr>
+            <a:ln w="31750">
+              <a:solidFill>
+                <a:srgbClr val="1B7F8C"/>
+              </a:solidFill>
+            </a:ln>
+          </c:spPr>
+          <c:marker>
+            <c:symbol val="none"/>
+          </c:marker>
+          <c:dPt>
+            <c:idx val="5"/>
+            <c:marker>
+              <c:symbol val="circle"/>
+              <c:size val="9"/>
+              <c:spPr>
+                <a:solidFill>
+                  <a:srgbClr val="1B7F8C"/>
+                </a:solidFill>
+                <a:ln>
+                  <a:solidFill>
+                    <a:srgbClr val="1B7F8C"/>
+                  </a:solidFill>
+                </a:ln>
+              </c:spPr>
+            </c:marker>
+          </c:dPt>
+          <c:cat>
+            <c:strRef>
+              <c:f>Sheet1!$A$2:$A$32</c:f>
+              <c:strCache>
+                <c:ptCount val="31"/>
+                <c:pt idx="0">
+                  <c:v>1</c:v>
+                </c:pt>
+                <c:pt idx="1">
+                  <c:v>2</c:v>
+                </c:pt>
+                <c:pt idx="2">
+                  <c:v>3</c:v>
+                </c:pt>
+                <c:pt idx="3">
+                  <c:v>4</c:v>
+                </c:pt>
+                <c:pt idx="4">
+                  <c:v>5</c:v>
+                </c:pt>
+                <c:pt idx="5">
+                  <c:v>6</c:v>
+                </c:pt>
+                <c:pt idx="6">
+                  <c:v>7</c:v>
+                </c:pt>
+                <c:pt idx="7">
+                  <c:v>8</c:v>
+                </c:pt>
+                <c:pt idx="8">
+                  <c:v>9</c:v>
+                </c:pt>
+                <c:pt idx="9">
+                  <c:v>10</c:v>
+                </c:pt>
+                <c:pt idx="10">
+                  <c:v>11</c:v>
+                </c:pt>
+                <c:pt idx="11">
+                  <c:v>12</c:v>
+                </c:pt>
+                <c:pt idx="12">
+                  <c:v>13</c:v>
+                </c:pt>
+                <c:pt idx="13">
+                  <c:v>14</c:v>
+                </c:pt>
+                <c:pt idx="14">
+                  <c:v>15</c:v>
+                </c:pt>
+                <c:pt idx="15">
+                  <c:v>16</c:v>
+                </c:pt>
+                <c:pt idx="16">
+                  <c:v>17</c:v>
+                </c:pt>
+                <c:pt idx="17">
+                  <c:v>18</c:v>
+                </c:pt>
+                <c:pt idx="18">
+                  <c:v>19</c:v>
+                </c:pt>
+                <c:pt idx="19">
+                  <c:v>20</c:v>
+                </c:pt>
+                <c:pt idx="20">
+                  <c:v>21</c:v>
+                </c:pt>
+                <c:pt idx="21">
+                  <c:v>22</c:v>
+                </c:pt>
+                <c:pt idx="22">
+                  <c:v>23</c:v>
+                </c:pt>
+                <c:pt idx="23">
+                  <c:v>24</c:v>
+                </c:pt>
+                <c:pt idx="24">
+                  <c:v>25</c:v>
+                </c:pt>
+                <c:pt idx="25">
+                  <c:v>26</c:v>
+                </c:pt>
+                <c:pt idx="26">
+                  <c:v>27</c:v>
+                </c:pt>
+                <c:pt idx="27">
+                  <c:v>28</c:v>
+                </c:pt>
+                <c:pt idx="28">
+                  <c:v>29</c:v>
+                </c:pt>
+                <c:pt idx="29">
+                  <c:v>30</c:v>
+                </c:pt>
+                <c:pt idx="30">
+                  <c:v>31</c:v>
+                </c:pt>
+              </c:strCache>
+            </c:strRef>
+          </c:cat>
+          <c:val>
+            <c:numRef>
+              <c:f>Sheet1!$B$2:$B$32</c:f>
+              <c:numCache>
+                <c:formatCode>General</c:formatCode>
+                <c:ptCount val="31"/>
+                <c:pt idx="0">
+                  <c:v>19.0</c:v>
+                </c:pt>
+                <c:pt idx="1">
+                  <c:v>27.0</c:v>
+                </c:pt>
+                <c:pt idx="2">
+                  <c:v>21.0</c:v>
+                </c:pt>
+                <c:pt idx="3">
+                  <c:v>21.0</c:v>
+                </c:pt>
+                <c:pt idx="4">
+                  <c:v>16.0</c:v>
+                </c:pt>
+                <c:pt idx="5">
+                  <c:v>0.0</c:v>
+                </c:pt>
+                <c:pt idx="6">
+                  <c:v>21.0</c:v>
+                </c:pt>
+                <c:pt idx="7">
+                  <c:v>20.0</c:v>
+                </c:pt>
+                <c:pt idx="8">
+                  <c:v>30.0</c:v>
+                </c:pt>
+                <c:pt idx="9">
+                  <c:v>21.0</c:v>
+                </c:pt>
+                <c:pt idx="10">
+                  <c:v>21.0</c:v>
+                </c:pt>
+                <c:pt idx="11">
+                  <c:v>22.0</c:v>
+                </c:pt>
+                <c:pt idx="12">
+                  <c:v>21.0</c:v>
+                </c:pt>
+                <c:pt idx="15">
+                  <c:v>26.0</c:v>
+                </c:pt>
+                <c:pt idx="16">
+                  <c:v>21.0</c:v>
+                </c:pt>
+                <c:pt idx="17">
+                  <c:v>20.0</c:v>
+                </c:pt>
+                <c:pt idx="18">
+                  <c:v>18.0</c:v>
+                </c:pt>
+                <c:pt idx="19">
+                  <c:v>15.0</c:v>
+                </c:pt>
+                <c:pt idx="20">
+                  <c:v>23.0</c:v>
+                </c:pt>
+                <c:pt idx="21">
+                  <c:v>22.0</c:v>
+                </c:pt>
+                <c:pt idx="22">
+                  <c:v>27.0</c:v>
+                </c:pt>
+                <c:pt idx="23">
+                  <c:v>24.0</c:v>
+                </c:pt>
+                <c:pt idx="24">
+                  <c:v>27.0</c:v>
+                </c:pt>
+                <c:pt idx="25">
+                  <c:v>21.0</c:v>
+                </c:pt>
+                <c:pt idx="26">
+                  <c:v>20.0</c:v>
+                </c:pt>
+                <c:pt idx="27">
+                  <c:v>17.0</c:v>
+                </c:pt>
+                <c:pt idx="28">
+                  <c:v>16.0</c:v>
+                </c:pt>
+                <c:pt idx="29">
+                  <c:v>20.0</c:v>
+                </c:pt>
+                <c:pt idx="30">
+                  <c:v>30.0</c:v>
+                </c:pt>
+              </c:numCache>
+            </c:numRef>
+          </c:val>
+          <c:smooth val="0"/>
+        </c:ser>
+        <c:ser>
+          <c:idx val="1"/>
+          <c:order val="1"/>
+          <c:tx>
+            <c:strRef>
+              <c:f>Sheet1!$C$1</c:f>
+              <c:strCache>
+                <c:ptCount val="1"/>
+                <c:pt idx="0">
+                  <c:v>September 2026</c:v>
+                </c:pt>
+              </c:strCache>
+            </c:strRef>
+          </c:tx>
+          <c:spPr>
+            <a:ln w="31750">
+              <a:solidFill>
+                <a:srgbClr val="8A94A0"/>
+              </a:solidFill>
+            </a:ln>
+          </c:spPr>
+          <c:marker>
+            <c:symbol val="none"/>
+          </c:marker>
+          <c:dPt>
+            <c:idx val="6"/>
+            <c:marker>
+              <c:symbol val="circle"/>
+              <c:size val="9"/>
+              <c:spPr>
+                <a:solidFill>
+                  <a:srgbClr val="8A94A0"/>
+                </a:solidFill>
+                <a:ln>
+                  <a:solidFill>
+                    <a:srgbClr val="8A94A0"/>
+                  </a:solidFill>
+                </a:ln>
+              </c:spPr>
+            </c:marker>
+          </c:dPt>
+          <c:dPt>
+            <c:idx val="21"/>
+            <c:marker>
+              <c:symbol val="circle"/>
+              <c:size val="9"/>
+              <c:spPr>
+                <a:solidFill>
+                  <a:srgbClr val="8A94A0"/>
+                </a:solidFill>
+                <a:ln>
+                  <a:solidFill>
+                    <a:srgbClr val="8A94A0"/>
+                  </a:solidFill>
+                </a:ln>
+              </c:spPr>
+            </c:marker>
+          </c:dPt>
+          <c:cat>
+            <c:strRef>
+              <c:f>Sheet1!$A$2:$A$32</c:f>
+              <c:strCache>
+                <c:ptCount val="31"/>
+                <c:pt idx="0">
+                  <c:v>1</c:v>
+                </c:pt>
+                <c:pt idx="1">
+                  <c:v>2</c:v>
+                </c:pt>
+                <c:pt idx="2">
+                  <c:v>3</c:v>
+                </c:pt>
+                <c:pt idx="3">
+                  <c:v>4</c:v>
+                </c:pt>
+                <c:pt idx="4">
+                  <c:v>5</c:v>
+                </c:pt>
+                <c:pt idx="5">
+                  <c:v>6</c:v>
+                </c:pt>
+                <c:pt idx="6">
+                  <c:v>7</c:v>
+                </c:pt>
+                <c:pt idx="7">
+                  <c:v>8</c:v>
+                </c:pt>
+                <c:pt idx="8">
+                  <c:v>9</c:v>
+                </c:pt>
+                <c:pt idx="9">
+                  <c:v>10</c:v>
+                </c:pt>
+                <c:pt idx="10">
+                  <c:v>11</c:v>
+                </c:pt>
+                <c:pt idx="11">
+                  <c:v>12</c:v>
+                </c:pt>
+                <c:pt idx="12">
+                  <c:v>13</c:v>
+                </c:pt>
+                <c:pt idx="13">
+                  <c:v>14</c:v>
+                </c:pt>
+                <c:pt idx="14">
+                  <c:v>15</c:v>
+                </c:pt>
+                <c:pt idx="15">
+                  <c:v>16</c:v>
+                </c:pt>
+                <c:pt idx="16">
+                  <c:v>17</c:v>
+                </c:pt>
+                <c:pt idx="17">
+                  <c:v>18</c:v>
+                </c:pt>
+                <c:pt idx="18">
+                  <c:v>19</c:v>
+                </c:pt>
+                <c:pt idx="19">
+                  <c:v>20</c:v>
+                </c:pt>
+                <c:pt idx="20">
+                  <c:v>21</c:v>
+                </c:pt>
+                <c:pt idx="21">
+                  <c:v>22</c:v>
+                </c:pt>
+                <c:pt idx="22">
+                  <c:v>23</c:v>
+                </c:pt>
+                <c:pt idx="23">
+                  <c:v>24</c:v>
+                </c:pt>
+                <c:pt idx="24">
+                  <c:v>25</c:v>
+                </c:pt>
+                <c:pt idx="25">
+                  <c:v>26</c:v>
+                </c:pt>
+                <c:pt idx="26">
+                  <c:v>27</c:v>
+                </c:pt>
+                <c:pt idx="27">
+                  <c:v>28</c:v>
+                </c:pt>
+                <c:pt idx="28">
+                  <c:v>29</c:v>
+                </c:pt>
+                <c:pt idx="29">
+                  <c:v>30</c:v>
+                </c:pt>
+                <c:pt idx="30">
+                  <c:v>31</c:v>
+                </c:pt>
+              </c:strCache>
+            </c:strRef>
+          </c:cat>
+          <c:val>
+            <c:numRef>
+              <c:f>Sheet1!$C$2:$C$31</c:f>
+              <c:numCache>
+                <c:formatCode>General</c:formatCode>
+                <c:ptCount val="30"/>
+                <c:pt idx="0">
+                  <c:v>15.0</c:v>
+                </c:pt>
+                <c:pt idx="1">
+                  <c:v>18.0</c:v>
+                </c:pt>
+                <c:pt idx="2">
+                  <c:v>18.0</c:v>
+                </c:pt>
+                <c:pt idx="3">
+                  <c:v>28.0</c:v>
+                </c:pt>
+                <c:pt idx="4">
+                  <c:v>28.0</c:v>
+                </c:pt>
+                <c:pt idx="5">
+                  <c:v>29.0</c:v>
+                </c:pt>
+                <c:pt idx="6">
+                  <c:v>0.0</c:v>
+                </c:pt>
+                <c:pt idx="7">
+                  <c:v>20.0</c:v>
+                </c:pt>
+                <c:pt idx="8">
+                  <c:v>14.0</c:v>
+                </c:pt>
+                <c:pt idx="9">
+                  <c:v>16.0</c:v>
+                </c:pt>
+                <c:pt idx="10">
+                  <c:v>22.0</c:v>
+                </c:pt>
+                <c:pt idx="11">
+                  <c:v>25.0</c:v>
+                </c:pt>
+                <c:pt idx="12">
+                  <c:v>29.0</c:v>
+                </c:pt>
+                <c:pt idx="13">
+                  <c:v>21.0</c:v>
+                </c:pt>
+                <c:pt idx="14">
+                  <c:v>16.0</c:v>
+                </c:pt>
+                <c:pt idx="15">
+                  <c:v>16.0</c:v>
+                </c:pt>
+                <c:pt idx="16">
+                  <c:v>22.0</c:v>
+                </c:pt>
+                <c:pt idx="17">
+                  <c:v>29.0</c:v>
+                </c:pt>
+                <c:pt idx="18">
+                  <c:v>24.0</c:v>
+                </c:pt>
+                <c:pt idx="19">
+                  <c:v>18.0</c:v>
+                </c:pt>
+                <c:pt idx="20">
+                  <c:v>19.0</c:v>
+                </c:pt>
+                <c:pt idx="21">
+                  <c:v>0.0</c:v>
+                </c:pt>
+                <c:pt idx="22">
+                  <c:v>17.0</c:v>
+                </c:pt>
+                <c:pt idx="23">
+                  <c:v>22.0</c:v>
+                </c:pt>
+                <c:pt idx="24">
+                  <c:v>29.0</c:v>
+                </c:pt>
+                <c:pt idx="25">
+                  <c:v>21.0</c:v>
+                </c:pt>
+                <c:pt idx="26">
+                  <c:v>24.0</c:v>
+                </c:pt>
+                <c:pt idx="27">
+                  <c:v>18.0</c:v>
+                </c:pt>
+                <c:pt idx="28">
+                  <c:v>17.0</c:v>
+                </c:pt>
+                <c:pt idx="29">
+                  <c:v>14.0</c:v>
+                </c:pt>
+              </c:numCache>
+            </c:numRef>
+          </c:val>
+          <c:smooth val="0"/>
+        </c:ser>
+        <c:ser>
+          <c:idx val="2"/>
+          <c:order val="2"/>
+          <c:tx>
+            <c:strRef>
+              <c:f>Sheet1!$D$1</c:f>
+              <c:strCache>
+                <c:ptCount val="1"/>
+                <c:pt idx="0">
+                  <c:v>Day with no data</c:v>
+                </c:pt>
+              </c:strCache>
+            </c:strRef>
+          </c:tx>
+          <c:spPr>
+            <a:ln>
+              <a:noFill/>
+            </a:ln>
+          </c:spPr>
+          <c:marker>
+            <c:symbol val="x"/>
+            <c:size val="10"/>
+            <c:spPr>
+              <a:ln>
+                <a:solidFill>
+                  <a:srgbClr val="B44A1E"/>
+                </a:solidFill>
+              </a:ln>
+            </c:spPr>
+          </c:marker>
+          <c:cat>
+            <c:strRef>
+              <c:f>Sheet1!$A$2:$A$32</c:f>
+              <c:strCache>
+                <c:ptCount val="31"/>
+                <c:pt idx="0">
+                  <c:v>1</c:v>
+                </c:pt>
+                <c:pt idx="1">
+                  <c:v>2</c:v>
+                </c:pt>
+                <c:pt idx="2">
+                  <c:v>3</c:v>
+                </c:pt>
+                <c:pt idx="3">
+                  <c:v>4</c:v>
+                </c:pt>
+                <c:pt idx="4">
+                  <c:v>5</c:v>
+                </c:pt>
+                <c:pt idx="5">
+                  <c:v>6</c:v>
+                </c:pt>
+                <c:pt idx="6">
+                  <c:v>7</c:v>
+                </c:pt>
+                <c:pt idx="7">
+                  <c:v>8</c:v>
+                </c:pt>
+                <c:pt idx="8">
+                  <c:v>9</c:v>
+                </c:pt>
+                <c:pt idx="9">
+                  <c:v>10</c:v>
+                </c:pt>
+                <c:pt idx="10">
+                  <c:v>11</c:v>
+                </c:pt>
+                <c:pt idx="11">
+                  <c:v>12</c:v>
+                </c:pt>
+                <c:pt idx="12">
+                  <c:v>13</c:v>
+                </c:pt>
+                <c:pt idx="13">
+                  <c:v>14</c:v>
+                </c:pt>
+                <c:pt idx="14">
+                  <c:v>15</c:v>
+                </c:pt>
+                <c:pt idx="15">
+                  <c:v>16</c:v>
+                </c:pt>
+                <c:pt idx="16">
+                  <c:v>17</c:v>
+                </c:pt>
+                <c:pt idx="17">
+                  <c:v>18</c:v>
+                </c:pt>
+                <c:pt idx="18">
+                  <c:v>19</c:v>
+                </c:pt>
+                <c:pt idx="19">
+                  <c:v>20</c:v>
+                </c:pt>
+                <c:pt idx="20">
+                  <c:v>21</c:v>
+                </c:pt>
+                <c:pt idx="21">
+                  <c:v>22</c:v>
+                </c:pt>
+                <c:pt idx="22">
+                  <c:v>23</c:v>
+                </c:pt>
+                <c:pt idx="23">
+                  <c:v>24</c:v>
+                </c:pt>
+                <c:pt idx="24">
+                  <c:v>25</c:v>
+                </c:pt>
+                <c:pt idx="25">
+                  <c:v>26</c:v>
+                </c:pt>
+                <c:pt idx="26">
+                  <c:v>27</c:v>
+                </c:pt>
+                <c:pt idx="27">
+                  <c:v>28</c:v>
+                </c:pt>
+                <c:pt idx="28">
+                  <c:v>29</c:v>
+                </c:pt>
+                <c:pt idx="29">
+                  <c:v>30</c:v>
+                </c:pt>
+                <c:pt idx="30">
+                  <c:v>31</c:v>
+                </c:pt>
+              </c:strCache>
+            </c:strRef>
+          </c:cat>
+          <c:val>
+            <c:numRef>
+              <c:f>Sheet1!$D$2:$D$32</c:f>
               <c:numCache>
                 <c:formatCode>General</c:formatCode>
                 <c:ptCount val="31"/>
@@ -4462,7 +5453,7 @@
                 </a:solidFill>
                 <a:latin typeface="Calibri"/>
               </a:rPr>
-              <a:t>Sample report: the orders are invented, not a real store.</a:t>
+              <a:t>Sample report: invented store orders and website figures. The website side ran against a stand-in server, not Google.</a:t>
             </a:r>
           </a:p>
         </p:txBody>
@@ -5785,14 +6776,14 @@
                 </a:solidFill>
                 <a:latin typeface="Calibri"/>
               </a:rPr>
-              <a:t>Orders by day in October</a:t>
+              <a:t>Sessions and orders by day in October</a:t>
             </a:r>
           </a:p>
         </p:txBody>
       </p:sp>
       <p:graphicFrame>
         <p:nvGraphicFramePr>
-          <p:cNvPr id="3" name="Chart 2" descr="Line chart of orders for each day of October 2026"/>
+          <p:cNvPr id="3" name="Chart 2" descr="Line chart of website sessions for each day of October 2026, with September 2026 as a grey line"/>
           <p:cNvGraphicFramePr>
             <a:graphicFrameLocks noGrp="1"/>
           </p:cNvGraphicFramePr>
@@ -5800,7 +6791,7 @@
         </p:nvGraphicFramePr>
         <p:xfrm>
           <a:off x="548640" y="1371600"/>
-          <a:ext cx="11094415" cy="4480560"/>
+          <a:ext cx="5410047" cy="4114800"/>
         </p:xfrm>
         <a:graphic>
           <a:graphicData uri="http://schemas.openxmlformats.org/drawingml/2006/chart">
@@ -5808,9 +6799,27 @@
           </a:graphicData>
         </a:graphic>
       </p:graphicFrame>
+      <p:graphicFrame>
+        <p:nvGraphicFramePr>
+          <p:cNvPr id="4" name="Chart 3" descr="Line chart of orders for each day of October 2026, with September 2026 as a grey line"/>
+          <p:cNvGraphicFramePr>
+            <a:graphicFrameLocks noGrp="1"/>
+          </p:cNvGraphicFramePr>
+          <p:nvPr/>
+        </p:nvGraphicFramePr>
+        <p:xfrm>
+          <a:off x="6233007" y="1371600"/>
+          <a:ext cx="5410047" cy="4114800"/>
+        </p:xfrm>
+        <a:graphic>
+          <a:graphicData uri="http://schemas.openxmlformats.org/drawingml/2006/chart">
+            <c:chart xmlns:c="http://schemas.openxmlformats.org/drawingml/2006/chart" r:id="rId3"/>
+          </a:graphicData>
+        </a:graphic>
+      </p:graphicFrame>
       <p:sp>
         <p:nvSpPr>
-          <p:cNvPr id="4" name="TextBox 3"/>
+          <p:cNvPr id="5" name="TextBox 4"/>
           <p:cNvSpPr txBox="1"/>
           <p:nvPr/>
         </p:nvSpPr>
@@ -5842,7 +6851,7 @@
                 </a:solidFill>
                 <a:latin typeface="Calibri"/>
               </a:rPr>
-              <a:t>Day of the month across, orders up.</a:t>
+              <a:t>Day of the month across. Left: website sessions. Right: orders. The grey line is the month before.</a:t>
             </a:r>
           </a:p>
           <a:p>
@@ -5858,7 +6867,7 @@
                 </a:solidFill>
                 <a:latin typeface="Calibri"/>
               </a:rPr>
-              <a:t>A dot on the zero line is a day with no orders, on either line.</a:t>
+              <a:t>Sessions: a break with an X is a day with no data (Oct 3, Oct 4, Oct 5).</a:t>
             </a:r>
           </a:p>
           <a:p>
@@ -5874,7 +6883,7 @@
                 </a:solidFill>
                 <a:latin typeface="Calibri"/>
               </a:rPr>
-              <a:t>A break in the line with an X on the zero line is a day with no data (Oct 14, Oct 15). 29 of 31 days are plotted.</a:t>
+              <a:t>Orders: a dot on the zero line is a day with no orders, a break with an X is a day with no data (Oct 14, Oct 15).</a:t>
             </a:r>
           </a:p>
         </p:txBody>
@@ -6815,21 +7824,891 @@
                 </a:solidFill>
                 <a:latin typeface="Calibri"/>
               </a:rPr>
-              <a:t>October refunds total is 27.1% above September, but October is missing 2 days: per reported day it is up 31.5%</a:t>
+              <a:t>October sessions total is 8.6% below September, but October is missing 3 days of website data: per reported day it is down 2.1%</a:t>
             </a:r>
           </a:p>
         </p:txBody>
       </p:sp>
+      <p:graphicFrame>
+        <p:nvGraphicFramePr>
+          <p:cNvPr id="3" name="Table 2"/>
+          <p:cNvGraphicFramePr>
+            <a:graphicFrameLocks noGrp="1"/>
+          </p:cNvGraphicFramePr>
+          <p:nvPr/>
+        </p:nvGraphicFramePr>
+        <p:xfrm>
+          <a:off x="548640" y="1280160"/>
+          <a:ext cx="11094412" cy="2304288"/>
+        </p:xfrm>
+        <a:graphic>
+          <a:graphicData uri="http://schemas.openxmlformats.org/drawingml/2006/table">
+            <a:tbl>
+              <a:tblPr firstRow="1" bandRow="1">
+                <a:tableStyleId>{5C22544A-7EE6-4342-B048-85BDC9FD1C3A}</a:tableStyleId>
+              </a:tblPr>
+              <a:tblGrid>
+                <a:gridCol w="2075214"/>
+                <a:gridCol w="1436686"/>
+                <a:gridCol w="1436686"/>
+                <a:gridCol w="1197239"/>
+                <a:gridCol w="957791"/>
+                <a:gridCol w="3990796"/>
+              </a:tblGrid>
+              <a:tr h="384048">
+                <a:tc>
+                  <a:txBody>
+                    <a:bodyPr/>
+                    <a:lstStyle/>
+                    <a:p>
+                      <a:pPr algn="l"/>
+                      <a:r>
+                        <a:rPr sz="1200" b="1" i="0">
+                          <a:solidFill>
+                            <a:srgbClr val="FFFFFF"/>
+                          </a:solidFill>
+                          <a:latin typeface="Calibri"/>
+                        </a:rPr>
+                        <a:t>Metric</a:t>
+                      </a:r>
+                    </a:p>
+                  </a:txBody>
+                  <a:tcPr anchor="ctr">
+                    <a:solidFill>
+                      <a:srgbClr val="1F3A5F"/>
+                    </a:solidFill>
+                  </a:tcPr>
+                </a:tc>
+                <a:tc>
+                  <a:txBody>
+                    <a:bodyPr/>
+                    <a:lstStyle/>
+                    <a:p>
+                      <a:pPr algn="r"/>
+                      <a:r>
+                        <a:rPr sz="1200" b="1" i="0">
+                          <a:solidFill>
+                            <a:srgbClr val="FFFFFF"/>
+                          </a:solidFill>
+                          <a:latin typeface="Calibri"/>
+                        </a:rPr>
+                        <a:t>October 2026</a:t>
+                      </a:r>
+                    </a:p>
+                  </a:txBody>
+                  <a:tcPr anchor="ctr">
+                    <a:solidFill>
+                      <a:srgbClr val="1F3A5F"/>
+                    </a:solidFill>
+                  </a:tcPr>
+                </a:tc>
+                <a:tc>
+                  <a:txBody>
+                    <a:bodyPr/>
+                    <a:lstStyle/>
+                    <a:p>
+                      <a:pPr algn="r"/>
+                      <a:r>
+                        <a:rPr sz="1200" b="1" i="0">
+                          <a:solidFill>
+                            <a:srgbClr val="FFFFFF"/>
+                          </a:solidFill>
+                          <a:latin typeface="Calibri"/>
+                        </a:rPr>
+                        <a:t>September 2026</a:t>
+                      </a:r>
+                    </a:p>
+                  </a:txBody>
+                  <a:tcPr anchor="ctr">
+                    <a:solidFill>
+                      <a:srgbClr val="1F3A5F"/>
+                    </a:solidFill>
+                  </a:tcPr>
+                </a:tc>
+                <a:tc>
+                  <a:txBody>
+                    <a:bodyPr/>
+                    <a:lstStyle/>
+                    <a:p>
+                      <a:pPr algn="r"/>
+                      <a:r>
+                        <a:rPr sz="1200" b="1" i="0">
+                          <a:solidFill>
+                            <a:srgbClr val="FFFFFF"/>
+                          </a:solidFill>
+                          <a:latin typeface="Calibri"/>
+                        </a:rPr>
+                        <a:t>Change</a:t>
+                      </a:r>
+                    </a:p>
+                  </a:txBody>
+                  <a:tcPr anchor="ctr">
+                    <a:solidFill>
+                      <a:srgbClr val="1F3A5F"/>
+                    </a:solidFill>
+                  </a:tcPr>
+                </a:tc>
+                <a:tc>
+                  <a:txBody>
+                    <a:bodyPr/>
+                    <a:lstStyle/>
+                    <a:p>
+                      <a:pPr algn="r"/>
+                      <a:r>
+                        <a:rPr sz="1200" b="1" i="0">
+                          <a:solidFill>
+                            <a:srgbClr val="FFFFFF"/>
+                          </a:solidFill>
+                          <a:latin typeface="Calibri"/>
+                        </a:rPr>
+                        <a:t>Change %</a:t>
+                      </a:r>
+                    </a:p>
+                  </a:txBody>
+                  <a:tcPr anchor="ctr">
+                    <a:solidFill>
+                      <a:srgbClr val="1F3A5F"/>
+                    </a:solidFill>
+                  </a:tcPr>
+                </a:tc>
+                <a:tc>
+                  <a:txBody>
+                    <a:bodyPr/>
+                    <a:lstStyle/>
+                    <a:p>
+                      <a:pPr algn="r"/>
+                      <a:r>
+                        <a:rPr sz="1200" b="1" i="0">
+                          <a:solidFill>
+                            <a:srgbClr val="FFFFFF"/>
+                          </a:solidFill>
+                          <a:latin typeface="Calibri"/>
+                        </a:rPr>
+                        <a:t>Note</a:t>
+                      </a:r>
+                    </a:p>
+                  </a:txBody>
+                  <a:tcPr anchor="ctr">
+                    <a:solidFill>
+                      <a:srgbClr val="1F3A5F"/>
+                    </a:solidFill>
+                  </a:tcPr>
+                </a:tc>
+              </a:tr>
+              <a:tr h="384048">
+                <a:tc>
+                  <a:txBody>
+                    <a:bodyPr/>
+                    <a:lstStyle/>
+                    <a:p>
+                      <a:pPr algn="l"/>
+                      <a:r>
+                        <a:rPr sz="1200" b="0" i="0">
+                          <a:solidFill>
+                            <a:srgbClr val="2B2F36"/>
+                          </a:solidFill>
+                          <a:latin typeface="Calibri"/>
+                        </a:rPr>
+                        <a:t>Sessions</a:t>
+                      </a:r>
+                    </a:p>
+                  </a:txBody>
+                  <a:tcPr anchor="ctr">
+                    <a:solidFill>
+                      <a:srgbClr val="FFFFFF"/>
+                    </a:solidFill>
+                  </a:tcPr>
+                </a:tc>
+                <a:tc>
+                  <a:txBody>
+                    <a:bodyPr/>
+                    <a:lstStyle/>
+                    <a:p>
+                      <a:pPr algn="r"/>
+                      <a:r>
+                        <a:rPr sz="1200" b="0" i="0">
+                          <a:solidFill>
+                            <a:srgbClr val="2B2F36"/>
+                          </a:solidFill>
+                          <a:latin typeface="Calibri"/>
+                        </a:rPr>
+                        <a:t>21,812</a:t>
+                      </a:r>
+                    </a:p>
+                  </a:txBody>
+                  <a:tcPr anchor="ctr">
+                    <a:solidFill>
+                      <a:srgbClr val="FFFFFF"/>
+                    </a:solidFill>
+                  </a:tcPr>
+                </a:tc>
+                <a:tc>
+                  <a:txBody>
+                    <a:bodyPr/>
+                    <a:lstStyle/>
+                    <a:p>
+                      <a:pPr algn="r"/>
+                      <a:r>
+                        <a:rPr sz="1200" b="0" i="0">
+                          <a:solidFill>
+                            <a:srgbClr val="2B2F36"/>
+                          </a:solidFill>
+                          <a:latin typeface="Calibri"/>
+                        </a:rPr>
+                        <a:t>23,876</a:t>
+                      </a:r>
+                    </a:p>
+                  </a:txBody>
+                  <a:tcPr anchor="ctr">
+                    <a:solidFill>
+                      <a:srgbClr val="FFFFFF"/>
+                    </a:solidFill>
+                  </a:tcPr>
+                </a:tc>
+                <a:tc>
+                  <a:txBody>
+                    <a:bodyPr/>
+                    <a:lstStyle/>
+                    <a:p>
+                      <a:pPr algn="r"/>
+                      <a:r>
+                        <a:rPr sz="1200" b="0" i="0">
+                          <a:solidFill>
+                            <a:srgbClr val="2B2F36"/>
+                          </a:solidFill>
+                          <a:latin typeface="Calibri"/>
+                        </a:rPr>
+                        <a:t>-2,064</a:t>
+                      </a:r>
+                    </a:p>
+                  </a:txBody>
+                  <a:tcPr anchor="ctr">
+                    <a:solidFill>
+                      <a:srgbClr val="FFFFFF"/>
+                    </a:solidFill>
+                  </a:tcPr>
+                </a:tc>
+                <a:tc>
+                  <a:txBody>
+                    <a:bodyPr/>
+                    <a:lstStyle/>
+                    <a:p>
+                      <a:pPr algn="r"/>
+                      <a:r>
+                        <a:rPr sz="1200" b="0" i="0">
+                          <a:solidFill>
+                            <a:srgbClr val="2B2F36"/>
+                          </a:solidFill>
+                          <a:latin typeface="Calibri"/>
+                        </a:rPr>
+                        <a:t>-8.6%</a:t>
+                      </a:r>
+                    </a:p>
+                  </a:txBody>
+                  <a:tcPr anchor="ctr">
+                    <a:solidFill>
+                      <a:srgbClr val="FFFFFF"/>
+                    </a:solidFill>
+                  </a:tcPr>
+                </a:tc>
+                <a:tc>
+                  <a:txBody>
+                    <a:bodyPr/>
+                    <a:lstStyle/>
+                    <a:p>
+                      <a:pPr algn="r"/>
+                      <a:r>
+                        <a:rPr sz="1200" b="0" i="0">
+                          <a:solidFill>
+                            <a:srgbClr val="2B2F36"/>
+                          </a:solidFill>
+                          <a:latin typeface="Calibri"/>
+                        </a:rPr>
+                        <a:t>October: 3 days missing; per reported day down 2.1%</a:t>
+                      </a:r>
+                    </a:p>
+                  </a:txBody>
+                  <a:tcPr anchor="ctr">
+                    <a:solidFill>
+                      <a:srgbClr val="FFFFFF"/>
+                    </a:solidFill>
+                  </a:tcPr>
+                </a:tc>
+              </a:tr>
+              <a:tr h="384048">
+                <a:tc>
+                  <a:txBody>
+                    <a:bodyPr/>
+                    <a:lstStyle/>
+                    <a:p>
+                      <a:pPr algn="l"/>
+                      <a:r>
+                        <a:rPr sz="1200" b="0" i="0">
+                          <a:solidFill>
+                            <a:srgbClr val="2B2F36"/>
+                          </a:solidFill>
+                          <a:latin typeface="Calibri"/>
+                        </a:rPr>
+                        <a:t>Users per active day</a:t>
+                      </a:r>
+                    </a:p>
+                  </a:txBody>
+                  <a:tcPr anchor="ctr">
+                    <a:solidFill>
+                      <a:srgbClr val="F1F4F7"/>
+                    </a:solidFill>
+                  </a:tcPr>
+                </a:tc>
+                <a:tc>
+                  <a:txBody>
+                    <a:bodyPr/>
+                    <a:lstStyle/>
+                    <a:p>
+                      <a:pPr algn="r"/>
+                      <a:r>
+                        <a:rPr sz="1200" b="0" i="0">
+                          <a:solidFill>
+                            <a:srgbClr val="2B2F36"/>
+                          </a:solidFill>
+                          <a:latin typeface="Calibri"/>
+                        </a:rPr>
+                        <a:t>607.1</a:t>
+                      </a:r>
+                    </a:p>
+                  </a:txBody>
+                  <a:tcPr anchor="ctr">
+                    <a:solidFill>
+                      <a:srgbClr val="F1F4F7"/>
+                    </a:solidFill>
+                  </a:tcPr>
+                </a:tc>
+                <a:tc>
+                  <a:txBody>
+                    <a:bodyPr/>
+                    <a:lstStyle/>
+                    <a:p>
+                      <a:pPr algn="r"/>
+                      <a:r>
+                        <a:rPr sz="1200" b="0" i="0">
+                          <a:solidFill>
+                            <a:srgbClr val="2B2F36"/>
+                          </a:solidFill>
+                          <a:latin typeface="Calibri"/>
+                        </a:rPr>
+                        <a:t>642.2</a:t>
+                      </a:r>
+                    </a:p>
+                  </a:txBody>
+                  <a:tcPr anchor="ctr">
+                    <a:solidFill>
+                      <a:srgbClr val="F1F4F7"/>
+                    </a:solidFill>
+                  </a:tcPr>
+                </a:tc>
+                <a:tc>
+                  <a:txBody>
+                    <a:bodyPr/>
+                    <a:lstStyle/>
+                    <a:p>
+                      <a:pPr algn="r"/>
+                      <a:r>
+                        <a:rPr sz="1200" b="0" i="0">
+                          <a:solidFill>
+                            <a:srgbClr val="2B2F36"/>
+                          </a:solidFill>
+                          <a:latin typeface="Calibri"/>
+                        </a:rPr>
+                        <a:t>-35.1</a:t>
+                      </a:r>
+                    </a:p>
+                  </a:txBody>
+                  <a:tcPr anchor="ctr">
+                    <a:solidFill>
+                      <a:srgbClr val="F1F4F7"/>
+                    </a:solidFill>
+                  </a:tcPr>
+                </a:tc>
+                <a:tc>
+                  <a:txBody>
+                    <a:bodyPr/>
+                    <a:lstStyle/>
+                    <a:p>
+                      <a:pPr algn="r"/>
+                      <a:r>
+                        <a:rPr sz="1200" b="0" i="0">
+                          <a:solidFill>
+                            <a:srgbClr val="2B2F36"/>
+                          </a:solidFill>
+                          <a:latin typeface="Calibri"/>
+                        </a:rPr>
+                        <a:t>-5.5%</a:t>
+                      </a:r>
+                    </a:p>
+                  </a:txBody>
+                  <a:tcPr anchor="ctr">
+                    <a:solidFill>
+                      <a:srgbClr val="F1F4F7"/>
+                    </a:solidFill>
+                  </a:tcPr>
+                </a:tc>
+                <a:tc>
+                  <a:txBody>
+                    <a:bodyPr/>
+                    <a:lstStyle/>
+                    <a:p>
+                      <a:pPr algn="r"/>
+                      <a:r>
+                        <a:rPr sz="1200" b="0" i="0">
+                          <a:solidFill>
+                            <a:srgbClr val="2B2F36"/>
+                          </a:solidFill>
+                          <a:latin typeface="Calibri"/>
+                        </a:rPr>
+                        <a:t>October: 3 days missing</a:t>
+                      </a:r>
+                    </a:p>
+                  </a:txBody>
+                  <a:tcPr anchor="ctr">
+                    <a:solidFill>
+                      <a:srgbClr val="F1F4F7"/>
+                    </a:solidFill>
+                  </a:tcPr>
+                </a:tc>
+              </a:tr>
+              <a:tr h="384048">
+                <a:tc>
+                  <a:txBody>
+                    <a:bodyPr/>
+                    <a:lstStyle/>
+                    <a:p>
+                      <a:pPr algn="l"/>
+                      <a:r>
+                        <a:rPr sz="1200" b="0" i="0">
+                          <a:solidFill>
+                            <a:srgbClr val="2B2F36"/>
+                          </a:solidFill>
+                          <a:latin typeface="Calibri"/>
+                        </a:rPr>
+                        <a:t>Page views</a:t>
+                      </a:r>
+                    </a:p>
+                  </a:txBody>
+                  <a:tcPr anchor="ctr">
+                    <a:solidFill>
+                      <a:srgbClr val="FFFFFF"/>
+                    </a:solidFill>
+                  </a:tcPr>
+                </a:tc>
+                <a:tc>
+                  <a:txBody>
+                    <a:bodyPr/>
+                    <a:lstStyle/>
+                    <a:p>
+                      <a:pPr algn="r"/>
+                      <a:r>
+                        <a:rPr sz="1200" b="0" i="0">
+                          <a:solidFill>
+                            <a:srgbClr val="2B2F36"/>
+                          </a:solidFill>
+                          <a:latin typeface="Calibri"/>
+                        </a:rPr>
+                        <a:t>57,336</a:t>
+                      </a:r>
+                    </a:p>
+                  </a:txBody>
+                  <a:tcPr anchor="ctr">
+                    <a:solidFill>
+                      <a:srgbClr val="FFFFFF"/>
+                    </a:solidFill>
+                  </a:tcPr>
+                </a:tc>
+                <a:tc>
+                  <a:txBody>
+                    <a:bodyPr/>
+                    <a:lstStyle/>
+                    <a:p>
+                      <a:pPr algn="r"/>
+                      <a:r>
+                        <a:rPr sz="1200" b="0" i="0">
+                          <a:solidFill>
+                            <a:srgbClr val="2B2F36"/>
+                          </a:solidFill>
+                          <a:latin typeface="Calibri"/>
+                        </a:rPr>
+                        <a:t>62,883</a:t>
+                      </a:r>
+                    </a:p>
+                  </a:txBody>
+                  <a:tcPr anchor="ctr">
+                    <a:solidFill>
+                      <a:srgbClr val="FFFFFF"/>
+                    </a:solidFill>
+                  </a:tcPr>
+                </a:tc>
+                <a:tc>
+                  <a:txBody>
+                    <a:bodyPr/>
+                    <a:lstStyle/>
+                    <a:p>
+                      <a:pPr algn="r"/>
+                      <a:r>
+                        <a:rPr sz="1200" b="0" i="0">
+                          <a:solidFill>
+                            <a:srgbClr val="2B2F36"/>
+                          </a:solidFill>
+                          <a:latin typeface="Calibri"/>
+                        </a:rPr>
+                        <a:t>-5,547</a:t>
+                      </a:r>
+                    </a:p>
+                  </a:txBody>
+                  <a:tcPr anchor="ctr">
+                    <a:solidFill>
+                      <a:srgbClr val="FFFFFF"/>
+                    </a:solidFill>
+                  </a:tcPr>
+                </a:tc>
+                <a:tc>
+                  <a:txBody>
+                    <a:bodyPr/>
+                    <a:lstStyle/>
+                    <a:p>
+                      <a:pPr algn="r"/>
+                      <a:r>
+                        <a:rPr sz="1200" b="0" i="0">
+                          <a:solidFill>
+                            <a:srgbClr val="2B2F36"/>
+                          </a:solidFill>
+                          <a:latin typeface="Calibri"/>
+                        </a:rPr>
+                        <a:t>-8.8%</a:t>
+                      </a:r>
+                    </a:p>
+                  </a:txBody>
+                  <a:tcPr anchor="ctr">
+                    <a:solidFill>
+                      <a:srgbClr val="FFFFFF"/>
+                    </a:solidFill>
+                  </a:tcPr>
+                </a:tc>
+                <a:tc>
+                  <a:txBody>
+                    <a:bodyPr/>
+                    <a:lstStyle/>
+                    <a:p>
+                      <a:pPr algn="r"/>
+                      <a:r>
+                        <a:rPr sz="1200" b="0" i="0">
+                          <a:solidFill>
+                            <a:srgbClr val="2B2F36"/>
+                          </a:solidFill>
+                          <a:latin typeface="Calibri"/>
+                        </a:rPr>
+                        <a:t>October: 3 days missing; per reported day down 2.3%</a:t>
+                      </a:r>
+                    </a:p>
+                  </a:txBody>
+                  <a:tcPr anchor="ctr">
+                    <a:solidFill>
+                      <a:srgbClr val="FFFFFF"/>
+                    </a:solidFill>
+                  </a:tcPr>
+                </a:tc>
+              </a:tr>
+              <a:tr h="384048">
+                <a:tc>
+                  <a:txBody>
+                    <a:bodyPr/>
+                    <a:lstStyle/>
+                    <a:p>
+                      <a:pPr algn="l"/>
+                      <a:r>
+                        <a:rPr sz="1200" b="0" i="0">
+                          <a:solidFill>
+                            <a:srgbClr val="2B2F36"/>
+                          </a:solidFill>
+                          <a:latin typeface="Calibri"/>
+                        </a:rPr>
+                        <a:t>Key events</a:t>
+                      </a:r>
+                    </a:p>
+                  </a:txBody>
+                  <a:tcPr anchor="ctr">
+                    <a:solidFill>
+                      <a:srgbClr val="F1F4F7"/>
+                    </a:solidFill>
+                  </a:tcPr>
+                </a:tc>
+                <a:tc>
+                  <a:txBody>
+                    <a:bodyPr/>
+                    <a:lstStyle/>
+                    <a:p>
+                      <a:pPr algn="r"/>
+                      <a:r>
+                        <a:rPr sz="1200" b="0" i="0">
+                          <a:solidFill>
+                            <a:srgbClr val="2B2F36"/>
+                          </a:solidFill>
+                          <a:latin typeface="Calibri"/>
+                        </a:rPr>
+                        <a:t>942</a:t>
+                      </a:r>
+                    </a:p>
+                  </a:txBody>
+                  <a:tcPr anchor="ctr">
+                    <a:solidFill>
+                      <a:srgbClr val="F1F4F7"/>
+                    </a:solidFill>
+                  </a:tcPr>
+                </a:tc>
+                <a:tc>
+                  <a:txBody>
+                    <a:bodyPr/>
+                    <a:lstStyle/>
+                    <a:p>
+                      <a:pPr algn="r"/>
+                      <a:r>
+                        <a:rPr sz="1200" b="0" i="0">
+                          <a:solidFill>
+                            <a:srgbClr val="2B2F36"/>
+                          </a:solidFill>
+                          <a:latin typeface="Calibri"/>
+                        </a:rPr>
+                        <a:t>1,045</a:t>
+                      </a:r>
+                    </a:p>
+                  </a:txBody>
+                  <a:tcPr anchor="ctr">
+                    <a:solidFill>
+                      <a:srgbClr val="F1F4F7"/>
+                    </a:solidFill>
+                  </a:tcPr>
+                </a:tc>
+                <a:tc>
+                  <a:txBody>
+                    <a:bodyPr/>
+                    <a:lstStyle/>
+                    <a:p>
+                      <a:pPr algn="r"/>
+                      <a:r>
+                        <a:rPr sz="1200" b="0" i="0">
+                          <a:solidFill>
+                            <a:srgbClr val="2B2F36"/>
+                          </a:solidFill>
+                          <a:latin typeface="Calibri"/>
+                        </a:rPr>
+                        <a:t>-103</a:t>
+                      </a:r>
+                    </a:p>
+                  </a:txBody>
+                  <a:tcPr anchor="ctr">
+                    <a:solidFill>
+                      <a:srgbClr val="F1F4F7"/>
+                    </a:solidFill>
+                  </a:tcPr>
+                </a:tc>
+                <a:tc>
+                  <a:txBody>
+                    <a:bodyPr/>
+                    <a:lstStyle/>
+                    <a:p>
+                      <a:pPr algn="r"/>
+                      <a:r>
+                        <a:rPr sz="1200" b="0" i="0">
+                          <a:solidFill>
+                            <a:srgbClr val="2B2F36"/>
+                          </a:solidFill>
+                          <a:latin typeface="Calibri"/>
+                        </a:rPr>
+                        <a:t>-9.9%</a:t>
+                      </a:r>
+                    </a:p>
+                  </a:txBody>
+                  <a:tcPr anchor="ctr">
+                    <a:solidFill>
+                      <a:srgbClr val="F1F4F7"/>
+                    </a:solidFill>
+                  </a:tcPr>
+                </a:tc>
+                <a:tc>
+                  <a:txBody>
+                    <a:bodyPr/>
+                    <a:lstStyle/>
+                    <a:p>
+                      <a:pPr algn="r"/>
+                      <a:r>
+                        <a:rPr sz="1200" b="0" i="0">
+                          <a:solidFill>
+                            <a:srgbClr val="2B2F36"/>
+                          </a:solidFill>
+                          <a:latin typeface="Calibri"/>
+                        </a:rPr>
+                        <a:t>October: 3 days missing; per reported day down 3.4%</a:t>
+                      </a:r>
+                    </a:p>
+                  </a:txBody>
+                  <a:tcPr anchor="ctr">
+                    <a:solidFill>
+                      <a:srgbClr val="F1F4F7"/>
+                    </a:solidFill>
+                  </a:tcPr>
+                </a:tc>
+              </a:tr>
+              <a:tr h="384048">
+                <a:tc>
+                  <a:txBody>
+                    <a:bodyPr/>
+                    <a:lstStyle/>
+                    <a:p>
+                      <a:pPr algn="l"/>
+                      <a:r>
+                        <a:rPr sz="1200" b="0" i="0">
+                          <a:solidFill>
+                            <a:srgbClr val="2B2F36"/>
+                          </a:solidFill>
+                          <a:latin typeface="Calibri"/>
+                        </a:rPr>
+                        <a:t>Order rate</a:t>
+                      </a:r>
+                    </a:p>
+                  </a:txBody>
+                  <a:tcPr anchor="ctr">
+                    <a:solidFill>
+                      <a:srgbClr val="FFFFFF"/>
+                    </a:solidFill>
+                  </a:tcPr>
+                </a:tc>
+                <a:tc>
+                  <a:txBody>
+                    <a:bodyPr/>
+                    <a:lstStyle/>
+                    <a:p>
+                      <a:pPr algn="r"/>
+                      <a:r>
+                        <a:rPr sz="1200" b="0" i="0">
+                          <a:solidFill>
+                            <a:srgbClr val="2B2F36"/>
+                          </a:solidFill>
+                          <a:latin typeface="Calibri"/>
+                        </a:rPr>
+                        <a:t>2.7%</a:t>
+                      </a:r>
+                    </a:p>
+                  </a:txBody>
+                  <a:tcPr anchor="ctr">
+                    <a:solidFill>
+                      <a:srgbClr val="FFFFFF"/>
+                    </a:solidFill>
+                  </a:tcPr>
+                </a:tc>
+                <a:tc>
+                  <a:txBody>
+                    <a:bodyPr/>
+                    <a:lstStyle/>
+                    <a:p>
+                      <a:pPr algn="r"/>
+                      <a:r>
+                        <a:rPr sz="1200" b="0" i="0">
+                          <a:solidFill>
+                            <a:srgbClr val="2B2F36"/>
+                          </a:solidFill>
+                          <a:latin typeface="Calibri"/>
+                        </a:rPr>
+                        <a:t>2.5%</a:t>
+                      </a:r>
+                    </a:p>
+                  </a:txBody>
+                  <a:tcPr anchor="ctr">
+                    <a:solidFill>
+                      <a:srgbClr val="FFFFFF"/>
+                    </a:solidFill>
+                  </a:tcPr>
+                </a:tc>
+                <a:tc>
+                  <a:txBody>
+                    <a:bodyPr/>
+                    <a:lstStyle/>
+                    <a:p>
+                      <a:pPr algn="r"/>
+                      <a:r>
+                        <a:rPr sz="1200" b="0" i="0">
+                          <a:solidFill>
+                            <a:srgbClr val="2B2F36"/>
+                          </a:solidFill>
+                          <a:latin typeface="Calibri"/>
+                        </a:rPr>
+                        <a:t>+0.2 pts</a:t>
+                      </a:r>
+                    </a:p>
+                  </a:txBody>
+                  <a:tcPr anchor="ctr">
+                    <a:solidFill>
+                      <a:srgbClr val="FFFFFF"/>
+                    </a:solidFill>
+                  </a:tcPr>
+                </a:tc>
+                <a:tc>
+                  <a:txBody>
+                    <a:bodyPr/>
+                    <a:lstStyle/>
+                    <a:p>
+                      <a:pPr algn="r"/>
+                      <a:r>
+                        <a:rPr sz="1200" b="0" i="0">
+                          <a:solidFill>
+                            <a:srgbClr val="2B2F36"/>
+                          </a:solidFill>
+                          <a:latin typeface="Calibri"/>
+                        </a:rPr>
+                        <a:t>+8.4%</a:t>
+                      </a:r>
+                    </a:p>
+                  </a:txBody>
+                  <a:tcPr anchor="ctr">
+                    <a:solidFill>
+                      <a:srgbClr val="FFFFFF"/>
+                    </a:solidFill>
+                  </a:tcPr>
+                </a:tc>
+                <a:tc>
+                  <a:txBody>
+                    <a:bodyPr/>
+                    <a:lstStyle/>
+                    <a:p>
+                      <a:pPr algn="r"/>
+                      <a:r>
+                        <a:rPr sz="1200" b="0" i="0">
+                          <a:solidFill>
+                            <a:srgbClr val="2B2F36"/>
+                          </a:solidFill>
+                          <a:latin typeface="Calibri"/>
+                        </a:rPr>
+                        <a:t>October: 3 days missing; 26 days in both</a:t>
+                      </a:r>
+                    </a:p>
+                  </a:txBody>
+                  <a:tcPr anchor="ctr">
+                    <a:solidFill>
+                      <a:srgbClr val="FFFFFF"/>
+                    </a:solidFill>
+                  </a:tcPr>
+                </a:tc>
+              </a:tr>
+            </a:tbl>
+          </a:graphicData>
+        </a:graphic>
+      </p:graphicFrame>
       <p:sp>
         <p:nvSpPr>
-          <p:cNvPr id="3" name="TextBox 2"/>
+          <p:cNvPr id="4" name="TextBox 3"/>
           <p:cNvSpPr txBox="1"/>
           <p:nvPr/>
         </p:nvSpPr>
         <p:spPr>
           <a:xfrm>
-            <a:off x="548640" y="1463040"/>
-            <a:ext cx="11094415" cy="4389120"/>
+            <a:off x="548640" y="3749039"/>
+            <a:ext cx="11094415" cy="320040"/>
           </a:xfrm>
           <a:prstGeom prst="rect">
             <a:avLst/>
@@ -6844,120 +8723,755 @@
           <a:p>
             <a:pPr>
               <a:spcAft>
-                <a:spcPts val="800"/>
+                <a:spcPts val="0"/>
               </a:spcAft>
             </a:pPr>
             <a:r>
-              <a:rPr sz="1800" b="0" i="0">
+              <a:rPr sz="1600" b="0" i="0">
                 <a:solidFill>
-                  <a:srgbClr val="2B2F36"/>
+                  <a:srgbClr val="1F3A5F"/>
                 </a:solidFill>
                 <a:latin typeface="Calibri"/>
               </a:rPr>
-              <a:t>Net sales total was $40,249.02 in October, 1.8% below September ($40,966.11), but October is missing 2 days: per reported day, net sales are up 1.6% ($1,387.90 against $1,365.54).</a:t>
-            </a:r>
-          </a:p>
-          <a:p>
-            <a:pPr>
-              <a:spcAft>
-                <a:spcPts val="800"/>
-              </a:spcAft>
-            </a:pPr>
-            <a:r>
-              <a:rPr sz="1800" b="0" i="0">
-                <a:solidFill>
-                  <a:srgbClr val="2B2F36"/>
-                </a:solidFill>
-                <a:latin typeface="Calibri"/>
-              </a:rPr>
-              <a:t>Orders total was 607 in October, 3.1% above September (589), but October is missing 2 days: per reported day, orders are up 6.6% (20.93 against 19.63).</a:t>
-            </a:r>
-          </a:p>
-          <a:p>
-            <a:pPr>
-              <a:spcAft>
-                <a:spcPts val="800"/>
-              </a:spcAft>
-            </a:pPr>
-            <a:r>
-              <a:rPr sz="1800" b="0" i="0">
-                <a:solidFill>
-                  <a:srgbClr val="2B2F36"/>
-                </a:solidFill>
-                <a:latin typeface="Calibri"/>
-              </a:rPr>
-              <a:t>Average order value was $69.81 in October, down 3.6% from September ($72.39), and October is missing 2 days.</a:t>
-            </a:r>
-          </a:p>
-          <a:p>
-            <a:pPr>
-              <a:spcAft>
-                <a:spcPts val="800"/>
-              </a:spcAft>
-            </a:pPr>
-            <a:r>
-              <a:rPr sz="1800" b="0" i="0">
-                <a:solidFill>
-                  <a:srgbClr val="2B2F36"/>
-                </a:solidFill>
-                <a:latin typeface="Calibri"/>
-              </a:rPr>
-              <a:t>Refunds total was $2,125.90 in October, 27.1% above September ($1,672.94), but October is missing 2 days: per reported day, refunds are up 31.5% ($73.31 against $55.76).</a:t>
-            </a:r>
-          </a:p>
-          <a:p>
-            <a:pPr>
-              <a:spcAft>
-                <a:spcPts val="800"/>
-              </a:spcAft>
-            </a:pPr>
-            <a:r>
-              <a:rPr sz="1800" b="0" i="0">
-                <a:solidFill>
-                  <a:srgbClr val="2B2F36"/>
-                </a:solidFill>
-                <a:latin typeface="Calibri"/>
-              </a:rPr>
-              <a:t>The biggest move was Refunds, 27.1% above September in total, but October is missing 2 days: per reported day it is up 31.5%.</a:t>
-            </a:r>
-          </a:p>
-          <a:p>
-            <a:pPr>
-              <a:spcAft>
-                <a:spcPts val="800"/>
-              </a:spcAft>
-            </a:pPr>
-            <a:r>
-              <a:rPr sz="1800" b="0" i="0">
-                <a:solidFill>
-                  <a:srgbClr val="2B2F36"/>
-                </a:solidFill>
-                <a:latin typeface="Calibri"/>
-              </a:rPr>
-              <a:t>The best day was Oct 31 with net sales of $2,187.62.</a:t>
-            </a:r>
-          </a:p>
-          <a:p>
-            <a:pPr>
-              <a:spcAft>
-                <a:spcPts val="800"/>
-              </a:spcAft>
-            </a:pPr>
-            <a:r>
-              <a:rPr sz="1800" b="0" i="0">
-                <a:solidFill>
-                  <a:srgbClr val="2B2F36"/>
-                </a:solidFill>
-                <a:latin typeface="Calibri"/>
-              </a:rPr>
-              <a:t>2 days have no data (Oct 14, Oct 15), so the totals are understated.</a:t>
+              <a:t>Sessions against orders by week</a:t>
             </a:r>
           </a:p>
         </p:txBody>
       </p:sp>
+      <p:graphicFrame>
+        <p:nvGraphicFramePr>
+          <p:cNvPr id="5" name="Table 4"/>
+          <p:cNvGraphicFramePr>
+            <a:graphicFrameLocks noGrp="1"/>
+          </p:cNvGraphicFramePr>
+          <p:nvPr/>
+        </p:nvGraphicFramePr>
+        <p:xfrm>
+          <a:off x="548640" y="4114800"/>
+          <a:ext cx="8229600" cy="1755648"/>
+        </p:xfrm>
+        <a:graphic>
+          <a:graphicData uri="http://schemas.openxmlformats.org/drawingml/2006/table">
+            <a:tbl>
+              <a:tblPr firstRow="1" bandRow="1">
+                <a:tableStyleId>{5C22544A-7EE6-4342-B048-85BDC9FD1C3A}</a:tableStyleId>
+              </a:tblPr>
+              <a:tblGrid>
+                <a:gridCol w="2377440"/>
+                <a:gridCol w="1645920"/>
+                <a:gridCol w="1463040"/>
+                <a:gridCol w="1280160"/>
+                <a:gridCol w="1463040"/>
+              </a:tblGrid>
+              <a:tr h="292608">
+                <a:tc>
+                  <a:txBody>
+                    <a:bodyPr/>
+                    <a:lstStyle/>
+                    <a:p>
+                      <a:pPr algn="l"/>
+                      <a:r>
+                        <a:rPr sz="1200" b="1" i="0">
+                          <a:solidFill>
+                            <a:srgbClr val="FFFFFF"/>
+                          </a:solidFill>
+                          <a:latin typeface="Calibri"/>
+                        </a:rPr>
+                        <a:t>Week</a:t>
+                      </a:r>
+                    </a:p>
+                  </a:txBody>
+                  <a:tcPr anchor="ctr">
+                    <a:solidFill>
+                      <a:srgbClr val="1F3A5F"/>
+                    </a:solidFill>
+                  </a:tcPr>
+                </a:tc>
+                <a:tc>
+                  <a:txBody>
+                    <a:bodyPr/>
+                    <a:lstStyle/>
+                    <a:p>
+                      <a:pPr algn="r"/>
+                      <a:r>
+                        <a:rPr sz="1200" b="1" i="0">
+                          <a:solidFill>
+                            <a:srgbClr val="FFFFFF"/>
+                          </a:solidFill>
+                          <a:latin typeface="Calibri"/>
+                        </a:rPr>
+                        <a:t>Days counted</a:t>
+                      </a:r>
+                    </a:p>
+                  </a:txBody>
+                  <a:tcPr anchor="ctr">
+                    <a:solidFill>
+                      <a:srgbClr val="1F3A5F"/>
+                    </a:solidFill>
+                  </a:tcPr>
+                </a:tc>
+                <a:tc>
+                  <a:txBody>
+                    <a:bodyPr/>
+                    <a:lstStyle/>
+                    <a:p>
+                      <a:pPr algn="r"/>
+                      <a:r>
+                        <a:rPr sz="1200" b="1" i="0">
+                          <a:solidFill>
+                            <a:srgbClr val="FFFFFF"/>
+                          </a:solidFill>
+                          <a:latin typeface="Calibri"/>
+                        </a:rPr>
+                        <a:t>Sessions</a:t>
+                      </a:r>
+                    </a:p>
+                  </a:txBody>
+                  <a:tcPr anchor="ctr">
+                    <a:solidFill>
+                      <a:srgbClr val="1F3A5F"/>
+                    </a:solidFill>
+                  </a:tcPr>
+                </a:tc>
+                <a:tc>
+                  <a:txBody>
+                    <a:bodyPr/>
+                    <a:lstStyle/>
+                    <a:p>
+                      <a:pPr algn="r"/>
+                      <a:r>
+                        <a:rPr sz="1200" b="1" i="0">
+                          <a:solidFill>
+                            <a:srgbClr val="FFFFFF"/>
+                          </a:solidFill>
+                          <a:latin typeface="Calibri"/>
+                        </a:rPr>
+                        <a:t>Orders</a:t>
+                      </a:r>
+                    </a:p>
+                  </a:txBody>
+                  <a:tcPr anchor="ctr">
+                    <a:solidFill>
+                      <a:srgbClr val="1F3A5F"/>
+                    </a:solidFill>
+                  </a:tcPr>
+                </a:tc>
+                <a:tc>
+                  <a:txBody>
+                    <a:bodyPr/>
+                    <a:lstStyle/>
+                    <a:p>
+                      <a:pPr algn="r"/>
+                      <a:r>
+                        <a:rPr sz="1200" b="1" i="0">
+                          <a:solidFill>
+                            <a:srgbClr val="FFFFFF"/>
+                          </a:solidFill>
+                          <a:latin typeface="Calibri"/>
+                        </a:rPr>
+                        <a:t>Order rate</a:t>
+                      </a:r>
+                    </a:p>
+                  </a:txBody>
+                  <a:tcPr anchor="ctr">
+                    <a:solidFill>
+                      <a:srgbClr val="1F3A5F"/>
+                    </a:solidFill>
+                  </a:tcPr>
+                </a:tc>
+              </a:tr>
+              <a:tr h="292608">
+                <a:tc>
+                  <a:txBody>
+                    <a:bodyPr/>
+                    <a:lstStyle/>
+                    <a:p>
+                      <a:pPr algn="l"/>
+                      <a:r>
+                        <a:rPr sz="1200" b="0" i="0">
+                          <a:solidFill>
+                            <a:srgbClr val="2B2F36"/>
+                          </a:solidFill>
+                          <a:latin typeface="Calibri"/>
+                        </a:rPr>
+                        <a:t>Oct 1 to 7</a:t>
+                      </a:r>
+                    </a:p>
+                  </a:txBody>
+                  <a:tcPr anchor="ctr">
+                    <a:solidFill>
+                      <a:srgbClr val="FFFFFF"/>
+                    </a:solidFill>
+                  </a:tcPr>
+                </a:tc>
+                <a:tc>
+                  <a:txBody>
+                    <a:bodyPr/>
+                    <a:lstStyle/>
+                    <a:p>
+                      <a:pPr algn="r"/>
+                      <a:r>
+                        <a:rPr sz="1200" b="0" i="0">
+                          <a:solidFill>
+                            <a:srgbClr val="2B2F36"/>
+                          </a:solidFill>
+                          <a:latin typeface="Calibri"/>
+                        </a:rPr>
+                        <a:t>4 of 7</a:t>
+                      </a:r>
+                    </a:p>
+                  </a:txBody>
+                  <a:tcPr anchor="ctr">
+                    <a:solidFill>
+                      <a:srgbClr val="FFFFFF"/>
+                    </a:solidFill>
+                  </a:tcPr>
+                </a:tc>
+                <a:tc>
+                  <a:txBody>
+                    <a:bodyPr/>
+                    <a:lstStyle/>
+                    <a:p>
+                      <a:pPr algn="r"/>
+                      <a:r>
+                        <a:rPr sz="1200" b="0" i="0">
+                          <a:solidFill>
+                            <a:srgbClr val="2B2F36"/>
+                          </a:solidFill>
+                          <a:latin typeface="Calibri"/>
+                        </a:rPr>
+                        <a:t>2,770</a:t>
+                      </a:r>
+                    </a:p>
+                  </a:txBody>
+                  <a:tcPr anchor="ctr">
+                    <a:solidFill>
+                      <a:srgbClr val="FFFFFF"/>
+                    </a:solidFill>
+                  </a:tcPr>
+                </a:tc>
+                <a:tc>
+                  <a:txBody>
+                    <a:bodyPr/>
+                    <a:lstStyle/>
+                    <a:p>
+                      <a:pPr algn="r"/>
+                      <a:r>
+                        <a:rPr sz="1200" b="0" i="0">
+                          <a:solidFill>
+                            <a:srgbClr val="2B2F36"/>
+                          </a:solidFill>
+                          <a:latin typeface="Calibri"/>
+                        </a:rPr>
+                        <a:t>67</a:t>
+                      </a:r>
+                    </a:p>
+                  </a:txBody>
+                  <a:tcPr anchor="ctr">
+                    <a:solidFill>
+                      <a:srgbClr val="FFFFFF"/>
+                    </a:solidFill>
+                  </a:tcPr>
+                </a:tc>
+                <a:tc>
+                  <a:txBody>
+                    <a:bodyPr/>
+                    <a:lstStyle/>
+                    <a:p>
+                      <a:pPr algn="r"/>
+                      <a:r>
+                        <a:rPr sz="1200" b="0" i="0">
+                          <a:solidFill>
+                            <a:srgbClr val="2B2F36"/>
+                          </a:solidFill>
+                          <a:latin typeface="Calibri"/>
+                        </a:rPr>
+                        <a:t>2.4%</a:t>
+                      </a:r>
+                    </a:p>
+                  </a:txBody>
+                  <a:tcPr anchor="ctr">
+                    <a:solidFill>
+                      <a:srgbClr val="FFFFFF"/>
+                    </a:solidFill>
+                  </a:tcPr>
+                </a:tc>
+              </a:tr>
+              <a:tr h="292608">
+                <a:tc>
+                  <a:txBody>
+                    <a:bodyPr/>
+                    <a:lstStyle/>
+                    <a:p>
+                      <a:pPr algn="l"/>
+                      <a:r>
+                        <a:rPr sz="1200" b="0" i="0">
+                          <a:solidFill>
+                            <a:srgbClr val="2B2F36"/>
+                          </a:solidFill>
+                          <a:latin typeface="Calibri"/>
+                        </a:rPr>
+                        <a:t>Oct 8 to 14</a:t>
+                      </a:r>
+                    </a:p>
+                  </a:txBody>
+                  <a:tcPr anchor="ctr">
+                    <a:solidFill>
+                      <a:srgbClr val="F1F4F7"/>
+                    </a:solidFill>
+                  </a:tcPr>
+                </a:tc>
+                <a:tc>
+                  <a:txBody>
+                    <a:bodyPr/>
+                    <a:lstStyle/>
+                    <a:p>
+                      <a:pPr algn="r"/>
+                      <a:r>
+                        <a:rPr sz="1200" b="0" i="0">
+                          <a:solidFill>
+                            <a:srgbClr val="2B2F36"/>
+                          </a:solidFill>
+                          <a:latin typeface="Calibri"/>
+                        </a:rPr>
+                        <a:t>6 of 7</a:t>
+                      </a:r>
+                    </a:p>
+                  </a:txBody>
+                  <a:tcPr anchor="ctr">
+                    <a:solidFill>
+                      <a:srgbClr val="F1F4F7"/>
+                    </a:solidFill>
+                  </a:tcPr>
+                </a:tc>
+                <a:tc>
+                  <a:txBody>
+                    <a:bodyPr/>
+                    <a:lstStyle/>
+                    <a:p>
+                      <a:pPr algn="r"/>
+                      <a:r>
+                        <a:rPr sz="1200" b="0" i="0">
+                          <a:solidFill>
+                            <a:srgbClr val="2B2F36"/>
+                          </a:solidFill>
+                          <a:latin typeface="Calibri"/>
+                        </a:rPr>
+                        <a:t>4,798</a:t>
+                      </a:r>
+                    </a:p>
+                  </a:txBody>
+                  <a:tcPr anchor="ctr">
+                    <a:solidFill>
+                      <a:srgbClr val="F1F4F7"/>
+                    </a:solidFill>
+                  </a:tcPr>
+                </a:tc>
+                <a:tc>
+                  <a:txBody>
+                    <a:bodyPr/>
+                    <a:lstStyle/>
+                    <a:p>
+                      <a:pPr algn="r"/>
+                      <a:r>
+                        <a:rPr sz="1200" b="0" i="0">
+                          <a:solidFill>
+                            <a:srgbClr val="2B2F36"/>
+                          </a:solidFill>
+                          <a:latin typeface="Calibri"/>
+                        </a:rPr>
+                        <a:t>135</a:t>
+                      </a:r>
+                    </a:p>
+                  </a:txBody>
+                  <a:tcPr anchor="ctr">
+                    <a:solidFill>
+                      <a:srgbClr val="F1F4F7"/>
+                    </a:solidFill>
+                  </a:tcPr>
+                </a:tc>
+                <a:tc>
+                  <a:txBody>
+                    <a:bodyPr/>
+                    <a:lstStyle/>
+                    <a:p>
+                      <a:pPr algn="r"/>
+                      <a:r>
+                        <a:rPr sz="1200" b="0" i="0">
+                          <a:solidFill>
+                            <a:srgbClr val="2B2F36"/>
+                          </a:solidFill>
+                          <a:latin typeface="Calibri"/>
+                        </a:rPr>
+                        <a:t>2.8%</a:t>
+                      </a:r>
+                    </a:p>
+                  </a:txBody>
+                  <a:tcPr anchor="ctr">
+                    <a:solidFill>
+                      <a:srgbClr val="F1F4F7"/>
+                    </a:solidFill>
+                  </a:tcPr>
+                </a:tc>
+              </a:tr>
+              <a:tr h="292608">
+                <a:tc>
+                  <a:txBody>
+                    <a:bodyPr/>
+                    <a:lstStyle/>
+                    <a:p>
+                      <a:pPr algn="l"/>
+                      <a:r>
+                        <a:rPr sz="1200" b="0" i="0">
+                          <a:solidFill>
+                            <a:srgbClr val="2B2F36"/>
+                          </a:solidFill>
+                          <a:latin typeface="Calibri"/>
+                        </a:rPr>
+                        <a:t>Oct 15 to 21</a:t>
+                      </a:r>
+                    </a:p>
+                  </a:txBody>
+                  <a:tcPr anchor="ctr">
+                    <a:solidFill>
+                      <a:srgbClr val="FFFFFF"/>
+                    </a:solidFill>
+                  </a:tcPr>
+                </a:tc>
+                <a:tc>
+                  <a:txBody>
+                    <a:bodyPr/>
+                    <a:lstStyle/>
+                    <a:p>
+                      <a:pPr algn="r"/>
+                      <a:r>
+                        <a:rPr sz="1200" b="0" i="0">
+                          <a:solidFill>
+                            <a:srgbClr val="2B2F36"/>
+                          </a:solidFill>
+                          <a:latin typeface="Calibri"/>
+                        </a:rPr>
+                        <a:t>6 of 7</a:t>
+                      </a:r>
+                    </a:p>
+                  </a:txBody>
+                  <a:tcPr anchor="ctr">
+                    <a:solidFill>
+                      <a:srgbClr val="FFFFFF"/>
+                    </a:solidFill>
+                  </a:tcPr>
+                </a:tc>
+                <a:tc>
+                  <a:txBody>
+                    <a:bodyPr/>
+                    <a:lstStyle/>
+                    <a:p>
+                      <a:pPr algn="r"/>
+                      <a:r>
+                        <a:rPr sz="1200" b="0" i="0">
+                          <a:solidFill>
+                            <a:srgbClr val="2B2F36"/>
+                          </a:solidFill>
+                          <a:latin typeface="Calibri"/>
+                        </a:rPr>
+                        <a:t>5,004</a:t>
+                      </a:r>
+                    </a:p>
+                  </a:txBody>
+                  <a:tcPr anchor="ctr">
+                    <a:solidFill>
+                      <a:srgbClr val="FFFFFF"/>
+                    </a:solidFill>
+                  </a:tcPr>
+                </a:tc>
+                <a:tc>
+                  <a:txBody>
+                    <a:bodyPr/>
+                    <a:lstStyle/>
+                    <a:p>
+                      <a:pPr algn="r"/>
+                      <a:r>
+                        <a:rPr sz="1200" b="0" i="0">
+                          <a:solidFill>
+                            <a:srgbClr val="2B2F36"/>
+                          </a:solidFill>
+                          <a:latin typeface="Calibri"/>
+                        </a:rPr>
+                        <a:t>123</a:t>
+                      </a:r>
+                    </a:p>
+                  </a:txBody>
+                  <a:tcPr anchor="ctr">
+                    <a:solidFill>
+                      <a:srgbClr val="FFFFFF"/>
+                    </a:solidFill>
+                  </a:tcPr>
+                </a:tc>
+                <a:tc>
+                  <a:txBody>
+                    <a:bodyPr/>
+                    <a:lstStyle/>
+                    <a:p>
+                      <a:pPr algn="r"/>
+                      <a:r>
+                        <a:rPr sz="1200" b="0" i="0">
+                          <a:solidFill>
+                            <a:srgbClr val="2B2F36"/>
+                          </a:solidFill>
+                          <a:latin typeface="Calibri"/>
+                        </a:rPr>
+                        <a:t>2.5%</a:t>
+                      </a:r>
+                    </a:p>
+                  </a:txBody>
+                  <a:tcPr anchor="ctr">
+                    <a:solidFill>
+                      <a:srgbClr val="FFFFFF"/>
+                    </a:solidFill>
+                  </a:tcPr>
+                </a:tc>
+              </a:tr>
+              <a:tr h="292608">
+                <a:tc>
+                  <a:txBody>
+                    <a:bodyPr/>
+                    <a:lstStyle/>
+                    <a:p>
+                      <a:pPr algn="l"/>
+                      <a:r>
+                        <a:rPr sz="1200" b="0" i="0">
+                          <a:solidFill>
+                            <a:srgbClr val="2B2F36"/>
+                          </a:solidFill>
+                          <a:latin typeface="Calibri"/>
+                        </a:rPr>
+                        <a:t>Oct 22 to 28</a:t>
+                      </a:r>
+                    </a:p>
+                  </a:txBody>
+                  <a:tcPr anchor="ctr">
+                    <a:solidFill>
+                      <a:srgbClr val="F1F4F7"/>
+                    </a:solidFill>
+                  </a:tcPr>
+                </a:tc>
+                <a:tc>
+                  <a:txBody>
+                    <a:bodyPr/>
+                    <a:lstStyle/>
+                    <a:p>
+                      <a:pPr algn="r"/>
+                      <a:r>
+                        <a:rPr sz="1200" b="0" i="0">
+                          <a:solidFill>
+                            <a:srgbClr val="2B2F36"/>
+                          </a:solidFill>
+                          <a:latin typeface="Calibri"/>
+                        </a:rPr>
+                        <a:t>7 of 7</a:t>
+                      </a:r>
+                    </a:p>
+                  </a:txBody>
+                  <a:tcPr anchor="ctr">
+                    <a:solidFill>
+                      <a:srgbClr val="F1F4F7"/>
+                    </a:solidFill>
+                  </a:tcPr>
+                </a:tc>
+                <a:tc>
+                  <a:txBody>
+                    <a:bodyPr/>
+                    <a:lstStyle/>
+                    <a:p>
+                      <a:pPr algn="r"/>
+                      <a:r>
+                        <a:rPr sz="1200" b="0" i="0">
+                          <a:solidFill>
+                            <a:srgbClr val="2B2F36"/>
+                          </a:solidFill>
+                          <a:latin typeface="Calibri"/>
+                        </a:rPr>
+                        <a:t>5,754</a:t>
+                      </a:r>
+                    </a:p>
+                  </a:txBody>
+                  <a:tcPr anchor="ctr">
+                    <a:solidFill>
+                      <a:srgbClr val="F1F4F7"/>
+                    </a:solidFill>
+                  </a:tcPr>
+                </a:tc>
+                <a:tc>
+                  <a:txBody>
+                    <a:bodyPr/>
+                    <a:lstStyle/>
+                    <a:p>
+                      <a:pPr algn="r"/>
+                      <a:r>
+                        <a:rPr sz="1200" b="0" i="0">
+                          <a:solidFill>
+                            <a:srgbClr val="2B2F36"/>
+                          </a:solidFill>
+                          <a:latin typeface="Calibri"/>
+                        </a:rPr>
+                        <a:t>158</a:t>
+                      </a:r>
+                    </a:p>
+                  </a:txBody>
+                  <a:tcPr anchor="ctr">
+                    <a:solidFill>
+                      <a:srgbClr val="F1F4F7"/>
+                    </a:solidFill>
+                  </a:tcPr>
+                </a:tc>
+                <a:tc>
+                  <a:txBody>
+                    <a:bodyPr/>
+                    <a:lstStyle/>
+                    <a:p>
+                      <a:pPr algn="r"/>
+                      <a:r>
+                        <a:rPr sz="1200" b="0" i="0">
+                          <a:solidFill>
+                            <a:srgbClr val="2B2F36"/>
+                          </a:solidFill>
+                          <a:latin typeface="Calibri"/>
+                        </a:rPr>
+                        <a:t>2.7%</a:t>
+                      </a:r>
+                    </a:p>
+                  </a:txBody>
+                  <a:tcPr anchor="ctr">
+                    <a:solidFill>
+                      <a:srgbClr val="F1F4F7"/>
+                    </a:solidFill>
+                  </a:tcPr>
+                </a:tc>
+              </a:tr>
+              <a:tr h="292608">
+                <a:tc>
+                  <a:txBody>
+                    <a:bodyPr/>
+                    <a:lstStyle/>
+                    <a:p>
+                      <a:pPr algn="l"/>
+                      <a:r>
+                        <a:rPr sz="1200" b="0" i="0">
+                          <a:solidFill>
+                            <a:srgbClr val="2B2F36"/>
+                          </a:solidFill>
+                          <a:latin typeface="Calibri"/>
+                        </a:rPr>
+                        <a:t>Oct 29 to 31</a:t>
+                      </a:r>
+                    </a:p>
+                  </a:txBody>
+                  <a:tcPr anchor="ctr">
+                    <a:solidFill>
+                      <a:srgbClr val="FFFFFF"/>
+                    </a:solidFill>
+                  </a:tcPr>
+                </a:tc>
+                <a:tc>
+                  <a:txBody>
+                    <a:bodyPr/>
+                    <a:lstStyle/>
+                    <a:p>
+                      <a:pPr algn="r"/>
+                      <a:r>
+                        <a:rPr sz="1200" b="0" i="0">
+                          <a:solidFill>
+                            <a:srgbClr val="2B2F36"/>
+                          </a:solidFill>
+                          <a:latin typeface="Calibri"/>
+                        </a:rPr>
+                        <a:t>3 of 3</a:t>
+                      </a:r>
+                    </a:p>
+                  </a:txBody>
+                  <a:tcPr anchor="ctr">
+                    <a:solidFill>
+                      <a:srgbClr val="FFFFFF"/>
+                    </a:solidFill>
+                  </a:tcPr>
+                </a:tc>
+                <a:tc>
+                  <a:txBody>
+                    <a:bodyPr/>
+                    <a:lstStyle/>
+                    <a:p>
+                      <a:pPr algn="r"/>
+                      <a:r>
+                        <a:rPr sz="1200" b="0" i="0">
+                          <a:solidFill>
+                            <a:srgbClr val="2B2F36"/>
+                          </a:solidFill>
+                          <a:latin typeface="Calibri"/>
+                        </a:rPr>
+                        <a:t>2,203</a:t>
+                      </a:r>
+                    </a:p>
+                  </a:txBody>
+                  <a:tcPr anchor="ctr">
+                    <a:solidFill>
+                      <a:srgbClr val="FFFFFF"/>
+                    </a:solidFill>
+                  </a:tcPr>
+                </a:tc>
+                <a:tc>
+                  <a:txBody>
+                    <a:bodyPr/>
+                    <a:lstStyle/>
+                    <a:p>
+                      <a:pPr algn="r"/>
+                      <a:r>
+                        <a:rPr sz="1200" b="0" i="0">
+                          <a:solidFill>
+                            <a:srgbClr val="2B2F36"/>
+                          </a:solidFill>
+                          <a:latin typeface="Calibri"/>
+                        </a:rPr>
+                        <a:t>66</a:t>
+                      </a:r>
+                    </a:p>
+                  </a:txBody>
+                  <a:tcPr anchor="ctr">
+                    <a:solidFill>
+                      <a:srgbClr val="FFFFFF"/>
+                    </a:solidFill>
+                  </a:tcPr>
+                </a:tc>
+                <a:tc>
+                  <a:txBody>
+                    <a:bodyPr/>
+                    <a:lstStyle/>
+                    <a:p>
+                      <a:pPr algn="r"/>
+                      <a:r>
+                        <a:rPr sz="1200" b="0" i="0">
+                          <a:solidFill>
+                            <a:srgbClr val="2B2F36"/>
+                          </a:solidFill>
+                          <a:latin typeface="Calibri"/>
+                        </a:rPr>
+                        <a:t>3.0%</a:t>
+                      </a:r>
+                    </a:p>
+                  </a:txBody>
+                  <a:tcPr anchor="ctr">
+                    <a:solidFill>
+                      <a:srgbClr val="FFFFFF"/>
+                    </a:solidFill>
+                  </a:tcPr>
+                </a:tc>
+              </a:tr>
+            </a:tbl>
+          </a:graphicData>
+        </a:graphic>
+      </p:graphicFrame>
       <p:sp>
         <p:nvSpPr>
-          <p:cNvPr id="4" name="TextBox 3"/>
+          <p:cNvPr id="6" name="TextBox 5"/>
           <p:cNvSpPr txBox="1"/>
           <p:nvPr/>
         </p:nvSpPr>
@@ -6989,7 +9503,39 @@
                 </a:solidFill>
                 <a:latin typeface="Calibri"/>
               </a:rPr>
-              <a:t>Narrative written from the computed figures on the previous slides.</a:t>
+              <a:t>Source: the website's Google Analytics 4 daily figures. Website days follow the property's own time zone, store days follow UTC.</a:t>
+            </a:r>
+          </a:p>
+          <a:p>
+            <a:pPr>
+              <a:spcAft>
+                <a:spcPts val="0"/>
+              </a:spcAft>
+            </a:pPr>
+            <a:r>
+              <a:rPr sz="1100" b="0" i="0">
+                <a:solidFill>
+                  <a:srgbClr val="5B6470"/>
+                </a:solidFill>
+                <a:latin typeface="Calibri"/>
+              </a:rPr>
+              <a:t>Users per active day is the average of each day's distinct users. Order rate is orders divided by sessions over the days both sources reported, not a Google Analytics conversion rate.</a:t>
+            </a:r>
+          </a:p>
+          <a:p>
+            <a:pPr>
+              <a:spcAft>
+                <a:spcPts val="0"/>
+              </a:spcAft>
+            </a:pPr>
+            <a:r>
+              <a:rPr sz="1100" b="0" i="0">
+                <a:solidFill>
+                  <a:srgbClr val="5B6470"/>
+                </a:solidFill>
+                <a:latin typeface="Calibri"/>
+              </a:rPr>
+              <a:t>Per reported day divides a total by the days with traffic plus the days with no traffic.</a:t>
             </a:r>
           </a:p>
         </p:txBody>
@@ -7034,13 +9580,302 @@
           <a:p>
             <a:pPr algn="l"/>
             <a:r>
-              <a:rPr sz="2800" b="1" i="0">
+              <a:rPr sz="2400" b="1" i="0">
                 <a:solidFill>
                   <a:srgbClr val="1F3A5F"/>
                 </a:solidFill>
                 <a:latin typeface="Calibri"/>
               </a:rPr>
-              <a:t>Data health: October is missing 2 of 31 days</a:t>
+              <a:t>October refunds total is 27.1% above September, but October is missing 2 days: per reported day it is up 31.5%</a:t>
+            </a:r>
+          </a:p>
+        </p:txBody>
+      </p:sp>
+      <p:sp>
+        <p:nvSpPr>
+          <p:cNvPr id="3" name="TextBox 2"/>
+          <p:cNvSpPr txBox="1"/>
+          <p:nvPr/>
+        </p:nvSpPr>
+        <p:spPr>
+          <a:xfrm>
+            <a:off x="548640" y="1463040"/>
+            <a:ext cx="11094415" cy="4389120"/>
+          </a:xfrm>
+          <a:prstGeom prst="rect">
+            <a:avLst/>
+          </a:prstGeom>
+          <a:noFill/>
+        </p:spPr>
+        <p:txBody>
+          <a:bodyPr wrap="square">
+            <a:spAutoFit/>
+          </a:bodyPr>
+          <a:lstStyle/>
+          <a:p>
+            <a:pPr>
+              <a:spcAft>
+                <a:spcPts val="500"/>
+              </a:spcAft>
+            </a:pPr>
+            <a:r>
+              <a:rPr sz="1500" b="0" i="0">
+                <a:solidFill>
+                  <a:srgbClr val="2B2F36"/>
+                </a:solidFill>
+                <a:latin typeface="Calibri"/>
+              </a:rPr>
+              <a:t>Net sales total was $40,249.02 in October, 1.8% below September ($40,966.11), but October is missing 2 days: per reported day, net sales are up 1.6% ($1,387.90 against $1,365.54).</a:t>
+            </a:r>
+          </a:p>
+          <a:p>
+            <a:pPr>
+              <a:spcAft>
+                <a:spcPts val="500"/>
+              </a:spcAft>
+            </a:pPr>
+            <a:r>
+              <a:rPr sz="1500" b="0" i="0">
+                <a:solidFill>
+                  <a:srgbClr val="2B2F36"/>
+                </a:solidFill>
+                <a:latin typeface="Calibri"/>
+              </a:rPr>
+              <a:t>Orders total was 607 in October, 3.1% above September (589), but October is missing 2 days: per reported day, orders are up 6.6% (20.93 against 19.63).</a:t>
+            </a:r>
+          </a:p>
+          <a:p>
+            <a:pPr>
+              <a:spcAft>
+                <a:spcPts val="500"/>
+              </a:spcAft>
+            </a:pPr>
+            <a:r>
+              <a:rPr sz="1500" b="0" i="0">
+                <a:solidFill>
+                  <a:srgbClr val="2B2F36"/>
+                </a:solidFill>
+                <a:latin typeface="Calibri"/>
+              </a:rPr>
+              <a:t>Average order value was $69.81 in October, down 3.6% from September ($72.39), and October is missing 2 days.</a:t>
+            </a:r>
+          </a:p>
+          <a:p>
+            <a:pPr>
+              <a:spcAft>
+                <a:spcPts val="500"/>
+              </a:spcAft>
+            </a:pPr>
+            <a:r>
+              <a:rPr sz="1500" b="0" i="0">
+                <a:solidFill>
+                  <a:srgbClr val="2B2F36"/>
+                </a:solidFill>
+                <a:latin typeface="Calibri"/>
+              </a:rPr>
+              <a:t>Refunds total was $2,125.90 in October, 27.1% above September ($1,672.94), but October is missing 2 days: per reported day, refunds are up 31.5% ($73.31 against $55.76).</a:t>
+            </a:r>
+          </a:p>
+          <a:p>
+            <a:pPr>
+              <a:spcAft>
+                <a:spcPts val="500"/>
+              </a:spcAft>
+            </a:pPr>
+            <a:r>
+              <a:rPr sz="1500" b="0" i="0">
+                <a:solidFill>
+                  <a:srgbClr val="2B2F36"/>
+                </a:solidFill>
+                <a:latin typeface="Calibri"/>
+              </a:rPr>
+              <a:t>The biggest move was Refunds, 27.1% above September in total, but October is missing 2 days: per reported day it is up 31.5%.</a:t>
+            </a:r>
+          </a:p>
+          <a:p>
+            <a:pPr>
+              <a:spcAft>
+                <a:spcPts val="500"/>
+              </a:spcAft>
+            </a:pPr>
+            <a:r>
+              <a:rPr sz="1500" b="0" i="0">
+                <a:solidFill>
+                  <a:srgbClr val="2B2F36"/>
+                </a:solidFill>
+                <a:latin typeface="Calibri"/>
+              </a:rPr>
+              <a:t>The best day was Oct 31 with net sales of $2,187.62.</a:t>
+            </a:r>
+          </a:p>
+          <a:p>
+            <a:pPr>
+              <a:spcAft>
+                <a:spcPts val="500"/>
+              </a:spcAft>
+            </a:pPr>
+            <a:r>
+              <a:rPr sz="1500" b="0" i="0">
+                <a:solidFill>
+                  <a:srgbClr val="2B2F36"/>
+                </a:solidFill>
+                <a:latin typeface="Calibri"/>
+              </a:rPr>
+              <a:t>2 days have no data (Oct 14, Oct 15), so the totals are understated.</a:t>
+            </a:r>
+          </a:p>
+          <a:p>
+            <a:pPr>
+              <a:spcAft>
+                <a:spcPts val="500"/>
+              </a:spcAft>
+            </a:pPr>
+            <a:r>
+              <a:rPr sz="1500" b="0" i="0">
+                <a:solidFill>
+                  <a:srgbClr val="2B2F36"/>
+                </a:solidFill>
+                <a:latin typeface="Calibri"/>
+              </a:rPr>
+              <a:t>Sessions total was 21,812 in October, 8.6% below September (23,876), but October is missing 3 days of website data: per reported day, sessions are down 2.1% (779.00 against 795.87).</a:t>
+            </a:r>
+          </a:p>
+          <a:p>
+            <a:pPr>
+              <a:spcAft>
+                <a:spcPts val="500"/>
+              </a:spcAft>
+            </a:pPr>
+            <a:r>
+              <a:rPr sz="1500" b="0" i="0">
+                <a:solidFill>
+                  <a:srgbClr val="2B2F36"/>
+                </a:solidFill>
+                <a:latin typeface="Calibri"/>
+              </a:rPr>
+              <a:t>Key events total was 942 in October, 9.9% below September (1,045), but October is missing 3 days of website data: per reported day, key events are down 3.4% (33.64 against 34.83).</a:t>
+            </a:r>
+          </a:p>
+          <a:p>
+            <a:pPr>
+              <a:spcAft>
+                <a:spcPts val="500"/>
+              </a:spcAft>
+            </a:pPr>
+            <a:r>
+              <a:rPr sz="1500" b="0" i="0">
+                <a:solidFill>
+                  <a:srgbClr val="2B2F36"/>
+                </a:solidFill>
+                <a:latin typeface="Calibri"/>
+              </a:rPr>
+              <a:t>Order rate was 2.7% in October, up 8.4% from September (2.5%), and October is missing 3 days of website data.</a:t>
+            </a:r>
+          </a:p>
+          <a:p>
+            <a:pPr>
+              <a:spcAft>
+                <a:spcPts val="500"/>
+              </a:spcAft>
+            </a:pPr>
+            <a:r>
+              <a:rPr sz="1500" b="0" i="0">
+                <a:solidFill>
+                  <a:srgbClr val="2B2F36"/>
+                </a:solidFill>
+                <a:latin typeface="Calibri"/>
+              </a:rPr>
+              <a:t>3 days have no website data (Oct 3, Oct 4, Oct 5), so the website totals are understated.</a:t>
+            </a:r>
+          </a:p>
+        </p:txBody>
+      </p:sp>
+      <p:sp>
+        <p:nvSpPr>
+          <p:cNvPr id="4" name="TextBox 3"/>
+          <p:cNvSpPr txBox="1"/>
+          <p:nvPr/>
+        </p:nvSpPr>
+        <p:spPr>
+          <a:xfrm>
+            <a:off x="548640" y="5989320"/>
+            <a:ext cx="11094415" cy="731520"/>
+          </a:xfrm>
+          <a:prstGeom prst="rect">
+            <a:avLst/>
+          </a:prstGeom>
+          <a:noFill/>
+        </p:spPr>
+        <p:txBody>
+          <a:bodyPr wrap="square">
+            <a:spAutoFit/>
+          </a:bodyPr>
+          <a:lstStyle/>
+          <a:p>
+            <a:pPr>
+              <a:spcAft>
+                <a:spcPts val="0"/>
+              </a:spcAft>
+            </a:pPr>
+            <a:r>
+              <a:rPr sz="1100" b="0" i="0">
+                <a:solidFill>
+                  <a:srgbClr val="5B6470"/>
+                </a:solidFill>
+                <a:latin typeface="Calibri"/>
+              </a:rPr>
+              <a:t>Narrative written from the computed figures on the previous slides.</a:t>
+            </a:r>
+          </a:p>
+        </p:txBody>
+      </p:sp>
+    </p:spTree>
+  </p:cSld>
+  <p:clrMapOvr>
+    <a:masterClrMapping/>
+  </p:clrMapOvr>
+</p:sld>
+</file>
+
+<file path=ppt/slides/slide8.xml><?xml version="1.0" encoding="utf-8"?>
+<p:sld xmlns:a="http://schemas.openxmlformats.org/drawingml/2006/main" xmlns:p="http://schemas.openxmlformats.org/presentationml/2006/main" xmlns:r="http://schemas.openxmlformats.org/officeDocument/2006/relationships">
+  <p:cSld>
+    <p:spTree>
+      <p:nvGrpSpPr>
+        <p:cNvPr id="1" name=""/>
+        <p:cNvGrpSpPr/>
+        <p:nvPr/>
+      </p:nvGrpSpPr>
+      <p:grpSpPr/>
+      <p:sp>
+        <p:nvSpPr>
+          <p:cNvPr id="2" name="Title 1"/>
+          <p:cNvSpPr>
+            <a:spLocks noGrp="1"/>
+          </p:cNvSpPr>
+          <p:nvPr>
+            <p:ph type="title"/>
+          </p:nvPr>
+        </p:nvSpPr>
+        <p:spPr>
+          <a:xfrm>
+            <a:off x="548640" y="274320"/>
+            <a:ext cx="11094415" cy="1005840"/>
+          </a:xfrm>
+        </p:spPr>
+        <p:txBody>
+          <a:bodyPr wrap="square" anchor="ctr"/>
+          <a:lstStyle/>
+          <a:p>
+            <a:pPr algn="l"/>
+            <a:r>
+              <a:rPr sz="2400" b="1" i="0">
+                <a:solidFill>
+                  <a:srgbClr val="1F3A5F"/>
+                </a:solidFill>
+                <a:latin typeface="Calibri"/>
+              </a:rPr>
+              <a:t>Data health: October is missing 2 days of store data and 3 days of website data</a:t>
             </a:r>
           </a:p>
         </p:txBody>
@@ -7054,8 +9889,8 @@
           <p:nvPr/>
         </p:nvGraphicFramePr>
         <p:xfrm>
-          <a:off x="548640" y="1371600"/>
-          <a:ext cx="11094414" cy="2944368"/>
+          <a:off x="548640" y="1280160"/>
+          <a:ext cx="11094413" cy="2414016"/>
         </p:xfrm>
         <a:graphic>
           <a:graphicData uri="http://schemas.openxmlformats.org/drawingml/2006/table">
@@ -7064,11 +9899,13 @@
                 <a:tableStyleId>{5C22544A-7EE6-4342-B048-85BDC9FD1C3A}</a:tableStyleId>
               </a:tblPr>
               <a:tblGrid>
-                <a:gridCol w="4395900"/>
-                <a:gridCol w="3349257"/>
-                <a:gridCol w="3349257"/>
+                <a:gridCol w="3572777"/>
+                <a:gridCol w="1880409"/>
+                <a:gridCol w="1880409"/>
+                <a:gridCol w="1880409"/>
+                <a:gridCol w="1880409"/>
               </a:tblGrid>
-              <a:tr h="420624">
+              <a:tr h="402336">
                 <a:tc>
                   <a:txBody>
                     <a:bodyPr/>
@@ -7076,7 +9913,7 @@
                     <a:p>
                       <a:pPr algn="l"/>
                       <a:r>
-                        <a:rPr sz="1500" b="1" i="0">
+                        <a:rPr sz="1400" b="1" i="0">
                           <a:solidFill>
                             <a:srgbClr val="FFFFFF"/>
                           </a:solidFill>
@@ -7099,13 +9936,13 @@
                     <a:p>
                       <a:pPr algn="r"/>
                       <a:r>
-                        <a:rPr sz="1500" b="1" i="0">
+                        <a:rPr sz="1400" b="1" i="0">
                           <a:solidFill>
                             <a:srgbClr val="FFFFFF"/>
                           </a:solidFill>
                           <a:latin typeface="Calibri"/>
                         </a:rPr>
-                        <a:t>October 2026</a:t>
+                        <a:t>Store, October</a:t>
                       </a:r>
                     </a:p>
                   </a:txBody>
@@ -7122,13 +9959,13 @@
                     <a:p>
                       <a:pPr algn="r"/>
                       <a:r>
-                        <a:rPr sz="1500" b="1" i="0">
+                        <a:rPr sz="1400" b="1" i="0">
                           <a:solidFill>
                             <a:srgbClr val="FFFFFF"/>
                           </a:solidFill>
                           <a:latin typeface="Calibri"/>
                         </a:rPr>
-                        <a:t>September 2026</a:t>
+                        <a:t>Store, September</a:t>
                       </a:r>
                     </a:p>
                   </a:txBody>
@@ -7138,8 +9975,54 @@
                     </a:solidFill>
                   </a:tcPr>
                 </a:tc>
+                <a:tc>
+                  <a:txBody>
+                    <a:bodyPr/>
+                    <a:lstStyle/>
+                    <a:p>
+                      <a:pPr algn="r"/>
+                      <a:r>
+                        <a:rPr sz="1400" b="1" i="0">
+                          <a:solidFill>
+                            <a:srgbClr val="FFFFFF"/>
+                          </a:solidFill>
+                          <a:latin typeface="Calibri"/>
+                        </a:rPr>
+                        <a:t>Website, October</a:t>
+                      </a:r>
+                    </a:p>
+                  </a:txBody>
+                  <a:tcPr anchor="ctr">
+                    <a:solidFill>
+                      <a:srgbClr val="1F3A5F"/>
+                    </a:solidFill>
+                  </a:tcPr>
+                </a:tc>
+                <a:tc>
+                  <a:txBody>
+                    <a:bodyPr/>
+                    <a:lstStyle/>
+                    <a:p>
+                      <a:pPr algn="r"/>
+                      <a:r>
+                        <a:rPr sz="1400" b="1" i="0">
+                          <a:solidFill>
+                            <a:srgbClr val="FFFFFF"/>
+                          </a:solidFill>
+                          <a:latin typeface="Calibri"/>
+                        </a:rPr>
+                        <a:t>Website, September</a:t>
+                      </a:r>
+                    </a:p>
+                  </a:txBody>
+                  <a:tcPr anchor="ctr">
+                    <a:solidFill>
+                      <a:srgbClr val="1F3A5F"/>
+                    </a:solidFill>
+                  </a:tcPr>
+                </a:tc>
               </a:tr>
-              <a:tr h="420624">
+              <a:tr h="402336">
                 <a:tc>
                   <a:txBody>
                     <a:bodyPr/>
@@ -7147,7 +10030,7 @@
                     <a:p>
                       <a:pPr algn="l"/>
                       <a:r>
-                        <a:rPr sz="1500" b="0" i="0">
+                        <a:rPr sz="1400" b="0" i="0">
                           <a:solidFill>
                             <a:srgbClr val="2B2F36"/>
                           </a:solidFill>
@@ -7170,7 +10053,7 @@
                     <a:p>
                       <a:pPr algn="r"/>
                       <a:r>
-                        <a:rPr sz="1500" b="0" i="0">
+                        <a:rPr sz="1400" b="0" i="0">
                           <a:solidFill>
                             <a:srgbClr val="2B2F36"/>
                           </a:solidFill>
@@ -7193,7 +10076,7 @@
                     <a:p>
                       <a:pPr algn="r"/>
                       <a:r>
-                        <a:rPr sz="1500" b="0" i="0">
+                        <a:rPr sz="1400" b="0" i="0">
                           <a:solidFill>
                             <a:srgbClr val="2B2F36"/>
                           </a:solidFill>
@@ -7209,8 +10092,54 @@
                     </a:solidFill>
                   </a:tcPr>
                 </a:tc>
+                <a:tc>
+                  <a:txBody>
+                    <a:bodyPr/>
+                    <a:lstStyle/>
+                    <a:p>
+                      <a:pPr algn="r"/>
+                      <a:r>
+                        <a:rPr sz="1400" b="0" i="0">
+                          <a:solidFill>
+                            <a:srgbClr val="2B2F36"/>
+                          </a:solidFill>
+                          <a:latin typeface="Calibri"/>
+                        </a:rPr>
+                        <a:t>31</a:t>
+                      </a:r>
+                    </a:p>
+                  </a:txBody>
+                  <a:tcPr anchor="ctr">
+                    <a:solidFill>
+                      <a:srgbClr val="FFFFFF"/>
+                    </a:solidFill>
+                  </a:tcPr>
+                </a:tc>
+                <a:tc>
+                  <a:txBody>
+                    <a:bodyPr/>
+                    <a:lstStyle/>
+                    <a:p>
+                      <a:pPr algn="r"/>
+                      <a:r>
+                        <a:rPr sz="1400" b="0" i="0">
+                          <a:solidFill>
+                            <a:srgbClr val="2B2F36"/>
+                          </a:solidFill>
+                          <a:latin typeface="Calibri"/>
+                        </a:rPr>
+                        <a:t>30</a:t>
+                      </a:r>
+                    </a:p>
+                  </a:txBody>
+                  <a:tcPr anchor="ctr">
+                    <a:solidFill>
+                      <a:srgbClr val="FFFFFF"/>
+                    </a:solidFill>
+                  </a:tcPr>
+                </a:tc>
               </a:tr>
-              <a:tr h="420624">
+              <a:tr h="402336">
                 <a:tc>
                   <a:txBody>
                     <a:bodyPr/>
@@ -7218,13 +10147,13 @@
                     <a:p>
                       <a:pPr algn="l"/>
                       <a:r>
-                        <a:rPr sz="1500" b="0" i="0">
-                          <a:solidFill>
-                            <a:srgbClr val="2B2F36"/>
-                          </a:solidFill>
-                          <a:latin typeface="Calibri"/>
-                        </a:rPr>
-                        <a:t>Days with orders</a:t>
+                        <a:rPr sz="1400" b="0" i="0">
+                          <a:solidFill>
+                            <a:srgbClr val="2B2F36"/>
+                          </a:solidFill>
+                          <a:latin typeface="Calibri"/>
+                        </a:rPr>
+                        <a:t>Days with data</a:t>
                       </a:r>
                     </a:p>
                   </a:txBody>
@@ -7241,7 +10170,7 @@
                     <a:p>
                       <a:pPr algn="r"/>
                       <a:r>
-                        <a:rPr sz="1500" b="0" i="0">
+                        <a:rPr sz="1400" b="0" i="0">
                           <a:solidFill>
                             <a:srgbClr val="2B2F36"/>
                           </a:solidFill>
@@ -7264,7 +10193,7 @@
                     <a:p>
                       <a:pPr algn="r"/>
                       <a:r>
-                        <a:rPr sz="1500" b="0" i="0">
+                        <a:rPr sz="1400" b="0" i="0">
                           <a:solidFill>
                             <a:srgbClr val="2B2F36"/>
                           </a:solidFill>
@@ -7280,8 +10209,54 @@
                     </a:solidFill>
                   </a:tcPr>
                 </a:tc>
+                <a:tc>
+                  <a:txBody>
+                    <a:bodyPr/>
+                    <a:lstStyle/>
+                    <a:p>
+                      <a:pPr algn="r"/>
+                      <a:r>
+                        <a:rPr sz="1400" b="0" i="0">
+                          <a:solidFill>
+                            <a:srgbClr val="2B2F36"/>
+                          </a:solidFill>
+                          <a:latin typeface="Calibri"/>
+                        </a:rPr>
+                        <a:t>28</a:t>
+                      </a:r>
+                    </a:p>
+                  </a:txBody>
+                  <a:tcPr anchor="ctr">
+                    <a:solidFill>
+                      <a:srgbClr val="F1F4F7"/>
+                    </a:solidFill>
+                  </a:tcPr>
+                </a:tc>
+                <a:tc>
+                  <a:txBody>
+                    <a:bodyPr/>
+                    <a:lstStyle/>
+                    <a:p>
+                      <a:pPr algn="r"/>
+                      <a:r>
+                        <a:rPr sz="1400" b="0" i="0">
+                          <a:solidFill>
+                            <a:srgbClr val="2B2F36"/>
+                          </a:solidFill>
+                          <a:latin typeface="Calibri"/>
+                        </a:rPr>
+                        <a:t>29</a:t>
+                      </a:r>
+                    </a:p>
+                  </a:txBody>
+                  <a:tcPr anchor="ctr">
+                    <a:solidFill>
+                      <a:srgbClr val="F1F4F7"/>
+                    </a:solidFill>
+                  </a:tcPr>
+                </a:tc>
               </a:tr>
-              <a:tr h="420624">
+              <a:tr h="402336">
                 <a:tc>
                   <a:txBody>
                     <a:bodyPr/>
@@ -7289,13 +10264,13 @@
                     <a:p>
                       <a:pPr algn="l"/>
                       <a:r>
-                        <a:rPr sz="1500" b="0" i="0">
-                          <a:solidFill>
-                            <a:srgbClr val="2B2F36"/>
-                          </a:solidFill>
-                          <a:latin typeface="Calibri"/>
-                        </a:rPr>
-                        <a:t>Days with no orders</a:t>
+                        <a:rPr sz="1400" b="0" i="0">
+                          <a:solidFill>
+                            <a:srgbClr val="2B2F36"/>
+                          </a:solidFill>
+                          <a:latin typeface="Calibri"/>
+                        </a:rPr>
+                        <a:t>Days with nothing to report</a:t>
                       </a:r>
                     </a:p>
                   </a:txBody>
@@ -7312,7 +10287,7 @@
                     <a:p>
                       <a:pPr algn="r"/>
                       <a:r>
-                        <a:rPr sz="1500" b="0" i="0">
+                        <a:rPr sz="1400" b="0" i="0">
                           <a:solidFill>
                             <a:srgbClr val="2B2F36"/>
                           </a:solidFill>
@@ -7335,7 +10310,7 @@
                     <a:p>
                       <a:pPr algn="r"/>
                       <a:r>
-                        <a:rPr sz="1500" b="0" i="0">
+                        <a:rPr sz="1400" b="0" i="0">
                           <a:solidFill>
                             <a:srgbClr val="2B2F36"/>
                           </a:solidFill>
@@ -7351,8 +10326,54 @@
                     </a:solidFill>
                   </a:tcPr>
                 </a:tc>
+                <a:tc>
+                  <a:txBody>
+                    <a:bodyPr/>
+                    <a:lstStyle/>
+                    <a:p>
+                      <a:pPr algn="r"/>
+                      <a:r>
+                        <a:rPr sz="1400" b="0" i="0">
+                          <a:solidFill>
+                            <a:srgbClr val="2B2F36"/>
+                          </a:solidFill>
+                          <a:latin typeface="Calibri"/>
+                        </a:rPr>
+                        <a:t>0</a:t>
+                      </a:r>
+                    </a:p>
+                  </a:txBody>
+                  <a:tcPr anchor="ctr">
+                    <a:solidFill>
+                      <a:srgbClr val="FFFFFF"/>
+                    </a:solidFill>
+                  </a:tcPr>
+                </a:tc>
+                <a:tc>
+                  <a:txBody>
+                    <a:bodyPr/>
+                    <a:lstStyle/>
+                    <a:p>
+                      <a:pPr algn="r"/>
+                      <a:r>
+                        <a:rPr sz="1400" b="0" i="0">
+                          <a:solidFill>
+                            <a:srgbClr val="2B2F36"/>
+                          </a:solidFill>
+                          <a:latin typeface="Calibri"/>
+                        </a:rPr>
+                        <a:t>1</a:t>
+                      </a:r>
+                    </a:p>
+                  </a:txBody>
+                  <a:tcPr anchor="ctr">
+                    <a:solidFill>
+                      <a:srgbClr val="FFFFFF"/>
+                    </a:solidFill>
+                  </a:tcPr>
+                </a:tc>
               </a:tr>
-              <a:tr h="420624">
+              <a:tr h="402336">
                 <a:tc>
                   <a:txBody>
                     <a:bodyPr/>
@@ -7360,7 +10381,7 @@
                     <a:p>
                       <a:pPr algn="l"/>
                       <a:r>
-                        <a:rPr sz="1500" b="0" i="0">
+                        <a:rPr sz="1400" b="0" i="0">
                           <a:solidFill>
                             <a:srgbClr val="2B2F36"/>
                           </a:solidFill>
@@ -7383,7 +10404,7 @@
                     <a:p>
                       <a:pPr algn="r"/>
                       <a:r>
-                        <a:rPr sz="1500" b="0" i="0">
+                        <a:rPr sz="1400" b="0" i="0">
                           <a:solidFill>
                             <a:srgbClr val="2B2F36"/>
                           </a:solidFill>
@@ -7406,7 +10427,7 @@
                     <a:p>
                       <a:pPr algn="r"/>
                       <a:r>
-                        <a:rPr sz="1500" b="0" i="0">
+                        <a:rPr sz="1400" b="0" i="0">
                           <a:solidFill>
                             <a:srgbClr val="2B2F36"/>
                           </a:solidFill>
@@ -7422,8 +10443,54 @@
                     </a:solidFill>
                   </a:tcPr>
                 </a:tc>
+                <a:tc>
+                  <a:txBody>
+                    <a:bodyPr/>
+                    <a:lstStyle/>
+                    <a:p>
+                      <a:pPr algn="r"/>
+                      <a:r>
+                        <a:rPr sz="1400" b="0" i="0">
+                          <a:solidFill>
+                            <a:srgbClr val="2B2F36"/>
+                          </a:solidFill>
+                          <a:latin typeface="Calibri"/>
+                        </a:rPr>
+                        <a:t>3</a:t>
+                      </a:r>
+                    </a:p>
+                  </a:txBody>
+                  <a:tcPr anchor="ctr">
+                    <a:solidFill>
+                      <a:srgbClr val="F1F4F7"/>
+                    </a:solidFill>
+                  </a:tcPr>
+                </a:tc>
+                <a:tc>
+                  <a:txBody>
+                    <a:bodyPr/>
+                    <a:lstStyle/>
+                    <a:p>
+                      <a:pPr algn="r"/>
+                      <a:r>
+                        <a:rPr sz="1400" b="0" i="0">
+                          <a:solidFill>
+                            <a:srgbClr val="2B2F36"/>
+                          </a:solidFill>
+                          <a:latin typeface="Calibri"/>
+                        </a:rPr>
+                        <a:t>0</a:t>
+                      </a:r>
+                    </a:p>
+                  </a:txBody>
+                  <a:tcPr anchor="ctr">
+                    <a:solidFill>
+                      <a:srgbClr val="F1F4F7"/>
+                    </a:solidFill>
+                  </a:tcPr>
+                </a:tc>
               </a:tr>
-              <a:tr h="420624">
+              <a:tr h="402336">
                 <a:tc>
                   <a:txBody>
                     <a:bodyPr/>
@@ -7431,7 +10498,7 @@
                     <a:p>
                       <a:pPr algn="l"/>
                       <a:r>
-                        <a:rPr sz="1500" b="0" i="0">
+                        <a:rPr sz="1400" b="0" i="0">
                           <a:solidFill>
                             <a:srgbClr val="2B2F36"/>
                           </a:solidFill>
@@ -7454,7 +10521,7 @@
                     <a:p>
                       <a:pPr algn="r"/>
                       <a:r>
-                        <a:rPr sz="1500" b="0" i="0">
+                        <a:rPr sz="1400" b="0" i="0">
                           <a:solidFill>
                             <a:srgbClr val="2B2F36"/>
                           </a:solidFill>
@@ -7477,7 +10544,7 @@
                     <a:p>
                       <a:pPr algn="r"/>
                       <a:r>
-                        <a:rPr sz="1500" b="0" i="0">
+                        <a:rPr sz="1400" b="0" i="0">
                           <a:solidFill>
                             <a:srgbClr val="2B2F36"/>
                           </a:solidFill>
@@ -7493,74 +10560,49 @@
                     </a:solidFill>
                   </a:tcPr>
                 </a:tc>
-              </a:tr>
-              <a:tr h="420624">
-                <a:tc>
-                  <a:txBody>
-                    <a:bodyPr/>
-                    <a:lstStyle/>
-                    <a:p>
-                      <a:pPr algn="l"/>
-                      <a:r>
-                        <a:rPr sz="1500" b="0" i="0">
-                          <a:solidFill>
-                            <a:srgbClr val="2B2F36"/>
-                          </a:solidFill>
-                          <a:latin typeface="Calibri"/>
-                        </a:rPr>
-                        <a:t>First and last day with orders</a:t>
-                      </a:r>
-                    </a:p>
-                  </a:txBody>
-                  <a:tcPr anchor="ctr">
-                    <a:solidFill>
-                      <a:srgbClr val="F1F4F7"/>
-                    </a:solidFill>
-                  </a:tcPr>
-                </a:tc>
-                <a:tc>
-                  <a:txBody>
-                    <a:bodyPr/>
-                    <a:lstStyle/>
-                    <a:p>
-                      <a:pPr algn="r"/>
-                      <a:r>
-                        <a:rPr sz="1500" b="0" i="0">
-                          <a:solidFill>
-                            <a:srgbClr val="2B2F36"/>
-                          </a:solidFill>
-                          <a:latin typeface="Calibri"/>
-                        </a:rPr>
-                        <a:t>Oct 1 to Oct 31</a:t>
-                      </a:r>
-                    </a:p>
-                  </a:txBody>
-                  <a:tcPr anchor="ctr">
-                    <a:solidFill>
-                      <a:srgbClr val="F1F4F7"/>
-                    </a:solidFill>
-                  </a:tcPr>
-                </a:tc>
-                <a:tc>
-                  <a:txBody>
-                    <a:bodyPr/>
-                    <a:lstStyle/>
-                    <a:p>
-                      <a:pPr algn="r"/>
-                      <a:r>
-                        <a:rPr sz="1500" b="0" i="0">
-                          <a:solidFill>
-                            <a:srgbClr val="2B2F36"/>
-                          </a:solidFill>
-                          <a:latin typeface="Calibri"/>
-                        </a:rPr>
-                        <a:t>Sep 1 to Sep 30</a:t>
-                      </a:r>
-                    </a:p>
-                  </a:txBody>
-                  <a:tcPr anchor="ctr">
-                    <a:solidFill>
-                      <a:srgbClr val="F1F4F7"/>
+                <a:tc>
+                  <a:txBody>
+                    <a:bodyPr/>
+                    <a:lstStyle/>
+                    <a:p>
+                      <a:pPr algn="r"/>
+                      <a:r>
+                        <a:rPr sz="1400" b="0" i="0">
+                          <a:solidFill>
+                            <a:srgbClr val="2B2F36"/>
+                          </a:solidFill>
+                          <a:latin typeface="Calibri"/>
+                        </a:rPr>
+                        <a:t>112</a:t>
+                      </a:r>
+                    </a:p>
+                  </a:txBody>
+                  <a:tcPr anchor="ctr">
+                    <a:solidFill>
+                      <a:srgbClr val="FFFFFF"/>
+                    </a:solidFill>
+                  </a:tcPr>
+                </a:tc>
+                <a:tc>
+                  <a:txBody>
+                    <a:bodyPr/>
+                    <a:lstStyle/>
+                    <a:p>
+                      <a:pPr algn="r"/>
+                      <a:r>
+                        <a:rPr sz="1400" b="0" i="0">
+                          <a:solidFill>
+                            <a:srgbClr val="2B2F36"/>
+                          </a:solidFill>
+                          <a:latin typeface="Calibri"/>
+                        </a:rPr>
+                        <a:t>116</a:t>
+                      </a:r>
+                    </a:p>
+                  </a:txBody>
+                  <a:tcPr anchor="ctr">
+                    <a:solidFill>
+                      <a:srgbClr val="FFFFFF"/>
                     </a:solidFill>
                   </a:tcPr>
                 </a:tc>
@@ -7577,8 +10619,8 @@
         </p:nvSpPr>
         <p:spPr>
           <a:xfrm>
-            <a:off x="548640" y="4526280"/>
-            <a:ext cx="11094415" cy="1463040"/>
+            <a:off x="548640" y="3840480"/>
+            <a:ext cx="11094415" cy="2103120"/>
           </a:xfrm>
           <a:prstGeom prst="rect">
             <a:avLst/>
@@ -7593,43 +10635,75 @@
           <a:p>
             <a:pPr>
               <a:spcAft>
-                <a:spcPts val="400"/>
+                <a:spcPts val="300"/>
               </a:spcAft>
             </a:pPr>
             <a:r>
-              <a:rPr sz="1500" b="0" i="0">
+              <a:rPr sz="1400" b="0" i="0">
                 <a:solidFill>
                   <a:srgbClr val="2B2F36"/>
                 </a:solidFill>
                 <a:latin typeface="Calibri"/>
               </a:rPr>
-              <a:t>Days with no data in October: Oct 14, Oct 15.</a:t>
+              <a:t>Days with no data in October, store: Oct 14, Oct 15.</a:t>
             </a:r>
           </a:p>
           <a:p>
             <a:pPr>
               <a:spcAft>
-                <a:spcPts val="400"/>
+                <a:spcPts val="300"/>
               </a:spcAft>
             </a:pPr>
             <a:r>
-              <a:rPr sz="1500" b="0" i="0">
+              <a:rPr sz="1400" b="0" i="0">
                 <a:solidFill>
                   <a:srgbClr val="2B2F36"/>
                 </a:solidFill>
                 <a:latin typeface="Calibri"/>
               </a:rPr>
-              <a:t>Days with no data in September: none.</a:t>
+              <a:t>Days with no data in October, website: Oct 3, Oct 4, Oct 5.</a:t>
             </a:r>
           </a:p>
           <a:p>
             <a:pPr>
               <a:spcAft>
-                <a:spcPts val="400"/>
+                <a:spcPts val="300"/>
               </a:spcAft>
             </a:pPr>
             <a:r>
-              <a:rPr sz="1500" b="0" i="0">
+              <a:rPr sz="1400" b="0" i="0">
+                <a:solidFill>
+                  <a:srgbClr val="2B2F36"/>
+                </a:solidFill>
+                <a:latin typeface="Calibri"/>
+              </a:rPr>
+              <a:t>Days with no data in September, store: none.</a:t>
+            </a:r>
+          </a:p>
+          <a:p>
+            <a:pPr>
+              <a:spcAft>
+                <a:spcPts val="300"/>
+              </a:spcAft>
+            </a:pPr>
+            <a:r>
+              <a:rPr sz="1400" b="0" i="0">
+                <a:solidFill>
+                  <a:srgbClr val="2B2F36"/>
+                </a:solidFill>
+                <a:latin typeface="Calibri"/>
+              </a:rPr>
+              <a:t>Days with no data in September, website: none.</a:t>
+            </a:r>
+          </a:p>
+          <a:p>
+            <a:pPr>
+              <a:spcAft>
+                <a:spcPts val="300"/>
+              </a:spcAft>
+            </a:pPr>
+            <a:r>
+              <a:rPr sz="1400" b="0" i="0">
                 <a:solidFill>
                   <a:srgbClr val="2B2F36"/>
                 </a:solidFill>
@@ -7674,7 +10748,7 @@
                 </a:solidFill>
                 <a:latin typeface="Calibri"/>
               </a:rPr>
-              <a:t>Days with orders, days with no orders and days with no data add up to the days in the month.</a:t>
+              <a:t>For each source, days with data, days with nothing to report and days with no data add up to the days in the month.</a:t>
             </a:r>
           </a:p>
           <a:p>
@@ -7690,7 +10764,7 @@
                 </a:solidFill>
                 <a:latin typeface="Calibri"/>
               </a:rPr>
-              <a:t>A day with no orders is one where a data pull ran and found none. A day with no data is one no data pull covered.</a:t>
+              <a:t>A day with nothing to report is one where a data pull ran and found none. A day with no data is one no data pull covered.</a:t>
             </a:r>
           </a:p>
         </p:txBody>

--- a/docs/monthly-report-sample/report_2026-10.pptx
+++ b/docs/monthly-report-sample/report_2026-10.pptx
@@ -13,6 +13,8 @@
     <p:sldId id="261" r:id="rId12"/>
     <p:sldId id="262" r:id="rId13"/>
     <p:sldId id="263" r:id="rId14"/>
+    <p:sldId id="264" r:id="rId15"/>
+    <p:sldId id="265" r:id="rId16"/>
   </p:sldIdLst>
   <p:sldSz cx="12191695" cy="6858000" type="screen4x3"/>
   <p:notesSz cx="6858000" cy="9144000"/>
@@ -2347,6 +2349,2916 @@
       <c:layout/>
       <c:overlay val="0"/>
     </c:legend>
+    <c:plotVisOnly val="1"/>
+    <c:dispBlanksAs val="gap"/>
+    <c:showDLblsOverMax val="0"/>
+  </c:chart>
+  <c:txPr>
+    <a:bodyPr/>
+    <a:lstStyle/>
+    <a:p>
+      <a:pPr>
+        <a:defRPr sz="1200">
+          <a:solidFill>
+            <a:srgbClr val="2B2F36"/>
+          </a:solidFill>
+          <a:latin typeface="Calibri"/>
+        </a:defRPr>
+      </a:pPr>
+      <a:endParaRPr lang="en-US"/>
+    </a:p>
+  </c:txPr>
+  <c:externalData r:id="rId1">
+    <c:autoUpdate val="0"/>
+  </c:externalData>
+</c:chartSpace>
+</file>
+
+<file path=ppt/charts/chart4.xml><?xml version="1.0" encoding="utf-8"?>
+<c:chartSpace xmlns:c="http://schemas.openxmlformats.org/drawingml/2006/chart" xmlns:a="http://schemas.openxmlformats.org/drawingml/2006/main" xmlns:r="http://schemas.openxmlformats.org/officeDocument/2006/relationships">
+  <c:date1904 val="0"/>
+  <c:chart>
+    <c:autoTitleDeleted val="1"/>
+    <c:plotArea>
+      <c:lineChart>
+        <c:grouping val="standard"/>
+        <c:varyColors val="0"/>
+        <c:ser>
+          <c:idx val="0"/>
+          <c:order val="0"/>
+          <c:tx>
+            <c:strRef>
+              <c:f>Sheet1!$B$1</c:f>
+              <c:strCache>
+                <c:ptCount val="1"/>
+                <c:pt idx="0">
+                  <c:v>October 2026</c:v>
+                </c:pt>
+              </c:strCache>
+            </c:strRef>
+          </c:tx>
+          <c:spPr>
+            <a:ln w="31750">
+              <a:solidFill>
+                <a:srgbClr val="1B7F8C"/>
+              </a:solidFill>
+            </a:ln>
+          </c:spPr>
+          <c:marker>
+            <c:symbol val="none"/>
+          </c:marker>
+          <c:cat>
+            <c:strRef>
+              <c:f>Sheet1!$A$2:$A$32</c:f>
+              <c:strCache>
+                <c:ptCount val="31"/>
+                <c:pt idx="0">
+                  <c:v>1</c:v>
+                </c:pt>
+                <c:pt idx="1">
+                  <c:v>2</c:v>
+                </c:pt>
+                <c:pt idx="2">
+                  <c:v>3</c:v>
+                </c:pt>
+                <c:pt idx="3">
+                  <c:v>4</c:v>
+                </c:pt>
+                <c:pt idx="4">
+                  <c:v>5</c:v>
+                </c:pt>
+                <c:pt idx="5">
+                  <c:v>6</c:v>
+                </c:pt>
+                <c:pt idx="6">
+                  <c:v>7</c:v>
+                </c:pt>
+                <c:pt idx="7">
+                  <c:v>8</c:v>
+                </c:pt>
+                <c:pt idx="8">
+                  <c:v>9</c:v>
+                </c:pt>
+                <c:pt idx="9">
+                  <c:v>10</c:v>
+                </c:pt>
+                <c:pt idx="10">
+                  <c:v>11</c:v>
+                </c:pt>
+                <c:pt idx="11">
+                  <c:v>12</c:v>
+                </c:pt>
+                <c:pt idx="12">
+                  <c:v>13</c:v>
+                </c:pt>
+                <c:pt idx="13">
+                  <c:v>14</c:v>
+                </c:pt>
+                <c:pt idx="14">
+                  <c:v>15</c:v>
+                </c:pt>
+                <c:pt idx="15">
+                  <c:v>16</c:v>
+                </c:pt>
+                <c:pt idx="16">
+                  <c:v>17</c:v>
+                </c:pt>
+                <c:pt idx="17">
+                  <c:v>18</c:v>
+                </c:pt>
+                <c:pt idx="18">
+                  <c:v>19</c:v>
+                </c:pt>
+                <c:pt idx="19">
+                  <c:v>20</c:v>
+                </c:pt>
+                <c:pt idx="20">
+                  <c:v>21</c:v>
+                </c:pt>
+                <c:pt idx="21">
+                  <c:v>22</c:v>
+                </c:pt>
+                <c:pt idx="22">
+                  <c:v>23</c:v>
+                </c:pt>
+                <c:pt idx="23">
+                  <c:v>24</c:v>
+                </c:pt>
+                <c:pt idx="24">
+                  <c:v>25</c:v>
+                </c:pt>
+                <c:pt idx="25">
+                  <c:v>26</c:v>
+                </c:pt>
+                <c:pt idx="26">
+                  <c:v>27</c:v>
+                </c:pt>
+                <c:pt idx="27">
+                  <c:v>28</c:v>
+                </c:pt>
+                <c:pt idx="28">
+                  <c:v>29</c:v>
+                </c:pt>
+                <c:pt idx="29">
+                  <c:v>30</c:v>
+                </c:pt>
+                <c:pt idx="30">
+                  <c:v>31</c:v>
+                </c:pt>
+              </c:strCache>
+            </c:strRef>
+          </c:cat>
+          <c:val>
+            <c:numRef>
+              <c:f>Sheet1!$B$2:$B$32</c:f>
+              <c:numCache>
+                <c:formatCode>General</c:formatCode>
+                <c:ptCount val="31"/>
+                <c:pt idx="0">
+                  <c:v>184.06</c:v>
+                </c:pt>
+                <c:pt idx="1">
+                  <c:v>225.74</c:v>
+                </c:pt>
+                <c:pt idx="2">
+                  <c:v>188.37</c:v>
+                </c:pt>
+                <c:pt idx="3">
+                  <c:v>266.75</c:v>
+                </c:pt>
+                <c:pt idx="4">
+                  <c:v>174.21</c:v>
+                </c:pt>
+                <c:pt idx="5">
+                  <c:v>202.19</c:v>
+                </c:pt>
+                <c:pt idx="6">
+                  <c:v>145.6</c:v>
+                </c:pt>
+                <c:pt idx="7">
+                  <c:v>253.66</c:v>
+                </c:pt>
+                <c:pt idx="8">
+                  <c:v>341.31</c:v>
+                </c:pt>
+                <c:pt idx="9">
+                  <c:v>235.47</c:v>
+                </c:pt>
+                <c:pt idx="10">
+                  <c:v>164.79</c:v>
+                </c:pt>
+                <c:pt idx="11">
+                  <c:v>164.98</c:v>
+                </c:pt>
+                <c:pt idx="12">
+                  <c:v>177.78</c:v>
+                </c:pt>
+                <c:pt idx="13">
+                  <c:v>208.13</c:v>
+                </c:pt>
+                <c:pt idx="14">
+                  <c:v>265.99</c:v>
+                </c:pt>
+                <c:pt idx="15">
+                  <c:v>229.74</c:v>
+                </c:pt>
+                <c:pt idx="16">
+                  <c:v>188.33</c:v>
+                </c:pt>
+                <c:pt idx="17">
+                  <c:v>300.2</c:v>
+                </c:pt>
+                <c:pt idx="18">
+                  <c:v>170.08</c:v>
+                </c:pt>
+                <c:pt idx="21">
+                  <c:v>263.24</c:v>
+                </c:pt>
+                <c:pt idx="22">
+                  <c:v>256.56</c:v>
+                </c:pt>
+                <c:pt idx="23">
+                  <c:v>228.0</c:v>
+                </c:pt>
+                <c:pt idx="24">
+                  <c:v>180.49</c:v>
+                </c:pt>
+                <c:pt idx="25">
+                  <c:v>148.45</c:v>
+                </c:pt>
+                <c:pt idx="26">
+                  <c:v>208.5</c:v>
+                </c:pt>
+                <c:pt idx="27">
+                  <c:v>205.61</c:v>
+                </c:pt>
+                <c:pt idx="28">
+                  <c:v>184.05</c:v>
+                </c:pt>
+                <c:pt idx="29">
+                  <c:v>229.56</c:v>
+                </c:pt>
+                <c:pt idx="30">
+                  <c:v>223.21</c:v>
+                </c:pt>
+              </c:numCache>
+            </c:numRef>
+          </c:val>
+          <c:smooth val="0"/>
+        </c:ser>
+        <c:ser>
+          <c:idx val="1"/>
+          <c:order val="1"/>
+          <c:tx>
+            <c:strRef>
+              <c:f>Sheet1!$C$1</c:f>
+              <c:strCache>
+                <c:ptCount val="1"/>
+                <c:pt idx="0">
+                  <c:v>September 2026</c:v>
+                </c:pt>
+              </c:strCache>
+            </c:strRef>
+          </c:tx>
+          <c:spPr>
+            <a:ln w="31750">
+              <a:solidFill>
+                <a:srgbClr val="8A94A0"/>
+              </a:solidFill>
+            </a:ln>
+          </c:spPr>
+          <c:marker>
+            <c:symbol val="none"/>
+          </c:marker>
+          <c:dPt>
+            <c:idx val="11"/>
+            <c:marker>
+              <c:symbol val="circle"/>
+              <c:size val="9"/>
+              <c:spPr>
+                <a:solidFill>
+                  <a:srgbClr val="8A94A0"/>
+                </a:solidFill>
+                <a:ln>
+                  <a:solidFill>
+                    <a:srgbClr val="8A94A0"/>
+                  </a:solidFill>
+                </a:ln>
+              </c:spPr>
+            </c:marker>
+          </c:dPt>
+          <c:cat>
+            <c:strRef>
+              <c:f>Sheet1!$A$2:$A$32</c:f>
+              <c:strCache>
+                <c:ptCount val="31"/>
+                <c:pt idx="0">
+                  <c:v>1</c:v>
+                </c:pt>
+                <c:pt idx="1">
+                  <c:v>2</c:v>
+                </c:pt>
+                <c:pt idx="2">
+                  <c:v>3</c:v>
+                </c:pt>
+                <c:pt idx="3">
+                  <c:v>4</c:v>
+                </c:pt>
+                <c:pt idx="4">
+                  <c:v>5</c:v>
+                </c:pt>
+                <c:pt idx="5">
+                  <c:v>6</c:v>
+                </c:pt>
+                <c:pt idx="6">
+                  <c:v>7</c:v>
+                </c:pt>
+                <c:pt idx="7">
+                  <c:v>8</c:v>
+                </c:pt>
+                <c:pt idx="8">
+                  <c:v>9</c:v>
+                </c:pt>
+                <c:pt idx="9">
+                  <c:v>10</c:v>
+                </c:pt>
+                <c:pt idx="10">
+                  <c:v>11</c:v>
+                </c:pt>
+                <c:pt idx="11">
+                  <c:v>12</c:v>
+                </c:pt>
+                <c:pt idx="12">
+                  <c:v>13</c:v>
+                </c:pt>
+                <c:pt idx="13">
+                  <c:v>14</c:v>
+                </c:pt>
+                <c:pt idx="14">
+                  <c:v>15</c:v>
+                </c:pt>
+                <c:pt idx="15">
+                  <c:v>16</c:v>
+                </c:pt>
+                <c:pt idx="16">
+                  <c:v>17</c:v>
+                </c:pt>
+                <c:pt idx="17">
+                  <c:v>18</c:v>
+                </c:pt>
+                <c:pt idx="18">
+                  <c:v>19</c:v>
+                </c:pt>
+                <c:pt idx="19">
+                  <c:v>20</c:v>
+                </c:pt>
+                <c:pt idx="20">
+                  <c:v>21</c:v>
+                </c:pt>
+                <c:pt idx="21">
+                  <c:v>22</c:v>
+                </c:pt>
+                <c:pt idx="22">
+                  <c:v>23</c:v>
+                </c:pt>
+                <c:pt idx="23">
+                  <c:v>24</c:v>
+                </c:pt>
+                <c:pt idx="24">
+                  <c:v>25</c:v>
+                </c:pt>
+                <c:pt idx="25">
+                  <c:v>26</c:v>
+                </c:pt>
+                <c:pt idx="26">
+                  <c:v>27</c:v>
+                </c:pt>
+                <c:pt idx="27">
+                  <c:v>28</c:v>
+                </c:pt>
+                <c:pt idx="28">
+                  <c:v>29</c:v>
+                </c:pt>
+                <c:pt idx="29">
+                  <c:v>30</c:v>
+                </c:pt>
+                <c:pt idx="30">
+                  <c:v>31</c:v>
+                </c:pt>
+              </c:strCache>
+            </c:strRef>
+          </c:cat>
+          <c:val>
+            <c:numRef>
+              <c:f>Sheet1!$C$2:$C$31</c:f>
+              <c:numCache>
+                <c:formatCode>General</c:formatCode>
+                <c:ptCount val="30"/>
+                <c:pt idx="0">
+                  <c:v>169.72</c:v>
+                </c:pt>
+                <c:pt idx="1">
+                  <c:v>211.91</c:v>
+                </c:pt>
+                <c:pt idx="2">
+                  <c:v>247.2</c:v>
+                </c:pt>
+                <c:pt idx="3">
+                  <c:v>146.33</c:v>
+                </c:pt>
+                <c:pt idx="4">
+                  <c:v>182.47</c:v>
+                </c:pt>
+                <c:pt idx="5">
+                  <c:v>159.2</c:v>
+                </c:pt>
+                <c:pt idx="6">
+                  <c:v>168.92</c:v>
+                </c:pt>
+                <c:pt idx="7">
+                  <c:v>122.38</c:v>
+                </c:pt>
+                <c:pt idx="8">
+                  <c:v>169.46</c:v>
+                </c:pt>
+                <c:pt idx="9">
+                  <c:v>212.1</c:v>
+                </c:pt>
+                <c:pt idx="10">
+                  <c:v>300.2</c:v>
+                </c:pt>
+                <c:pt idx="11">
+                  <c:v>0.0</c:v>
+                </c:pt>
+                <c:pt idx="12">
+                  <c:v>301.71</c:v>
+                </c:pt>
+                <c:pt idx="13">
+                  <c:v>230.09</c:v>
+                </c:pt>
+                <c:pt idx="14">
+                  <c:v>240.83</c:v>
+                </c:pt>
+                <c:pt idx="15">
+                  <c:v>200.65</c:v>
+                </c:pt>
+                <c:pt idx="16">
+                  <c:v>236.09</c:v>
+                </c:pt>
+                <c:pt idx="17">
+                  <c:v>282.17</c:v>
+                </c:pt>
+                <c:pt idx="18">
+                  <c:v>207.19</c:v>
+                </c:pt>
+                <c:pt idx="19">
+                  <c:v>291.66</c:v>
+                </c:pt>
+                <c:pt idx="20">
+                  <c:v>149.83</c:v>
+                </c:pt>
+                <c:pt idx="21">
+                  <c:v>161.01</c:v>
+                </c:pt>
+                <c:pt idx="22">
+                  <c:v>193.81</c:v>
+                </c:pt>
+                <c:pt idx="23">
+                  <c:v>123.7</c:v>
+                </c:pt>
+                <c:pt idx="24">
+                  <c:v>194.93</c:v>
+                </c:pt>
+                <c:pt idx="25">
+                  <c:v>309.92</c:v>
+                </c:pt>
+                <c:pt idx="26">
+                  <c:v>230.39</c:v>
+                </c:pt>
+                <c:pt idx="27">
+                  <c:v>244.83</c:v>
+                </c:pt>
+                <c:pt idx="28">
+                  <c:v>201.96</c:v>
+                </c:pt>
+                <c:pt idx="29">
+                  <c:v>197.6</c:v>
+                </c:pt>
+              </c:numCache>
+            </c:numRef>
+          </c:val>
+          <c:smooth val="0"/>
+        </c:ser>
+        <c:ser>
+          <c:idx val="2"/>
+          <c:order val="2"/>
+          <c:tx>
+            <c:strRef>
+              <c:f>Sheet1!$D$1</c:f>
+              <c:strCache>
+                <c:ptCount val="1"/>
+                <c:pt idx="0">
+                  <c:v>Day with no data</c:v>
+                </c:pt>
+              </c:strCache>
+            </c:strRef>
+          </c:tx>
+          <c:spPr>
+            <a:ln>
+              <a:noFill/>
+            </a:ln>
+          </c:spPr>
+          <c:marker>
+            <c:symbol val="x"/>
+            <c:size val="10"/>
+            <c:spPr>
+              <a:ln>
+                <a:solidFill>
+                  <a:srgbClr val="B44A1E"/>
+                </a:solidFill>
+              </a:ln>
+            </c:spPr>
+          </c:marker>
+          <c:cat>
+            <c:strRef>
+              <c:f>Sheet1!$A$2:$A$32</c:f>
+              <c:strCache>
+                <c:ptCount val="31"/>
+                <c:pt idx="0">
+                  <c:v>1</c:v>
+                </c:pt>
+                <c:pt idx="1">
+                  <c:v>2</c:v>
+                </c:pt>
+                <c:pt idx="2">
+                  <c:v>3</c:v>
+                </c:pt>
+                <c:pt idx="3">
+                  <c:v>4</c:v>
+                </c:pt>
+                <c:pt idx="4">
+                  <c:v>5</c:v>
+                </c:pt>
+                <c:pt idx="5">
+                  <c:v>6</c:v>
+                </c:pt>
+                <c:pt idx="6">
+                  <c:v>7</c:v>
+                </c:pt>
+                <c:pt idx="7">
+                  <c:v>8</c:v>
+                </c:pt>
+                <c:pt idx="8">
+                  <c:v>9</c:v>
+                </c:pt>
+                <c:pt idx="9">
+                  <c:v>10</c:v>
+                </c:pt>
+                <c:pt idx="10">
+                  <c:v>11</c:v>
+                </c:pt>
+                <c:pt idx="11">
+                  <c:v>12</c:v>
+                </c:pt>
+                <c:pt idx="12">
+                  <c:v>13</c:v>
+                </c:pt>
+                <c:pt idx="13">
+                  <c:v>14</c:v>
+                </c:pt>
+                <c:pt idx="14">
+                  <c:v>15</c:v>
+                </c:pt>
+                <c:pt idx="15">
+                  <c:v>16</c:v>
+                </c:pt>
+                <c:pt idx="16">
+                  <c:v>17</c:v>
+                </c:pt>
+                <c:pt idx="17">
+                  <c:v>18</c:v>
+                </c:pt>
+                <c:pt idx="18">
+                  <c:v>19</c:v>
+                </c:pt>
+                <c:pt idx="19">
+                  <c:v>20</c:v>
+                </c:pt>
+                <c:pt idx="20">
+                  <c:v>21</c:v>
+                </c:pt>
+                <c:pt idx="21">
+                  <c:v>22</c:v>
+                </c:pt>
+                <c:pt idx="22">
+                  <c:v>23</c:v>
+                </c:pt>
+                <c:pt idx="23">
+                  <c:v>24</c:v>
+                </c:pt>
+                <c:pt idx="24">
+                  <c:v>25</c:v>
+                </c:pt>
+                <c:pt idx="25">
+                  <c:v>26</c:v>
+                </c:pt>
+                <c:pt idx="26">
+                  <c:v>27</c:v>
+                </c:pt>
+                <c:pt idx="27">
+                  <c:v>28</c:v>
+                </c:pt>
+                <c:pt idx="28">
+                  <c:v>29</c:v>
+                </c:pt>
+                <c:pt idx="29">
+                  <c:v>30</c:v>
+                </c:pt>
+                <c:pt idx="30">
+                  <c:v>31</c:v>
+                </c:pt>
+              </c:strCache>
+            </c:strRef>
+          </c:cat>
+          <c:val>
+            <c:numRef>
+              <c:f>Sheet1!$D$2:$D$32</c:f>
+              <c:numCache>
+                <c:formatCode>General</c:formatCode>
+                <c:ptCount val="31"/>
+                <c:pt idx="19">
+                  <c:v>0.0</c:v>
+                </c:pt>
+                <c:pt idx="20">
+                  <c:v>0.0</c:v>
+                </c:pt>
+              </c:numCache>
+            </c:numRef>
+          </c:val>
+          <c:smooth val="0"/>
+        </c:ser>
+        <c:marker val="1"/>
+        <c:smooth val="0"/>
+        <c:axId val="2118791784"/>
+        <c:axId val="2140495176"/>
+      </c:lineChart>
+      <c:catAx>
+        <c:axId val="2118791784"/>
+        <c:scaling>
+          <c:orientation val="minMax"/>
+        </c:scaling>
+        <c:delete val="0"/>
+        <c:axPos val="b"/>
+        <c:majorTickMark val="out"/>
+        <c:minorTickMark val="none"/>
+        <c:tickLblPos val="nextTo"/>
+        <c:spPr>
+          <a:ln>
+            <a:solidFill>
+              <a:srgbClr val="8A94A0"/>
+            </a:solidFill>
+          </a:ln>
+        </c:spPr>
+        <c:crossAx val="2140495176"/>
+        <c:crosses val="autoZero"/>
+        <c:auto val="1"/>
+        <c:lblAlgn val="ctr"/>
+        <c:lblOffset val="100"/>
+        <c:noMultiLvlLbl val="0"/>
+      </c:catAx>
+      <c:valAx>
+        <c:axId val="2140495176"/>
+        <c:scaling/>
+        <c:delete val="0"/>
+        <c:axPos val="l"/>
+        <c:majorGridlines>
+          <c:spPr>
+            <a:ln>
+              <a:solidFill>
+                <a:srgbClr val="D9DEE4"/>
+              </a:solidFill>
+            </a:ln>
+          </c:spPr>
+        </c:majorGridlines>
+        <c:title>
+          <c:tx>
+            <c:rich>
+              <a:bodyPr/>
+              <a:lstStyle/>
+              <a:p>
+                <a:r>
+                  <a:rPr sz="1200" b="0" i="0">
+                    <a:solidFill>
+                      <a:srgbClr val="5B6470"/>
+                    </a:solidFill>
+                    <a:latin typeface="Calibri"/>
+                  </a:rPr>
+                  <a:t>Ad spend (EUR)</a:t>
+                </a:r>
+              </a:p>
+            </c:rich>
+          </c:tx>
+          <c:layout/>
+          <c:overlay val="0"/>
+        </c:title>
+        <c:numFmt formatCode="#,##0" sourceLinked="0"/>
+        <c:majorTickMark val="out"/>
+        <c:minorTickMark val="none"/>
+        <c:tickLblPos val="nextTo"/>
+        <c:spPr>
+          <a:ln>
+            <a:noFill/>
+          </a:ln>
+        </c:spPr>
+        <c:crossAx val="2118791784"/>
+        <c:crosses val="autoZero"/>
+      </c:valAx>
+    </c:plotArea>
+    <c:legend>
+      <c:legendPos val="b"/>
+      <c:layout/>
+      <c:overlay val="0"/>
+    </c:legend>
+    <c:plotVisOnly val="1"/>
+    <c:dispBlanksAs val="gap"/>
+    <c:showDLblsOverMax val="0"/>
+  </c:chart>
+  <c:txPr>
+    <a:bodyPr/>
+    <a:lstStyle/>
+    <a:p>
+      <a:pPr>
+        <a:defRPr sz="1200">
+          <a:solidFill>
+            <a:srgbClr val="2B2F36"/>
+          </a:solidFill>
+          <a:latin typeface="Calibri"/>
+        </a:defRPr>
+      </a:pPr>
+      <a:endParaRPr lang="en-US"/>
+    </a:p>
+  </c:txPr>
+  <c:externalData r:id="rId1">
+    <c:autoUpdate val="0"/>
+  </c:externalData>
+</c:chartSpace>
+</file>
+
+<file path=ppt/charts/chart5.xml><?xml version="1.0" encoding="utf-8"?>
+<c:chartSpace xmlns:c="http://schemas.openxmlformats.org/drawingml/2006/chart" xmlns:a="http://schemas.openxmlformats.org/drawingml/2006/main" xmlns:r="http://schemas.openxmlformats.org/officeDocument/2006/relationships">
+  <c:date1904 val="0"/>
+  <c:chart>
+    <c:autoTitleDeleted val="1"/>
+    <c:plotArea>
+      <c:lineChart>
+        <c:grouping val="standard"/>
+        <c:varyColors val="0"/>
+        <c:ser>
+          <c:idx val="0"/>
+          <c:order val="0"/>
+          <c:tx>
+            <c:strRef>
+              <c:f>Sheet1!$B$1</c:f>
+              <c:strCache>
+                <c:ptCount val="1"/>
+                <c:pt idx="0">
+                  <c:v>October 2026</c:v>
+                </c:pt>
+              </c:strCache>
+            </c:strRef>
+          </c:tx>
+          <c:spPr>
+            <a:ln w="31750">
+              <a:solidFill>
+                <a:srgbClr val="1B7F8C"/>
+              </a:solidFill>
+            </a:ln>
+          </c:spPr>
+          <c:marker>
+            <c:symbol val="none"/>
+          </c:marker>
+          <c:cat>
+            <c:strRef>
+              <c:f>Sheet1!$A$2:$A$32</c:f>
+              <c:strCache>
+                <c:ptCount val="31"/>
+                <c:pt idx="0">
+                  <c:v>1</c:v>
+                </c:pt>
+                <c:pt idx="1">
+                  <c:v>2</c:v>
+                </c:pt>
+                <c:pt idx="2">
+                  <c:v>3</c:v>
+                </c:pt>
+                <c:pt idx="3">
+                  <c:v>4</c:v>
+                </c:pt>
+                <c:pt idx="4">
+                  <c:v>5</c:v>
+                </c:pt>
+                <c:pt idx="5">
+                  <c:v>6</c:v>
+                </c:pt>
+                <c:pt idx="6">
+                  <c:v>7</c:v>
+                </c:pt>
+                <c:pt idx="7">
+                  <c:v>8</c:v>
+                </c:pt>
+                <c:pt idx="8">
+                  <c:v>9</c:v>
+                </c:pt>
+                <c:pt idx="9">
+                  <c:v>10</c:v>
+                </c:pt>
+                <c:pt idx="10">
+                  <c:v>11</c:v>
+                </c:pt>
+                <c:pt idx="11">
+                  <c:v>12</c:v>
+                </c:pt>
+                <c:pt idx="12">
+                  <c:v>13</c:v>
+                </c:pt>
+                <c:pt idx="13">
+                  <c:v>14</c:v>
+                </c:pt>
+                <c:pt idx="14">
+                  <c:v>15</c:v>
+                </c:pt>
+                <c:pt idx="15">
+                  <c:v>16</c:v>
+                </c:pt>
+                <c:pt idx="16">
+                  <c:v>17</c:v>
+                </c:pt>
+                <c:pt idx="17">
+                  <c:v>18</c:v>
+                </c:pt>
+                <c:pt idx="18">
+                  <c:v>19</c:v>
+                </c:pt>
+                <c:pt idx="19">
+                  <c:v>20</c:v>
+                </c:pt>
+                <c:pt idx="20">
+                  <c:v>21</c:v>
+                </c:pt>
+                <c:pt idx="21">
+                  <c:v>22</c:v>
+                </c:pt>
+                <c:pt idx="22">
+                  <c:v>23</c:v>
+                </c:pt>
+                <c:pt idx="23">
+                  <c:v>24</c:v>
+                </c:pt>
+                <c:pt idx="24">
+                  <c:v>25</c:v>
+                </c:pt>
+                <c:pt idx="25">
+                  <c:v>26</c:v>
+                </c:pt>
+                <c:pt idx="26">
+                  <c:v>27</c:v>
+                </c:pt>
+                <c:pt idx="27">
+                  <c:v>28</c:v>
+                </c:pt>
+                <c:pt idx="28">
+                  <c:v>29</c:v>
+                </c:pt>
+                <c:pt idx="29">
+                  <c:v>30</c:v>
+                </c:pt>
+                <c:pt idx="30">
+                  <c:v>31</c:v>
+                </c:pt>
+              </c:strCache>
+            </c:strRef>
+          </c:cat>
+          <c:val>
+            <c:numRef>
+              <c:f>Sheet1!$B$2:$B$32</c:f>
+              <c:numCache>
+                <c:formatCode>General</c:formatCode>
+                <c:ptCount val="31"/>
+                <c:pt idx="0">
+                  <c:v>285.0</c:v>
+                </c:pt>
+                <c:pt idx="1">
+                  <c:v>373.0</c:v>
+                </c:pt>
+                <c:pt idx="2">
+                  <c:v>344.0</c:v>
+                </c:pt>
+                <c:pt idx="3">
+                  <c:v>367.0</c:v>
+                </c:pt>
+                <c:pt idx="4">
+                  <c:v>177.0</c:v>
+                </c:pt>
+                <c:pt idx="5">
+                  <c:v>277.0</c:v>
+                </c:pt>
+                <c:pt idx="6">
+                  <c:v>160.0</c:v>
+                </c:pt>
+                <c:pt idx="7">
+                  <c:v>230.0</c:v>
+                </c:pt>
+                <c:pt idx="8">
+                  <c:v>341.0</c:v>
+                </c:pt>
+                <c:pt idx="9">
+                  <c:v>344.0</c:v>
+                </c:pt>
+                <c:pt idx="10">
+                  <c:v>223.0</c:v>
+                </c:pt>
+                <c:pt idx="11">
+                  <c:v>207.0</c:v>
+                </c:pt>
+                <c:pt idx="12">
+                  <c:v>224.0</c:v>
+                </c:pt>
+                <c:pt idx="13">
+                  <c:v>295.0</c:v>
+                </c:pt>
+                <c:pt idx="14">
+                  <c:v>469.0</c:v>
+                </c:pt>
+                <c:pt idx="15">
+                  <c:v>198.0</c:v>
+                </c:pt>
+                <c:pt idx="16">
+                  <c:v>152.0</c:v>
+                </c:pt>
+                <c:pt idx="17">
+                  <c:v>271.0</c:v>
+                </c:pt>
+                <c:pt idx="18">
+                  <c:v>178.0</c:v>
+                </c:pt>
+                <c:pt idx="21">
+                  <c:v>342.0</c:v>
+                </c:pt>
+                <c:pt idx="22">
+                  <c:v>194.0</c:v>
+                </c:pt>
+                <c:pt idx="23">
+                  <c:v>386.0</c:v>
+                </c:pt>
+                <c:pt idx="24">
+                  <c:v>175.0</c:v>
+                </c:pt>
+                <c:pt idx="25">
+                  <c:v>149.0</c:v>
+                </c:pt>
+                <c:pt idx="26">
+                  <c:v>312.0</c:v>
+                </c:pt>
+                <c:pt idx="27">
+                  <c:v>166.0</c:v>
+                </c:pt>
+                <c:pt idx="28">
+                  <c:v>168.0</c:v>
+                </c:pt>
+                <c:pt idx="29">
+                  <c:v>285.0</c:v>
+                </c:pt>
+                <c:pt idx="30">
+                  <c:v>286.0</c:v>
+                </c:pt>
+              </c:numCache>
+            </c:numRef>
+          </c:val>
+          <c:smooth val="0"/>
+        </c:ser>
+        <c:ser>
+          <c:idx val="1"/>
+          <c:order val="1"/>
+          <c:tx>
+            <c:strRef>
+              <c:f>Sheet1!$C$1</c:f>
+              <c:strCache>
+                <c:ptCount val="1"/>
+                <c:pt idx="0">
+                  <c:v>September 2026</c:v>
+                </c:pt>
+              </c:strCache>
+            </c:strRef>
+          </c:tx>
+          <c:spPr>
+            <a:ln w="31750">
+              <a:solidFill>
+                <a:srgbClr val="8A94A0"/>
+              </a:solidFill>
+            </a:ln>
+          </c:spPr>
+          <c:marker>
+            <c:symbol val="none"/>
+          </c:marker>
+          <c:dPt>
+            <c:idx val="11"/>
+            <c:marker>
+              <c:symbol val="circle"/>
+              <c:size val="9"/>
+              <c:spPr>
+                <a:solidFill>
+                  <a:srgbClr val="8A94A0"/>
+                </a:solidFill>
+                <a:ln>
+                  <a:solidFill>
+                    <a:srgbClr val="8A94A0"/>
+                  </a:solidFill>
+                </a:ln>
+              </c:spPr>
+            </c:marker>
+          </c:dPt>
+          <c:cat>
+            <c:strRef>
+              <c:f>Sheet1!$A$2:$A$32</c:f>
+              <c:strCache>
+                <c:ptCount val="31"/>
+                <c:pt idx="0">
+                  <c:v>1</c:v>
+                </c:pt>
+                <c:pt idx="1">
+                  <c:v>2</c:v>
+                </c:pt>
+                <c:pt idx="2">
+                  <c:v>3</c:v>
+                </c:pt>
+                <c:pt idx="3">
+                  <c:v>4</c:v>
+                </c:pt>
+                <c:pt idx="4">
+                  <c:v>5</c:v>
+                </c:pt>
+                <c:pt idx="5">
+                  <c:v>6</c:v>
+                </c:pt>
+                <c:pt idx="6">
+                  <c:v>7</c:v>
+                </c:pt>
+                <c:pt idx="7">
+                  <c:v>8</c:v>
+                </c:pt>
+                <c:pt idx="8">
+                  <c:v>9</c:v>
+                </c:pt>
+                <c:pt idx="9">
+                  <c:v>10</c:v>
+                </c:pt>
+                <c:pt idx="10">
+                  <c:v>11</c:v>
+                </c:pt>
+                <c:pt idx="11">
+                  <c:v>12</c:v>
+                </c:pt>
+                <c:pt idx="12">
+                  <c:v>13</c:v>
+                </c:pt>
+                <c:pt idx="13">
+                  <c:v>14</c:v>
+                </c:pt>
+                <c:pt idx="14">
+                  <c:v>15</c:v>
+                </c:pt>
+                <c:pt idx="15">
+                  <c:v>16</c:v>
+                </c:pt>
+                <c:pt idx="16">
+                  <c:v>17</c:v>
+                </c:pt>
+                <c:pt idx="17">
+                  <c:v>18</c:v>
+                </c:pt>
+                <c:pt idx="18">
+                  <c:v>19</c:v>
+                </c:pt>
+                <c:pt idx="19">
+                  <c:v>20</c:v>
+                </c:pt>
+                <c:pt idx="20">
+                  <c:v>21</c:v>
+                </c:pt>
+                <c:pt idx="21">
+                  <c:v>22</c:v>
+                </c:pt>
+                <c:pt idx="22">
+                  <c:v>23</c:v>
+                </c:pt>
+                <c:pt idx="23">
+                  <c:v>24</c:v>
+                </c:pt>
+                <c:pt idx="24">
+                  <c:v>25</c:v>
+                </c:pt>
+                <c:pt idx="25">
+                  <c:v>26</c:v>
+                </c:pt>
+                <c:pt idx="26">
+                  <c:v>27</c:v>
+                </c:pt>
+                <c:pt idx="27">
+                  <c:v>28</c:v>
+                </c:pt>
+                <c:pt idx="28">
+                  <c:v>29</c:v>
+                </c:pt>
+                <c:pt idx="29">
+                  <c:v>30</c:v>
+                </c:pt>
+                <c:pt idx="30">
+                  <c:v>31</c:v>
+                </c:pt>
+              </c:strCache>
+            </c:strRef>
+          </c:cat>
+          <c:val>
+            <c:numRef>
+              <c:f>Sheet1!$C$2:$C$31</c:f>
+              <c:numCache>
+                <c:formatCode>General</c:formatCode>
+                <c:ptCount val="30"/>
+                <c:pt idx="0">
+                  <c:v>126.0</c:v>
+                </c:pt>
+                <c:pt idx="1">
+                  <c:v>250.0</c:v>
+                </c:pt>
+                <c:pt idx="2">
+                  <c:v>338.0</c:v>
+                </c:pt>
+                <c:pt idx="3">
+                  <c:v>177.0</c:v>
+                </c:pt>
+                <c:pt idx="4">
+                  <c:v>221.0</c:v>
+                </c:pt>
+                <c:pt idx="5">
+                  <c:v>209.0</c:v>
+                </c:pt>
+                <c:pt idx="6">
+                  <c:v>267.0</c:v>
+                </c:pt>
+                <c:pt idx="7">
+                  <c:v>189.0</c:v>
+                </c:pt>
+                <c:pt idx="8">
+                  <c:v>190.0</c:v>
+                </c:pt>
+                <c:pt idx="9">
+                  <c:v>206.0</c:v>
+                </c:pt>
+                <c:pt idx="10">
+                  <c:v>425.0</c:v>
+                </c:pt>
+                <c:pt idx="11">
+                  <c:v>0.0</c:v>
+                </c:pt>
+                <c:pt idx="12">
+                  <c:v>472.0</c:v>
+                </c:pt>
+                <c:pt idx="13">
+                  <c:v>366.0</c:v>
+                </c:pt>
+                <c:pt idx="14">
+                  <c:v>346.0</c:v>
+                </c:pt>
+                <c:pt idx="15">
+                  <c:v>213.0</c:v>
+                </c:pt>
+                <c:pt idx="16">
+                  <c:v>321.0</c:v>
+                </c:pt>
+                <c:pt idx="17">
+                  <c:v>353.0</c:v>
+                </c:pt>
+                <c:pt idx="18">
+                  <c:v>343.0</c:v>
+                </c:pt>
+                <c:pt idx="19">
+                  <c:v>587.0</c:v>
+                </c:pt>
+                <c:pt idx="20">
+                  <c:v>287.0</c:v>
+                </c:pt>
+                <c:pt idx="21">
+                  <c:v>178.0</c:v>
+                </c:pt>
+                <c:pt idx="22">
+                  <c:v>307.0</c:v>
+                </c:pt>
+                <c:pt idx="23">
+                  <c:v>159.0</c:v>
+                </c:pt>
+                <c:pt idx="24">
+                  <c:v>367.0</c:v>
+                </c:pt>
+                <c:pt idx="25">
+                  <c:v>305.0</c:v>
+                </c:pt>
+                <c:pt idx="26">
+                  <c:v>284.0</c:v>
+                </c:pt>
+                <c:pt idx="27">
+                  <c:v>218.0</c:v>
+                </c:pt>
+                <c:pt idx="28">
+                  <c:v>365.0</c:v>
+                </c:pt>
+                <c:pt idx="29">
+                  <c:v>303.0</c:v>
+                </c:pt>
+              </c:numCache>
+            </c:numRef>
+          </c:val>
+          <c:smooth val="0"/>
+        </c:ser>
+        <c:ser>
+          <c:idx val="2"/>
+          <c:order val="2"/>
+          <c:tx>
+            <c:strRef>
+              <c:f>Sheet1!$D$1</c:f>
+              <c:strCache>
+                <c:ptCount val="1"/>
+                <c:pt idx="0">
+                  <c:v>Day with no data</c:v>
+                </c:pt>
+              </c:strCache>
+            </c:strRef>
+          </c:tx>
+          <c:spPr>
+            <a:ln>
+              <a:noFill/>
+            </a:ln>
+          </c:spPr>
+          <c:marker>
+            <c:symbol val="x"/>
+            <c:size val="10"/>
+            <c:spPr>
+              <a:ln>
+                <a:solidFill>
+                  <a:srgbClr val="B44A1E"/>
+                </a:solidFill>
+              </a:ln>
+            </c:spPr>
+          </c:marker>
+          <c:cat>
+            <c:strRef>
+              <c:f>Sheet1!$A$2:$A$32</c:f>
+              <c:strCache>
+                <c:ptCount val="31"/>
+                <c:pt idx="0">
+                  <c:v>1</c:v>
+                </c:pt>
+                <c:pt idx="1">
+                  <c:v>2</c:v>
+                </c:pt>
+                <c:pt idx="2">
+                  <c:v>3</c:v>
+                </c:pt>
+                <c:pt idx="3">
+                  <c:v>4</c:v>
+                </c:pt>
+                <c:pt idx="4">
+                  <c:v>5</c:v>
+                </c:pt>
+                <c:pt idx="5">
+                  <c:v>6</c:v>
+                </c:pt>
+                <c:pt idx="6">
+                  <c:v>7</c:v>
+                </c:pt>
+                <c:pt idx="7">
+                  <c:v>8</c:v>
+                </c:pt>
+                <c:pt idx="8">
+                  <c:v>9</c:v>
+                </c:pt>
+                <c:pt idx="9">
+                  <c:v>10</c:v>
+                </c:pt>
+                <c:pt idx="10">
+                  <c:v>11</c:v>
+                </c:pt>
+                <c:pt idx="11">
+                  <c:v>12</c:v>
+                </c:pt>
+                <c:pt idx="12">
+                  <c:v>13</c:v>
+                </c:pt>
+                <c:pt idx="13">
+                  <c:v>14</c:v>
+                </c:pt>
+                <c:pt idx="14">
+                  <c:v>15</c:v>
+                </c:pt>
+                <c:pt idx="15">
+                  <c:v>16</c:v>
+                </c:pt>
+                <c:pt idx="16">
+                  <c:v>17</c:v>
+                </c:pt>
+                <c:pt idx="17">
+                  <c:v>18</c:v>
+                </c:pt>
+                <c:pt idx="18">
+                  <c:v>19</c:v>
+                </c:pt>
+                <c:pt idx="19">
+                  <c:v>20</c:v>
+                </c:pt>
+                <c:pt idx="20">
+                  <c:v>21</c:v>
+                </c:pt>
+                <c:pt idx="21">
+                  <c:v>22</c:v>
+                </c:pt>
+                <c:pt idx="22">
+                  <c:v>23</c:v>
+                </c:pt>
+                <c:pt idx="23">
+                  <c:v>24</c:v>
+                </c:pt>
+                <c:pt idx="24">
+                  <c:v>25</c:v>
+                </c:pt>
+                <c:pt idx="25">
+                  <c:v>26</c:v>
+                </c:pt>
+                <c:pt idx="26">
+                  <c:v>27</c:v>
+                </c:pt>
+                <c:pt idx="27">
+                  <c:v>28</c:v>
+                </c:pt>
+                <c:pt idx="28">
+                  <c:v>29</c:v>
+                </c:pt>
+                <c:pt idx="29">
+                  <c:v>30</c:v>
+                </c:pt>
+                <c:pt idx="30">
+                  <c:v>31</c:v>
+                </c:pt>
+              </c:strCache>
+            </c:strRef>
+          </c:cat>
+          <c:val>
+            <c:numRef>
+              <c:f>Sheet1!$D$2:$D$32</c:f>
+              <c:numCache>
+                <c:formatCode>General</c:formatCode>
+                <c:ptCount val="31"/>
+                <c:pt idx="19">
+                  <c:v>0.0</c:v>
+                </c:pt>
+                <c:pt idx="20">
+                  <c:v>0.0</c:v>
+                </c:pt>
+              </c:numCache>
+            </c:numRef>
+          </c:val>
+          <c:smooth val="0"/>
+        </c:ser>
+        <c:marker val="1"/>
+        <c:smooth val="0"/>
+        <c:axId val="2118791784"/>
+        <c:axId val="2140495176"/>
+      </c:lineChart>
+      <c:catAx>
+        <c:axId val="2118791784"/>
+        <c:scaling>
+          <c:orientation val="minMax"/>
+        </c:scaling>
+        <c:delete val="0"/>
+        <c:axPos val="b"/>
+        <c:majorTickMark val="out"/>
+        <c:minorTickMark val="none"/>
+        <c:tickLblPos val="nextTo"/>
+        <c:spPr>
+          <a:ln>
+            <a:solidFill>
+              <a:srgbClr val="8A94A0"/>
+            </a:solidFill>
+          </a:ln>
+        </c:spPr>
+        <c:crossAx val="2140495176"/>
+        <c:crosses val="autoZero"/>
+        <c:auto val="1"/>
+        <c:lblAlgn val="ctr"/>
+        <c:lblOffset val="100"/>
+        <c:noMultiLvlLbl val="0"/>
+      </c:catAx>
+      <c:valAx>
+        <c:axId val="2140495176"/>
+        <c:scaling/>
+        <c:delete val="0"/>
+        <c:axPos val="l"/>
+        <c:majorGridlines>
+          <c:spPr>
+            <a:ln>
+              <a:solidFill>
+                <a:srgbClr val="D9DEE4"/>
+              </a:solidFill>
+            </a:ln>
+          </c:spPr>
+        </c:majorGridlines>
+        <c:title>
+          <c:tx>
+            <c:rich>
+              <a:bodyPr/>
+              <a:lstStyle/>
+              <a:p>
+                <a:r>
+                  <a:rPr sz="1200" b="0" i="0">
+                    <a:solidFill>
+                      <a:srgbClr val="5B6470"/>
+                    </a:solidFill>
+                    <a:latin typeface="Calibri"/>
+                  </a:rPr>
+                  <a:t>Clicks</a:t>
+                </a:r>
+              </a:p>
+            </c:rich>
+          </c:tx>
+          <c:layout/>
+          <c:overlay val="0"/>
+        </c:title>
+        <c:numFmt formatCode="#,##0" sourceLinked="0"/>
+        <c:majorTickMark val="out"/>
+        <c:minorTickMark val="none"/>
+        <c:tickLblPos val="nextTo"/>
+        <c:spPr>
+          <a:ln>
+            <a:noFill/>
+          </a:ln>
+        </c:spPr>
+        <c:crossAx val="2118791784"/>
+        <c:crosses val="autoZero"/>
+      </c:valAx>
+    </c:plotArea>
+    <c:plotVisOnly val="1"/>
+    <c:dispBlanksAs val="gap"/>
+    <c:showDLblsOverMax val="0"/>
+  </c:chart>
+  <c:txPr>
+    <a:bodyPr/>
+    <a:lstStyle/>
+    <a:p>
+      <a:pPr>
+        <a:defRPr sz="1200">
+          <a:solidFill>
+            <a:srgbClr val="2B2F36"/>
+          </a:solidFill>
+          <a:latin typeface="Calibri"/>
+        </a:defRPr>
+      </a:pPr>
+      <a:endParaRPr lang="en-US"/>
+    </a:p>
+  </c:txPr>
+  <c:externalData r:id="rId1">
+    <c:autoUpdate val="0"/>
+  </c:externalData>
+</c:chartSpace>
+</file>
+
+<file path=ppt/charts/chart6.xml><?xml version="1.0" encoding="utf-8"?>
+<c:chartSpace xmlns:c="http://schemas.openxmlformats.org/drawingml/2006/chart" xmlns:a="http://schemas.openxmlformats.org/drawingml/2006/main" xmlns:r="http://schemas.openxmlformats.org/officeDocument/2006/relationships">
+  <c:date1904 val="0"/>
+  <c:chart>
+    <c:autoTitleDeleted val="1"/>
+    <c:plotArea>
+      <c:lineChart>
+        <c:grouping val="standard"/>
+        <c:varyColors val="0"/>
+        <c:ser>
+          <c:idx val="0"/>
+          <c:order val="0"/>
+          <c:tx>
+            <c:strRef>
+              <c:f>Sheet1!$B$1</c:f>
+              <c:strCache>
+                <c:ptCount val="1"/>
+                <c:pt idx="0">
+                  <c:v>October 2026</c:v>
+                </c:pt>
+              </c:strCache>
+            </c:strRef>
+          </c:tx>
+          <c:spPr>
+            <a:ln w="31750">
+              <a:solidFill>
+                <a:srgbClr val="1B7F8C"/>
+              </a:solidFill>
+            </a:ln>
+          </c:spPr>
+          <c:marker>
+            <c:symbol val="none"/>
+          </c:marker>
+          <c:cat>
+            <c:strRef>
+              <c:f>Sheet1!$A$2:$A$32</c:f>
+              <c:strCache>
+                <c:ptCount val="31"/>
+                <c:pt idx="0">
+                  <c:v>1</c:v>
+                </c:pt>
+                <c:pt idx="1">
+                  <c:v>2</c:v>
+                </c:pt>
+                <c:pt idx="2">
+                  <c:v>3</c:v>
+                </c:pt>
+                <c:pt idx="3">
+                  <c:v>4</c:v>
+                </c:pt>
+                <c:pt idx="4">
+                  <c:v>5</c:v>
+                </c:pt>
+                <c:pt idx="5">
+                  <c:v>6</c:v>
+                </c:pt>
+                <c:pt idx="6">
+                  <c:v>7</c:v>
+                </c:pt>
+                <c:pt idx="7">
+                  <c:v>8</c:v>
+                </c:pt>
+                <c:pt idx="8">
+                  <c:v>9</c:v>
+                </c:pt>
+                <c:pt idx="9">
+                  <c:v>10</c:v>
+                </c:pt>
+                <c:pt idx="10">
+                  <c:v>11</c:v>
+                </c:pt>
+                <c:pt idx="11">
+                  <c:v>12</c:v>
+                </c:pt>
+                <c:pt idx="12">
+                  <c:v>13</c:v>
+                </c:pt>
+                <c:pt idx="13">
+                  <c:v>14</c:v>
+                </c:pt>
+                <c:pt idx="14">
+                  <c:v>15</c:v>
+                </c:pt>
+                <c:pt idx="15">
+                  <c:v>16</c:v>
+                </c:pt>
+                <c:pt idx="16">
+                  <c:v>17</c:v>
+                </c:pt>
+                <c:pt idx="17">
+                  <c:v>18</c:v>
+                </c:pt>
+                <c:pt idx="18">
+                  <c:v>19</c:v>
+                </c:pt>
+                <c:pt idx="19">
+                  <c:v>20</c:v>
+                </c:pt>
+                <c:pt idx="20">
+                  <c:v>21</c:v>
+                </c:pt>
+                <c:pt idx="21">
+                  <c:v>22</c:v>
+                </c:pt>
+                <c:pt idx="22">
+                  <c:v>23</c:v>
+                </c:pt>
+                <c:pt idx="23">
+                  <c:v>24</c:v>
+                </c:pt>
+                <c:pt idx="24">
+                  <c:v>25</c:v>
+                </c:pt>
+                <c:pt idx="25">
+                  <c:v>26</c:v>
+                </c:pt>
+                <c:pt idx="26">
+                  <c:v>27</c:v>
+                </c:pt>
+                <c:pt idx="27">
+                  <c:v>28</c:v>
+                </c:pt>
+                <c:pt idx="28">
+                  <c:v>29</c:v>
+                </c:pt>
+                <c:pt idx="29">
+                  <c:v>30</c:v>
+                </c:pt>
+                <c:pt idx="30">
+                  <c:v>31</c:v>
+                </c:pt>
+              </c:strCache>
+            </c:strRef>
+          </c:cat>
+          <c:val>
+            <c:numRef>
+              <c:f>Sheet1!$B$2:$B$32</c:f>
+              <c:numCache>
+                <c:formatCode>General</c:formatCode>
+                <c:ptCount val="31"/>
+                <c:pt idx="0">
+                  <c:v>131.0</c:v>
+                </c:pt>
+                <c:pt idx="1">
+                  <c:v>154.0</c:v>
+                </c:pt>
+                <c:pt idx="2">
+                  <c:v>122.0</c:v>
+                </c:pt>
+                <c:pt idx="3">
+                  <c:v>113.0</c:v>
+                </c:pt>
+                <c:pt idx="4">
+                  <c:v>168.0</c:v>
+                </c:pt>
+                <c:pt idx="5">
+                  <c:v>101.0</c:v>
+                </c:pt>
+                <c:pt idx="6">
+                  <c:v>182.0</c:v>
+                </c:pt>
+                <c:pt idx="7">
+                  <c:v>101.0</c:v>
+                </c:pt>
+                <c:pt idx="10">
+                  <c:v>141.0</c:v>
+                </c:pt>
+                <c:pt idx="11">
+                  <c:v>146.0</c:v>
+                </c:pt>
+                <c:pt idx="12">
+                  <c:v>188.0</c:v>
+                </c:pt>
+                <c:pt idx="13">
+                  <c:v>183.0</c:v>
+                </c:pt>
+                <c:pt idx="14">
+                  <c:v>135.0</c:v>
+                </c:pt>
+                <c:pt idx="15">
+                  <c:v>176.0</c:v>
+                </c:pt>
+                <c:pt idx="16">
+                  <c:v>123.0</c:v>
+                </c:pt>
+                <c:pt idx="17">
+                  <c:v>129.0</c:v>
+                </c:pt>
+                <c:pt idx="18">
+                  <c:v>187.0</c:v>
+                </c:pt>
+                <c:pt idx="19">
+                  <c:v>141.0</c:v>
+                </c:pt>
+                <c:pt idx="20">
+                  <c:v>137.0</c:v>
+                </c:pt>
+                <c:pt idx="21">
+                  <c:v>153.0</c:v>
+                </c:pt>
+                <c:pt idx="22">
+                  <c:v>142.0</c:v>
+                </c:pt>
+                <c:pt idx="23">
+                  <c:v>129.0</c:v>
+                </c:pt>
+                <c:pt idx="24">
+                  <c:v>108.0</c:v>
+                </c:pt>
+                <c:pt idx="25">
+                  <c:v>137.0</c:v>
+                </c:pt>
+                <c:pt idx="26">
+                  <c:v>143.0</c:v>
+                </c:pt>
+                <c:pt idx="27">
+                  <c:v>117.0</c:v>
+                </c:pt>
+                <c:pt idx="28">
+                  <c:v>171.0</c:v>
+                </c:pt>
+                <c:pt idx="29">
+                  <c:v>150.0</c:v>
+                </c:pt>
+                <c:pt idx="30">
+                  <c:v>95.0</c:v>
+                </c:pt>
+              </c:numCache>
+            </c:numRef>
+          </c:val>
+          <c:smooth val="0"/>
+        </c:ser>
+        <c:ser>
+          <c:idx val="1"/>
+          <c:order val="1"/>
+          <c:tx>
+            <c:strRef>
+              <c:f>Sheet1!$C$1</c:f>
+              <c:strCache>
+                <c:ptCount val="1"/>
+                <c:pt idx="0">
+                  <c:v>September 2026</c:v>
+                </c:pt>
+              </c:strCache>
+            </c:strRef>
+          </c:tx>
+          <c:spPr>
+            <a:ln w="31750">
+              <a:solidFill>
+                <a:srgbClr val="8A94A0"/>
+              </a:solidFill>
+            </a:ln>
+          </c:spPr>
+          <c:marker>
+            <c:symbol val="none"/>
+          </c:marker>
+          <c:dPt>
+            <c:idx val="20"/>
+            <c:marker>
+              <c:symbol val="circle"/>
+              <c:size val="9"/>
+              <c:spPr>
+                <a:solidFill>
+                  <a:srgbClr val="8A94A0"/>
+                </a:solidFill>
+                <a:ln>
+                  <a:solidFill>
+                    <a:srgbClr val="8A94A0"/>
+                  </a:solidFill>
+                </a:ln>
+              </c:spPr>
+            </c:marker>
+          </c:dPt>
+          <c:cat>
+            <c:strRef>
+              <c:f>Sheet1!$A$2:$A$32</c:f>
+              <c:strCache>
+                <c:ptCount val="31"/>
+                <c:pt idx="0">
+                  <c:v>1</c:v>
+                </c:pt>
+                <c:pt idx="1">
+                  <c:v>2</c:v>
+                </c:pt>
+                <c:pt idx="2">
+                  <c:v>3</c:v>
+                </c:pt>
+                <c:pt idx="3">
+                  <c:v>4</c:v>
+                </c:pt>
+                <c:pt idx="4">
+                  <c:v>5</c:v>
+                </c:pt>
+                <c:pt idx="5">
+                  <c:v>6</c:v>
+                </c:pt>
+                <c:pt idx="6">
+                  <c:v>7</c:v>
+                </c:pt>
+                <c:pt idx="7">
+                  <c:v>8</c:v>
+                </c:pt>
+                <c:pt idx="8">
+                  <c:v>9</c:v>
+                </c:pt>
+                <c:pt idx="9">
+                  <c:v>10</c:v>
+                </c:pt>
+                <c:pt idx="10">
+                  <c:v>11</c:v>
+                </c:pt>
+                <c:pt idx="11">
+                  <c:v>12</c:v>
+                </c:pt>
+                <c:pt idx="12">
+                  <c:v>13</c:v>
+                </c:pt>
+                <c:pt idx="13">
+                  <c:v>14</c:v>
+                </c:pt>
+                <c:pt idx="14">
+                  <c:v>15</c:v>
+                </c:pt>
+                <c:pt idx="15">
+                  <c:v>16</c:v>
+                </c:pt>
+                <c:pt idx="16">
+                  <c:v>17</c:v>
+                </c:pt>
+                <c:pt idx="17">
+                  <c:v>18</c:v>
+                </c:pt>
+                <c:pt idx="18">
+                  <c:v>19</c:v>
+                </c:pt>
+                <c:pt idx="19">
+                  <c:v>20</c:v>
+                </c:pt>
+                <c:pt idx="20">
+                  <c:v>21</c:v>
+                </c:pt>
+                <c:pt idx="21">
+                  <c:v>22</c:v>
+                </c:pt>
+                <c:pt idx="22">
+                  <c:v>23</c:v>
+                </c:pt>
+                <c:pt idx="23">
+                  <c:v>24</c:v>
+                </c:pt>
+                <c:pt idx="24">
+                  <c:v>25</c:v>
+                </c:pt>
+                <c:pt idx="25">
+                  <c:v>26</c:v>
+                </c:pt>
+                <c:pt idx="26">
+                  <c:v>27</c:v>
+                </c:pt>
+                <c:pt idx="27">
+                  <c:v>28</c:v>
+                </c:pt>
+                <c:pt idx="28">
+                  <c:v>29</c:v>
+                </c:pt>
+                <c:pt idx="29">
+                  <c:v>30</c:v>
+                </c:pt>
+                <c:pt idx="30">
+                  <c:v>31</c:v>
+                </c:pt>
+              </c:strCache>
+            </c:strRef>
+          </c:cat>
+          <c:val>
+            <c:numRef>
+              <c:f>Sheet1!$C$2:$C$31</c:f>
+              <c:numCache>
+                <c:formatCode>General</c:formatCode>
+                <c:ptCount val="30"/>
+                <c:pt idx="0">
+                  <c:v>153.0</c:v>
+                </c:pt>
+                <c:pt idx="1">
+                  <c:v>151.0</c:v>
+                </c:pt>
+                <c:pt idx="2">
+                  <c:v>126.0</c:v>
+                </c:pt>
+                <c:pt idx="3">
+                  <c:v>90.0</c:v>
+                </c:pt>
+                <c:pt idx="4">
+                  <c:v>113.0</c:v>
+                </c:pt>
+                <c:pt idx="5">
+                  <c:v>79.0</c:v>
+                </c:pt>
+                <c:pt idx="6">
+                  <c:v>146.0</c:v>
+                </c:pt>
+                <c:pt idx="7">
+                  <c:v>119.0</c:v>
+                </c:pt>
+                <c:pt idx="8">
+                  <c:v>156.0</c:v>
+                </c:pt>
+                <c:pt idx="9">
+                  <c:v>92.0</c:v>
+                </c:pt>
+                <c:pt idx="10">
+                  <c:v>131.0</c:v>
+                </c:pt>
+                <c:pt idx="11">
+                  <c:v>108.0</c:v>
+                </c:pt>
+                <c:pt idx="12">
+                  <c:v>83.0</c:v>
+                </c:pt>
+                <c:pt idx="13">
+                  <c:v>114.0</c:v>
+                </c:pt>
+                <c:pt idx="14">
+                  <c:v>91.0</c:v>
+                </c:pt>
+                <c:pt idx="15">
+                  <c:v>93.0</c:v>
+                </c:pt>
+                <c:pt idx="16">
+                  <c:v>94.0</c:v>
+                </c:pt>
+                <c:pt idx="17">
+                  <c:v>91.0</c:v>
+                </c:pt>
+                <c:pt idx="18">
+                  <c:v>87.0</c:v>
+                </c:pt>
+                <c:pt idx="19">
+                  <c:v>93.0</c:v>
+                </c:pt>
+                <c:pt idx="20">
+                  <c:v>0.0</c:v>
+                </c:pt>
+                <c:pt idx="21">
+                  <c:v>119.0</c:v>
+                </c:pt>
+                <c:pt idx="22">
+                  <c:v>131.0</c:v>
+                </c:pt>
+                <c:pt idx="23">
+                  <c:v>169.0</c:v>
+                </c:pt>
+                <c:pt idx="24">
+                  <c:v>125.0</c:v>
+                </c:pt>
+                <c:pt idx="25">
+                  <c:v>128.0</c:v>
+                </c:pt>
+                <c:pt idx="26">
+                  <c:v>99.0</c:v>
+                </c:pt>
+                <c:pt idx="27">
+                  <c:v>139.0</c:v>
+                </c:pt>
+                <c:pt idx="28">
+                  <c:v>155.0</c:v>
+                </c:pt>
+                <c:pt idx="29">
+                  <c:v>158.0</c:v>
+                </c:pt>
+              </c:numCache>
+            </c:numRef>
+          </c:val>
+          <c:smooth val="0"/>
+        </c:ser>
+        <c:ser>
+          <c:idx val="2"/>
+          <c:order val="2"/>
+          <c:tx>
+            <c:strRef>
+              <c:f>Sheet1!$D$1</c:f>
+              <c:strCache>
+                <c:ptCount val="1"/>
+                <c:pt idx="0">
+                  <c:v>Day with no data</c:v>
+                </c:pt>
+              </c:strCache>
+            </c:strRef>
+          </c:tx>
+          <c:spPr>
+            <a:ln>
+              <a:noFill/>
+            </a:ln>
+          </c:spPr>
+          <c:marker>
+            <c:symbol val="x"/>
+            <c:size val="10"/>
+            <c:spPr>
+              <a:ln>
+                <a:solidFill>
+                  <a:srgbClr val="B44A1E"/>
+                </a:solidFill>
+              </a:ln>
+            </c:spPr>
+          </c:marker>
+          <c:cat>
+            <c:strRef>
+              <c:f>Sheet1!$A$2:$A$32</c:f>
+              <c:strCache>
+                <c:ptCount val="31"/>
+                <c:pt idx="0">
+                  <c:v>1</c:v>
+                </c:pt>
+                <c:pt idx="1">
+                  <c:v>2</c:v>
+                </c:pt>
+                <c:pt idx="2">
+                  <c:v>3</c:v>
+                </c:pt>
+                <c:pt idx="3">
+                  <c:v>4</c:v>
+                </c:pt>
+                <c:pt idx="4">
+                  <c:v>5</c:v>
+                </c:pt>
+                <c:pt idx="5">
+                  <c:v>6</c:v>
+                </c:pt>
+                <c:pt idx="6">
+                  <c:v>7</c:v>
+                </c:pt>
+                <c:pt idx="7">
+                  <c:v>8</c:v>
+                </c:pt>
+                <c:pt idx="8">
+                  <c:v>9</c:v>
+                </c:pt>
+                <c:pt idx="9">
+                  <c:v>10</c:v>
+                </c:pt>
+                <c:pt idx="10">
+                  <c:v>11</c:v>
+                </c:pt>
+                <c:pt idx="11">
+                  <c:v>12</c:v>
+                </c:pt>
+                <c:pt idx="12">
+                  <c:v>13</c:v>
+                </c:pt>
+                <c:pt idx="13">
+                  <c:v>14</c:v>
+                </c:pt>
+                <c:pt idx="14">
+                  <c:v>15</c:v>
+                </c:pt>
+                <c:pt idx="15">
+                  <c:v>16</c:v>
+                </c:pt>
+                <c:pt idx="16">
+                  <c:v>17</c:v>
+                </c:pt>
+                <c:pt idx="17">
+                  <c:v>18</c:v>
+                </c:pt>
+                <c:pt idx="18">
+                  <c:v>19</c:v>
+                </c:pt>
+                <c:pt idx="19">
+                  <c:v>20</c:v>
+                </c:pt>
+                <c:pt idx="20">
+                  <c:v>21</c:v>
+                </c:pt>
+                <c:pt idx="21">
+                  <c:v>22</c:v>
+                </c:pt>
+                <c:pt idx="22">
+                  <c:v>23</c:v>
+                </c:pt>
+                <c:pt idx="23">
+                  <c:v>24</c:v>
+                </c:pt>
+                <c:pt idx="24">
+                  <c:v>25</c:v>
+                </c:pt>
+                <c:pt idx="25">
+                  <c:v>26</c:v>
+                </c:pt>
+                <c:pt idx="26">
+                  <c:v>27</c:v>
+                </c:pt>
+                <c:pt idx="27">
+                  <c:v>28</c:v>
+                </c:pt>
+                <c:pt idx="28">
+                  <c:v>29</c:v>
+                </c:pt>
+                <c:pt idx="29">
+                  <c:v>30</c:v>
+                </c:pt>
+                <c:pt idx="30">
+                  <c:v>31</c:v>
+                </c:pt>
+              </c:strCache>
+            </c:strRef>
+          </c:cat>
+          <c:val>
+            <c:numRef>
+              <c:f>Sheet1!$D$2:$D$32</c:f>
+              <c:numCache>
+                <c:formatCode>General</c:formatCode>
+                <c:ptCount val="31"/>
+                <c:pt idx="8">
+                  <c:v>0.0</c:v>
+                </c:pt>
+                <c:pt idx="9">
+                  <c:v>0.0</c:v>
+                </c:pt>
+              </c:numCache>
+            </c:numRef>
+          </c:val>
+          <c:smooth val="0"/>
+        </c:ser>
+        <c:marker val="1"/>
+        <c:smooth val="0"/>
+        <c:axId val="2118791784"/>
+        <c:axId val="2140495176"/>
+      </c:lineChart>
+      <c:catAx>
+        <c:axId val="2118791784"/>
+        <c:scaling>
+          <c:orientation val="minMax"/>
+        </c:scaling>
+        <c:delete val="0"/>
+        <c:axPos val="b"/>
+        <c:majorTickMark val="out"/>
+        <c:minorTickMark val="none"/>
+        <c:tickLblPos val="nextTo"/>
+        <c:spPr>
+          <a:ln>
+            <a:solidFill>
+              <a:srgbClr val="8A94A0"/>
+            </a:solidFill>
+          </a:ln>
+        </c:spPr>
+        <c:crossAx val="2140495176"/>
+        <c:crosses val="autoZero"/>
+        <c:auto val="1"/>
+        <c:lblAlgn val="ctr"/>
+        <c:lblOffset val="100"/>
+        <c:noMultiLvlLbl val="0"/>
+      </c:catAx>
+      <c:valAx>
+        <c:axId val="2140495176"/>
+        <c:scaling/>
+        <c:delete val="0"/>
+        <c:axPos val="l"/>
+        <c:majorGridlines>
+          <c:spPr>
+            <a:ln>
+              <a:solidFill>
+                <a:srgbClr val="D9DEE4"/>
+              </a:solidFill>
+            </a:ln>
+          </c:spPr>
+        </c:majorGridlines>
+        <c:title>
+          <c:tx>
+            <c:rich>
+              <a:bodyPr/>
+              <a:lstStyle/>
+              <a:p>
+                <a:r>
+                  <a:rPr sz="1200" b="0" i="0">
+                    <a:solidFill>
+                      <a:srgbClr val="5B6470"/>
+                    </a:solidFill>
+                    <a:latin typeface="Calibri"/>
+                  </a:rPr>
+                  <a:t>Search clicks</a:t>
+                </a:r>
+              </a:p>
+            </c:rich>
+          </c:tx>
+          <c:layout/>
+          <c:overlay val="0"/>
+        </c:title>
+        <c:numFmt formatCode="#,##0" sourceLinked="0"/>
+        <c:majorTickMark val="out"/>
+        <c:minorTickMark val="none"/>
+        <c:tickLblPos val="nextTo"/>
+        <c:spPr>
+          <a:ln>
+            <a:noFill/>
+          </a:ln>
+        </c:spPr>
+        <c:crossAx val="2118791784"/>
+        <c:crosses val="autoZero"/>
+      </c:valAx>
+    </c:plotArea>
+    <c:legend>
+      <c:legendPos val="b"/>
+      <c:layout/>
+      <c:overlay val="0"/>
+    </c:legend>
+    <c:plotVisOnly val="1"/>
+    <c:dispBlanksAs val="gap"/>
+    <c:showDLblsOverMax val="0"/>
+  </c:chart>
+  <c:txPr>
+    <a:bodyPr/>
+    <a:lstStyle/>
+    <a:p>
+      <a:pPr>
+        <a:defRPr sz="1200">
+          <a:solidFill>
+            <a:srgbClr val="2B2F36"/>
+          </a:solidFill>
+          <a:latin typeface="Calibri"/>
+        </a:defRPr>
+      </a:pPr>
+      <a:endParaRPr lang="en-US"/>
+    </a:p>
+  </c:txPr>
+  <c:externalData r:id="rId1">
+    <c:autoUpdate val="0"/>
+  </c:externalData>
+</c:chartSpace>
+</file>
+
+<file path=ppt/charts/chart7.xml><?xml version="1.0" encoding="utf-8"?>
+<c:chartSpace xmlns:c="http://schemas.openxmlformats.org/drawingml/2006/chart" xmlns:a="http://schemas.openxmlformats.org/drawingml/2006/main" xmlns:r="http://schemas.openxmlformats.org/officeDocument/2006/relationships">
+  <c:date1904 val="0"/>
+  <c:chart>
+    <c:autoTitleDeleted val="1"/>
+    <c:plotArea>
+      <c:lineChart>
+        <c:grouping val="standard"/>
+        <c:varyColors val="0"/>
+        <c:ser>
+          <c:idx val="0"/>
+          <c:order val="0"/>
+          <c:tx>
+            <c:strRef>
+              <c:f>Sheet1!$B$1</c:f>
+              <c:strCache>
+                <c:ptCount val="1"/>
+                <c:pt idx="0">
+                  <c:v>October 2026</c:v>
+                </c:pt>
+              </c:strCache>
+            </c:strRef>
+          </c:tx>
+          <c:spPr>
+            <a:ln w="31750">
+              <a:solidFill>
+                <a:srgbClr val="1B7F8C"/>
+              </a:solidFill>
+            </a:ln>
+          </c:spPr>
+          <c:marker>
+            <c:symbol val="none"/>
+          </c:marker>
+          <c:cat>
+            <c:strRef>
+              <c:f>Sheet1!$A$2:$A$32</c:f>
+              <c:strCache>
+                <c:ptCount val="31"/>
+                <c:pt idx="0">
+                  <c:v>1</c:v>
+                </c:pt>
+                <c:pt idx="1">
+                  <c:v>2</c:v>
+                </c:pt>
+                <c:pt idx="2">
+                  <c:v>3</c:v>
+                </c:pt>
+                <c:pt idx="3">
+                  <c:v>4</c:v>
+                </c:pt>
+                <c:pt idx="4">
+                  <c:v>5</c:v>
+                </c:pt>
+                <c:pt idx="5">
+                  <c:v>6</c:v>
+                </c:pt>
+                <c:pt idx="6">
+                  <c:v>7</c:v>
+                </c:pt>
+                <c:pt idx="7">
+                  <c:v>8</c:v>
+                </c:pt>
+                <c:pt idx="8">
+                  <c:v>9</c:v>
+                </c:pt>
+                <c:pt idx="9">
+                  <c:v>10</c:v>
+                </c:pt>
+                <c:pt idx="10">
+                  <c:v>11</c:v>
+                </c:pt>
+                <c:pt idx="11">
+                  <c:v>12</c:v>
+                </c:pt>
+                <c:pt idx="12">
+                  <c:v>13</c:v>
+                </c:pt>
+                <c:pt idx="13">
+                  <c:v>14</c:v>
+                </c:pt>
+                <c:pt idx="14">
+                  <c:v>15</c:v>
+                </c:pt>
+                <c:pt idx="15">
+                  <c:v>16</c:v>
+                </c:pt>
+                <c:pt idx="16">
+                  <c:v>17</c:v>
+                </c:pt>
+                <c:pt idx="17">
+                  <c:v>18</c:v>
+                </c:pt>
+                <c:pt idx="18">
+                  <c:v>19</c:v>
+                </c:pt>
+                <c:pt idx="19">
+                  <c:v>20</c:v>
+                </c:pt>
+                <c:pt idx="20">
+                  <c:v>21</c:v>
+                </c:pt>
+                <c:pt idx="21">
+                  <c:v>22</c:v>
+                </c:pt>
+                <c:pt idx="22">
+                  <c:v>23</c:v>
+                </c:pt>
+                <c:pt idx="23">
+                  <c:v>24</c:v>
+                </c:pt>
+                <c:pt idx="24">
+                  <c:v>25</c:v>
+                </c:pt>
+                <c:pt idx="25">
+                  <c:v>26</c:v>
+                </c:pt>
+                <c:pt idx="26">
+                  <c:v>27</c:v>
+                </c:pt>
+                <c:pt idx="27">
+                  <c:v>28</c:v>
+                </c:pt>
+                <c:pt idx="28">
+                  <c:v>29</c:v>
+                </c:pt>
+                <c:pt idx="29">
+                  <c:v>30</c:v>
+                </c:pt>
+                <c:pt idx="30">
+                  <c:v>31</c:v>
+                </c:pt>
+              </c:strCache>
+            </c:strRef>
+          </c:cat>
+          <c:val>
+            <c:numRef>
+              <c:f>Sheet1!$B$2:$B$32</c:f>
+              <c:numCache>
+                <c:formatCode>General</c:formatCode>
+                <c:ptCount val="31"/>
+                <c:pt idx="0">
+                  <c:v>3047.0</c:v>
+                </c:pt>
+                <c:pt idx="1">
+                  <c:v>3784.0</c:v>
+                </c:pt>
+                <c:pt idx="2">
+                  <c:v>2421.0</c:v>
+                </c:pt>
+                <c:pt idx="3">
+                  <c:v>2294.0</c:v>
+                </c:pt>
+                <c:pt idx="4">
+                  <c:v>4406.0</c:v>
+                </c:pt>
+                <c:pt idx="5">
+                  <c:v>2900.0</c:v>
+                </c:pt>
+                <c:pt idx="6">
+                  <c:v>3863.0</c:v>
+                </c:pt>
+                <c:pt idx="7">
+                  <c:v>1877.0</c:v>
+                </c:pt>
+                <c:pt idx="10">
+                  <c:v>3492.0</c:v>
+                </c:pt>
+                <c:pt idx="11">
+                  <c:v>3578.0</c:v>
+                </c:pt>
+                <c:pt idx="12">
+                  <c:v>3606.0</c:v>
+                </c:pt>
+                <c:pt idx="13">
+                  <c:v>4237.0</c:v>
+                </c:pt>
+                <c:pt idx="14">
+                  <c:v>3117.0</c:v>
+                </c:pt>
+                <c:pt idx="15">
+                  <c:v>3998.0</c:v>
+                </c:pt>
+                <c:pt idx="16">
+                  <c:v>2960.0</c:v>
+                </c:pt>
+                <c:pt idx="17">
+                  <c:v>2634.0</c:v>
+                </c:pt>
+                <c:pt idx="18">
+                  <c:v>5454.0</c:v>
+                </c:pt>
+                <c:pt idx="19">
+                  <c:v>2826.0</c:v>
+                </c:pt>
+                <c:pt idx="20">
+                  <c:v>3561.0</c:v>
+                </c:pt>
+                <c:pt idx="21">
+                  <c:v>3768.0</c:v>
+                </c:pt>
+                <c:pt idx="22">
+                  <c:v>3916.0</c:v>
+                </c:pt>
+                <c:pt idx="23">
+                  <c:v>2392.0</c:v>
+                </c:pt>
+                <c:pt idx="24">
+                  <c:v>3046.0</c:v>
+                </c:pt>
+                <c:pt idx="25">
+                  <c:v>3323.0</c:v>
+                </c:pt>
+                <c:pt idx="26">
+                  <c:v>4206.0</c:v>
+                </c:pt>
+                <c:pt idx="27">
+                  <c:v>2337.0</c:v>
+                </c:pt>
+                <c:pt idx="28">
+                  <c:v>4323.0</c:v>
+                </c:pt>
+                <c:pt idx="29">
+                  <c:v>2844.0</c:v>
+                </c:pt>
+                <c:pt idx="30">
+                  <c:v>2486.0</c:v>
+                </c:pt>
+              </c:numCache>
+            </c:numRef>
+          </c:val>
+          <c:smooth val="0"/>
+        </c:ser>
+        <c:ser>
+          <c:idx val="1"/>
+          <c:order val="1"/>
+          <c:tx>
+            <c:strRef>
+              <c:f>Sheet1!$C$1</c:f>
+              <c:strCache>
+                <c:ptCount val="1"/>
+                <c:pt idx="0">
+                  <c:v>September 2026</c:v>
+                </c:pt>
+              </c:strCache>
+            </c:strRef>
+          </c:tx>
+          <c:spPr>
+            <a:ln w="31750">
+              <a:solidFill>
+                <a:srgbClr val="8A94A0"/>
+              </a:solidFill>
+            </a:ln>
+          </c:spPr>
+          <c:marker>
+            <c:symbol val="none"/>
+          </c:marker>
+          <c:dPt>
+            <c:idx val="20"/>
+            <c:marker>
+              <c:symbol val="circle"/>
+              <c:size val="9"/>
+              <c:spPr>
+                <a:solidFill>
+                  <a:srgbClr val="8A94A0"/>
+                </a:solidFill>
+                <a:ln>
+                  <a:solidFill>
+                    <a:srgbClr val="8A94A0"/>
+                  </a:solidFill>
+                </a:ln>
+              </c:spPr>
+            </c:marker>
+          </c:dPt>
+          <c:cat>
+            <c:strRef>
+              <c:f>Sheet1!$A$2:$A$32</c:f>
+              <c:strCache>
+                <c:ptCount val="31"/>
+                <c:pt idx="0">
+                  <c:v>1</c:v>
+                </c:pt>
+                <c:pt idx="1">
+                  <c:v>2</c:v>
+                </c:pt>
+                <c:pt idx="2">
+                  <c:v>3</c:v>
+                </c:pt>
+                <c:pt idx="3">
+                  <c:v>4</c:v>
+                </c:pt>
+                <c:pt idx="4">
+                  <c:v>5</c:v>
+                </c:pt>
+                <c:pt idx="5">
+                  <c:v>6</c:v>
+                </c:pt>
+                <c:pt idx="6">
+                  <c:v>7</c:v>
+                </c:pt>
+                <c:pt idx="7">
+                  <c:v>8</c:v>
+                </c:pt>
+                <c:pt idx="8">
+                  <c:v>9</c:v>
+                </c:pt>
+                <c:pt idx="9">
+                  <c:v>10</c:v>
+                </c:pt>
+                <c:pt idx="10">
+                  <c:v>11</c:v>
+                </c:pt>
+                <c:pt idx="11">
+                  <c:v>12</c:v>
+                </c:pt>
+                <c:pt idx="12">
+                  <c:v>13</c:v>
+                </c:pt>
+                <c:pt idx="13">
+                  <c:v>14</c:v>
+                </c:pt>
+                <c:pt idx="14">
+                  <c:v>15</c:v>
+                </c:pt>
+                <c:pt idx="15">
+                  <c:v>16</c:v>
+                </c:pt>
+                <c:pt idx="16">
+                  <c:v>17</c:v>
+                </c:pt>
+                <c:pt idx="17">
+                  <c:v>18</c:v>
+                </c:pt>
+                <c:pt idx="18">
+                  <c:v>19</c:v>
+                </c:pt>
+                <c:pt idx="19">
+                  <c:v>20</c:v>
+                </c:pt>
+                <c:pt idx="20">
+                  <c:v>21</c:v>
+                </c:pt>
+                <c:pt idx="21">
+                  <c:v>22</c:v>
+                </c:pt>
+                <c:pt idx="22">
+                  <c:v>23</c:v>
+                </c:pt>
+                <c:pt idx="23">
+                  <c:v>24</c:v>
+                </c:pt>
+                <c:pt idx="24">
+                  <c:v>25</c:v>
+                </c:pt>
+                <c:pt idx="25">
+                  <c:v>26</c:v>
+                </c:pt>
+                <c:pt idx="26">
+                  <c:v>27</c:v>
+                </c:pt>
+                <c:pt idx="27">
+                  <c:v>28</c:v>
+                </c:pt>
+                <c:pt idx="28">
+                  <c:v>29</c:v>
+                </c:pt>
+                <c:pt idx="29">
+                  <c:v>30</c:v>
+                </c:pt>
+                <c:pt idx="30">
+                  <c:v>31</c:v>
+                </c:pt>
+              </c:strCache>
+            </c:strRef>
+          </c:cat>
+          <c:val>
+            <c:numRef>
+              <c:f>Sheet1!$C$2:$C$31</c:f>
+              <c:numCache>
+                <c:formatCode>General</c:formatCode>
+                <c:ptCount val="30"/>
+                <c:pt idx="0">
+                  <c:v>3642.0</c:v>
+                </c:pt>
+                <c:pt idx="1">
+                  <c:v>3701.0</c:v>
+                </c:pt>
+                <c:pt idx="2">
+                  <c:v>2454.0</c:v>
+                </c:pt>
+                <c:pt idx="3">
+                  <c:v>1785.0</c:v>
+                </c:pt>
+                <c:pt idx="4">
+                  <c:v>2794.0</c:v>
+                </c:pt>
+                <c:pt idx="5">
+                  <c:v>2363.0</c:v>
+                </c:pt>
+                <c:pt idx="6">
+                  <c:v>4297.0</c:v>
+                </c:pt>
+                <c:pt idx="7">
+                  <c:v>2701.0</c:v>
+                </c:pt>
+                <c:pt idx="8">
+                  <c:v>3626.0</c:v>
+                </c:pt>
+                <c:pt idx="9">
+                  <c:v>2243.0</c:v>
+                </c:pt>
+                <c:pt idx="10">
+                  <c:v>2997.0</c:v>
+                </c:pt>
+                <c:pt idx="11">
+                  <c:v>2658.0</c:v>
+                </c:pt>
+                <c:pt idx="12">
+                  <c:v>2378.0</c:v>
+                </c:pt>
+                <c:pt idx="13">
+                  <c:v>3218.0</c:v>
+                </c:pt>
+                <c:pt idx="14">
+                  <c:v>2676.0</c:v>
+                </c:pt>
+                <c:pt idx="15">
+                  <c:v>1851.0</c:v>
+                </c:pt>
+                <c:pt idx="16">
+                  <c:v>1751.0</c:v>
+                </c:pt>
+                <c:pt idx="17">
+                  <c:v>2552.0</c:v>
+                </c:pt>
+                <c:pt idx="18">
+                  <c:v>2569.0</c:v>
+                </c:pt>
+                <c:pt idx="19">
+                  <c:v>2582.0</c:v>
+                </c:pt>
+                <c:pt idx="20">
+                  <c:v>0.0</c:v>
+                </c:pt>
+                <c:pt idx="21">
+                  <c:v>3471.0</c:v>
+                </c:pt>
+                <c:pt idx="22">
+                  <c:v>3086.0</c:v>
+                </c:pt>
+                <c:pt idx="23">
+                  <c:v>3156.0</c:v>
+                </c:pt>
+                <c:pt idx="24">
+                  <c:v>2937.0</c:v>
+                </c:pt>
+                <c:pt idx="25">
+                  <c:v>3078.0</c:v>
+                </c:pt>
+                <c:pt idx="26">
+                  <c:v>1855.0</c:v>
+                </c:pt>
+                <c:pt idx="27">
+                  <c:v>3442.0</c:v>
+                </c:pt>
+                <c:pt idx="28">
+                  <c:v>3608.0</c:v>
+                </c:pt>
+                <c:pt idx="29">
+                  <c:v>3821.0</c:v>
+                </c:pt>
+              </c:numCache>
+            </c:numRef>
+          </c:val>
+          <c:smooth val="0"/>
+        </c:ser>
+        <c:ser>
+          <c:idx val="2"/>
+          <c:order val="2"/>
+          <c:tx>
+            <c:strRef>
+              <c:f>Sheet1!$D$1</c:f>
+              <c:strCache>
+                <c:ptCount val="1"/>
+                <c:pt idx="0">
+                  <c:v>Day with no data</c:v>
+                </c:pt>
+              </c:strCache>
+            </c:strRef>
+          </c:tx>
+          <c:spPr>
+            <a:ln>
+              <a:noFill/>
+            </a:ln>
+          </c:spPr>
+          <c:marker>
+            <c:symbol val="x"/>
+            <c:size val="10"/>
+            <c:spPr>
+              <a:ln>
+                <a:solidFill>
+                  <a:srgbClr val="B44A1E"/>
+                </a:solidFill>
+              </a:ln>
+            </c:spPr>
+          </c:marker>
+          <c:cat>
+            <c:strRef>
+              <c:f>Sheet1!$A$2:$A$32</c:f>
+              <c:strCache>
+                <c:ptCount val="31"/>
+                <c:pt idx="0">
+                  <c:v>1</c:v>
+                </c:pt>
+                <c:pt idx="1">
+                  <c:v>2</c:v>
+                </c:pt>
+                <c:pt idx="2">
+                  <c:v>3</c:v>
+                </c:pt>
+                <c:pt idx="3">
+                  <c:v>4</c:v>
+                </c:pt>
+                <c:pt idx="4">
+                  <c:v>5</c:v>
+                </c:pt>
+                <c:pt idx="5">
+                  <c:v>6</c:v>
+                </c:pt>
+                <c:pt idx="6">
+                  <c:v>7</c:v>
+                </c:pt>
+                <c:pt idx="7">
+                  <c:v>8</c:v>
+                </c:pt>
+                <c:pt idx="8">
+                  <c:v>9</c:v>
+                </c:pt>
+                <c:pt idx="9">
+                  <c:v>10</c:v>
+                </c:pt>
+                <c:pt idx="10">
+                  <c:v>11</c:v>
+                </c:pt>
+                <c:pt idx="11">
+                  <c:v>12</c:v>
+                </c:pt>
+                <c:pt idx="12">
+                  <c:v>13</c:v>
+                </c:pt>
+                <c:pt idx="13">
+                  <c:v>14</c:v>
+                </c:pt>
+                <c:pt idx="14">
+                  <c:v>15</c:v>
+                </c:pt>
+                <c:pt idx="15">
+                  <c:v>16</c:v>
+                </c:pt>
+                <c:pt idx="16">
+                  <c:v>17</c:v>
+                </c:pt>
+                <c:pt idx="17">
+                  <c:v>18</c:v>
+                </c:pt>
+                <c:pt idx="18">
+                  <c:v>19</c:v>
+                </c:pt>
+                <c:pt idx="19">
+                  <c:v>20</c:v>
+                </c:pt>
+                <c:pt idx="20">
+                  <c:v>21</c:v>
+                </c:pt>
+                <c:pt idx="21">
+                  <c:v>22</c:v>
+                </c:pt>
+                <c:pt idx="22">
+                  <c:v>23</c:v>
+                </c:pt>
+                <c:pt idx="23">
+                  <c:v>24</c:v>
+                </c:pt>
+                <c:pt idx="24">
+                  <c:v>25</c:v>
+                </c:pt>
+                <c:pt idx="25">
+                  <c:v>26</c:v>
+                </c:pt>
+                <c:pt idx="26">
+                  <c:v>27</c:v>
+                </c:pt>
+                <c:pt idx="27">
+                  <c:v>28</c:v>
+                </c:pt>
+                <c:pt idx="28">
+                  <c:v>29</c:v>
+                </c:pt>
+                <c:pt idx="29">
+                  <c:v>30</c:v>
+                </c:pt>
+                <c:pt idx="30">
+                  <c:v>31</c:v>
+                </c:pt>
+              </c:strCache>
+            </c:strRef>
+          </c:cat>
+          <c:val>
+            <c:numRef>
+              <c:f>Sheet1!$D$2:$D$32</c:f>
+              <c:numCache>
+                <c:formatCode>General</c:formatCode>
+                <c:ptCount val="31"/>
+                <c:pt idx="8">
+                  <c:v>0.0</c:v>
+                </c:pt>
+                <c:pt idx="9">
+                  <c:v>0.0</c:v>
+                </c:pt>
+              </c:numCache>
+            </c:numRef>
+          </c:val>
+          <c:smooth val="0"/>
+        </c:ser>
+        <c:marker val="1"/>
+        <c:smooth val="0"/>
+        <c:axId val="2118791784"/>
+        <c:axId val="2140495176"/>
+      </c:lineChart>
+      <c:catAx>
+        <c:axId val="2118791784"/>
+        <c:scaling>
+          <c:orientation val="minMax"/>
+        </c:scaling>
+        <c:delete val="0"/>
+        <c:axPos val="b"/>
+        <c:majorTickMark val="out"/>
+        <c:minorTickMark val="none"/>
+        <c:tickLblPos val="nextTo"/>
+        <c:spPr>
+          <a:ln>
+            <a:solidFill>
+              <a:srgbClr val="8A94A0"/>
+            </a:solidFill>
+          </a:ln>
+        </c:spPr>
+        <c:crossAx val="2140495176"/>
+        <c:crosses val="autoZero"/>
+        <c:auto val="1"/>
+        <c:lblAlgn val="ctr"/>
+        <c:lblOffset val="100"/>
+        <c:noMultiLvlLbl val="0"/>
+      </c:catAx>
+      <c:valAx>
+        <c:axId val="2140495176"/>
+        <c:scaling/>
+        <c:delete val="0"/>
+        <c:axPos val="l"/>
+        <c:majorGridlines>
+          <c:spPr>
+            <a:ln>
+              <a:solidFill>
+                <a:srgbClr val="D9DEE4"/>
+              </a:solidFill>
+            </a:ln>
+          </c:spPr>
+        </c:majorGridlines>
+        <c:title>
+          <c:tx>
+            <c:rich>
+              <a:bodyPr/>
+              <a:lstStyle/>
+              <a:p>
+                <a:r>
+                  <a:rPr sz="1200" b="0" i="0">
+                    <a:solidFill>
+                      <a:srgbClr val="5B6470"/>
+                    </a:solidFill>
+                    <a:latin typeface="Calibri"/>
+                  </a:rPr>
+                  <a:t>Search impressions</a:t>
+                </a:r>
+              </a:p>
+            </c:rich>
+          </c:tx>
+          <c:layout/>
+          <c:overlay val="0"/>
+        </c:title>
+        <c:numFmt formatCode="#,##0" sourceLinked="0"/>
+        <c:majorTickMark val="out"/>
+        <c:minorTickMark val="none"/>
+        <c:tickLblPos val="nextTo"/>
+        <c:spPr>
+          <a:ln>
+            <a:noFill/>
+          </a:ln>
+        </c:spPr>
+        <c:crossAx val="2118791784"/>
+        <c:crosses val="autoZero"/>
+      </c:valAx>
+    </c:plotArea>
     <c:plotVisOnly val="1"/>
     <c:dispBlanksAs val="gap"/>
     <c:showDLblsOverMax val="0"/>
@@ -5453,7 +8365,978 @@
                 </a:solidFill>
                 <a:latin typeface="Calibri"/>
               </a:rPr>
-              <a:t>Sample report: invented store orders and website figures. The website side ran against a stand-in server, not Google.</a:t>
+              <a:t>Sample report: invented figures. The website, ad and search sides ran against stand-in servers, not Google or Meta.</a:t>
+            </a:r>
+          </a:p>
+        </p:txBody>
+      </p:sp>
+    </p:spTree>
+  </p:cSld>
+  <p:clrMapOvr>
+    <a:masterClrMapping/>
+  </p:clrMapOvr>
+</p:sld>
+</file>
+
+<file path=ppt/slides/slide10.xml><?xml version="1.0" encoding="utf-8"?>
+<p:sld xmlns:a="http://schemas.openxmlformats.org/drawingml/2006/main" xmlns:p="http://schemas.openxmlformats.org/presentationml/2006/main" xmlns:r="http://schemas.openxmlformats.org/officeDocument/2006/relationships">
+  <p:cSld>
+    <p:spTree>
+      <p:nvGrpSpPr>
+        <p:cNvPr id="1" name=""/>
+        <p:cNvGrpSpPr/>
+        <p:nvPr/>
+      </p:nvGrpSpPr>
+      <p:grpSpPr/>
+      <p:sp>
+        <p:nvSpPr>
+          <p:cNvPr id="2" name="Title 1"/>
+          <p:cNvSpPr>
+            <a:spLocks noGrp="1"/>
+          </p:cNvSpPr>
+          <p:nvPr>
+            <p:ph type="title"/>
+          </p:nvPr>
+        </p:nvSpPr>
+        <p:spPr>
+          <a:xfrm>
+            <a:off x="548640" y="274320"/>
+            <a:ext cx="11094415" cy="1005840"/>
+          </a:xfrm>
+        </p:spPr>
+        <p:txBody>
+          <a:bodyPr wrap="square" anchor="ctr"/>
+          <a:lstStyle/>
+          <a:p>
+            <a:pPr algn="l"/>
+            <a:r>
+              <a:rPr sz="2400" b="1" i="0">
+                <a:solidFill>
+                  <a:srgbClr val="1F3A5F"/>
+                </a:solidFill>
+                <a:latin typeface="Calibri"/>
+              </a:rPr>
+              <a:t>Data health: October is missing days of store, website, ads and search data</a:t>
+            </a:r>
+          </a:p>
+        </p:txBody>
+      </p:sp>
+      <p:graphicFrame>
+        <p:nvGraphicFramePr>
+          <p:cNvPr id="3" name="Table 2"/>
+          <p:cNvGraphicFramePr>
+            <a:graphicFrameLocks noGrp="1"/>
+          </p:cNvGraphicFramePr>
+          <p:nvPr/>
+        </p:nvGraphicFramePr>
+        <p:xfrm>
+          <a:off x="548640" y="1280160"/>
+          <a:ext cx="11094412" cy="2103120"/>
+        </p:xfrm>
+        <a:graphic>
+          <a:graphicData uri="http://schemas.openxmlformats.org/drawingml/2006/table">
+            <a:tbl>
+              <a:tblPr firstRow="1" bandRow="1">
+                <a:tableStyleId>{5C22544A-7EE6-4342-B048-85BDC9FD1C3A}</a:tableStyleId>
+              </a:tblPr>
+              <a:tblGrid>
+                <a:gridCol w="2144298"/>
+                <a:gridCol w="1398455"/>
+                <a:gridCol w="2051068"/>
+                <a:gridCol w="1584916"/>
+                <a:gridCol w="1864607"/>
+                <a:gridCol w="2051068"/>
+              </a:tblGrid>
+              <a:tr h="420624">
+                <a:tc>
+                  <a:txBody>
+                    <a:bodyPr/>
+                    <a:lstStyle/>
+                    <a:p>
+                      <a:pPr algn="l"/>
+                      <a:r>
+                        <a:rPr sz="1300" b="1" i="0">
+                          <a:solidFill>
+                            <a:srgbClr val="FFFFFF"/>
+                          </a:solidFill>
+                          <a:latin typeface="Calibri"/>
+                        </a:rPr>
+                        <a:t>Source, October</a:t>
+                      </a:r>
+                    </a:p>
+                  </a:txBody>
+                  <a:tcPr anchor="ctr">
+                    <a:solidFill>
+                      <a:srgbClr val="1F3A5F"/>
+                    </a:solidFill>
+                  </a:tcPr>
+                </a:tc>
+                <a:tc>
+                  <a:txBody>
+                    <a:bodyPr/>
+                    <a:lstStyle/>
+                    <a:p>
+                      <a:pPr algn="r"/>
+                      <a:r>
+                        <a:rPr sz="1300" b="1" i="0">
+                          <a:solidFill>
+                            <a:srgbClr val="FFFFFF"/>
+                          </a:solidFill>
+                          <a:latin typeface="Calibri"/>
+                        </a:rPr>
+                        <a:t>Days with data</a:t>
+                      </a:r>
+                    </a:p>
+                  </a:txBody>
+                  <a:tcPr anchor="ctr">
+                    <a:solidFill>
+                      <a:srgbClr val="1F3A5F"/>
+                    </a:solidFill>
+                  </a:tcPr>
+                </a:tc>
+                <a:tc>
+                  <a:txBody>
+                    <a:bodyPr/>
+                    <a:lstStyle/>
+                    <a:p>
+                      <a:pPr algn="r"/>
+                      <a:r>
+                        <a:rPr sz="1300" b="1" i="0">
+                          <a:solidFill>
+                            <a:srgbClr val="FFFFFF"/>
+                          </a:solidFill>
+                          <a:latin typeface="Calibri"/>
+                        </a:rPr>
+                        <a:t>Days with nothing to report</a:t>
+                      </a:r>
+                    </a:p>
+                  </a:txBody>
+                  <a:tcPr anchor="ctr">
+                    <a:solidFill>
+                      <a:srgbClr val="1F3A5F"/>
+                    </a:solidFill>
+                  </a:tcPr>
+                </a:tc>
+                <a:tc>
+                  <a:txBody>
+                    <a:bodyPr/>
+                    <a:lstStyle/>
+                    <a:p>
+                      <a:pPr algn="r"/>
+                      <a:r>
+                        <a:rPr sz="1300" b="1" i="0">
+                          <a:solidFill>
+                            <a:srgbClr val="FFFFFF"/>
+                          </a:solidFill>
+                          <a:latin typeface="Calibri"/>
+                        </a:rPr>
+                        <a:t>Days with no data</a:t>
+                      </a:r>
+                    </a:p>
+                  </a:txBody>
+                  <a:tcPr anchor="ctr">
+                    <a:solidFill>
+                      <a:srgbClr val="1F3A5F"/>
+                    </a:solidFill>
+                  </a:tcPr>
+                </a:tc>
+                <a:tc>
+                  <a:txBody>
+                    <a:bodyPr/>
+                    <a:lstStyle/>
+                    <a:p>
+                      <a:pPr algn="r"/>
+                      <a:r>
+                        <a:rPr sz="1300" b="1" i="0">
+                          <a:solidFill>
+                            <a:srgbClr val="FFFFFF"/>
+                          </a:solidFill>
+                          <a:latin typeface="Calibri"/>
+                        </a:rPr>
+                        <a:t>Days that may still change</a:t>
+                      </a:r>
+                    </a:p>
+                  </a:txBody>
+                  <a:tcPr anchor="ctr">
+                    <a:solidFill>
+                      <a:srgbClr val="1F3A5F"/>
+                    </a:solidFill>
+                  </a:tcPr>
+                </a:tc>
+                <a:tc>
+                  <a:txBody>
+                    <a:bodyPr/>
+                    <a:lstStyle/>
+                    <a:p>
+                      <a:pPr algn="r"/>
+                      <a:r>
+                        <a:rPr sz="1300" b="1" i="0">
+                          <a:solidFill>
+                            <a:srgbClr val="FFFFFF"/>
+                          </a:solidFill>
+                          <a:latin typeface="Calibri"/>
+                        </a:rPr>
+                        <a:t>Stored daily figures used</a:t>
+                      </a:r>
+                    </a:p>
+                  </a:txBody>
+                  <a:tcPr anchor="ctr">
+                    <a:solidFill>
+                      <a:srgbClr val="1F3A5F"/>
+                    </a:solidFill>
+                  </a:tcPr>
+                </a:tc>
+              </a:tr>
+              <a:tr h="420624">
+                <a:tc>
+                  <a:txBody>
+                    <a:bodyPr/>
+                    <a:lstStyle/>
+                    <a:p>
+                      <a:pPr algn="l"/>
+                      <a:r>
+                        <a:rPr sz="1300" b="0" i="0">
+                          <a:solidFill>
+                            <a:srgbClr val="2B2F36"/>
+                          </a:solidFill>
+                          <a:latin typeface="Calibri"/>
+                        </a:rPr>
+                        <a:t>Store</a:t>
+                      </a:r>
+                    </a:p>
+                  </a:txBody>
+                  <a:tcPr anchor="ctr">
+                    <a:solidFill>
+                      <a:srgbClr val="FFFFFF"/>
+                    </a:solidFill>
+                  </a:tcPr>
+                </a:tc>
+                <a:tc>
+                  <a:txBody>
+                    <a:bodyPr/>
+                    <a:lstStyle/>
+                    <a:p>
+                      <a:pPr algn="r"/>
+                      <a:r>
+                        <a:rPr sz="1300" b="0" i="0">
+                          <a:solidFill>
+                            <a:srgbClr val="2B2F36"/>
+                          </a:solidFill>
+                          <a:latin typeface="Calibri"/>
+                        </a:rPr>
+                        <a:t>28</a:t>
+                      </a:r>
+                    </a:p>
+                  </a:txBody>
+                  <a:tcPr anchor="ctr">
+                    <a:solidFill>
+                      <a:srgbClr val="FFFFFF"/>
+                    </a:solidFill>
+                  </a:tcPr>
+                </a:tc>
+                <a:tc>
+                  <a:txBody>
+                    <a:bodyPr/>
+                    <a:lstStyle/>
+                    <a:p>
+                      <a:pPr algn="r"/>
+                      <a:r>
+                        <a:rPr sz="1300" b="0" i="0">
+                          <a:solidFill>
+                            <a:srgbClr val="2B2F36"/>
+                          </a:solidFill>
+                          <a:latin typeface="Calibri"/>
+                        </a:rPr>
+                        <a:t>1</a:t>
+                      </a:r>
+                    </a:p>
+                  </a:txBody>
+                  <a:tcPr anchor="ctr">
+                    <a:solidFill>
+                      <a:srgbClr val="FFFFFF"/>
+                    </a:solidFill>
+                  </a:tcPr>
+                </a:tc>
+                <a:tc>
+                  <a:txBody>
+                    <a:bodyPr/>
+                    <a:lstStyle/>
+                    <a:p>
+                      <a:pPr algn="r"/>
+                      <a:r>
+                        <a:rPr sz="1300" b="0" i="0">
+                          <a:solidFill>
+                            <a:srgbClr val="2B2F36"/>
+                          </a:solidFill>
+                          <a:latin typeface="Calibri"/>
+                        </a:rPr>
+                        <a:t>2</a:t>
+                      </a:r>
+                    </a:p>
+                  </a:txBody>
+                  <a:tcPr anchor="ctr">
+                    <a:solidFill>
+                      <a:srgbClr val="FFFFFF"/>
+                    </a:solidFill>
+                  </a:tcPr>
+                </a:tc>
+                <a:tc>
+                  <a:txBody>
+                    <a:bodyPr/>
+                    <a:lstStyle/>
+                    <a:p>
+                      <a:pPr algn="r"/>
+                      <a:r>
+                        <a:rPr sz="1300" b="0" i="0">
+                          <a:solidFill>
+                            <a:srgbClr val="2B2F36"/>
+                          </a:solidFill>
+                          <a:latin typeface="Calibri"/>
+                        </a:rPr>
+                        <a:t>n/a</a:t>
+                      </a:r>
+                    </a:p>
+                  </a:txBody>
+                  <a:tcPr anchor="ctr">
+                    <a:solidFill>
+                      <a:srgbClr val="FFFFFF"/>
+                    </a:solidFill>
+                  </a:tcPr>
+                </a:tc>
+                <a:tc>
+                  <a:txBody>
+                    <a:bodyPr/>
+                    <a:lstStyle/>
+                    <a:p>
+                      <a:pPr algn="r"/>
+                      <a:r>
+                        <a:rPr sz="1300" b="0" i="0">
+                          <a:solidFill>
+                            <a:srgbClr val="2B2F36"/>
+                          </a:solidFill>
+                          <a:latin typeface="Calibri"/>
+                        </a:rPr>
+                        <a:t>168</a:t>
+                      </a:r>
+                    </a:p>
+                  </a:txBody>
+                  <a:tcPr anchor="ctr">
+                    <a:solidFill>
+                      <a:srgbClr val="FFFFFF"/>
+                    </a:solidFill>
+                  </a:tcPr>
+                </a:tc>
+              </a:tr>
+              <a:tr h="420624">
+                <a:tc>
+                  <a:txBody>
+                    <a:bodyPr/>
+                    <a:lstStyle/>
+                    <a:p>
+                      <a:pPr algn="l"/>
+                      <a:r>
+                        <a:rPr sz="1300" b="0" i="0">
+                          <a:solidFill>
+                            <a:srgbClr val="2B2F36"/>
+                          </a:solidFill>
+                          <a:latin typeface="Calibri"/>
+                        </a:rPr>
+                        <a:t>Website</a:t>
+                      </a:r>
+                    </a:p>
+                  </a:txBody>
+                  <a:tcPr anchor="ctr">
+                    <a:solidFill>
+                      <a:srgbClr val="F1F4F7"/>
+                    </a:solidFill>
+                  </a:tcPr>
+                </a:tc>
+                <a:tc>
+                  <a:txBody>
+                    <a:bodyPr/>
+                    <a:lstStyle/>
+                    <a:p>
+                      <a:pPr algn="r"/>
+                      <a:r>
+                        <a:rPr sz="1300" b="0" i="0">
+                          <a:solidFill>
+                            <a:srgbClr val="2B2F36"/>
+                          </a:solidFill>
+                          <a:latin typeface="Calibri"/>
+                        </a:rPr>
+                        <a:t>28</a:t>
+                      </a:r>
+                    </a:p>
+                  </a:txBody>
+                  <a:tcPr anchor="ctr">
+                    <a:solidFill>
+                      <a:srgbClr val="F1F4F7"/>
+                    </a:solidFill>
+                  </a:tcPr>
+                </a:tc>
+                <a:tc>
+                  <a:txBody>
+                    <a:bodyPr/>
+                    <a:lstStyle/>
+                    <a:p>
+                      <a:pPr algn="r"/>
+                      <a:r>
+                        <a:rPr sz="1300" b="0" i="0">
+                          <a:solidFill>
+                            <a:srgbClr val="2B2F36"/>
+                          </a:solidFill>
+                          <a:latin typeface="Calibri"/>
+                        </a:rPr>
+                        <a:t>0</a:t>
+                      </a:r>
+                    </a:p>
+                  </a:txBody>
+                  <a:tcPr anchor="ctr">
+                    <a:solidFill>
+                      <a:srgbClr val="F1F4F7"/>
+                    </a:solidFill>
+                  </a:tcPr>
+                </a:tc>
+                <a:tc>
+                  <a:txBody>
+                    <a:bodyPr/>
+                    <a:lstStyle/>
+                    <a:p>
+                      <a:pPr algn="r"/>
+                      <a:r>
+                        <a:rPr sz="1300" b="0" i="0">
+                          <a:solidFill>
+                            <a:srgbClr val="2B2F36"/>
+                          </a:solidFill>
+                          <a:latin typeface="Calibri"/>
+                        </a:rPr>
+                        <a:t>3</a:t>
+                      </a:r>
+                    </a:p>
+                  </a:txBody>
+                  <a:tcPr anchor="ctr">
+                    <a:solidFill>
+                      <a:srgbClr val="F1F4F7"/>
+                    </a:solidFill>
+                  </a:tcPr>
+                </a:tc>
+                <a:tc>
+                  <a:txBody>
+                    <a:bodyPr/>
+                    <a:lstStyle/>
+                    <a:p>
+                      <a:pPr algn="r"/>
+                      <a:r>
+                        <a:rPr sz="1300" b="0" i="0">
+                          <a:solidFill>
+                            <a:srgbClr val="2B2F36"/>
+                          </a:solidFill>
+                          <a:latin typeface="Calibri"/>
+                        </a:rPr>
+                        <a:t>n/a</a:t>
+                      </a:r>
+                    </a:p>
+                  </a:txBody>
+                  <a:tcPr anchor="ctr">
+                    <a:solidFill>
+                      <a:srgbClr val="F1F4F7"/>
+                    </a:solidFill>
+                  </a:tcPr>
+                </a:tc>
+                <a:tc>
+                  <a:txBody>
+                    <a:bodyPr/>
+                    <a:lstStyle/>
+                    <a:p>
+                      <a:pPr algn="r"/>
+                      <a:r>
+                        <a:rPr sz="1300" b="0" i="0">
+                          <a:solidFill>
+                            <a:srgbClr val="2B2F36"/>
+                          </a:solidFill>
+                          <a:latin typeface="Calibri"/>
+                        </a:rPr>
+                        <a:t>112</a:t>
+                      </a:r>
+                    </a:p>
+                  </a:txBody>
+                  <a:tcPr anchor="ctr">
+                    <a:solidFill>
+                      <a:srgbClr val="F1F4F7"/>
+                    </a:solidFill>
+                  </a:tcPr>
+                </a:tc>
+              </a:tr>
+              <a:tr h="420624">
+                <a:tc>
+                  <a:txBody>
+                    <a:bodyPr/>
+                    <a:lstStyle/>
+                    <a:p>
+                      <a:pPr algn="l"/>
+                      <a:r>
+                        <a:rPr sz="1300" b="0" i="0">
+                          <a:solidFill>
+                            <a:srgbClr val="2B2F36"/>
+                          </a:solidFill>
+                          <a:latin typeface="Calibri"/>
+                        </a:rPr>
+                        <a:t>Ads</a:t>
+                      </a:r>
+                    </a:p>
+                  </a:txBody>
+                  <a:tcPr anchor="ctr">
+                    <a:solidFill>
+                      <a:srgbClr val="FFFFFF"/>
+                    </a:solidFill>
+                  </a:tcPr>
+                </a:tc>
+                <a:tc>
+                  <a:txBody>
+                    <a:bodyPr/>
+                    <a:lstStyle/>
+                    <a:p>
+                      <a:pPr algn="r"/>
+                      <a:r>
+                        <a:rPr sz="1300" b="0" i="0">
+                          <a:solidFill>
+                            <a:srgbClr val="2B2F36"/>
+                          </a:solidFill>
+                          <a:latin typeface="Calibri"/>
+                        </a:rPr>
+                        <a:t>29</a:t>
+                      </a:r>
+                    </a:p>
+                  </a:txBody>
+                  <a:tcPr anchor="ctr">
+                    <a:solidFill>
+                      <a:srgbClr val="FFFFFF"/>
+                    </a:solidFill>
+                  </a:tcPr>
+                </a:tc>
+                <a:tc>
+                  <a:txBody>
+                    <a:bodyPr/>
+                    <a:lstStyle/>
+                    <a:p>
+                      <a:pPr algn="r"/>
+                      <a:r>
+                        <a:rPr sz="1300" b="0" i="0">
+                          <a:solidFill>
+                            <a:srgbClr val="2B2F36"/>
+                          </a:solidFill>
+                          <a:latin typeface="Calibri"/>
+                        </a:rPr>
+                        <a:t>0</a:t>
+                      </a:r>
+                    </a:p>
+                  </a:txBody>
+                  <a:tcPr anchor="ctr">
+                    <a:solidFill>
+                      <a:srgbClr val="FFFFFF"/>
+                    </a:solidFill>
+                  </a:tcPr>
+                </a:tc>
+                <a:tc>
+                  <a:txBody>
+                    <a:bodyPr/>
+                    <a:lstStyle/>
+                    <a:p>
+                      <a:pPr algn="r"/>
+                      <a:r>
+                        <a:rPr sz="1300" b="0" i="0">
+                          <a:solidFill>
+                            <a:srgbClr val="2B2F36"/>
+                          </a:solidFill>
+                          <a:latin typeface="Calibri"/>
+                        </a:rPr>
+                        <a:t>2</a:t>
+                      </a:r>
+                    </a:p>
+                  </a:txBody>
+                  <a:tcPr anchor="ctr">
+                    <a:solidFill>
+                      <a:srgbClr val="FFFFFF"/>
+                    </a:solidFill>
+                  </a:tcPr>
+                </a:tc>
+                <a:tc>
+                  <a:txBody>
+                    <a:bodyPr/>
+                    <a:lstStyle/>
+                    <a:p>
+                      <a:pPr algn="r"/>
+                      <a:r>
+                        <a:rPr sz="1300" b="0" i="0">
+                          <a:solidFill>
+                            <a:srgbClr val="2B2F36"/>
+                          </a:solidFill>
+                          <a:latin typeface="Calibri"/>
+                        </a:rPr>
+                        <a:t>6</a:t>
+                      </a:r>
+                    </a:p>
+                  </a:txBody>
+                  <a:tcPr anchor="ctr">
+                    <a:solidFill>
+                      <a:srgbClr val="FFFFFF"/>
+                    </a:solidFill>
+                  </a:tcPr>
+                </a:tc>
+                <a:tc>
+                  <a:txBody>
+                    <a:bodyPr/>
+                    <a:lstStyle/>
+                    <a:p>
+                      <a:pPr algn="r"/>
+                      <a:r>
+                        <a:rPr sz="1300" b="0" i="0">
+                          <a:solidFill>
+                            <a:srgbClr val="2B2F36"/>
+                          </a:solidFill>
+                          <a:latin typeface="Calibri"/>
+                        </a:rPr>
+                        <a:t>141</a:t>
+                      </a:r>
+                    </a:p>
+                  </a:txBody>
+                  <a:tcPr anchor="ctr">
+                    <a:solidFill>
+                      <a:srgbClr val="FFFFFF"/>
+                    </a:solidFill>
+                  </a:tcPr>
+                </a:tc>
+              </a:tr>
+              <a:tr h="420624">
+                <a:tc>
+                  <a:txBody>
+                    <a:bodyPr/>
+                    <a:lstStyle/>
+                    <a:p>
+                      <a:pPr algn="l"/>
+                      <a:r>
+                        <a:rPr sz="1300" b="0" i="0">
+                          <a:solidFill>
+                            <a:srgbClr val="2B2F36"/>
+                          </a:solidFill>
+                          <a:latin typeface="Calibri"/>
+                        </a:rPr>
+                        <a:t>Search</a:t>
+                      </a:r>
+                    </a:p>
+                  </a:txBody>
+                  <a:tcPr anchor="ctr">
+                    <a:solidFill>
+                      <a:srgbClr val="F1F4F7"/>
+                    </a:solidFill>
+                  </a:tcPr>
+                </a:tc>
+                <a:tc>
+                  <a:txBody>
+                    <a:bodyPr/>
+                    <a:lstStyle/>
+                    <a:p>
+                      <a:pPr algn="r"/>
+                      <a:r>
+                        <a:rPr sz="1300" b="0" i="0">
+                          <a:solidFill>
+                            <a:srgbClr val="2B2F36"/>
+                          </a:solidFill>
+                          <a:latin typeface="Calibri"/>
+                        </a:rPr>
+                        <a:t>29</a:t>
+                      </a:r>
+                    </a:p>
+                  </a:txBody>
+                  <a:tcPr anchor="ctr">
+                    <a:solidFill>
+                      <a:srgbClr val="F1F4F7"/>
+                    </a:solidFill>
+                  </a:tcPr>
+                </a:tc>
+                <a:tc>
+                  <a:txBody>
+                    <a:bodyPr/>
+                    <a:lstStyle/>
+                    <a:p>
+                      <a:pPr algn="r"/>
+                      <a:r>
+                        <a:rPr sz="1300" b="0" i="0">
+                          <a:solidFill>
+                            <a:srgbClr val="2B2F36"/>
+                          </a:solidFill>
+                          <a:latin typeface="Calibri"/>
+                        </a:rPr>
+                        <a:t>0</a:t>
+                      </a:r>
+                    </a:p>
+                  </a:txBody>
+                  <a:tcPr anchor="ctr">
+                    <a:solidFill>
+                      <a:srgbClr val="F1F4F7"/>
+                    </a:solidFill>
+                  </a:tcPr>
+                </a:tc>
+                <a:tc>
+                  <a:txBody>
+                    <a:bodyPr/>
+                    <a:lstStyle/>
+                    <a:p>
+                      <a:pPr algn="r"/>
+                      <a:r>
+                        <a:rPr sz="1300" b="0" i="0">
+                          <a:solidFill>
+                            <a:srgbClr val="2B2F36"/>
+                          </a:solidFill>
+                          <a:latin typeface="Calibri"/>
+                        </a:rPr>
+                        <a:t>2</a:t>
+                      </a:r>
+                    </a:p>
+                  </a:txBody>
+                  <a:tcPr anchor="ctr">
+                    <a:solidFill>
+                      <a:srgbClr val="F1F4F7"/>
+                    </a:solidFill>
+                  </a:tcPr>
+                </a:tc>
+                <a:tc>
+                  <a:txBody>
+                    <a:bodyPr/>
+                    <a:lstStyle/>
+                    <a:p>
+                      <a:pPr algn="r"/>
+                      <a:r>
+                        <a:rPr sz="1300" b="0" i="0">
+                          <a:solidFill>
+                            <a:srgbClr val="2B2F36"/>
+                          </a:solidFill>
+                          <a:latin typeface="Calibri"/>
+                        </a:rPr>
+                        <a:t>2</a:t>
+                      </a:r>
+                    </a:p>
+                  </a:txBody>
+                  <a:tcPr anchor="ctr">
+                    <a:solidFill>
+                      <a:srgbClr val="F1F4F7"/>
+                    </a:solidFill>
+                  </a:tcPr>
+                </a:tc>
+                <a:tc>
+                  <a:txBody>
+                    <a:bodyPr/>
+                    <a:lstStyle/>
+                    <a:p>
+                      <a:pPr algn="r"/>
+                      <a:r>
+                        <a:rPr sz="1300" b="0" i="0">
+                          <a:solidFill>
+                            <a:srgbClr val="2B2F36"/>
+                          </a:solidFill>
+                          <a:latin typeface="Calibri"/>
+                        </a:rPr>
+                        <a:t>87</a:t>
+                      </a:r>
+                    </a:p>
+                  </a:txBody>
+                  <a:tcPr anchor="ctr">
+                    <a:solidFill>
+                      <a:srgbClr val="F1F4F7"/>
+                    </a:solidFill>
+                  </a:tcPr>
+                </a:tc>
+              </a:tr>
+            </a:tbl>
+          </a:graphicData>
+        </a:graphic>
+      </p:graphicFrame>
+      <p:sp>
+        <p:nvSpPr>
+          <p:cNvPr id="4" name="TextBox 3"/>
+          <p:cNvSpPr txBox="1"/>
+          <p:nvPr/>
+        </p:nvSpPr>
+        <p:spPr>
+          <a:xfrm>
+            <a:off x="548640" y="3611880"/>
+            <a:ext cx="11094415" cy="2194560"/>
+          </a:xfrm>
+          <a:prstGeom prst="rect">
+            <a:avLst/>
+          </a:prstGeom>
+          <a:noFill/>
+        </p:spPr>
+        <p:txBody>
+          <a:bodyPr wrap="square">
+            <a:spAutoFit/>
+          </a:bodyPr>
+          <a:lstStyle/>
+          <a:p>
+            <a:pPr>
+              <a:spcAft>
+                <a:spcPts val="200"/>
+              </a:spcAft>
+            </a:pPr>
+            <a:r>
+              <a:rPr sz="1200" b="0" i="0">
+                <a:solidFill>
+                  <a:srgbClr val="2B2F36"/>
+                </a:solidFill>
+                <a:latin typeface="Calibri"/>
+              </a:rPr>
+              <a:t>Days with no data in October, store: Oct 14, Oct 15.</a:t>
+            </a:r>
+          </a:p>
+          <a:p>
+            <a:pPr>
+              <a:spcAft>
+                <a:spcPts val="200"/>
+              </a:spcAft>
+            </a:pPr>
+            <a:r>
+              <a:rPr sz="1200" b="0" i="0">
+                <a:solidFill>
+                  <a:srgbClr val="2B2F36"/>
+                </a:solidFill>
+                <a:latin typeface="Calibri"/>
+              </a:rPr>
+              <a:t>Days with no data in October, website: Oct 3, Oct 4, Oct 5.</a:t>
+            </a:r>
+          </a:p>
+          <a:p>
+            <a:pPr>
+              <a:spcAft>
+                <a:spcPts val="200"/>
+              </a:spcAft>
+            </a:pPr>
+            <a:r>
+              <a:rPr sz="1200" b="0" i="0">
+                <a:solidFill>
+                  <a:srgbClr val="2B2F36"/>
+                </a:solidFill>
+                <a:latin typeface="Calibri"/>
+              </a:rPr>
+              <a:t>Days with no data in October, ads: Oct 20, Oct 21.</a:t>
+            </a:r>
+          </a:p>
+          <a:p>
+            <a:pPr>
+              <a:spcAft>
+                <a:spcPts val="200"/>
+              </a:spcAft>
+            </a:pPr>
+            <a:r>
+              <a:rPr sz="1200" b="0" i="0">
+                <a:solidFill>
+                  <a:srgbClr val="2B2F36"/>
+                </a:solidFill>
+                <a:latin typeface="Calibri"/>
+              </a:rPr>
+              <a:t>Days with no data in October, search: Oct 9, Oct 10.</a:t>
+            </a:r>
+          </a:p>
+          <a:p>
+            <a:pPr>
+              <a:spcAft>
+                <a:spcPts val="200"/>
+              </a:spcAft>
+            </a:pPr>
+            <a:r>
+              <a:rPr sz="1200" b="0" i="0">
+                <a:solidFill>
+                  <a:srgbClr val="2B2F36"/>
+                </a:solidFill>
+                <a:latin typeface="Calibri"/>
+              </a:rPr>
+              <a:t>May still change, ads: Oct 26, Oct 27, Oct 28, Oct 29, Oct 30, Oct 31.</a:t>
+            </a:r>
+          </a:p>
+          <a:p>
+            <a:pPr>
+              <a:spcAft>
+                <a:spcPts val="200"/>
+              </a:spcAft>
+            </a:pPr>
+            <a:r>
+              <a:rPr sz="1200" b="0" i="0">
+                <a:solidFill>
+                  <a:srgbClr val="2B2F36"/>
+                </a:solidFill>
+                <a:latin typeface="Calibri"/>
+              </a:rPr>
+              <a:t>May still change, search: Oct 30, Oct 31.</a:t>
+            </a:r>
+          </a:p>
+          <a:p>
+            <a:pPr>
+              <a:spcAft>
+                <a:spcPts val="200"/>
+              </a:spcAft>
+            </a:pPr>
+            <a:r>
+              <a:rPr sz="1200" b="0" i="0">
+                <a:solidFill>
+                  <a:srgbClr val="2B2F36"/>
+                </a:solidFill>
+                <a:latin typeface="Calibri"/>
+              </a:rPr>
+              <a:t>A month with days missing is understated, so its changes are marked partial.</a:t>
+            </a:r>
+          </a:p>
+        </p:txBody>
+      </p:sp>
+      <p:sp>
+        <p:nvSpPr>
+          <p:cNvPr id="5" name="TextBox 4"/>
+          <p:cNvSpPr txBox="1"/>
+          <p:nvPr/>
+        </p:nvSpPr>
+        <p:spPr>
+          <a:xfrm>
+            <a:off x="548640" y="5989320"/>
+            <a:ext cx="11094415" cy="731520"/>
+          </a:xfrm>
+          <a:prstGeom prst="rect">
+            <a:avLst/>
+          </a:prstGeom>
+          <a:noFill/>
+        </p:spPr>
+        <p:txBody>
+          <a:bodyPr wrap="square">
+            <a:spAutoFit/>
+          </a:bodyPr>
+          <a:lstStyle/>
+          <a:p>
+            <a:pPr>
+              <a:spcAft>
+                <a:spcPts val="0"/>
+              </a:spcAft>
+            </a:pPr>
+            <a:r>
+              <a:rPr sz="1100" b="0" i="0">
+                <a:solidFill>
+                  <a:srgbClr val="5B6470"/>
+                </a:solidFill>
+                <a:latin typeface="Calibri"/>
+              </a:rPr>
+              <a:t>For each source, days with data, days with nothing to report and days with no data add up to the days in the month.</a:t>
+            </a:r>
+          </a:p>
+          <a:p>
+            <a:pPr>
+              <a:spcAft>
+                <a:spcPts val="0"/>
+              </a:spcAft>
+            </a:pPr>
+            <a:r>
+              <a:rPr sz="1100" b="0" i="0">
+                <a:solidFill>
+                  <a:srgbClr val="5B6470"/>
+                </a:solidFill>
+                <a:latin typeface="Calibri"/>
+              </a:rPr>
+              <a:t>A day with nothing to report is one where a data pull ran and found none. A day with no data is one no data pull covered. A day that may still change is one close to the report date: purchases and search figures are restated for a few days.</a:t>
             </a:r>
           </a:p>
         </p:txBody>
@@ -5518,8 +9401,8 @@
           <p:nvPr/>
         </p:nvGraphicFramePr>
         <p:xfrm>
-          <a:off x="548640" y="1463040"/>
-          <a:ext cx="11094413" cy="3712464"/>
+          <a:off x="548640" y="1325880"/>
+          <a:ext cx="11094412" cy="4206235"/>
         </p:xfrm>
         <a:graphic>
           <a:graphicData uri="http://schemas.openxmlformats.org/drawingml/2006/table">
@@ -5528,14 +9411,14 @@
                 <a:tableStyleId>{5C22544A-7EE6-4342-B048-85BDC9FD1C3A}</a:tableStyleId>
               </a:tblPr>
               <a:tblGrid>
-                <a:gridCol w="2411829"/>
-                <a:gridCol w="1607886"/>
-                <a:gridCol w="1607886"/>
-                <a:gridCol w="1447097"/>
-                <a:gridCol w="1045126"/>
-                <a:gridCol w="2974589"/>
+                <a:gridCol w="1794684"/>
+                <a:gridCol w="1305225"/>
+                <a:gridCol w="1305225"/>
+                <a:gridCol w="1142072"/>
+                <a:gridCol w="815765"/>
+                <a:gridCol w="4731441"/>
               </a:tblGrid>
-              <a:tr h="530352">
+              <a:tr h="382385">
                 <a:tc>
                   <a:txBody>
                     <a:bodyPr/>
@@ -5543,7 +9426,7 @@
                     <a:p>
                       <a:pPr algn="l"/>
                       <a:r>
-                        <a:rPr sz="1400" b="1" i="0">
+                        <a:rPr sz="1200" b="1" i="0">
                           <a:solidFill>
                             <a:srgbClr val="FFFFFF"/>
                           </a:solidFill>
@@ -5566,7 +9449,7 @@
                     <a:p>
                       <a:pPr algn="r"/>
                       <a:r>
-                        <a:rPr sz="1400" b="1" i="0">
+                        <a:rPr sz="1200" b="1" i="0">
                           <a:solidFill>
                             <a:srgbClr val="FFFFFF"/>
                           </a:solidFill>
@@ -5589,7 +9472,7 @@
                     <a:p>
                       <a:pPr algn="r"/>
                       <a:r>
-                        <a:rPr sz="1400" b="1" i="0">
+                        <a:rPr sz="1200" b="1" i="0">
                           <a:solidFill>
                             <a:srgbClr val="FFFFFF"/>
                           </a:solidFill>
@@ -5612,7 +9495,7 @@
                     <a:p>
                       <a:pPr algn="r"/>
                       <a:r>
-                        <a:rPr sz="1400" b="1" i="0">
+                        <a:rPr sz="1200" b="1" i="0">
                           <a:solidFill>
                             <a:srgbClr val="FFFFFF"/>
                           </a:solidFill>
@@ -5635,7 +9518,7 @@
                     <a:p>
                       <a:pPr algn="r"/>
                       <a:r>
-                        <a:rPr sz="1400" b="1" i="0">
+                        <a:rPr sz="1200" b="1" i="0">
                           <a:solidFill>
                             <a:srgbClr val="FFFFFF"/>
                           </a:solidFill>
@@ -5658,7 +9541,7 @@
                     <a:p>
                       <a:pPr algn="r"/>
                       <a:r>
-                        <a:rPr sz="1400" b="1" i="0">
+                        <a:rPr sz="1200" b="1" i="0">
                           <a:solidFill>
                             <a:srgbClr val="FFFFFF"/>
                           </a:solidFill>
@@ -5675,7 +9558,7 @@
                   </a:tcPr>
                 </a:tc>
               </a:tr>
-              <a:tr h="530352">
+              <a:tr h="382385">
                 <a:tc>
                   <a:txBody>
                     <a:bodyPr/>
@@ -5683,7 +9566,7 @@
                     <a:p>
                       <a:pPr algn="l"/>
                       <a:r>
-                        <a:rPr sz="1400" b="0" i="0">
+                        <a:rPr sz="1200" b="0" i="0">
                           <a:solidFill>
                             <a:srgbClr val="2B2F36"/>
                           </a:solidFill>
@@ -5706,7 +9589,7 @@
                     <a:p>
                       <a:pPr algn="r"/>
                       <a:r>
-                        <a:rPr sz="1400" b="0" i="0">
+                        <a:rPr sz="1200" b="0" i="0">
                           <a:solidFill>
                             <a:srgbClr val="2B2F36"/>
                           </a:solidFill>
@@ -5729,7 +9612,7 @@
                     <a:p>
                       <a:pPr algn="r"/>
                       <a:r>
-                        <a:rPr sz="1400" b="0" i="0">
+                        <a:rPr sz="1200" b="0" i="0">
                           <a:solidFill>
                             <a:srgbClr val="2B2F36"/>
                           </a:solidFill>
@@ -5752,7 +9635,7 @@
                     <a:p>
                       <a:pPr algn="r"/>
                       <a:r>
-                        <a:rPr sz="1400" b="0" i="0">
+                        <a:rPr sz="1200" b="0" i="0">
                           <a:solidFill>
                             <a:srgbClr val="2B2F36"/>
                           </a:solidFill>
@@ -5775,7 +9658,7 @@
                     <a:p>
                       <a:pPr algn="r"/>
                       <a:r>
-                        <a:rPr sz="1400" b="0" i="0">
+                        <a:rPr sz="1200" b="0" i="0">
                           <a:solidFill>
                             <a:srgbClr val="2B2F36"/>
                           </a:solidFill>
@@ -5798,7 +9681,7 @@
                     <a:p>
                       <a:pPr algn="r"/>
                       <a:r>
-                        <a:rPr sz="1400" b="0" i="0">
+                        <a:rPr sz="1200" b="0" i="0">
                           <a:solidFill>
                             <a:srgbClr val="2B2F36"/>
                           </a:solidFill>
@@ -5815,7 +9698,7 @@
                   </a:tcPr>
                 </a:tc>
               </a:tr>
-              <a:tr h="530352">
+              <a:tr h="382385">
                 <a:tc>
                   <a:txBody>
                     <a:bodyPr/>
@@ -5823,7 +9706,7 @@
                     <a:p>
                       <a:pPr algn="l"/>
                       <a:r>
-                        <a:rPr sz="1400" b="0" i="0">
+                        <a:rPr sz="1200" b="0" i="0">
                           <a:solidFill>
                             <a:srgbClr val="2B2F36"/>
                           </a:solidFill>
@@ -5846,7 +9729,7 @@
                     <a:p>
                       <a:pPr algn="r"/>
                       <a:r>
-                        <a:rPr sz="1400" b="0" i="0">
+                        <a:rPr sz="1200" b="0" i="0">
                           <a:solidFill>
                             <a:srgbClr val="2B2F36"/>
                           </a:solidFill>
@@ -5869,7 +9752,7 @@
                     <a:p>
                       <a:pPr algn="r"/>
                       <a:r>
-                        <a:rPr sz="1400" b="0" i="0">
+                        <a:rPr sz="1200" b="0" i="0">
                           <a:solidFill>
                             <a:srgbClr val="2B2F36"/>
                           </a:solidFill>
@@ -5892,7 +9775,7 @@
                     <a:p>
                       <a:pPr algn="r"/>
                       <a:r>
-                        <a:rPr sz="1400" b="0" i="0">
+                        <a:rPr sz="1200" b="0" i="0">
                           <a:solidFill>
                             <a:srgbClr val="2B2F36"/>
                           </a:solidFill>
@@ -5915,7 +9798,7 @@
                     <a:p>
                       <a:pPr algn="r"/>
                       <a:r>
-                        <a:rPr sz="1400" b="0" i="0">
+                        <a:rPr sz="1200" b="0" i="0">
                           <a:solidFill>
                             <a:srgbClr val="2B2F36"/>
                           </a:solidFill>
@@ -5938,7 +9821,7 @@
                     <a:p>
                       <a:pPr algn="r"/>
                       <a:r>
-                        <a:rPr sz="1400" b="0" i="0">
+                        <a:rPr sz="1200" b="0" i="0">
                           <a:solidFill>
                             <a:srgbClr val="2B2F36"/>
                           </a:solidFill>
@@ -5955,7 +9838,7 @@
                   </a:tcPr>
                 </a:tc>
               </a:tr>
-              <a:tr h="530352">
+              <a:tr h="382385">
                 <a:tc>
                   <a:txBody>
                     <a:bodyPr/>
@@ -5963,7 +9846,7 @@
                     <a:p>
                       <a:pPr algn="l"/>
                       <a:r>
-                        <a:rPr sz="1400" b="0" i="0">
+                        <a:rPr sz="1200" b="0" i="0">
                           <a:solidFill>
                             <a:srgbClr val="2B2F36"/>
                           </a:solidFill>
@@ -5986,7 +9869,7 @@
                     <a:p>
                       <a:pPr algn="r"/>
                       <a:r>
-                        <a:rPr sz="1400" b="0" i="0">
+                        <a:rPr sz="1200" b="0" i="0">
                           <a:solidFill>
                             <a:srgbClr val="2B2F36"/>
                           </a:solidFill>
@@ -6009,7 +9892,7 @@
                     <a:p>
                       <a:pPr algn="r"/>
                       <a:r>
-                        <a:rPr sz="1400" b="0" i="0">
+                        <a:rPr sz="1200" b="0" i="0">
                           <a:solidFill>
                             <a:srgbClr val="2B2F36"/>
                           </a:solidFill>
@@ -6032,7 +9915,7 @@
                     <a:p>
                       <a:pPr algn="r"/>
                       <a:r>
-                        <a:rPr sz="1400" b="0" i="0">
+                        <a:rPr sz="1200" b="0" i="0">
                           <a:solidFill>
                             <a:srgbClr val="2B2F36"/>
                           </a:solidFill>
@@ -6055,7 +9938,7 @@
                     <a:p>
                       <a:pPr algn="r"/>
                       <a:r>
-                        <a:rPr sz="1400" b="0" i="0">
+                        <a:rPr sz="1200" b="0" i="0">
                           <a:solidFill>
                             <a:srgbClr val="2B2F36"/>
                           </a:solidFill>
@@ -6078,7 +9961,7 @@
                     <a:p>
                       <a:pPr algn="r"/>
                       <a:r>
-                        <a:rPr sz="1400" b="0" i="0">
+                        <a:rPr sz="1200" b="0" i="0">
                           <a:solidFill>
                             <a:srgbClr val="2B2F36"/>
                           </a:solidFill>
@@ -6095,7 +9978,7 @@
                   </a:tcPr>
                 </a:tc>
               </a:tr>
-              <a:tr h="530352">
+              <a:tr h="382385">
                 <a:tc>
                   <a:txBody>
                     <a:bodyPr/>
@@ -6103,7 +9986,7 @@
                     <a:p>
                       <a:pPr algn="l"/>
                       <a:r>
-                        <a:rPr sz="1400" b="0" i="0">
+                        <a:rPr sz="1200" b="0" i="0">
                           <a:solidFill>
                             <a:srgbClr val="2B2F36"/>
                           </a:solidFill>
@@ -6126,7 +10009,7 @@
                     <a:p>
                       <a:pPr algn="r"/>
                       <a:r>
-                        <a:rPr sz="1400" b="0" i="0">
+                        <a:rPr sz="1200" b="0" i="0">
                           <a:solidFill>
                             <a:srgbClr val="2B2F36"/>
                           </a:solidFill>
@@ -6149,7 +10032,7 @@
                     <a:p>
                       <a:pPr algn="r"/>
                       <a:r>
-                        <a:rPr sz="1400" b="0" i="0">
+                        <a:rPr sz="1200" b="0" i="0">
                           <a:solidFill>
                             <a:srgbClr val="2B2F36"/>
                           </a:solidFill>
@@ -6172,7 +10055,7 @@
                     <a:p>
                       <a:pPr algn="r"/>
                       <a:r>
-                        <a:rPr sz="1400" b="0" i="0">
+                        <a:rPr sz="1200" b="0" i="0">
                           <a:solidFill>
                             <a:srgbClr val="2B2F36"/>
                           </a:solidFill>
@@ -6195,7 +10078,7 @@
                     <a:p>
                       <a:pPr algn="r"/>
                       <a:r>
-                        <a:rPr sz="1400" b="0" i="0">
+                        <a:rPr sz="1200" b="0" i="0">
                           <a:solidFill>
                             <a:srgbClr val="2B2F36"/>
                           </a:solidFill>
@@ -6218,7 +10101,7 @@
                     <a:p>
                       <a:pPr algn="r"/>
                       <a:r>
-                        <a:rPr sz="1400" b="0" i="0">
+                        <a:rPr sz="1200" b="0" i="0">
                           <a:solidFill>
                             <a:srgbClr val="2B2F36"/>
                           </a:solidFill>
@@ -6235,7 +10118,7 @@
                   </a:tcPr>
                 </a:tc>
               </a:tr>
-              <a:tr h="530352">
+              <a:tr h="382385">
                 <a:tc>
                   <a:txBody>
                     <a:bodyPr/>
@@ -6243,7 +10126,7 @@
                     <a:p>
                       <a:pPr algn="l"/>
                       <a:r>
-                        <a:rPr sz="1400" b="0" i="0">
+                        <a:rPr sz="1200" b="0" i="0">
                           <a:solidFill>
                             <a:srgbClr val="2B2F36"/>
                           </a:solidFill>
@@ -6266,7 +10149,7 @@
                     <a:p>
                       <a:pPr algn="r"/>
                       <a:r>
-                        <a:rPr sz="1400" b="0" i="0">
+                        <a:rPr sz="1200" b="0" i="0">
                           <a:solidFill>
                             <a:srgbClr val="2B2F36"/>
                           </a:solidFill>
@@ -6289,7 +10172,7 @@
                     <a:p>
                       <a:pPr algn="r"/>
                       <a:r>
-                        <a:rPr sz="1400" b="0" i="0">
+                        <a:rPr sz="1200" b="0" i="0">
                           <a:solidFill>
                             <a:srgbClr val="2B2F36"/>
                           </a:solidFill>
@@ -6312,7 +10195,7 @@
                     <a:p>
                       <a:pPr algn="r"/>
                       <a:r>
-                        <a:rPr sz="1400" b="0" i="0">
+                        <a:rPr sz="1200" b="0" i="0">
                           <a:solidFill>
                             <a:srgbClr val="2B2F36"/>
                           </a:solidFill>
@@ -6335,7 +10218,7 @@
                     <a:p>
                       <a:pPr algn="r"/>
                       <a:r>
-                        <a:rPr sz="1400" b="0" i="0">
+                        <a:rPr sz="1200" b="0" i="0">
                           <a:solidFill>
                             <a:srgbClr val="2B2F36"/>
                           </a:solidFill>
@@ -6358,7 +10241,7 @@
                     <a:p>
                       <a:pPr algn="r"/>
                       <a:r>
-                        <a:rPr sz="1400" b="0" i="0">
+                        <a:rPr sz="1200" b="0" i="0">
                           <a:solidFill>
                             <a:srgbClr val="2B2F36"/>
                           </a:solidFill>
@@ -6375,7 +10258,7 @@
                   </a:tcPr>
                 </a:tc>
               </a:tr>
-              <a:tr h="530352">
+              <a:tr h="382385">
                 <a:tc>
                   <a:txBody>
                     <a:bodyPr/>
@@ -6383,7 +10266,7 @@
                     <a:p>
                       <a:pPr algn="l"/>
                       <a:r>
-                        <a:rPr sz="1400" b="0" i="0">
+                        <a:rPr sz="1200" b="0" i="0">
                           <a:solidFill>
                             <a:srgbClr val="2B2F36"/>
                           </a:solidFill>
@@ -6406,7 +10289,7 @@
                     <a:p>
                       <a:pPr algn="r"/>
                       <a:r>
-                        <a:rPr sz="1400" b="0" i="0">
+                        <a:rPr sz="1200" b="0" i="0">
                           <a:solidFill>
                             <a:srgbClr val="2B2F36"/>
                           </a:solidFill>
@@ -6429,7 +10312,7 @@
                     <a:p>
                       <a:pPr algn="r"/>
                       <a:r>
-                        <a:rPr sz="1400" b="0" i="0">
+                        <a:rPr sz="1200" b="0" i="0">
                           <a:solidFill>
                             <a:srgbClr val="2B2F36"/>
                           </a:solidFill>
@@ -6452,7 +10335,7 @@
                     <a:p>
                       <a:pPr algn="r"/>
                       <a:r>
-                        <a:rPr sz="1400" b="0" i="0">
+                        <a:rPr sz="1200" b="0" i="0">
                           <a:solidFill>
                             <a:srgbClr val="2B2F36"/>
                           </a:solidFill>
@@ -6475,7 +10358,7 @@
                     <a:p>
                       <a:pPr algn="r"/>
                       <a:r>
-                        <a:rPr sz="1400" b="0" i="0">
+                        <a:rPr sz="1200" b="0" i="0">
                           <a:solidFill>
                             <a:srgbClr val="2B2F36"/>
                           </a:solidFill>
@@ -6498,13 +10381,573 @@
                     <a:p>
                       <a:pPr algn="r"/>
                       <a:r>
-                        <a:rPr sz="1400" b="0" i="0">
+                        <a:rPr sz="1200" b="0" i="0">
                           <a:solidFill>
                             <a:srgbClr val="2B2F36"/>
                           </a:solidFill>
                           <a:latin typeface="Calibri"/>
                         </a:rPr>
                         <a:t>October partial: 2 days missing</a:t>
+                      </a:r>
+                    </a:p>
+                  </a:txBody>
+                  <a:tcPr anchor="ctr">
+                    <a:solidFill>
+                      <a:srgbClr val="F1F4F7"/>
+                    </a:solidFill>
+                  </a:tcPr>
+                </a:tc>
+              </a:tr>
+              <a:tr h="382385">
+                <a:tc>
+                  <a:txBody>
+                    <a:bodyPr/>
+                    <a:lstStyle/>
+                    <a:p>
+                      <a:pPr algn="l"/>
+                      <a:r>
+                        <a:rPr sz="1200" b="0" i="0">
+                          <a:solidFill>
+                            <a:srgbClr val="2B2F36"/>
+                          </a:solidFill>
+                          <a:latin typeface="Calibri"/>
+                        </a:rPr>
+                        <a:t>Ad spend</a:t>
+                      </a:r>
+                    </a:p>
+                  </a:txBody>
+                  <a:tcPr anchor="ctr">
+                    <a:solidFill>
+                      <a:srgbClr val="FFFFFF"/>
+                    </a:solidFill>
+                  </a:tcPr>
+                </a:tc>
+                <a:tc>
+                  <a:txBody>
+                    <a:bodyPr/>
+                    <a:lstStyle/>
+                    <a:p>
+                      <a:pPr algn="r"/>
+                      <a:r>
+                        <a:rPr sz="1200" b="0" i="0">
+                          <a:solidFill>
+                            <a:srgbClr val="2B2F36"/>
+                          </a:solidFill>
+                          <a:latin typeface="Calibri"/>
+                        </a:rPr>
+                        <a:t>EUR 6,215.05</a:t>
+                      </a:r>
+                    </a:p>
+                  </a:txBody>
+                  <a:tcPr anchor="ctr">
+                    <a:solidFill>
+                      <a:srgbClr val="FFFFFF"/>
+                    </a:solidFill>
+                  </a:tcPr>
+                </a:tc>
+                <a:tc>
+                  <a:txBody>
+                    <a:bodyPr/>
+                    <a:lstStyle/>
+                    <a:p>
+                      <a:pPr algn="r"/>
+                      <a:r>
+                        <a:rPr sz="1200" b="0" i="0">
+                          <a:solidFill>
+                            <a:srgbClr val="2B2F36"/>
+                          </a:solidFill>
+                          <a:latin typeface="Calibri"/>
+                        </a:rPr>
+                        <a:t>EUR 6,088.26</a:t>
+                      </a:r>
+                    </a:p>
+                  </a:txBody>
+                  <a:tcPr anchor="ctr">
+                    <a:solidFill>
+                      <a:srgbClr val="FFFFFF"/>
+                    </a:solidFill>
+                  </a:tcPr>
+                </a:tc>
+                <a:tc>
+                  <a:txBody>
+                    <a:bodyPr/>
+                    <a:lstStyle/>
+                    <a:p>
+                      <a:pPr algn="r"/>
+                      <a:r>
+                        <a:rPr sz="1200" b="0" i="0">
+                          <a:solidFill>
+                            <a:srgbClr val="2B2F36"/>
+                          </a:solidFill>
+                          <a:latin typeface="Calibri"/>
+                        </a:rPr>
+                        <a:t>+EUR 126.79</a:t>
+                      </a:r>
+                    </a:p>
+                  </a:txBody>
+                  <a:tcPr anchor="ctr">
+                    <a:solidFill>
+                      <a:srgbClr val="FFFFFF"/>
+                    </a:solidFill>
+                  </a:tcPr>
+                </a:tc>
+                <a:tc>
+                  <a:txBody>
+                    <a:bodyPr/>
+                    <a:lstStyle/>
+                    <a:p>
+                      <a:pPr algn="r"/>
+                      <a:r>
+                        <a:rPr sz="1200" b="0" i="0">
+                          <a:solidFill>
+                            <a:srgbClr val="2B2F36"/>
+                          </a:solidFill>
+                          <a:latin typeface="Calibri"/>
+                        </a:rPr>
+                        <a:t>+2.1%</a:t>
+                      </a:r>
+                    </a:p>
+                  </a:txBody>
+                  <a:tcPr anchor="ctr">
+                    <a:solidFill>
+                      <a:srgbClr val="FFFFFF"/>
+                    </a:solidFill>
+                  </a:tcPr>
+                </a:tc>
+                <a:tc>
+                  <a:txBody>
+                    <a:bodyPr/>
+                    <a:lstStyle/>
+                    <a:p>
+                      <a:pPr algn="r"/>
+                      <a:r>
+                        <a:rPr sz="1200" b="0" i="0">
+                          <a:solidFill>
+                            <a:srgbClr val="2B2F36"/>
+                          </a:solidFill>
+                          <a:latin typeface="Calibri"/>
+                        </a:rPr>
+                        <a:t>October: 2 days missing; per reported day up 5.6%</a:t>
+                      </a:r>
+                    </a:p>
+                  </a:txBody>
+                  <a:tcPr anchor="ctr">
+                    <a:solidFill>
+                      <a:srgbClr val="FFFFFF"/>
+                    </a:solidFill>
+                  </a:tcPr>
+                </a:tc>
+              </a:tr>
+              <a:tr h="382385">
+                <a:tc>
+                  <a:txBody>
+                    <a:bodyPr/>
+                    <a:lstStyle/>
+                    <a:p>
+                      <a:pPr algn="l"/>
+                      <a:r>
+                        <a:rPr sz="1200" b="0" i="0">
+                          <a:solidFill>
+                            <a:srgbClr val="2B2F36"/>
+                          </a:solidFill>
+                          <a:latin typeface="Calibri"/>
+                        </a:rPr>
+                        <a:t>Return on ad spend</a:t>
+                      </a:r>
+                    </a:p>
+                  </a:txBody>
+                  <a:tcPr anchor="ctr">
+                    <a:solidFill>
+                      <a:srgbClr val="F1F4F7"/>
+                    </a:solidFill>
+                  </a:tcPr>
+                </a:tc>
+                <a:tc>
+                  <a:txBody>
+                    <a:bodyPr/>
+                    <a:lstStyle/>
+                    <a:p>
+                      <a:pPr algn="r"/>
+                      <a:r>
+                        <a:rPr sz="1200" b="0" i="0">
+                          <a:solidFill>
+                            <a:srgbClr val="2B2F36"/>
+                          </a:solidFill>
+                          <a:latin typeface="Calibri"/>
+                        </a:rPr>
+                        <a:t>2.89</a:t>
+                      </a:r>
+                    </a:p>
+                  </a:txBody>
+                  <a:tcPr anchor="ctr">
+                    <a:solidFill>
+                      <a:srgbClr val="F1F4F7"/>
+                    </a:solidFill>
+                  </a:tcPr>
+                </a:tc>
+                <a:tc>
+                  <a:txBody>
+                    <a:bodyPr/>
+                    <a:lstStyle/>
+                    <a:p>
+                      <a:pPr algn="r"/>
+                      <a:r>
+                        <a:rPr sz="1200" b="0" i="0">
+                          <a:solidFill>
+                            <a:srgbClr val="2B2F36"/>
+                          </a:solidFill>
+                          <a:latin typeface="Calibri"/>
+                        </a:rPr>
+                        <a:t>3.40</a:t>
+                      </a:r>
+                    </a:p>
+                  </a:txBody>
+                  <a:tcPr anchor="ctr">
+                    <a:solidFill>
+                      <a:srgbClr val="F1F4F7"/>
+                    </a:solidFill>
+                  </a:tcPr>
+                </a:tc>
+                <a:tc>
+                  <a:txBody>
+                    <a:bodyPr/>
+                    <a:lstStyle/>
+                    <a:p>
+                      <a:pPr algn="r"/>
+                      <a:r>
+                        <a:rPr sz="1200" b="0" i="0">
+                          <a:solidFill>
+                            <a:srgbClr val="2B2F36"/>
+                          </a:solidFill>
+                          <a:latin typeface="Calibri"/>
+                        </a:rPr>
+                        <a:t>-0.51</a:t>
+                      </a:r>
+                    </a:p>
+                  </a:txBody>
+                  <a:tcPr anchor="ctr">
+                    <a:solidFill>
+                      <a:srgbClr val="F1F4F7"/>
+                    </a:solidFill>
+                  </a:tcPr>
+                </a:tc>
+                <a:tc>
+                  <a:txBody>
+                    <a:bodyPr/>
+                    <a:lstStyle/>
+                    <a:p>
+                      <a:pPr algn="r"/>
+                      <a:r>
+                        <a:rPr sz="1200" b="0" i="0">
+                          <a:solidFill>
+                            <a:srgbClr val="2B2F36"/>
+                          </a:solidFill>
+                          <a:latin typeface="Calibri"/>
+                        </a:rPr>
+                        <a:t>-15.1%</a:t>
+                      </a:r>
+                    </a:p>
+                  </a:txBody>
+                  <a:tcPr anchor="ctr">
+                    <a:solidFill>
+                      <a:srgbClr val="F1F4F7"/>
+                    </a:solidFill>
+                  </a:tcPr>
+                </a:tc>
+                <a:tc>
+                  <a:txBody>
+                    <a:bodyPr/>
+                    <a:lstStyle/>
+                    <a:p>
+                      <a:pPr algn="r"/>
+                      <a:r>
+                        <a:rPr sz="1200" b="0" i="0">
+                          <a:solidFill>
+                            <a:srgbClr val="2B2F36"/>
+                          </a:solidFill>
+                          <a:latin typeface="Calibri"/>
+                        </a:rPr>
+                        <a:t>October: 2 days missing; on 27 of 29 days; last 6 days provisional</a:t>
+                      </a:r>
+                    </a:p>
+                  </a:txBody>
+                  <a:tcPr anchor="ctr">
+                    <a:solidFill>
+                      <a:srgbClr val="F1F4F7"/>
+                    </a:solidFill>
+                  </a:tcPr>
+                </a:tc>
+              </a:tr>
+              <a:tr h="382385">
+                <a:tc>
+                  <a:txBody>
+                    <a:bodyPr/>
+                    <a:lstStyle/>
+                    <a:p>
+                      <a:pPr algn="l"/>
+                      <a:r>
+                        <a:rPr sz="1200" b="0" i="0">
+                          <a:solidFill>
+                            <a:srgbClr val="2B2F36"/>
+                          </a:solidFill>
+                          <a:latin typeface="Calibri"/>
+                        </a:rPr>
+                        <a:t>Search clicks</a:t>
+                      </a:r>
+                    </a:p>
+                  </a:txBody>
+                  <a:tcPr anchor="ctr">
+                    <a:solidFill>
+                      <a:srgbClr val="FFFFFF"/>
+                    </a:solidFill>
+                  </a:tcPr>
+                </a:tc>
+                <a:tc>
+                  <a:txBody>
+                    <a:bodyPr/>
+                    <a:lstStyle/>
+                    <a:p>
+                      <a:pPr algn="r"/>
+                      <a:r>
+                        <a:rPr sz="1200" b="0" i="0">
+                          <a:solidFill>
+                            <a:srgbClr val="2B2F36"/>
+                          </a:solidFill>
+                          <a:latin typeface="Calibri"/>
+                        </a:rPr>
+                        <a:t>4,103</a:t>
+                      </a:r>
+                    </a:p>
+                  </a:txBody>
+                  <a:tcPr anchor="ctr">
+                    <a:solidFill>
+                      <a:srgbClr val="FFFFFF"/>
+                    </a:solidFill>
+                  </a:tcPr>
+                </a:tc>
+                <a:tc>
+                  <a:txBody>
+                    <a:bodyPr/>
+                    <a:lstStyle/>
+                    <a:p>
+                      <a:pPr algn="r"/>
+                      <a:r>
+                        <a:rPr sz="1200" b="0" i="0">
+                          <a:solidFill>
+                            <a:srgbClr val="2B2F36"/>
+                          </a:solidFill>
+                          <a:latin typeface="Calibri"/>
+                        </a:rPr>
+                        <a:t>3,433</a:t>
+                      </a:r>
+                    </a:p>
+                  </a:txBody>
+                  <a:tcPr anchor="ctr">
+                    <a:solidFill>
+                      <a:srgbClr val="FFFFFF"/>
+                    </a:solidFill>
+                  </a:tcPr>
+                </a:tc>
+                <a:tc>
+                  <a:txBody>
+                    <a:bodyPr/>
+                    <a:lstStyle/>
+                    <a:p>
+                      <a:pPr algn="r"/>
+                      <a:r>
+                        <a:rPr sz="1200" b="0" i="0">
+                          <a:solidFill>
+                            <a:srgbClr val="2B2F36"/>
+                          </a:solidFill>
+                          <a:latin typeface="Calibri"/>
+                        </a:rPr>
+                        <a:t>+670</a:t>
+                      </a:r>
+                    </a:p>
+                  </a:txBody>
+                  <a:tcPr anchor="ctr">
+                    <a:solidFill>
+                      <a:srgbClr val="FFFFFF"/>
+                    </a:solidFill>
+                  </a:tcPr>
+                </a:tc>
+                <a:tc>
+                  <a:txBody>
+                    <a:bodyPr/>
+                    <a:lstStyle/>
+                    <a:p>
+                      <a:pPr algn="r"/>
+                      <a:r>
+                        <a:rPr sz="1200" b="0" i="0">
+                          <a:solidFill>
+                            <a:srgbClr val="2B2F36"/>
+                          </a:solidFill>
+                          <a:latin typeface="Calibri"/>
+                        </a:rPr>
+                        <a:t>+19.5%</a:t>
+                      </a:r>
+                    </a:p>
+                  </a:txBody>
+                  <a:tcPr anchor="ctr">
+                    <a:solidFill>
+                      <a:srgbClr val="FFFFFF"/>
+                    </a:solidFill>
+                  </a:tcPr>
+                </a:tc>
+                <a:tc>
+                  <a:txBody>
+                    <a:bodyPr/>
+                    <a:lstStyle/>
+                    <a:p>
+                      <a:pPr algn="r"/>
+                      <a:r>
+                        <a:rPr sz="1200" b="0" i="0">
+                          <a:solidFill>
+                            <a:srgbClr val="2B2F36"/>
+                          </a:solidFill>
+                          <a:latin typeface="Calibri"/>
+                        </a:rPr>
+                        <a:t>October: 2 days missing; per reported day up 23.6%; last 2 days provisional</a:t>
+                      </a:r>
+                    </a:p>
+                  </a:txBody>
+                  <a:tcPr anchor="ctr">
+                    <a:solidFill>
+                      <a:srgbClr val="FFFFFF"/>
+                    </a:solidFill>
+                  </a:tcPr>
+                </a:tc>
+              </a:tr>
+              <a:tr h="382385">
+                <a:tc>
+                  <a:txBody>
+                    <a:bodyPr/>
+                    <a:lstStyle/>
+                    <a:p>
+                      <a:pPr algn="l"/>
+                      <a:r>
+                        <a:rPr sz="1200" b="0" i="0">
+                          <a:solidFill>
+                            <a:srgbClr val="2B2F36"/>
+                          </a:solidFill>
+                          <a:latin typeface="Calibri"/>
+                        </a:rPr>
+                        <a:t>Average position</a:t>
+                      </a:r>
+                    </a:p>
+                  </a:txBody>
+                  <a:tcPr anchor="ctr">
+                    <a:solidFill>
+                      <a:srgbClr val="F1F4F7"/>
+                    </a:solidFill>
+                  </a:tcPr>
+                </a:tc>
+                <a:tc>
+                  <a:txBody>
+                    <a:bodyPr/>
+                    <a:lstStyle/>
+                    <a:p>
+                      <a:pPr algn="r"/>
+                      <a:r>
+                        <a:rPr sz="1200" b="0" i="0">
+                          <a:solidFill>
+                            <a:srgbClr val="2B2F36"/>
+                          </a:solidFill>
+                          <a:latin typeface="Calibri"/>
+                        </a:rPr>
+                        <a:t>8.6</a:t>
+                      </a:r>
+                    </a:p>
+                  </a:txBody>
+                  <a:tcPr anchor="ctr">
+                    <a:solidFill>
+                      <a:srgbClr val="F1F4F7"/>
+                    </a:solidFill>
+                  </a:tcPr>
+                </a:tc>
+                <a:tc>
+                  <a:txBody>
+                    <a:bodyPr/>
+                    <a:lstStyle/>
+                    <a:p>
+                      <a:pPr algn="r"/>
+                      <a:r>
+                        <a:rPr sz="1200" b="0" i="0">
+                          <a:solidFill>
+                            <a:srgbClr val="2B2F36"/>
+                          </a:solidFill>
+                          <a:latin typeface="Calibri"/>
+                        </a:rPr>
+                        <a:t>9.4</a:t>
+                      </a:r>
+                    </a:p>
+                  </a:txBody>
+                  <a:tcPr anchor="ctr">
+                    <a:solidFill>
+                      <a:srgbClr val="F1F4F7"/>
+                    </a:solidFill>
+                  </a:tcPr>
+                </a:tc>
+                <a:tc>
+                  <a:txBody>
+                    <a:bodyPr/>
+                    <a:lstStyle/>
+                    <a:p>
+                      <a:pPr algn="r"/>
+                      <a:r>
+                        <a:rPr sz="1200" b="0" i="0">
+                          <a:solidFill>
+                            <a:srgbClr val="2B2F36"/>
+                          </a:solidFill>
+                          <a:latin typeface="Calibri"/>
+                        </a:rPr>
+                        <a:t>-0.8</a:t>
+                      </a:r>
+                    </a:p>
+                  </a:txBody>
+                  <a:tcPr anchor="ctr">
+                    <a:solidFill>
+                      <a:srgbClr val="F1F4F7"/>
+                    </a:solidFill>
+                  </a:tcPr>
+                </a:tc>
+                <a:tc>
+                  <a:txBody>
+                    <a:bodyPr/>
+                    <a:lstStyle/>
+                    <a:p>
+                      <a:pPr algn="r"/>
+                      <a:r>
+                        <a:rPr sz="1200" b="0" i="0">
+                          <a:solidFill>
+                            <a:srgbClr val="2B2F36"/>
+                          </a:solidFill>
+                          <a:latin typeface="Calibri"/>
+                        </a:rPr>
+                        <a:t>-8.9%</a:t>
+                      </a:r>
+                    </a:p>
+                  </a:txBody>
+                  <a:tcPr anchor="ctr">
+                    <a:solidFill>
+                      <a:srgbClr val="F1F4F7"/>
+                    </a:solidFill>
+                  </a:tcPr>
+                </a:tc>
+                <a:tc>
+                  <a:txBody>
+                    <a:bodyPr/>
+                    <a:lstStyle/>
+                    <a:p>
+                      <a:pPr algn="r"/>
+                      <a:r>
+                        <a:rPr sz="1200" b="0" i="0">
+                          <a:solidFill>
+                            <a:srgbClr val="2B2F36"/>
+                          </a:solidFill>
+                          <a:latin typeface="Calibri"/>
+                        </a:rPr>
+                        <a:t>October: 2 days missing; last 2 days provisional</a:t>
                       </a:r>
                     </a:p>
                   </a:txBody>
@@ -6554,6 +10997,22 @@
                 <a:latin typeface="Calibri"/>
               </a:rPr>
               <a:t>Source: the store's daily order records.</a:t>
+            </a:r>
+          </a:p>
+          <a:p>
+            <a:pPr>
+              <a:spcAft>
+                <a:spcPts val="0"/>
+              </a:spcAft>
+            </a:pPr>
+            <a:r>
+              <a:rPr sz="1100" b="0" i="0">
+                <a:solidFill>
+                  <a:srgbClr val="5B6470"/>
+                </a:solidFill>
+                <a:latin typeface="Calibri"/>
+              </a:rPr>
+              <a:t>Ad rows: Meta, in the ad account's currency (EUR), purchases in a 7 day click window. Search rows: Search Console, Pacific time, a lower position is nearer the top.</a:t>
             </a:r>
           </a:p>
           <a:p>
@@ -9586,213 +14045,924 @@
                 </a:solidFill>
                 <a:latin typeface="Calibri"/>
               </a:rPr>
-              <a:t>October refunds total is 27.1% above September, but October is missing 2 days: per reported day it is up 31.5%</a:t>
+              <a:t>October ad spend total is 2.1% above September, but October is missing 2 days of ad data: per reported day it is up 5.6%</a:t>
             </a:r>
           </a:p>
         </p:txBody>
       </p:sp>
+      <p:graphicFrame>
+        <p:nvGraphicFramePr>
+          <p:cNvPr id="3" name="Table 2"/>
+          <p:cNvGraphicFramePr>
+            <a:graphicFrameLocks noGrp="1"/>
+          </p:cNvGraphicFramePr>
+          <p:nvPr/>
+        </p:nvGraphicFramePr>
+        <p:xfrm>
+          <a:off x="548640" y="1371600"/>
+          <a:ext cx="5394958" cy="3785616"/>
+        </p:xfrm>
+        <a:graphic>
+          <a:graphicData uri="http://schemas.openxmlformats.org/drawingml/2006/table">
+            <a:tbl>
+              <a:tblPr firstRow="1" bandRow="1">
+                <a:tableStyleId>{5C22544A-7EE6-4342-B048-85BDC9FD1C3A}</a:tableStyleId>
+              </a:tblPr>
+              <a:tblGrid>
+                <a:gridCol w="1892262"/>
+                <a:gridCol w="1328609"/>
+                <a:gridCol w="1328609"/>
+                <a:gridCol w="845478"/>
+              </a:tblGrid>
+              <a:tr h="420624">
+                <a:tc>
+                  <a:txBody>
+                    <a:bodyPr/>
+                    <a:lstStyle/>
+                    <a:p>
+                      <a:pPr algn="l"/>
+                      <a:r>
+                        <a:rPr sz="1200" b="1" i="0">
+                          <a:solidFill>
+                            <a:srgbClr val="FFFFFF"/>
+                          </a:solidFill>
+                          <a:latin typeface="Calibri"/>
+                        </a:rPr>
+                        <a:t>Metric</a:t>
+                      </a:r>
+                    </a:p>
+                  </a:txBody>
+                  <a:tcPr anchor="ctr">
+                    <a:solidFill>
+                      <a:srgbClr val="1F3A5F"/>
+                    </a:solidFill>
+                  </a:tcPr>
+                </a:tc>
+                <a:tc>
+                  <a:txBody>
+                    <a:bodyPr/>
+                    <a:lstStyle/>
+                    <a:p>
+                      <a:pPr algn="r"/>
+                      <a:r>
+                        <a:rPr sz="1200" b="1" i="0">
+                          <a:solidFill>
+                            <a:srgbClr val="FFFFFF"/>
+                          </a:solidFill>
+                          <a:latin typeface="Calibri"/>
+                        </a:rPr>
+                        <a:t>October</a:t>
+                      </a:r>
+                    </a:p>
+                  </a:txBody>
+                  <a:tcPr anchor="ctr">
+                    <a:solidFill>
+                      <a:srgbClr val="1F3A5F"/>
+                    </a:solidFill>
+                  </a:tcPr>
+                </a:tc>
+                <a:tc>
+                  <a:txBody>
+                    <a:bodyPr/>
+                    <a:lstStyle/>
+                    <a:p>
+                      <a:pPr algn="r"/>
+                      <a:r>
+                        <a:rPr sz="1200" b="1" i="0">
+                          <a:solidFill>
+                            <a:srgbClr val="FFFFFF"/>
+                          </a:solidFill>
+                          <a:latin typeface="Calibri"/>
+                        </a:rPr>
+                        <a:t>September</a:t>
+                      </a:r>
+                    </a:p>
+                  </a:txBody>
+                  <a:tcPr anchor="ctr">
+                    <a:solidFill>
+                      <a:srgbClr val="1F3A5F"/>
+                    </a:solidFill>
+                  </a:tcPr>
+                </a:tc>
+                <a:tc>
+                  <a:txBody>
+                    <a:bodyPr/>
+                    <a:lstStyle/>
+                    <a:p>
+                      <a:pPr algn="r"/>
+                      <a:r>
+                        <a:rPr sz="1200" b="1" i="0">
+                          <a:solidFill>
+                            <a:srgbClr val="FFFFFF"/>
+                          </a:solidFill>
+                          <a:latin typeface="Calibri"/>
+                        </a:rPr>
+                        <a:t>Change %</a:t>
+                      </a:r>
+                    </a:p>
+                  </a:txBody>
+                  <a:tcPr anchor="ctr">
+                    <a:solidFill>
+                      <a:srgbClr val="1F3A5F"/>
+                    </a:solidFill>
+                  </a:tcPr>
+                </a:tc>
+              </a:tr>
+              <a:tr h="420624">
+                <a:tc>
+                  <a:txBody>
+                    <a:bodyPr/>
+                    <a:lstStyle/>
+                    <a:p>
+                      <a:pPr algn="l"/>
+                      <a:r>
+                        <a:rPr sz="1200" b="0" i="0">
+                          <a:solidFill>
+                            <a:srgbClr val="2B2F36"/>
+                          </a:solidFill>
+                          <a:latin typeface="Calibri"/>
+                        </a:rPr>
+                        <a:t>Ad spend</a:t>
+                      </a:r>
+                    </a:p>
+                  </a:txBody>
+                  <a:tcPr anchor="ctr">
+                    <a:solidFill>
+                      <a:srgbClr val="FFFFFF"/>
+                    </a:solidFill>
+                  </a:tcPr>
+                </a:tc>
+                <a:tc>
+                  <a:txBody>
+                    <a:bodyPr/>
+                    <a:lstStyle/>
+                    <a:p>
+                      <a:pPr algn="r"/>
+                      <a:r>
+                        <a:rPr sz="1200" b="0" i="0">
+                          <a:solidFill>
+                            <a:srgbClr val="2B2F36"/>
+                          </a:solidFill>
+                          <a:latin typeface="Calibri"/>
+                        </a:rPr>
+                        <a:t>EUR 6,215.05</a:t>
+                      </a:r>
+                    </a:p>
+                  </a:txBody>
+                  <a:tcPr anchor="ctr">
+                    <a:solidFill>
+                      <a:srgbClr val="FFFFFF"/>
+                    </a:solidFill>
+                  </a:tcPr>
+                </a:tc>
+                <a:tc>
+                  <a:txBody>
+                    <a:bodyPr/>
+                    <a:lstStyle/>
+                    <a:p>
+                      <a:pPr algn="r"/>
+                      <a:r>
+                        <a:rPr sz="1200" b="0" i="0">
+                          <a:solidFill>
+                            <a:srgbClr val="2B2F36"/>
+                          </a:solidFill>
+                          <a:latin typeface="Calibri"/>
+                        </a:rPr>
+                        <a:t>EUR 6,088.26</a:t>
+                      </a:r>
+                    </a:p>
+                  </a:txBody>
+                  <a:tcPr anchor="ctr">
+                    <a:solidFill>
+                      <a:srgbClr val="FFFFFF"/>
+                    </a:solidFill>
+                  </a:tcPr>
+                </a:tc>
+                <a:tc>
+                  <a:txBody>
+                    <a:bodyPr/>
+                    <a:lstStyle/>
+                    <a:p>
+                      <a:pPr algn="r"/>
+                      <a:r>
+                        <a:rPr sz="1200" b="0" i="0">
+                          <a:solidFill>
+                            <a:srgbClr val="2B2F36"/>
+                          </a:solidFill>
+                          <a:latin typeface="Calibri"/>
+                        </a:rPr>
+                        <a:t>+2.1%</a:t>
+                      </a:r>
+                    </a:p>
+                  </a:txBody>
+                  <a:tcPr anchor="ctr">
+                    <a:solidFill>
+                      <a:srgbClr val="FFFFFF"/>
+                    </a:solidFill>
+                  </a:tcPr>
+                </a:tc>
+              </a:tr>
+              <a:tr h="420624">
+                <a:tc>
+                  <a:txBody>
+                    <a:bodyPr/>
+                    <a:lstStyle/>
+                    <a:p>
+                      <a:pPr algn="l"/>
+                      <a:r>
+                        <a:rPr sz="1200" b="0" i="0">
+                          <a:solidFill>
+                            <a:srgbClr val="2B2F36"/>
+                          </a:solidFill>
+                          <a:latin typeface="Calibri"/>
+                        </a:rPr>
+                        <a:t>Impressions</a:t>
+                      </a:r>
+                    </a:p>
+                  </a:txBody>
+                  <a:tcPr anchor="ctr">
+                    <a:solidFill>
+                      <a:srgbClr val="F1F4F7"/>
+                    </a:solidFill>
+                  </a:tcPr>
+                </a:tc>
+                <a:tc>
+                  <a:txBody>
+                    <a:bodyPr/>
+                    <a:lstStyle/>
+                    <a:p>
+                      <a:pPr algn="r"/>
+                      <a:r>
+                        <a:rPr sz="1200" b="0" i="0">
+                          <a:solidFill>
+                            <a:srgbClr val="2B2F36"/>
+                          </a:solidFill>
+                          <a:latin typeface="Calibri"/>
+                        </a:rPr>
+                        <a:t>431,757</a:t>
+                      </a:r>
+                    </a:p>
+                  </a:txBody>
+                  <a:tcPr anchor="ctr">
+                    <a:solidFill>
+                      <a:srgbClr val="F1F4F7"/>
+                    </a:solidFill>
+                  </a:tcPr>
+                </a:tc>
+                <a:tc>
+                  <a:txBody>
+                    <a:bodyPr/>
+                    <a:lstStyle/>
+                    <a:p>
+                      <a:pPr algn="r"/>
+                      <a:r>
+                        <a:rPr sz="1200" b="0" i="0">
+                          <a:solidFill>
+                            <a:srgbClr val="2B2F36"/>
+                          </a:solidFill>
+                          <a:latin typeface="Calibri"/>
+                        </a:rPr>
+                        <a:t>440,492</a:t>
+                      </a:r>
+                    </a:p>
+                  </a:txBody>
+                  <a:tcPr anchor="ctr">
+                    <a:solidFill>
+                      <a:srgbClr val="F1F4F7"/>
+                    </a:solidFill>
+                  </a:tcPr>
+                </a:tc>
+                <a:tc>
+                  <a:txBody>
+                    <a:bodyPr/>
+                    <a:lstStyle/>
+                    <a:p>
+                      <a:pPr algn="r"/>
+                      <a:r>
+                        <a:rPr sz="1200" b="0" i="0">
+                          <a:solidFill>
+                            <a:srgbClr val="2B2F36"/>
+                          </a:solidFill>
+                          <a:latin typeface="Calibri"/>
+                        </a:rPr>
+                        <a:t>-2.0%</a:t>
+                      </a:r>
+                    </a:p>
+                  </a:txBody>
+                  <a:tcPr anchor="ctr">
+                    <a:solidFill>
+                      <a:srgbClr val="F1F4F7"/>
+                    </a:solidFill>
+                  </a:tcPr>
+                </a:tc>
+              </a:tr>
+              <a:tr h="420624">
+                <a:tc>
+                  <a:txBody>
+                    <a:bodyPr/>
+                    <a:lstStyle/>
+                    <a:p>
+                      <a:pPr algn="l"/>
+                      <a:r>
+                        <a:rPr sz="1200" b="0" i="0">
+                          <a:solidFill>
+                            <a:srgbClr val="2B2F36"/>
+                          </a:solidFill>
+                          <a:latin typeface="Calibri"/>
+                        </a:rPr>
+                        <a:t>Clicks</a:t>
+                      </a:r>
+                    </a:p>
+                  </a:txBody>
+                  <a:tcPr anchor="ctr">
+                    <a:solidFill>
+                      <a:srgbClr val="FFFFFF"/>
+                    </a:solidFill>
+                  </a:tcPr>
+                </a:tc>
+                <a:tc>
+                  <a:txBody>
+                    <a:bodyPr/>
+                    <a:lstStyle/>
+                    <a:p>
+                      <a:pPr algn="r"/>
+                      <a:r>
+                        <a:rPr sz="1200" b="0" i="0">
+                          <a:solidFill>
+                            <a:srgbClr val="2B2F36"/>
+                          </a:solidFill>
+                          <a:latin typeface="Calibri"/>
+                        </a:rPr>
+                        <a:t>7,578</a:t>
+                      </a:r>
+                    </a:p>
+                  </a:txBody>
+                  <a:tcPr anchor="ctr">
+                    <a:solidFill>
+                      <a:srgbClr val="FFFFFF"/>
+                    </a:solidFill>
+                  </a:tcPr>
+                </a:tc>
+                <a:tc>
+                  <a:txBody>
+                    <a:bodyPr/>
+                    <a:lstStyle/>
+                    <a:p>
+                      <a:pPr algn="r"/>
+                      <a:r>
+                        <a:rPr sz="1200" b="0" i="0">
+                          <a:solidFill>
+                            <a:srgbClr val="2B2F36"/>
+                          </a:solidFill>
+                          <a:latin typeface="Calibri"/>
+                        </a:rPr>
+                        <a:t>8,372</a:t>
+                      </a:r>
+                    </a:p>
+                  </a:txBody>
+                  <a:tcPr anchor="ctr">
+                    <a:solidFill>
+                      <a:srgbClr val="FFFFFF"/>
+                    </a:solidFill>
+                  </a:tcPr>
+                </a:tc>
+                <a:tc>
+                  <a:txBody>
+                    <a:bodyPr/>
+                    <a:lstStyle/>
+                    <a:p>
+                      <a:pPr algn="r"/>
+                      <a:r>
+                        <a:rPr sz="1200" b="0" i="0">
+                          <a:solidFill>
+                            <a:srgbClr val="2B2F36"/>
+                          </a:solidFill>
+                          <a:latin typeface="Calibri"/>
+                        </a:rPr>
+                        <a:t>-9.5%</a:t>
+                      </a:r>
+                    </a:p>
+                  </a:txBody>
+                  <a:tcPr anchor="ctr">
+                    <a:solidFill>
+                      <a:srgbClr val="FFFFFF"/>
+                    </a:solidFill>
+                  </a:tcPr>
+                </a:tc>
+              </a:tr>
+              <a:tr h="420624">
+                <a:tc>
+                  <a:txBody>
+                    <a:bodyPr/>
+                    <a:lstStyle/>
+                    <a:p>
+                      <a:pPr algn="l"/>
+                      <a:r>
+                        <a:rPr sz="1200" b="0" i="0">
+                          <a:solidFill>
+                            <a:srgbClr val="2B2F36"/>
+                          </a:solidFill>
+                          <a:latin typeface="Calibri"/>
+                        </a:rPr>
+                        <a:t>Click through rate</a:t>
+                      </a:r>
+                    </a:p>
+                  </a:txBody>
+                  <a:tcPr anchor="ctr">
+                    <a:solidFill>
+                      <a:srgbClr val="F1F4F7"/>
+                    </a:solidFill>
+                  </a:tcPr>
+                </a:tc>
+                <a:tc>
+                  <a:txBody>
+                    <a:bodyPr/>
+                    <a:lstStyle/>
+                    <a:p>
+                      <a:pPr algn="r"/>
+                      <a:r>
+                        <a:rPr sz="1200" b="0" i="0">
+                          <a:solidFill>
+                            <a:srgbClr val="2B2F36"/>
+                          </a:solidFill>
+                          <a:latin typeface="Calibri"/>
+                        </a:rPr>
+                        <a:t>1.76%</a:t>
+                      </a:r>
+                    </a:p>
+                  </a:txBody>
+                  <a:tcPr anchor="ctr">
+                    <a:solidFill>
+                      <a:srgbClr val="F1F4F7"/>
+                    </a:solidFill>
+                  </a:tcPr>
+                </a:tc>
+                <a:tc>
+                  <a:txBody>
+                    <a:bodyPr/>
+                    <a:lstStyle/>
+                    <a:p>
+                      <a:pPr algn="r"/>
+                      <a:r>
+                        <a:rPr sz="1200" b="0" i="0">
+                          <a:solidFill>
+                            <a:srgbClr val="2B2F36"/>
+                          </a:solidFill>
+                          <a:latin typeface="Calibri"/>
+                        </a:rPr>
+                        <a:t>1.90%</a:t>
+                      </a:r>
+                    </a:p>
+                  </a:txBody>
+                  <a:tcPr anchor="ctr">
+                    <a:solidFill>
+                      <a:srgbClr val="F1F4F7"/>
+                    </a:solidFill>
+                  </a:tcPr>
+                </a:tc>
+                <a:tc>
+                  <a:txBody>
+                    <a:bodyPr/>
+                    <a:lstStyle/>
+                    <a:p>
+                      <a:pPr algn="r"/>
+                      <a:r>
+                        <a:rPr sz="1200" b="0" i="0">
+                          <a:solidFill>
+                            <a:srgbClr val="2B2F36"/>
+                          </a:solidFill>
+                          <a:latin typeface="Calibri"/>
+                        </a:rPr>
+                        <a:t>-7.7%</a:t>
+                      </a:r>
+                    </a:p>
+                  </a:txBody>
+                  <a:tcPr anchor="ctr">
+                    <a:solidFill>
+                      <a:srgbClr val="F1F4F7"/>
+                    </a:solidFill>
+                  </a:tcPr>
+                </a:tc>
+              </a:tr>
+              <a:tr h="420624">
+                <a:tc>
+                  <a:txBody>
+                    <a:bodyPr/>
+                    <a:lstStyle/>
+                    <a:p>
+                      <a:pPr algn="l"/>
+                      <a:r>
+                        <a:rPr sz="1200" b="0" i="0">
+                          <a:solidFill>
+                            <a:srgbClr val="2B2F36"/>
+                          </a:solidFill>
+                          <a:latin typeface="Calibri"/>
+                        </a:rPr>
+                        <a:t>Cost per click</a:t>
+                      </a:r>
+                    </a:p>
+                  </a:txBody>
+                  <a:tcPr anchor="ctr">
+                    <a:solidFill>
+                      <a:srgbClr val="FFFFFF"/>
+                    </a:solidFill>
+                  </a:tcPr>
+                </a:tc>
+                <a:tc>
+                  <a:txBody>
+                    <a:bodyPr/>
+                    <a:lstStyle/>
+                    <a:p>
+                      <a:pPr algn="r"/>
+                      <a:r>
+                        <a:rPr sz="1200" b="0" i="0">
+                          <a:solidFill>
+                            <a:srgbClr val="2B2F36"/>
+                          </a:solidFill>
+                          <a:latin typeface="Calibri"/>
+                        </a:rPr>
+                        <a:t>EUR 0.82</a:t>
+                      </a:r>
+                    </a:p>
+                  </a:txBody>
+                  <a:tcPr anchor="ctr">
+                    <a:solidFill>
+                      <a:srgbClr val="FFFFFF"/>
+                    </a:solidFill>
+                  </a:tcPr>
+                </a:tc>
+                <a:tc>
+                  <a:txBody>
+                    <a:bodyPr/>
+                    <a:lstStyle/>
+                    <a:p>
+                      <a:pPr algn="r"/>
+                      <a:r>
+                        <a:rPr sz="1200" b="0" i="0">
+                          <a:solidFill>
+                            <a:srgbClr val="2B2F36"/>
+                          </a:solidFill>
+                          <a:latin typeface="Calibri"/>
+                        </a:rPr>
+                        <a:t>EUR 0.73</a:t>
+                      </a:r>
+                    </a:p>
+                  </a:txBody>
+                  <a:tcPr anchor="ctr">
+                    <a:solidFill>
+                      <a:srgbClr val="FFFFFF"/>
+                    </a:solidFill>
+                  </a:tcPr>
+                </a:tc>
+                <a:tc>
+                  <a:txBody>
+                    <a:bodyPr/>
+                    <a:lstStyle/>
+                    <a:p>
+                      <a:pPr algn="r"/>
+                      <a:r>
+                        <a:rPr sz="1200" b="0" i="0">
+                          <a:solidFill>
+                            <a:srgbClr val="2B2F36"/>
+                          </a:solidFill>
+                          <a:latin typeface="Calibri"/>
+                        </a:rPr>
+                        <a:t>+12.8%</a:t>
+                      </a:r>
+                    </a:p>
+                  </a:txBody>
+                  <a:tcPr anchor="ctr">
+                    <a:solidFill>
+                      <a:srgbClr val="FFFFFF"/>
+                    </a:solidFill>
+                  </a:tcPr>
+                </a:tc>
+              </a:tr>
+              <a:tr h="420624">
+                <a:tc>
+                  <a:txBody>
+                    <a:bodyPr/>
+                    <a:lstStyle/>
+                    <a:p>
+                      <a:pPr algn="l"/>
+                      <a:r>
+                        <a:rPr sz="1200" b="0" i="0">
+                          <a:solidFill>
+                            <a:srgbClr val="2B2F36"/>
+                          </a:solidFill>
+                          <a:latin typeface="Calibri"/>
+                        </a:rPr>
+                        <a:t>Purchases</a:t>
+                      </a:r>
+                    </a:p>
+                  </a:txBody>
+                  <a:tcPr anchor="ctr">
+                    <a:solidFill>
+                      <a:srgbClr val="F1F4F7"/>
+                    </a:solidFill>
+                  </a:tcPr>
+                </a:tc>
+                <a:tc>
+                  <a:txBody>
+                    <a:bodyPr/>
+                    <a:lstStyle/>
+                    <a:p>
+                      <a:pPr algn="r"/>
+                      <a:r>
+                        <a:rPr sz="1200" b="0" i="0">
+                          <a:solidFill>
+                            <a:srgbClr val="2B2F36"/>
+                          </a:solidFill>
+                          <a:latin typeface="Calibri"/>
+                        </a:rPr>
+                        <a:t>295</a:t>
+                      </a:r>
+                    </a:p>
+                  </a:txBody>
+                  <a:tcPr anchor="ctr">
+                    <a:solidFill>
+                      <a:srgbClr val="F1F4F7"/>
+                    </a:solidFill>
+                  </a:tcPr>
+                </a:tc>
+                <a:tc>
+                  <a:txBody>
+                    <a:bodyPr/>
+                    <a:lstStyle/>
+                    <a:p>
+                      <a:pPr algn="r"/>
+                      <a:r>
+                        <a:rPr sz="1200" b="0" i="0">
+                          <a:solidFill>
+                            <a:srgbClr val="2B2F36"/>
+                          </a:solidFill>
+                          <a:latin typeface="Calibri"/>
+                        </a:rPr>
+                        <a:t>384</a:t>
+                      </a:r>
+                    </a:p>
+                  </a:txBody>
+                  <a:tcPr anchor="ctr">
+                    <a:solidFill>
+                      <a:srgbClr val="F1F4F7"/>
+                    </a:solidFill>
+                  </a:tcPr>
+                </a:tc>
+                <a:tc>
+                  <a:txBody>
+                    <a:bodyPr/>
+                    <a:lstStyle/>
+                    <a:p>
+                      <a:pPr algn="r"/>
+                      <a:r>
+                        <a:rPr sz="1200" b="0" i="0">
+                          <a:solidFill>
+                            <a:srgbClr val="2B2F36"/>
+                          </a:solidFill>
+                          <a:latin typeface="Calibri"/>
+                        </a:rPr>
+                        <a:t>-23.2%</a:t>
+                      </a:r>
+                    </a:p>
+                  </a:txBody>
+                  <a:tcPr anchor="ctr">
+                    <a:solidFill>
+                      <a:srgbClr val="F1F4F7"/>
+                    </a:solidFill>
+                  </a:tcPr>
+                </a:tc>
+              </a:tr>
+              <a:tr h="420624">
+                <a:tc>
+                  <a:txBody>
+                    <a:bodyPr/>
+                    <a:lstStyle/>
+                    <a:p>
+                      <a:pPr algn="l"/>
+                      <a:r>
+                        <a:rPr sz="1200" b="0" i="0">
+                          <a:solidFill>
+                            <a:srgbClr val="2B2F36"/>
+                          </a:solidFill>
+                          <a:latin typeface="Calibri"/>
+                        </a:rPr>
+                        <a:t>Purchase value</a:t>
+                      </a:r>
+                    </a:p>
+                  </a:txBody>
+                  <a:tcPr anchor="ctr">
+                    <a:solidFill>
+                      <a:srgbClr val="FFFFFF"/>
+                    </a:solidFill>
+                  </a:tcPr>
+                </a:tc>
+                <a:tc>
+                  <a:txBody>
+                    <a:bodyPr/>
+                    <a:lstStyle/>
+                    <a:p>
+                      <a:pPr algn="r"/>
+                      <a:r>
+                        <a:rPr sz="1200" b="0" i="0">
+                          <a:solidFill>
+                            <a:srgbClr val="2B2F36"/>
+                          </a:solidFill>
+                          <a:latin typeface="Calibri"/>
+                        </a:rPr>
+                        <a:t>EUR 16,236.38</a:t>
+                      </a:r>
+                    </a:p>
+                  </a:txBody>
+                  <a:tcPr anchor="ctr">
+                    <a:solidFill>
+                      <a:srgbClr val="FFFFFF"/>
+                    </a:solidFill>
+                  </a:tcPr>
+                </a:tc>
+                <a:tc>
+                  <a:txBody>
+                    <a:bodyPr/>
+                    <a:lstStyle/>
+                    <a:p>
+                      <a:pPr algn="r"/>
+                      <a:r>
+                        <a:rPr sz="1200" b="0" i="0">
+                          <a:solidFill>
+                            <a:srgbClr val="2B2F36"/>
+                          </a:solidFill>
+                          <a:latin typeface="Calibri"/>
+                        </a:rPr>
+                        <a:t>EUR 20,719.49</a:t>
+                      </a:r>
+                    </a:p>
+                  </a:txBody>
+                  <a:tcPr anchor="ctr">
+                    <a:solidFill>
+                      <a:srgbClr val="FFFFFF"/>
+                    </a:solidFill>
+                  </a:tcPr>
+                </a:tc>
+                <a:tc>
+                  <a:txBody>
+                    <a:bodyPr/>
+                    <a:lstStyle/>
+                    <a:p>
+                      <a:pPr algn="r"/>
+                      <a:r>
+                        <a:rPr sz="1200" b="0" i="0">
+                          <a:solidFill>
+                            <a:srgbClr val="2B2F36"/>
+                          </a:solidFill>
+                          <a:latin typeface="Calibri"/>
+                        </a:rPr>
+                        <a:t>-21.6%</a:t>
+                      </a:r>
+                    </a:p>
+                  </a:txBody>
+                  <a:tcPr anchor="ctr">
+                    <a:solidFill>
+                      <a:srgbClr val="FFFFFF"/>
+                    </a:solidFill>
+                  </a:tcPr>
+                </a:tc>
+              </a:tr>
+              <a:tr h="420624">
+                <a:tc>
+                  <a:txBody>
+                    <a:bodyPr/>
+                    <a:lstStyle/>
+                    <a:p>
+                      <a:pPr algn="l"/>
+                      <a:r>
+                        <a:rPr sz="1200" b="0" i="0">
+                          <a:solidFill>
+                            <a:srgbClr val="2B2F36"/>
+                          </a:solidFill>
+                          <a:latin typeface="Calibri"/>
+                        </a:rPr>
+                        <a:t>Return on ad spend</a:t>
+                      </a:r>
+                    </a:p>
+                  </a:txBody>
+                  <a:tcPr anchor="ctr">
+                    <a:solidFill>
+                      <a:srgbClr val="F1F4F7"/>
+                    </a:solidFill>
+                  </a:tcPr>
+                </a:tc>
+                <a:tc>
+                  <a:txBody>
+                    <a:bodyPr/>
+                    <a:lstStyle/>
+                    <a:p>
+                      <a:pPr algn="r"/>
+                      <a:r>
+                        <a:rPr sz="1200" b="0" i="0">
+                          <a:solidFill>
+                            <a:srgbClr val="2B2F36"/>
+                          </a:solidFill>
+                          <a:latin typeface="Calibri"/>
+                        </a:rPr>
+                        <a:t>2.89</a:t>
+                      </a:r>
+                    </a:p>
+                  </a:txBody>
+                  <a:tcPr anchor="ctr">
+                    <a:solidFill>
+                      <a:srgbClr val="F1F4F7"/>
+                    </a:solidFill>
+                  </a:tcPr>
+                </a:tc>
+                <a:tc>
+                  <a:txBody>
+                    <a:bodyPr/>
+                    <a:lstStyle/>
+                    <a:p>
+                      <a:pPr algn="r"/>
+                      <a:r>
+                        <a:rPr sz="1200" b="0" i="0">
+                          <a:solidFill>
+                            <a:srgbClr val="2B2F36"/>
+                          </a:solidFill>
+                          <a:latin typeface="Calibri"/>
+                        </a:rPr>
+                        <a:t>3.40</a:t>
+                      </a:r>
+                    </a:p>
+                  </a:txBody>
+                  <a:tcPr anchor="ctr">
+                    <a:solidFill>
+                      <a:srgbClr val="F1F4F7"/>
+                    </a:solidFill>
+                  </a:tcPr>
+                </a:tc>
+                <a:tc>
+                  <a:txBody>
+                    <a:bodyPr/>
+                    <a:lstStyle/>
+                    <a:p>
+                      <a:pPr algn="r"/>
+                      <a:r>
+                        <a:rPr sz="1200" b="0" i="0">
+                          <a:solidFill>
+                            <a:srgbClr val="2B2F36"/>
+                          </a:solidFill>
+                          <a:latin typeface="Calibri"/>
+                        </a:rPr>
+                        <a:t>-15.1%</a:t>
+                      </a:r>
+                    </a:p>
+                  </a:txBody>
+                  <a:tcPr anchor="ctr">
+                    <a:solidFill>
+                      <a:srgbClr val="F1F4F7"/>
+                    </a:solidFill>
+                  </a:tcPr>
+                </a:tc>
+              </a:tr>
+            </a:tbl>
+          </a:graphicData>
+        </a:graphic>
+      </p:graphicFrame>
+      <p:graphicFrame>
+        <p:nvGraphicFramePr>
+          <p:cNvPr id="4" name="Chart 3" descr="Line chart of ad spend for each day of October 2026, with September 2026 as a grey line"/>
+          <p:cNvGraphicFramePr>
+            <a:graphicFrameLocks noGrp="1"/>
+          </p:cNvGraphicFramePr>
+          <p:nvPr/>
+        </p:nvGraphicFramePr>
+        <p:xfrm>
+          <a:off x="6217920" y="1325880"/>
+          <a:ext cx="5425135" cy="2240280"/>
+        </p:xfrm>
+        <a:graphic>
+          <a:graphicData uri="http://schemas.openxmlformats.org/drawingml/2006/chart">
+            <c:chart xmlns:c="http://schemas.openxmlformats.org/drawingml/2006/chart" r:id="rId2"/>
+          </a:graphicData>
+        </a:graphic>
+      </p:graphicFrame>
+      <p:graphicFrame>
+        <p:nvGraphicFramePr>
+          <p:cNvPr id="5" name="Chart 4" descr="Line chart of ad clicks for each day of October 2026, with September 2026 as a grey line"/>
+          <p:cNvGraphicFramePr>
+            <a:graphicFrameLocks noGrp="1"/>
+          </p:cNvGraphicFramePr>
+          <p:nvPr/>
+        </p:nvGraphicFramePr>
+        <p:xfrm>
+          <a:off x="6217920" y="3611880"/>
+          <a:ext cx="5425135" cy="2240280"/>
+        </p:xfrm>
+        <a:graphic>
+          <a:graphicData uri="http://schemas.openxmlformats.org/drawingml/2006/chart">
+            <c:chart xmlns:c="http://schemas.openxmlformats.org/drawingml/2006/chart" r:id="rId3"/>
+          </a:graphicData>
+        </a:graphic>
+      </p:graphicFrame>
       <p:sp>
         <p:nvSpPr>
-          <p:cNvPr id="3" name="TextBox 2"/>
-          <p:cNvSpPr txBox="1"/>
-          <p:nvPr/>
-        </p:nvSpPr>
-        <p:spPr>
-          <a:xfrm>
-            <a:off x="548640" y="1463040"/>
-            <a:ext cx="11094415" cy="4389120"/>
-          </a:xfrm>
-          <a:prstGeom prst="rect">
-            <a:avLst/>
-          </a:prstGeom>
-          <a:noFill/>
-        </p:spPr>
-        <p:txBody>
-          <a:bodyPr wrap="square">
-            <a:spAutoFit/>
-          </a:bodyPr>
-          <a:lstStyle/>
-          <a:p>
-            <a:pPr>
-              <a:spcAft>
-                <a:spcPts val="500"/>
-              </a:spcAft>
-            </a:pPr>
-            <a:r>
-              <a:rPr sz="1500" b="0" i="0">
-                <a:solidFill>
-                  <a:srgbClr val="2B2F36"/>
-                </a:solidFill>
-                <a:latin typeface="Calibri"/>
-              </a:rPr>
-              <a:t>Net sales total was $40,249.02 in October, 1.8% below September ($40,966.11), but October is missing 2 days: per reported day, net sales are up 1.6% ($1,387.90 against $1,365.54).</a:t>
-            </a:r>
-          </a:p>
-          <a:p>
-            <a:pPr>
-              <a:spcAft>
-                <a:spcPts val="500"/>
-              </a:spcAft>
-            </a:pPr>
-            <a:r>
-              <a:rPr sz="1500" b="0" i="0">
-                <a:solidFill>
-                  <a:srgbClr val="2B2F36"/>
-                </a:solidFill>
-                <a:latin typeface="Calibri"/>
-              </a:rPr>
-              <a:t>Orders total was 607 in October, 3.1% above September (589), but October is missing 2 days: per reported day, orders are up 6.6% (20.93 against 19.63).</a:t>
-            </a:r>
-          </a:p>
-          <a:p>
-            <a:pPr>
-              <a:spcAft>
-                <a:spcPts val="500"/>
-              </a:spcAft>
-            </a:pPr>
-            <a:r>
-              <a:rPr sz="1500" b="0" i="0">
-                <a:solidFill>
-                  <a:srgbClr val="2B2F36"/>
-                </a:solidFill>
-                <a:latin typeface="Calibri"/>
-              </a:rPr>
-              <a:t>Average order value was $69.81 in October, down 3.6% from September ($72.39), and October is missing 2 days.</a:t>
-            </a:r>
-          </a:p>
-          <a:p>
-            <a:pPr>
-              <a:spcAft>
-                <a:spcPts val="500"/>
-              </a:spcAft>
-            </a:pPr>
-            <a:r>
-              <a:rPr sz="1500" b="0" i="0">
-                <a:solidFill>
-                  <a:srgbClr val="2B2F36"/>
-                </a:solidFill>
-                <a:latin typeface="Calibri"/>
-              </a:rPr>
-              <a:t>Refunds total was $2,125.90 in October, 27.1% above September ($1,672.94), but October is missing 2 days: per reported day, refunds are up 31.5% ($73.31 against $55.76).</a:t>
-            </a:r>
-          </a:p>
-          <a:p>
-            <a:pPr>
-              <a:spcAft>
-                <a:spcPts val="500"/>
-              </a:spcAft>
-            </a:pPr>
-            <a:r>
-              <a:rPr sz="1500" b="0" i="0">
-                <a:solidFill>
-                  <a:srgbClr val="2B2F36"/>
-                </a:solidFill>
-                <a:latin typeface="Calibri"/>
-              </a:rPr>
-              <a:t>The biggest move was Refunds, 27.1% above September in total, but October is missing 2 days: per reported day it is up 31.5%.</a:t>
-            </a:r>
-          </a:p>
-          <a:p>
-            <a:pPr>
-              <a:spcAft>
-                <a:spcPts val="500"/>
-              </a:spcAft>
-            </a:pPr>
-            <a:r>
-              <a:rPr sz="1500" b="0" i="0">
-                <a:solidFill>
-                  <a:srgbClr val="2B2F36"/>
-                </a:solidFill>
-                <a:latin typeface="Calibri"/>
-              </a:rPr>
-              <a:t>The best day was Oct 31 with net sales of $2,187.62.</a:t>
-            </a:r>
-          </a:p>
-          <a:p>
-            <a:pPr>
-              <a:spcAft>
-                <a:spcPts val="500"/>
-              </a:spcAft>
-            </a:pPr>
-            <a:r>
-              <a:rPr sz="1500" b="0" i="0">
-                <a:solidFill>
-                  <a:srgbClr val="2B2F36"/>
-                </a:solidFill>
-                <a:latin typeface="Calibri"/>
-              </a:rPr>
-              <a:t>2 days have no data (Oct 14, Oct 15), so the totals are understated.</a:t>
-            </a:r>
-          </a:p>
-          <a:p>
-            <a:pPr>
-              <a:spcAft>
-                <a:spcPts val="500"/>
-              </a:spcAft>
-            </a:pPr>
-            <a:r>
-              <a:rPr sz="1500" b="0" i="0">
-                <a:solidFill>
-                  <a:srgbClr val="2B2F36"/>
-                </a:solidFill>
-                <a:latin typeface="Calibri"/>
-              </a:rPr>
-              <a:t>Sessions total was 21,812 in October, 8.6% below September (23,876), but October is missing 3 days of website data: per reported day, sessions are down 2.1% (779.00 against 795.87).</a:t>
-            </a:r>
-          </a:p>
-          <a:p>
-            <a:pPr>
-              <a:spcAft>
-                <a:spcPts val="500"/>
-              </a:spcAft>
-            </a:pPr>
-            <a:r>
-              <a:rPr sz="1500" b="0" i="0">
-                <a:solidFill>
-                  <a:srgbClr val="2B2F36"/>
-                </a:solidFill>
-                <a:latin typeface="Calibri"/>
-              </a:rPr>
-              <a:t>Key events total was 942 in October, 9.9% below September (1,045), but October is missing 3 days of website data: per reported day, key events are down 3.4% (33.64 against 34.83).</a:t>
-            </a:r>
-          </a:p>
-          <a:p>
-            <a:pPr>
-              <a:spcAft>
-                <a:spcPts val="500"/>
-              </a:spcAft>
-            </a:pPr>
-            <a:r>
-              <a:rPr sz="1500" b="0" i="0">
-                <a:solidFill>
-                  <a:srgbClr val="2B2F36"/>
-                </a:solidFill>
-                <a:latin typeface="Calibri"/>
-              </a:rPr>
-              <a:t>Order rate was 2.7% in October, up 8.4% from September (2.5%), and October is missing 3 days of website data.</a:t>
-            </a:r>
-          </a:p>
-          <a:p>
-            <a:pPr>
-              <a:spcAft>
-                <a:spcPts val="500"/>
-              </a:spcAft>
-            </a:pPr>
-            <a:r>
-              <a:rPr sz="1500" b="0" i="0">
-                <a:solidFill>
-                  <a:srgbClr val="2B2F36"/>
-                </a:solidFill>
-                <a:latin typeface="Calibri"/>
-              </a:rPr>
-              <a:t>3 days have no website data (Oct 3, Oct 4, Oct 5), so the website totals are understated.</a:t>
-            </a:r>
-          </a:p>
-        </p:txBody>
-      </p:sp>
-      <p:sp>
-        <p:nvSpPr>
-          <p:cNvPr id="4" name="TextBox 3"/>
+          <p:cNvPr id="6" name="TextBox 5"/>
           <p:cNvSpPr txBox="1"/>
           <p:nvPr/>
         </p:nvSpPr>
@@ -9824,7 +14994,55 @@
                 </a:solidFill>
                 <a:latin typeface="Calibri"/>
               </a:rPr>
-              <a:t>Narrative written from the computed figures on the previous slides.</a:t>
+              <a:t>Source: Meta Marketing API, in the ad account's currency (EUR) and time zone; store days follow UTC. Purchases are Meta's own count in a 7 day click window, not the store's orders.</a:t>
+            </a:r>
+          </a:p>
+          <a:p>
+            <a:pPr>
+              <a:spcAft>
+                <a:spcPts val="0"/>
+              </a:spcAft>
+            </a:pPr>
+            <a:r>
+              <a:rPr sz="1100" b="0" i="0">
+                <a:solidFill>
+                  <a:srgbClr val="5B6470"/>
+                </a:solidFill>
+                <a:latin typeface="Calibri"/>
+              </a:rPr>
+              <a:t>Day of the month across. Top chart: ad spend. Bottom chart: clicks. The grey line is the month before. A dot on the zero line is a day with no ad delivery, on either line; a break with an X is a day with no data (Oct 20, Oct 21).</a:t>
+            </a:r>
+          </a:p>
+          <a:p>
+            <a:pPr>
+              <a:spcAft>
+                <a:spcPts val="0"/>
+              </a:spcAft>
+            </a:pPr>
+            <a:r>
+              <a:rPr sz="1100" b="0" i="0">
+                <a:solidFill>
+                  <a:srgbClr val="5B6470"/>
+                </a:solidFill>
+                <a:latin typeface="Calibri"/>
+              </a:rPr>
+              <a:t>Provisional days (a click can lead to a purchase after the day is over): Oct 26, Oct 27, Oct 28, Oct 29, Oct 30, Oct 31.</a:t>
+            </a:r>
+          </a:p>
+          <a:p>
+            <a:pPr>
+              <a:spcAft>
+                <a:spcPts val="0"/>
+              </a:spcAft>
+            </a:pPr>
+            <a:r>
+              <a:rPr sz="1100" b="0" i="0">
+                <a:solidFill>
+                  <a:srgbClr val="5B6470"/>
+                </a:solidFill>
+                <a:latin typeface="Calibri"/>
+              </a:rPr>
+              <a:t>Per reported day divides a total by the days with ad delivery plus the days with none.</a:t>
             </a:r>
           </a:p>
         </p:txBody>
@@ -9875,14 +15093,14 @@
                 </a:solidFill>
                 <a:latin typeface="Calibri"/>
               </a:rPr>
-              <a:t>Data health: October is missing 2 days of store data and 3 days of website data</a:t>
+              <a:t>October search clicks total is 19.5% above September, but October is missing 2 days of search data: per reported day it is up 23.6%</a:t>
             </a:r>
           </a:p>
         </p:txBody>
       </p:sp>
       <p:graphicFrame>
         <p:nvGraphicFramePr>
-          <p:cNvPr id="3" name="Table 2"/>
+          <p:cNvPr id="3" name="Chart 2" descr="Line chart of search clicks for each day of October 2026, with September 2026 as a grey line"/>
           <p:cNvGraphicFramePr>
             <a:graphicFrameLocks noGrp="1"/>
           </p:cNvGraphicFramePr>
@@ -9890,737 +15108,42 @@
         </p:nvGraphicFramePr>
         <p:xfrm>
           <a:off x="548640" y="1280160"/>
-          <a:ext cx="11094413" cy="2414016"/>
+          <a:ext cx="5410047" cy="2240280"/>
         </p:xfrm>
         <a:graphic>
-          <a:graphicData uri="http://schemas.openxmlformats.org/drawingml/2006/table">
-            <a:tbl>
-              <a:tblPr firstRow="1" bandRow="1">
-                <a:tableStyleId>{5C22544A-7EE6-4342-B048-85BDC9FD1C3A}</a:tableStyleId>
-              </a:tblPr>
-              <a:tblGrid>
-                <a:gridCol w="3572777"/>
-                <a:gridCol w="1880409"/>
-                <a:gridCol w="1880409"/>
-                <a:gridCol w="1880409"/>
-                <a:gridCol w="1880409"/>
-              </a:tblGrid>
-              <a:tr h="402336">
-                <a:tc>
-                  <a:txBody>
-                    <a:bodyPr/>
-                    <a:lstStyle/>
-                    <a:p>
-                      <a:pPr algn="l"/>
-                      <a:r>
-                        <a:rPr sz="1400" b="1" i="0">
-                          <a:solidFill>
-                            <a:srgbClr val="FFFFFF"/>
-                          </a:solidFill>
-                          <a:latin typeface="Calibri"/>
-                        </a:rPr>
-                        <a:t>Count</a:t>
-                      </a:r>
-                    </a:p>
-                  </a:txBody>
-                  <a:tcPr anchor="ctr">
-                    <a:solidFill>
-                      <a:srgbClr val="1F3A5F"/>
-                    </a:solidFill>
-                  </a:tcPr>
-                </a:tc>
-                <a:tc>
-                  <a:txBody>
-                    <a:bodyPr/>
-                    <a:lstStyle/>
-                    <a:p>
-                      <a:pPr algn="r"/>
-                      <a:r>
-                        <a:rPr sz="1400" b="1" i="0">
-                          <a:solidFill>
-                            <a:srgbClr val="FFFFFF"/>
-                          </a:solidFill>
-                          <a:latin typeface="Calibri"/>
-                        </a:rPr>
-                        <a:t>Store, October</a:t>
-                      </a:r>
-                    </a:p>
-                  </a:txBody>
-                  <a:tcPr anchor="ctr">
-                    <a:solidFill>
-                      <a:srgbClr val="1F3A5F"/>
-                    </a:solidFill>
-                  </a:tcPr>
-                </a:tc>
-                <a:tc>
-                  <a:txBody>
-                    <a:bodyPr/>
-                    <a:lstStyle/>
-                    <a:p>
-                      <a:pPr algn="r"/>
-                      <a:r>
-                        <a:rPr sz="1400" b="1" i="0">
-                          <a:solidFill>
-                            <a:srgbClr val="FFFFFF"/>
-                          </a:solidFill>
-                          <a:latin typeface="Calibri"/>
-                        </a:rPr>
-                        <a:t>Store, September</a:t>
-                      </a:r>
-                    </a:p>
-                  </a:txBody>
-                  <a:tcPr anchor="ctr">
-                    <a:solidFill>
-                      <a:srgbClr val="1F3A5F"/>
-                    </a:solidFill>
-                  </a:tcPr>
-                </a:tc>
-                <a:tc>
-                  <a:txBody>
-                    <a:bodyPr/>
-                    <a:lstStyle/>
-                    <a:p>
-                      <a:pPr algn="r"/>
-                      <a:r>
-                        <a:rPr sz="1400" b="1" i="0">
-                          <a:solidFill>
-                            <a:srgbClr val="FFFFFF"/>
-                          </a:solidFill>
-                          <a:latin typeface="Calibri"/>
-                        </a:rPr>
-                        <a:t>Website, October</a:t>
-                      </a:r>
-                    </a:p>
-                  </a:txBody>
-                  <a:tcPr anchor="ctr">
-                    <a:solidFill>
-                      <a:srgbClr val="1F3A5F"/>
-                    </a:solidFill>
-                  </a:tcPr>
-                </a:tc>
-                <a:tc>
-                  <a:txBody>
-                    <a:bodyPr/>
-                    <a:lstStyle/>
-                    <a:p>
-                      <a:pPr algn="r"/>
-                      <a:r>
-                        <a:rPr sz="1400" b="1" i="0">
-                          <a:solidFill>
-                            <a:srgbClr val="FFFFFF"/>
-                          </a:solidFill>
-                          <a:latin typeface="Calibri"/>
-                        </a:rPr>
-                        <a:t>Website, September</a:t>
-                      </a:r>
-                    </a:p>
-                  </a:txBody>
-                  <a:tcPr anchor="ctr">
-                    <a:solidFill>
-                      <a:srgbClr val="1F3A5F"/>
-                    </a:solidFill>
-                  </a:tcPr>
-                </a:tc>
-              </a:tr>
-              <a:tr h="402336">
-                <a:tc>
-                  <a:txBody>
-                    <a:bodyPr/>
-                    <a:lstStyle/>
-                    <a:p>
-                      <a:pPr algn="l"/>
-                      <a:r>
-                        <a:rPr sz="1400" b="0" i="0">
-                          <a:solidFill>
-                            <a:srgbClr val="2B2F36"/>
-                          </a:solidFill>
-                          <a:latin typeface="Calibri"/>
-                        </a:rPr>
-                        <a:t>Days in the month</a:t>
-                      </a:r>
-                    </a:p>
-                  </a:txBody>
-                  <a:tcPr anchor="ctr">
-                    <a:solidFill>
-                      <a:srgbClr val="FFFFFF"/>
-                    </a:solidFill>
-                  </a:tcPr>
-                </a:tc>
-                <a:tc>
-                  <a:txBody>
-                    <a:bodyPr/>
-                    <a:lstStyle/>
-                    <a:p>
-                      <a:pPr algn="r"/>
-                      <a:r>
-                        <a:rPr sz="1400" b="0" i="0">
-                          <a:solidFill>
-                            <a:srgbClr val="2B2F36"/>
-                          </a:solidFill>
-                          <a:latin typeface="Calibri"/>
-                        </a:rPr>
-                        <a:t>31</a:t>
-                      </a:r>
-                    </a:p>
-                  </a:txBody>
-                  <a:tcPr anchor="ctr">
-                    <a:solidFill>
-                      <a:srgbClr val="FFFFFF"/>
-                    </a:solidFill>
-                  </a:tcPr>
-                </a:tc>
-                <a:tc>
-                  <a:txBody>
-                    <a:bodyPr/>
-                    <a:lstStyle/>
-                    <a:p>
-                      <a:pPr algn="r"/>
-                      <a:r>
-                        <a:rPr sz="1400" b="0" i="0">
-                          <a:solidFill>
-                            <a:srgbClr val="2B2F36"/>
-                          </a:solidFill>
-                          <a:latin typeface="Calibri"/>
-                        </a:rPr>
-                        <a:t>30</a:t>
-                      </a:r>
-                    </a:p>
-                  </a:txBody>
-                  <a:tcPr anchor="ctr">
-                    <a:solidFill>
-                      <a:srgbClr val="FFFFFF"/>
-                    </a:solidFill>
-                  </a:tcPr>
-                </a:tc>
-                <a:tc>
-                  <a:txBody>
-                    <a:bodyPr/>
-                    <a:lstStyle/>
-                    <a:p>
-                      <a:pPr algn="r"/>
-                      <a:r>
-                        <a:rPr sz="1400" b="0" i="0">
-                          <a:solidFill>
-                            <a:srgbClr val="2B2F36"/>
-                          </a:solidFill>
-                          <a:latin typeface="Calibri"/>
-                        </a:rPr>
-                        <a:t>31</a:t>
-                      </a:r>
-                    </a:p>
-                  </a:txBody>
-                  <a:tcPr anchor="ctr">
-                    <a:solidFill>
-                      <a:srgbClr val="FFFFFF"/>
-                    </a:solidFill>
-                  </a:tcPr>
-                </a:tc>
-                <a:tc>
-                  <a:txBody>
-                    <a:bodyPr/>
-                    <a:lstStyle/>
-                    <a:p>
-                      <a:pPr algn="r"/>
-                      <a:r>
-                        <a:rPr sz="1400" b="0" i="0">
-                          <a:solidFill>
-                            <a:srgbClr val="2B2F36"/>
-                          </a:solidFill>
-                          <a:latin typeface="Calibri"/>
-                        </a:rPr>
-                        <a:t>30</a:t>
-                      </a:r>
-                    </a:p>
-                  </a:txBody>
-                  <a:tcPr anchor="ctr">
-                    <a:solidFill>
-                      <a:srgbClr val="FFFFFF"/>
-                    </a:solidFill>
-                  </a:tcPr>
-                </a:tc>
-              </a:tr>
-              <a:tr h="402336">
-                <a:tc>
-                  <a:txBody>
-                    <a:bodyPr/>
-                    <a:lstStyle/>
-                    <a:p>
-                      <a:pPr algn="l"/>
-                      <a:r>
-                        <a:rPr sz="1400" b="0" i="0">
-                          <a:solidFill>
-                            <a:srgbClr val="2B2F36"/>
-                          </a:solidFill>
-                          <a:latin typeface="Calibri"/>
-                        </a:rPr>
-                        <a:t>Days with data</a:t>
-                      </a:r>
-                    </a:p>
-                  </a:txBody>
-                  <a:tcPr anchor="ctr">
-                    <a:solidFill>
-                      <a:srgbClr val="F1F4F7"/>
-                    </a:solidFill>
-                  </a:tcPr>
-                </a:tc>
-                <a:tc>
-                  <a:txBody>
-                    <a:bodyPr/>
-                    <a:lstStyle/>
-                    <a:p>
-                      <a:pPr algn="r"/>
-                      <a:r>
-                        <a:rPr sz="1400" b="0" i="0">
-                          <a:solidFill>
-                            <a:srgbClr val="2B2F36"/>
-                          </a:solidFill>
-                          <a:latin typeface="Calibri"/>
-                        </a:rPr>
-                        <a:t>28</a:t>
-                      </a:r>
-                    </a:p>
-                  </a:txBody>
-                  <a:tcPr anchor="ctr">
-                    <a:solidFill>
-                      <a:srgbClr val="F1F4F7"/>
-                    </a:solidFill>
-                  </a:tcPr>
-                </a:tc>
-                <a:tc>
-                  <a:txBody>
-                    <a:bodyPr/>
-                    <a:lstStyle/>
-                    <a:p>
-                      <a:pPr algn="r"/>
-                      <a:r>
-                        <a:rPr sz="1400" b="0" i="0">
-                          <a:solidFill>
-                            <a:srgbClr val="2B2F36"/>
-                          </a:solidFill>
-                          <a:latin typeface="Calibri"/>
-                        </a:rPr>
-                        <a:t>28</a:t>
-                      </a:r>
-                    </a:p>
-                  </a:txBody>
-                  <a:tcPr anchor="ctr">
-                    <a:solidFill>
-                      <a:srgbClr val="F1F4F7"/>
-                    </a:solidFill>
-                  </a:tcPr>
-                </a:tc>
-                <a:tc>
-                  <a:txBody>
-                    <a:bodyPr/>
-                    <a:lstStyle/>
-                    <a:p>
-                      <a:pPr algn="r"/>
-                      <a:r>
-                        <a:rPr sz="1400" b="0" i="0">
-                          <a:solidFill>
-                            <a:srgbClr val="2B2F36"/>
-                          </a:solidFill>
-                          <a:latin typeface="Calibri"/>
-                        </a:rPr>
-                        <a:t>28</a:t>
-                      </a:r>
-                    </a:p>
-                  </a:txBody>
-                  <a:tcPr anchor="ctr">
-                    <a:solidFill>
-                      <a:srgbClr val="F1F4F7"/>
-                    </a:solidFill>
-                  </a:tcPr>
-                </a:tc>
-                <a:tc>
-                  <a:txBody>
-                    <a:bodyPr/>
-                    <a:lstStyle/>
-                    <a:p>
-                      <a:pPr algn="r"/>
-                      <a:r>
-                        <a:rPr sz="1400" b="0" i="0">
-                          <a:solidFill>
-                            <a:srgbClr val="2B2F36"/>
-                          </a:solidFill>
-                          <a:latin typeface="Calibri"/>
-                        </a:rPr>
-                        <a:t>29</a:t>
-                      </a:r>
-                    </a:p>
-                  </a:txBody>
-                  <a:tcPr anchor="ctr">
-                    <a:solidFill>
-                      <a:srgbClr val="F1F4F7"/>
-                    </a:solidFill>
-                  </a:tcPr>
-                </a:tc>
-              </a:tr>
-              <a:tr h="402336">
-                <a:tc>
-                  <a:txBody>
-                    <a:bodyPr/>
-                    <a:lstStyle/>
-                    <a:p>
-                      <a:pPr algn="l"/>
-                      <a:r>
-                        <a:rPr sz="1400" b="0" i="0">
-                          <a:solidFill>
-                            <a:srgbClr val="2B2F36"/>
-                          </a:solidFill>
-                          <a:latin typeface="Calibri"/>
-                        </a:rPr>
-                        <a:t>Days with nothing to report</a:t>
-                      </a:r>
-                    </a:p>
-                  </a:txBody>
-                  <a:tcPr anchor="ctr">
-                    <a:solidFill>
-                      <a:srgbClr val="FFFFFF"/>
-                    </a:solidFill>
-                  </a:tcPr>
-                </a:tc>
-                <a:tc>
-                  <a:txBody>
-                    <a:bodyPr/>
-                    <a:lstStyle/>
-                    <a:p>
-                      <a:pPr algn="r"/>
-                      <a:r>
-                        <a:rPr sz="1400" b="0" i="0">
-                          <a:solidFill>
-                            <a:srgbClr val="2B2F36"/>
-                          </a:solidFill>
-                          <a:latin typeface="Calibri"/>
-                        </a:rPr>
-                        <a:t>1</a:t>
-                      </a:r>
-                    </a:p>
-                  </a:txBody>
-                  <a:tcPr anchor="ctr">
-                    <a:solidFill>
-                      <a:srgbClr val="FFFFFF"/>
-                    </a:solidFill>
-                  </a:tcPr>
-                </a:tc>
-                <a:tc>
-                  <a:txBody>
-                    <a:bodyPr/>
-                    <a:lstStyle/>
-                    <a:p>
-                      <a:pPr algn="r"/>
-                      <a:r>
-                        <a:rPr sz="1400" b="0" i="0">
-                          <a:solidFill>
-                            <a:srgbClr val="2B2F36"/>
-                          </a:solidFill>
-                          <a:latin typeface="Calibri"/>
-                        </a:rPr>
-                        <a:t>2</a:t>
-                      </a:r>
-                    </a:p>
-                  </a:txBody>
-                  <a:tcPr anchor="ctr">
-                    <a:solidFill>
-                      <a:srgbClr val="FFFFFF"/>
-                    </a:solidFill>
-                  </a:tcPr>
-                </a:tc>
-                <a:tc>
-                  <a:txBody>
-                    <a:bodyPr/>
-                    <a:lstStyle/>
-                    <a:p>
-                      <a:pPr algn="r"/>
-                      <a:r>
-                        <a:rPr sz="1400" b="0" i="0">
-                          <a:solidFill>
-                            <a:srgbClr val="2B2F36"/>
-                          </a:solidFill>
-                          <a:latin typeface="Calibri"/>
-                        </a:rPr>
-                        <a:t>0</a:t>
-                      </a:r>
-                    </a:p>
-                  </a:txBody>
-                  <a:tcPr anchor="ctr">
-                    <a:solidFill>
-                      <a:srgbClr val="FFFFFF"/>
-                    </a:solidFill>
-                  </a:tcPr>
-                </a:tc>
-                <a:tc>
-                  <a:txBody>
-                    <a:bodyPr/>
-                    <a:lstStyle/>
-                    <a:p>
-                      <a:pPr algn="r"/>
-                      <a:r>
-                        <a:rPr sz="1400" b="0" i="0">
-                          <a:solidFill>
-                            <a:srgbClr val="2B2F36"/>
-                          </a:solidFill>
-                          <a:latin typeface="Calibri"/>
-                        </a:rPr>
-                        <a:t>1</a:t>
-                      </a:r>
-                    </a:p>
-                  </a:txBody>
-                  <a:tcPr anchor="ctr">
-                    <a:solidFill>
-                      <a:srgbClr val="FFFFFF"/>
-                    </a:solidFill>
-                  </a:tcPr>
-                </a:tc>
-              </a:tr>
-              <a:tr h="402336">
-                <a:tc>
-                  <a:txBody>
-                    <a:bodyPr/>
-                    <a:lstStyle/>
-                    <a:p>
-                      <a:pPr algn="l"/>
-                      <a:r>
-                        <a:rPr sz="1400" b="0" i="0">
-                          <a:solidFill>
-                            <a:srgbClr val="2B2F36"/>
-                          </a:solidFill>
-                          <a:latin typeface="Calibri"/>
-                        </a:rPr>
-                        <a:t>Days with no data</a:t>
-                      </a:r>
-                    </a:p>
-                  </a:txBody>
-                  <a:tcPr anchor="ctr">
-                    <a:solidFill>
-                      <a:srgbClr val="F1F4F7"/>
-                    </a:solidFill>
-                  </a:tcPr>
-                </a:tc>
-                <a:tc>
-                  <a:txBody>
-                    <a:bodyPr/>
-                    <a:lstStyle/>
-                    <a:p>
-                      <a:pPr algn="r"/>
-                      <a:r>
-                        <a:rPr sz="1400" b="0" i="0">
-                          <a:solidFill>
-                            <a:srgbClr val="2B2F36"/>
-                          </a:solidFill>
-                          <a:latin typeface="Calibri"/>
-                        </a:rPr>
-                        <a:t>2</a:t>
-                      </a:r>
-                    </a:p>
-                  </a:txBody>
-                  <a:tcPr anchor="ctr">
-                    <a:solidFill>
-                      <a:srgbClr val="F1F4F7"/>
-                    </a:solidFill>
-                  </a:tcPr>
-                </a:tc>
-                <a:tc>
-                  <a:txBody>
-                    <a:bodyPr/>
-                    <a:lstStyle/>
-                    <a:p>
-                      <a:pPr algn="r"/>
-                      <a:r>
-                        <a:rPr sz="1400" b="0" i="0">
-                          <a:solidFill>
-                            <a:srgbClr val="2B2F36"/>
-                          </a:solidFill>
-                          <a:latin typeface="Calibri"/>
-                        </a:rPr>
-                        <a:t>0</a:t>
-                      </a:r>
-                    </a:p>
-                  </a:txBody>
-                  <a:tcPr anchor="ctr">
-                    <a:solidFill>
-                      <a:srgbClr val="F1F4F7"/>
-                    </a:solidFill>
-                  </a:tcPr>
-                </a:tc>
-                <a:tc>
-                  <a:txBody>
-                    <a:bodyPr/>
-                    <a:lstStyle/>
-                    <a:p>
-                      <a:pPr algn="r"/>
-                      <a:r>
-                        <a:rPr sz="1400" b="0" i="0">
-                          <a:solidFill>
-                            <a:srgbClr val="2B2F36"/>
-                          </a:solidFill>
-                          <a:latin typeface="Calibri"/>
-                        </a:rPr>
-                        <a:t>3</a:t>
-                      </a:r>
-                    </a:p>
-                  </a:txBody>
-                  <a:tcPr anchor="ctr">
-                    <a:solidFill>
-                      <a:srgbClr val="F1F4F7"/>
-                    </a:solidFill>
-                  </a:tcPr>
-                </a:tc>
-                <a:tc>
-                  <a:txBody>
-                    <a:bodyPr/>
-                    <a:lstStyle/>
-                    <a:p>
-                      <a:pPr algn="r"/>
-                      <a:r>
-                        <a:rPr sz="1400" b="0" i="0">
-                          <a:solidFill>
-                            <a:srgbClr val="2B2F36"/>
-                          </a:solidFill>
-                          <a:latin typeface="Calibri"/>
-                        </a:rPr>
-                        <a:t>0</a:t>
-                      </a:r>
-                    </a:p>
-                  </a:txBody>
-                  <a:tcPr anchor="ctr">
-                    <a:solidFill>
-                      <a:srgbClr val="F1F4F7"/>
-                    </a:solidFill>
-                  </a:tcPr>
-                </a:tc>
-              </a:tr>
-              <a:tr h="402336">
-                <a:tc>
-                  <a:txBody>
-                    <a:bodyPr/>
-                    <a:lstStyle/>
-                    <a:p>
-                      <a:pPr algn="l"/>
-                      <a:r>
-                        <a:rPr sz="1400" b="0" i="0">
-                          <a:solidFill>
-                            <a:srgbClr val="2B2F36"/>
-                          </a:solidFill>
-                          <a:latin typeface="Calibri"/>
-                        </a:rPr>
-                        <a:t>Stored daily figures used</a:t>
-                      </a:r>
-                    </a:p>
-                  </a:txBody>
-                  <a:tcPr anchor="ctr">
-                    <a:solidFill>
-                      <a:srgbClr val="FFFFFF"/>
-                    </a:solidFill>
-                  </a:tcPr>
-                </a:tc>
-                <a:tc>
-                  <a:txBody>
-                    <a:bodyPr/>
-                    <a:lstStyle/>
-                    <a:p>
-                      <a:pPr algn="r"/>
-                      <a:r>
-                        <a:rPr sz="1400" b="0" i="0">
-                          <a:solidFill>
-                            <a:srgbClr val="2B2F36"/>
-                          </a:solidFill>
-                          <a:latin typeface="Calibri"/>
-                        </a:rPr>
-                        <a:t>168</a:t>
-                      </a:r>
-                    </a:p>
-                  </a:txBody>
-                  <a:tcPr anchor="ctr">
-                    <a:solidFill>
-                      <a:srgbClr val="FFFFFF"/>
-                    </a:solidFill>
-                  </a:tcPr>
-                </a:tc>
-                <a:tc>
-                  <a:txBody>
-                    <a:bodyPr/>
-                    <a:lstStyle/>
-                    <a:p>
-                      <a:pPr algn="r"/>
-                      <a:r>
-                        <a:rPr sz="1400" b="0" i="0">
-                          <a:solidFill>
-                            <a:srgbClr val="2B2F36"/>
-                          </a:solidFill>
-                          <a:latin typeface="Calibri"/>
-                        </a:rPr>
-                        <a:t>168</a:t>
-                      </a:r>
-                    </a:p>
-                  </a:txBody>
-                  <a:tcPr anchor="ctr">
-                    <a:solidFill>
-                      <a:srgbClr val="FFFFFF"/>
-                    </a:solidFill>
-                  </a:tcPr>
-                </a:tc>
-                <a:tc>
-                  <a:txBody>
-                    <a:bodyPr/>
-                    <a:lstStyle/>
-                    <a:p>
-                      <a:pPr algn="r"/>
-                      <a:r>
-                        <a:rPr sz="1400" b="0" i="0">
-                          <a:solidFill>
-                            <a:srgbClr val="2B2F36"/>
-                          </a:solidFill>
-                          <a:latin typeface="Calibri"/>
-                        </a:rPr>
-                        <a:t>112</a:t>
-                      </a:r>
-                    </a:p>
-                  </a:txBody>
-                  <a:tcPr anchor="ctr">
-                    <a:solidFill>
-                      <a:srgbClr val="FFFFFF"/>
-                    </a:solidFill>
-                  </a:tcPr>
-                </a:tc>
-                <a:tc>
-                  <a:txBody>
-                    <a:bodyPr/>
-                    <a:lstStyle/>
-                    <a:p>
-                      <a:pPr algn="r"/>
-                      <a:r>
-                        <a:rPr sz="1400" b="0" i="0">
-                          <a:solidFill>
-                            <a:srgbClr val="2B2F36"/>
-                          </a:solidFill>
-                          <a:latin typeface="Calibri"/>
-                        </a:rPr>
-                        <a:t>116</a:t>
-                      </a:r>
-                    </a:p>
-                  </a:txBody>
-                  <a:tcPr anchor="ctr">
-                    <a:solidFill>
-                      <a:srgbClr val="FFFFFF"/>
-                    </a:solidFill>
-                  </a:tcPr>
-                </a:tc>
-              </a:tr>
-            </a:tbl>
+          <a:graphicData uri="http://schemas.openxmlformats.org/drawingml/2006/chart">
+            <c:chart xmlns:c="http://schemas.openxmlformats.org/drawingml/2006/chart" r:id="rId2"/>
+          </a:graphicData>
+        </a:graphic>
+      </p:graphicFrame>
+      <p:graphicFrame>
+        <p:nvGraphicFramePr>
+          <p:cNvPr id="4" name="Chart 3" descr="Line chart of search impressions for each day of October 2026, with September 2026 as a grey line"/>
+          <p:cNvGraphicFramePr>
+            <a:graphicFrameLocks noGrp="1"/>
+          </p:cNvGraphicFramePr>
+          <p:nvPr/>
+        </p:nvGraphicFramePr>
+        <p:xfrm>
+          <a:off x="6233007" y="1280160"/>
+          <a:ext cx="5410047" cy="2240280"/>
+        </p:xfrm>
+        <a:graphic>
+          <a:graphicData uri="http://schemas.openxmlformats.org/drawingml/2006/chart">
+            <c:chart xmlns:c="http://schemas.openxmlformats.org/drawingml/2006/chart" r:id="rId3"/>
           </a:graphicData>
         </a:graphic>
       </p:graphicFrame>
       <p:sp>
         <p:nvSpPr>
-          <p:cNvPr id="4" name="TextBox 3"/>
+          <p:cNvPr id="5" name="TextBox 4"/>
           <p:cNvSpPr txBox="1"/>
           <p:nvPr/>
         </p:nvSpPr>
         <p:spPr>
           <a:xfrm>
-            <a:off x="548640" y="3840480"/>
-            <a:ext cx="11094415" cy="2103120"/>
+            <a:off x="548640" y="3566160"/>
+            <a:ext cx="3657600" cy="320040"/>
           </a:xfrm>
           <a:prstGeom prst="rect">
             <a:avLst/>
@@ -10635,88 +15158,1784 @@
           <a:p>
             <a:pPr>
               <a:spcAft>
-                <a:spcPts val="300"/>
+                <a:spcPts val="0"/>
               </a:spcAft>
             </a:pPr>
             <a:r>
-              <a:rPr sz="1400" b="0" i="0">
+              <a:rPr sz="1500" b="0" i="0">
                 <a:solidFill>
-                  <a:srgbClr val="2B2F36"/>
+                  <a:srgbClr val="1F3A5F"/>
                 </a:solidFill>
                 <a:latin typeface="Calibri"/>
               </a:rPr>
-              <a:t>Days with no data in October, store: Oct 14, Oct 15.</a:t>
-            </a:r>
-          </a:p>
-          <a:p>
-            <a:pPr>
-              <a:spcAft>
-                <a:spcPts val="300"/>
-              </a:spcAft>
-            </a:pPr>
-            <a:r>
-              <a:rPr sz="1400" b="0" i="0">
-                <a:solidFill>
-                  <a:srgbClr val="2B2F36"/>
-                </a:solidFill>
-                <a:latin typeface="Calibri"/>
-              </a:rPr>
-              <a:t>Days with no data in October, website: Oct 3, Oct 4, Oct 5.</a:t>
-            </a:r>
-          </a:p>
-          <a:p>
-            <a:pPr>
-              <a:spcAft>
-                <a:spcPts val="300"/>
-              </a:spcAft>
-            </a:pPr>
-            <a:r>
-              <a:rPr sz="1400" b="0" i="0">
-                <a:solidFill>
-                  <a:srgbClr val="2B2F36"/>
-                </a:solidFill>
-                <a:latin typeface="Calibri"/>
-              </a:rPr>
-              <a:t>Days with no data in September, store: none.</a:t>
-            </a:r>
-          </a:p>
-          <a:p>
-            <a:pPr>
-              <a:spcAft>
-                <a:spcPts val="300"/>
-              </a:spcAft>
-            </a:pPr>
-            <a:r>
-              <a:rPr sz="1400" b="0" i="0">
-                <a:solidFill>
-                  <a:srgbClr val="2B2F36"/>
-                </a:solidFill>
-                <a:latin typeface="Calibri"/>
-              </a:rPr>
-              <a:t>Days with no data in September, website: none.</a:t>
-            </a:r>
-          </a:p>
-          <a:p>
-            <a:pPr>
-              <a:spcAft>
-                <a:spcPts val="300"/>
-              </a:spcAft>
-            </a:pPr>
-            <a:r>
-              <a:rPr sz="1400" b="0" i="0">
-                <a:solidFill>
-                  <a:srgbClr val="2B2F36"/>
-                </a:solidFill>
-                <a:latin typeface="Calibri"/>
-              </a:rPr>
-              <a:t>A month with days missing is understated, so its changes are marked partial.</a:t>
+              <a:t>Search figures</a:t>
             </a:r>
           </a:p>
         </p:txBody>
       </p:sp>
+      <p:graphicFrame>
+        <p:nvGraphicFramePr>
+          <p:cNvPr id="6" name="Table 5"/>
+          <p:cNvGraphicFramePr>
+            <a:graphicFrameLocks noGrp="1"/>
+          </p:cNvGraphicFramePr>
+          <p:nvPr/>
+        </p:nvGraphicFramePr>
+        <p:xfrm>
+          <a:off x="548640" y="3886200"/>
+          <a:ext cx="3657598" cy="1508760"/>
+        </p:xfrm>
+        <a:graphic>
+          <a:graphicData uri="http://schemas.openxmlformats.org/drawingml/2006/table">
+            <a:tbl>
+              <a:tblPr firstRow="1" bandRow="1">
+                <a:tableStyleId>{5C22544A-7EE6-4342-B048-85BDC9FD1C3A}</a:tableStyleId>
+              </a:tblPr>
+              <a:tblGrid>
+                <a:gridCol w="1712068"/>
+                <a:gridCol w="661480"/>
+                <a:gridCol w="661480"/>
+                <a:gridCol w="622570"/>
+              </a:tblGrid>
+              <a:tr h="301752">
+                <a:tc>
+                  <a:txBody>
+                    <a:bodyPr/>
+                    <a:lstStyle/>
+                    <a:p>
+                      <a:pPr algn="l"/>
+                      <a:r>
+                        <a:rPr sz="1100" b="1" i="0">
+                          <a:solidFill>
+                            <a:srgbClr val="FFFFFF"/>
+                          </a:solidFill>
+                          <a:latin typeface="Calibri"/>
+                        </a:rPr>
+                        <a:t>Metric</a:t>
+                      </a:r>
+                    </a:p>
+                  </a:txBody>
+                  <a:tcPr anchor="ctr">
+                    <a:solidFill>
+                      <a:srgbClr val="1F3A5F"/>
+                    </a:solidFill>
+                  </a:tcPr>
+                </a:tc>
+                <a:tc>
+                  <a:txBody>
+                    <a:bodyPr/>
+                    <a:lstStyle/>
+                    <a:p>
+                      <a:pPr algn="r"/>
+                      <a:r>
+                        <a:rPr sz="1100" b="1" i="0">
+                          <a:solidFill>
+                            <a:srgbClr val="FFFFFF"/>
+                          </a:solidFill>
+                          <a:latin typeface="Calibri"/>
+                        </a:rPr>
+                        <a:t>Oct</a:t>
+                      </a:r>
+                    </a:p>
+                  </a:txBody>
+                  <a:tcPr anchor="ctr">
+                    <a:solidFill>
+                      <a:srgbClr val="1F3A5F"/>
+                    </a:solidFill>
+                  </a:tcPr>
+                </a:tc>
+                <a:tc>
+                  <a:txBody>
+                    <a:bodyPr/>
+                    <a:lstStyle/>
+                    <a:p>
+                      <a:pPr algn="r"/>
+                      <a:r>
+                        <a:rPr sz="1100" b="1" i="0">
+                          <a:solidFill>
+                            <a:srgbClr val="FFFFFF"/>
+                          </a:solidFill>
+                          <a:latin typeface="Calibri"/>
+                        </a:rPr>
+                        <a:t>Sep</a:t>
+                      </a:r>
+                    </a:p>
+                  </a:txBody>
+                  <a:tcPr anchor="ctr">
+                    <a:solidFill>
+                      <a:srgbClr val="1F3A5F"/>
+                    </a:solidFill>
+                  </a:tcPr>
+                </a:tc>
+                <a:tc>
+                  <a:txBody>
+                    <a:bodyPr/>
+                    <a:lstStyle/>
+                    <a:p>
+                      <a:pPr algn="r"/>
+                      <a:r>
+                        <a:rPr sz="1100" b="1" i="0">
+                          <a:solidFill>
+                            <a:srgbClr val="FFFFFF"/>
+                          </a:solidFill>
+                          <a:latin typeface="Calibri"/>
+                        </a:rPr>
+                        <a:t>Chg %</a:t>
+                      </a:r>
+                    </a:p>
+                  </a:txBody>
+                  <a:tcPr anchor="ctr">
+                    <a:solidFill>
+                      <a:srgbClr val="1F3A5F"/>
+                    </a:solidFill>
+                  </a:tcPr>
+                </a:tc>
+              </a:tr>
+              <a:tr h="301752">
+                <a:tc>
+                  <a:txBody>
+                    <a:bodyPr/>
+                    <a:lstStyle/>
+                    <a:p>
+                      <a:pPr algn="l"/>
+                      <a:r>
+                        <a:rPr sz="1100" b="0" i="0">
+                          <a:solidFill>
+                            <a:srgbClr val="2B2F36"/>
+                          </a:solidFill>
+                          <a:latin typeface="Calibri"/>
+                        </a:rPr>
+                        <a:t>Search clicks</a:t>
+                      </a:r>
+                    </a:p>
+                  </a:txBody>
+                  <a:tcPr anchor="ctr">
+                    <a:solidFill>
+                      <a:srgbClr val="FFFFFF"/>
+                    </a:solidFill>
+                  </a:tcPr>
+                </a:tc>
+                <a:tc>
+                  <a:txBody>
+                    <a:bodyPr/>
+                    <a:lstStyle/>
+                    <a:p>
+                      <a:pPr algn="r"/>
+                      <a:r>
+                        <a:rPr sz="1100" b="0" i="0">
+                          <a:solidFill>
+                            <a:srgbClr val="2B2F36"/>
+                          </a:solidFill>
+                          <a:latin typeface="Calibri"/>
+                        </a:rPr>
+                        <a:t>4,103</a:t>
+                      </a:r>
+                    </a:p>
+                  </a:txBody>
+                  <a:tcPr anchor="ctr">
+                    <a:solidFill>
+                      <a:srgbClr val="FFFFFF"/>
+                    </a:solidFill>
+                  </a:tcPr>
+                </a:tc>
+                <a:tc>
+                  <a:txBody>
+                    <a:bodyPr/>
+                    <a:lstStyle/>
+                    <a:p>
+                      <a:pPr algn="r"/>
+                      <a:r>
+                        <a:rPr sz="1100" b="0" i="0">
+                          <a:solidFill>
+                            <a:srgbClr val="2B2F36"/>
+                          </a:solidFill>
+                          <a:latin typeface="Calibri"/>
+                        </a:rPr>
+                        <a:t>3,433</a:t>
+                      </a:r>
+                    </a:p>
+                  </a:txBody>
+                  <a:tcPr anchor="ctr">
+                    <a:solidFill>
+                      <a:srgbClr val="FFFFFF"/>
+                    </a:solidFill>
+                  </a:tcPr>
+                </a:tc>
+                <a:tc>
+                  <a:txBody>
+                    <a:bodyPr/>
+                    <a:lstStyle/>
+                    <a:p>
+                      <a:pPr algn="r"/>
+                      <a:r>
+                        <a:rPr sz="1100" b="0" i="0">
+                          <a:solidFill>
+                            <a:srgbClr val="2B2F36"/>
+                          </a:solidFill>
+                          <a:latin typeface="Calibri"/>
+                        </a:rPr>
+                        <a:t>+19.5%</a:t>
+                      </a:r>
+                    </a:p>
+                  </a:txBody>
+                  <a:tcPr anchor="ctr">
+                    <a:solidFill>
+                      <a:srgbClr val="FFFFFF"/>
+                    </a:solidFill>
+                  </a:tcPr>
+                </a:tc>
+              </a:tr>
+              <a:tr h="301752">
+                <a:tc>
+                  <a:txBody>
+                    <a:bodyPr/>
+                    <a:lstStyle/>
+                    <a:p>
+                      <a:pPr algn="l"/>
+                      <a:r>
+                        <a:rPr sz="1100" b="0" i="0">
+                          <a:solidFill>
+                            <a:srgbClr val="2B2F36"/>
+                          </a:solidFill>
+                          <a:latin typeface="Calibri"/>
+                        </a:rPr>
+                        <a:t>Search impressions</a:t>
+                      </a:r>
+                    </a:p>
+                  </a:txBody>
+                  <a:tcPr anchor="ctr">
+                    <a:solidFill>
+                      <a:srgbClr val="F1F4F7"/>
+                    </a:solidFill>
+                  </a:tcPr>
+                </a:tc>
+                <a:tc>
+                  <a:txBody>
+                    <a:bodyPr/>
+                    <a:lstStyle/>
+                    <a:p>
+                      <a:pPr algn="r"/>
+                      <a:r>
+                        <a:rPr sz="1100" b="0" i="0">
+                          <a:solidFill>
+                            <a:srgbClr val="2B2F36"/>
+                          </a:solidFill>
+                          <a:latin typeface="Calibri"/>
+                        </a:rPr>
+                        <a:t>96,696</a:t>
+                      </a:r>
+                    </a:p>
+                  </a:txBody>
+                  <a:tcPr anchor="ctr">
+                    <a:solidFill>
+                      <a:srgbClr val="F1F4F7"/>
+                    </a:solidFill>
+                  </a:tcPr>
+                </a:tc>
+                <a:tc>
+                  <a:txBody>
+                    <a:bodyPr/>
+                    <a:lstStyle/>
+                    <a:p>
+                      <a:pPr algn="r"/>
+                      <a:r>
+                        <a:rPr sz="1100" b="0" i="0">
+                          <a:solidFill>
+                            <a:srgbClr val="2B2F36"/>
+                          </a:solidFill>
+                          <a:latin typeface="Calibri"/>
+                        </a:rPr>
+                        <a:t>83,292</a:t>
+                      </a:r>
+                    </a:p>
+                  </a:txBody>
+                  <a:tcPr anchor="ctr">
+                    <a:solidFill>
+                      <a:srgbClr val="F1F4F7"/>
+                    </a:solidFill>
+                  </a:tcPr>
+                </a:tc>
+                <a:tc>
+                  <a:txBody>
+                    <a:bodyPr/>
+                    <a:lstStyle/>
+                    <a:p>
+                      <a:pPr algn="r"/>
+                      <a:r>
+                        <a:rPr sz="1100" b="0" i="0">
+                          <a:solidFill>
+                            <a:srgbClr val="2B2F36"/>
+                          </a:solidFill>
+                          <a:latin typeface="Calibri"/>
+                        </a:rPr>
+                        <a:t>+16.1%</a:t>
+                      </a:r>
+                    </a:p>
+                  </a:txBody>
+                  <a:tcPr anchor="ctr">
+                    <a:solidFill>
+                      <a:srgbClr val="F1F4F7"/>
+                    </a:solidFill>
+                  </a:tcPr>
+                </a:tc>
+              </a:tr>
+              <a:tr h="301752">
+                <a:tc>
+                  <a:txBody>
+                    <a:bodyPr/>
+                    <a:lstStyle/>
+                    <a:p>
+                      <a:pPr algn="l"/>
+                      <a:r>
+                        <a:rPr sz="1100" b="0" i="0">
+                          <a:solidFill>
+                            <a:srgbClr val="2B2F36"/>
+                          </a:solidFill>
+                          <a:latin typeface="Calibri"/>
+                        </a:rPr>
+                        <a:t>Search click through rate</a:t>
+                      </a:r>
+                    </a:p>
+                  </a:txBody>
+                  <a:tcPr anchor="ctr">
+                    <a:solidFill>
+                      <a:srgbClr val="FFFFFF"/>
+                    </a:solidFill>
+                  </a:tcPr>
+                </a:tc>
+                <a:tc>
+                  <a:txBody>
+                    <a:bodyPr/>
+                    <a:lstStyle/>
+                    <a:p>
+                      <a:pPr algn="r"/>
+                      <a:r>
+                        <a:rPr sz="1100" b="0" i="0">
+                          <a:solidFill>
+                            <a:srgbClr val="2B2F36"/>
+                          </a:solidFill>
+                          <a:latin typeface="Calibri"/>
+                        </a:rPr>
+                        <a:t>4.24%</a:t>
+                      </a:r>
+                    </a:p>
+                  </a:txBody>
+                  <a:tcPr anchor="ctr">
+                    <a:solidFill>
+                      <a:srgbClr val="FFFFFF"/>
+                    </a:solidFill>
+                  </a:tcPr>
+                </a:tc>
+                <a:tc>
+                  <a:txBody>
+                    <a:bodyPr/>
+                    <a:lstStyle/>
+                    <a:p>
+                      <a:pPr algn="r"/>
+                      <a:r>
+                        <a:rPr sz="1100" b="0" i="0">
+                          <a:solidFill>
+                            <a:srgbClr val="2B2F36"/>
+                          </a:solidFill>
+                          <a:latin typeface="Calibri"/>
+                        </a:rPr>
+                        <a:t>4.12%</a:t>
+                      </a:r>
+                    </a:p>
+                  </a:txBody>
+                  <a:tcPr anchor="ctr">
+                    <a:solidFill>
+                      <a:srgbClr val="FFFFFF"/>
+                    </a:solidFill>
+                  </a:tcPr>
+                </a:tc>
+                <a:tc>
+                  <a:txBody>
+                    <a:bodyPr/>
+                    <a:lstStyle/>
+                    <a:p>
+                      <a:pPr algn="r"/>
+                      <a:r>
+                        <a:rPr sz="1100" b="0" i="0">
+                          <a:solidFill>
+                            <a:srgbClr val="2B2F36"/>
+                          </a:solidFill>
+                          <a:latin typeface="Calibri"/>
+                        </a:rPr>
+                        <a:t>+2.9%</a:t>
+                      </a:r>
+                    </a:p>
+                  </a:txBody>
+                  <a:tcPr anchor="ctr">
+                    <a:solidFill>
+                      <a:srgbClr val="FFFFFF"/>
+                    </a:solidFill>
+                  </a:tcPr>
+                </a:tc>
+              </a:tr>
+              <a:tr h="301752">
+                <a:tc>
+                  <a:txBody>
+                    <a:bodyPr/>
+                    <a:lstStyle/>
+                    <a:p>
+                      <a:pPr algn="l"/>
+                      <a:r>
+                        <a:rPr sz="1100" b="0" i="0">
+                          <a:solidFill>
+                            <a:srgbClr val="2B2F36"/>
+                          </a:solidFill>
+                          <a:latin typeface="Calibri"/>
+                        </a:rPr>
+                        <a:t>Average position</a:t>
+                      </a:r>
+                    </a:p>
+                  </a:txBody>
+                  <a:tcPr anchor="ctr">
+                    <a:solidFill>
+                      <a:srgbClr val="F1F4F7"/>
+                    </a:solidFill>
+                  </a:tcPr>
+                </a:tc>
+                <a:tc>
+                  <a:txBody>
+                    <a:bodyPr/>
+                    <a:lstStyle/>
+                    <a:p>
+                      <a:pPr algn="r"/>
+                      <a:r>
+                        <a:rPr sz="1100" b="0" i="0">
+                          <a:solidFill>
+                            <a:srgbClr val="2B2F36"/>
+                          </a:solidFill>
+                          <a:latin typeface="Calibri"/>
+                        </a:rPr>
+                        <a:t>8.6</a:t>
+                      </a:r>
+                    </a:p>
+                  </a:txBody>
+                  <a:tcPr anchor="ctr">
+                    <a:solidFill>
+                      <a:srgbClr val="F1F4F7"/>
+                    </a:solidFill>
+                  </a:tcPr>
+                </a:tc>
+                <a:tc>
+                  <a:txBody>
+                    <a:bodyPr/>
+                    <a:lstStyle/>
+                    <a:p>
+                      <a:pPr algn="r"/>
+                      <a:r>
+                        <a:rPr sz="1100" b="0" i="0">
+                          <a:solidFill>
+                            <a:srgbClr val="2B2F36"/>
+                          </a:solidFill>
+                          <a:latin typeface="Calibri"/>
+                        </a:rPr>
+                        <a:t>9.4</a:t>
+                      </a:r>
+                    </a:p>
+                  </a:txBody>
+                  <a:tcPr anchor="ctr">
+                    <a:solidFill>
+                      <a:srgbClr val="F1F4F7"/>
+                    </a:solidFill>
+                  </a:tcPr>
+                </a:tc>
+                <a:tc>
+                  <a:txBody>
+                    <a:bodyPr/>
+                    <a:lstStyle/>
+                    <a:p>
+                      <a:pPr algn="r"/>
+                      <a:r>
+                        <a:rPr sz="1100" b="0" i="0">
+                          <a:solidFill>
+                            <a:srgbClr val="2B2F36"/>
+                          </a:solidFill>
+                          <a:latin typeface="Calibri"/>
+                        </a:rPr>
+                        <a:t>-8.9%</a:t>
+                      </a:r>
+                    </a:p>
+                  </a:txBody>
+                  <a:tcPr anchor="ctr">
+                    <a:solidFill>
+                      <a:srgbClr val="F1F4F7"/>
+                    </a:solidFill>
+                  </a:tcPr>
+                </a:tc>
+              </a:tr>
+            </a:tbl>
+          </a:graphicData>
+        </a:graphic>
+      </p:graphicFrame>
       <p:sp>
         <p:nvSpPr>
-          <p:cNvPr id="5" name="TextBox 4"/>
+          <p:cNvPr id="7" name="TextBox 6"/>
+          <p:cNvSpPr txBox="1"/>
+          <p:nvPr/>
+        </p:nvSpPr>
+        <p:spPr>
+          <a:xfrm>
+            <a:off x="4343400" y="3566160"/>
+            <a:ext cx="3520440" cy="320040"/>
+          </a:xfrm>
+          <a:prstGeom prst="rect">
+            <a:avLst/>
+          </a:prstGeom>
+          <a:noFill/>
+        </p:spPr>
+        <p:txBody>
+          <a:bodyPr wrap="square">
+            <a:spAutoFit/>
+          </a:bodyPr>
+          <a:lstStyle/>
+          <a:p>
+            <a:pPr>
+              <a:spcAft>
+                <a:spcPts val="0"/>
+              </a:spcAft>
+            </a:pPr>
+            <a:r>
+              <a:rPr sz="1500" b="0" i="0">
+                <a:solidFill>
+                  <a:srgbClr val="1F3A5F"/>
+                </a:solidFill>
+                <a:latin typeface="Calibri"/>
+              </a:rPr>
+              <a:t>Top queries</a:t>
+            </a:r>
+          </a:p>
+        </p:txBody>
+      </p:sp>
+      <p:graphicFrame>
+        <p:nvGraphicFramePr>
+          <p:cNvPr id="8" name="Table 7"/>
+          <p:cNvGraphicFramePr>
+            <a:graphicFrameLocks noGrp="1"/>
+          </p:cNvGraphicFramePr>
+          <p:nvPr/>
+        </p:nvGraphicFramePr>
+        <p:xfrm>
+          <a:off x="4343400" y="3886200"/>
+          <a:ext cx="3520439" cy="1810512"/>
+        </p:xfrm>
+        <a:graphic>
+          <a:graphicData uri="http://schemas.openxmlformats.org/drawingml/2006/table">
+            <a:tbl>
+              <a:tblPr firstRow="1" bandRow="1">
+                <a:tableStyleId>{5C22544A-7EE6-4342-B048-85BDC9FD1C3A}</a:tableStyleId>
+              </a:tblPr>
+              <a:tblGrid>
+                <a:gridCol w="1866257"/>
+                <a:gridCol w="508979"/>
+                <a:gridCol w="678639"/>
+                <a:gridCol w="466564"/>
+              </a:tblGrid>
+              <a:tr h="301752">
+                <a:tc>
+                  <a:txBody>
+                    <a:bodyPr/>
+                    <a:lstStyle/>
+                    <a:p>
+                      <a:pPr algn="l"/>
+                      <a:r>
+                        <a:rPr sz="1100" b="1" i="0">
+                          <a:solidFill>
+                            <a:srgbClr val="FFFFFF"/>
+                          </a:solidFill>
+                          <a:latin typeface="Calibri"/>
+                        </a:rPr>
+                        <a:t>Query</a:t>
+                      </a:r>
+                    </a:p>
+                  </a:txBody>
+                  <a:tcPr anchor="ctr">
+                    <a:solidFill>
+                      <a:srgbClr val="1F3A5F"/>
+                    </a:solidFill>
+                  </a:tcPr>
+                </a:tc>
+                <a:tc>
+                  <a:txBody>
+                    <a:bodyPr/>
+                    <a:lstStyle/>
+                    <a:p>
+                      <a:pPr algn="r"/>
+                      <a:r>
+                        <a:rPr sz="1100" b="1" i="0">
+                          <a:solidFill>
+                            <a:srgbClr val="FFFFFF"/>
+                          </a:solidFill>
+                          <a:latin typeface="Calibri"/>
+                        </a:rPr>
+                        <a:t>Clicks</a:t>
+                      </a:r>
+                    </a:p>
+                  </a:txBody>
+                  <a:tcPr anchor="ctr">
+                    <a:solidFill>
+                      <a:srgbClr val="1F3A5F"/>
+                    </a:solidFill>
+                  </a:tcPr>
+                </a:tc>
+                <a:tc>
+                  <a:txBody>
+                    <a:bodyPr/>
+                    <a:lstStyle/>
+                    <a:p>
+                      <a:pPr algn="r"/>
+                      <a:r>
+                        <a:rPr sz="1100" b="1" i="0">
+                          <a:solidFill>
+                            <a:srgbClr val="FFFFFF"/>
+                          </a:solidFill>
+                          <a:latin typeface="Calibri"/>
+                        </a:rPr>
+                        <a:t>Impr.</a:t>
+                      </a:r>
+                    </a:p>
+                  </a:txBody>
+                  <a:tcPr anchor="ctr">
+                    <a:solidFill>
+                      <a:srgbClr val="1F3A5F"/>
+                    </a:solidFill>
+                  </a:tcPr>
+                </a:tc>
+                <a:tc>
+                  <a:txBody>
+                    <a:bodyPr/>
+                    <a:lstStyle/>
+                    <a:p>
+                      <a:pPr algn="r"/>
+                      <a:r>
+                        <a:rPr sz="1100" b="1" i="0">
+                          <a:solidFill>
+                            <a:srgbClr val="FFFFFF"/>
+                          </a:solidFill>
+                          <a:latin typeface="Calibri"/>
+                        </a:rPr>
+                        <a:t>Pos.</a:t>
+                      </a:r>
+                    </a:p>
+                  </a:txBody>
+                  <a:tcPr anchor="ctr">
+                    <a:solidFill>
+                      <a:srgbClr val="1F3A5F"/>
+                    </a:solidFill>
+                  </a:tcPr>
+                </a:tc>
+              </a:tr>
+              <a:tr h="301752">
+                <a:tc>
+                  <a:txBody>
+                    <a:bodyPr/>
+                    <a:lstStyle/>
+                    <a:p>
+                      <a:pPr algn="l"/>
+                      <a:r>
+                        <a:rPr sz="1100" b="0" i="0">
+                          <a:solidFill>
+                            <a:srgbClr val="2B2F36"/>
+                          </a:solidFill>
+                          <a:latin typeface="Calibri"/>
+                        </a:rPr>
+                        <a:t>headlamp rechargeable</a:t>
+                      </a:r>
+                    </a:p>
+                  </a:txBody>
+                  <a:tcPr anchor="ctr">
+                    <a:solidFill>
+                      <a:srgbClr val="FFFFFF"/>
+                    </a:solidFill>
+                  </a:tcPr>
+                </a:tc>
+                <a:tc>
+                  <a:txBody>
+                    <a:bodyPr/>
+                    <a:lstStyle/>
+                    <a:p>
+                      <a:pPr algn="r"/>
+                      <a:r>
+                        <a:rPr sz="1100" b="0" i="0">
+                          <a:solidFill>
+                            <a:srgbClr val="2B2F36"/>
+                          </a:solidFill>
+                          <a:latin typeface="Calibri"/>
+                        </a:rPr>
+                        <a:t>292</a:t>
+                      </a:r>
+                    </a:p>
+                  </a:txBody>
+                  <a:tcPr anchor="ctr">
+                    <a:solidFill>
+                      <a:srgbClr val="FFFFFF"/>
+                    </a:solidFill>
+                  </a:tcPr>
+                </a:tc>
+                <a:tc>
+                  <a:txBody>
+                    <a:bodyPr/>
+                    <a:lstStyle/>
+                    <a:p>
+                      <a:pPr algn="r"/>
+                      <a:r>
+                        <a:rPr sz="1100" b="0" i="0">
+                          <a:solidFill>
+                            <a:srgbClr val="2B2F36"/>
+                          </a:solidFill>
+                          <a:latin typeface="Calibri"/>
+                        </a:rPr>
+                        <a:t>7,161</a:t>
+                      </a:r>
+                    </a:p>
+                  </a:txBody>
+                  <a:tcPr anchor="ctr">
+                    <a:solidFill>
+                      <a:srgbClr val="FFFFFF"/>
+                    </a:solidFill>
+                  </a:tcPr>
+                </a:tc>
+                <a:tc>
+                  <a:txBody>
+                    <a:bodyPr/>
+                    <a:lstStyle/>
+                    <a:p>
+                      <a:pPr algn="r"/>
+                      <a:r>
+                        <a:rPr sz="1100" b="0" i="0">
+                          <a:solidFill>
+                            <a:srgbClr val="2B2F36"/>
+                          </a:solidFill>
+                          <a:latin typeface="Calibri"/>
+                        </a:rPr>
+                        <a:t>7.5</a:t>
+                      </a:r>
+                    </a:p>
+                  </a:txBody>
+                  <a:tcPr anchor="ctr">
+                    <a:solidFill>
+                      <a:srgbClr val="FFFFFF"/>
+                    </a:solidFill>
+                  </a:tcPr>
+                </a:tc>
+              </a:tr>
+              <a:tr h="301752">
+                <a:tc>
+                  <a:txBody>
+                    <a:bodyPr/>
+                    <a:lstStyle/>
+                    <a:p>
+                      <a:pPr algn="l"/>
+                      <a:r>
+                        <a:rPr sz="1100" b="0" i="0">
+                          <a:solidFill>
+                            <a:srgbClr val="2B2F36"/>
+                          </a:solidFill>
+                          <a:latin typeface="Calibri"/>
+                        </a:rPr>
+                        <a:t>example outfitters</a:t>
+                      </a:r>
+                    </a:p>
+                  </a:txBody>
+                  <a:tcPr anchor="ctr">
+                    <a:solidFill>
+                      <a:srgbClr val="F1F4F7"/>
+                    </a:solidFill>
+                  </a:tcPr>
+                </a:tc>
+                <a:tc>
+                  <a:txBody>
+                    <a:bodyPr/>
+                    <a:lstStyle/>
+                    <a:p>
+                      <a:pPr algn="r"/>
+                      <a:r>
+                        <a:rPr sz="1100" b="0" i="0">
+                          <a:solidFill>
+                            <a:srgbClr val="2B2F36"/>
+                          </a:solidFill>
+                          <a:latin typeface="Calibri"/>
+                        </a:rPr>
+                        <a:t>276</a:t>
+                      </a:r>
+                    </a:p>
+                  </a:txBody>
+                  <a:tcPr anchor="ctr">
+                    <a:solidFill>
+                      <a:srgbClr val="F1F4F7"/>
+                    </a:solidFill>
+                  </a:tcPr>
+                </a:tc>
+                <a:tc>
+                  <a:txBody>
+                    <a:bodyPr/>
+                    <a:lstStyle/>
+                    <a:p>
+                      <a:pPr algn="r"/>
+                      <a:r>
+                        <a:rPr sz="1100" b="0" i="0">
+                          <a:solidFill>
+                            <a:srgbClr val="2B2F36"/>
+                          </a:solidFill>
+                          <a:latin typeface="Calibri"/>
+                        </a:rPr>
+                        <a:t>6,888</a:t>
+                      </a:r>
+                    </a:p>
+                  </a:txBody>
+                  <a:tcPr anchor="ctr">
+                    <a:solidFill>
+                      <a:srgbClr val="F1F4F7"/>
+                    </a:solidFill>
+                  </a:tcPr>
+                </a:tc>
+                <a:tc>
+                  <a:txBody>
+                    <a:bodyPr/>
+                    <a:lstStyle/>
+                    <a:p>
+                      <a:pPr algn="r"/>
+                      <a:r>
+                        <a:rPr sz="1100" b="0" i="0">
+                          <a:solidFill>
+                            <a:srgbClr val="2B2F36"/>
+                          </a:solidFill>
+                          <a:latin typeface="Calibri"/>
+                        </a:rPr>
+                        <a:t>8.9</a:t>
+                      </a:r>
+                    </a:p>
+                  </a:txBody>
+                  <a:tcPr anchor="ctr">
+                    <a:solidFill>
+                      <a:srgbClr val="F1F4F7"/>
+                    </a:solidFill>
+                  </a:tcPr>
+                </a:tc>
+              </a:tr>
+              <a:tr h="301752">
+                <a:tc>
+                  <a:txBody>
+                    <a:bodyPr/>
+                    <a:lstStyle/>
+                    <a:p>
+                      <a:pPr algn="l"/>
+                      <a:r>
+                        <a:rPr sz="1100" b="0" i="0">
+                          <a:solidFill>
+                            <a:srgbClr val="2B2F36"/>
+                          </a:solidFill>
+                          <a:latin typeface="Calibri"/>
+                        </a:rPr>
+                        <a:t>gore tex jacket</a:t>
+                      </a:r>
+                    </a:p>
+                  </a:txBody>
+                  <a:tcPr anchor="ctr">
+                    <a:solidFill>
+                      <a:srgbClr val="FFFFFF"/>
+                    </a:solidFill>
+                  </a:tcPr>
+                </a:tc>
+                <a:tc>
+                  <a:txBody>
+                    <a:bodyPr/>
+                    <a:lstStyle/>
+                    <a:p>
+                      <a:pPr algn="r"/>
+                      <a:r>
+                        <a:rPr sz="1100" b="0" i="0">
+                          <a:solidFill>
+                            <a:srgbClr val="2B2F36"/>
+                          </a:solidFill>
+                          <a:latin typeface="Calibri"/>
+                        </a:rPr>
+                        <a:t>262</a:t>
+                      </a:r>
+                    </a:p>
+                  </a:txBody>
+                  <a:tcPr anchor="ctr">
+                    <a:solidFill>
+                      <a:srgbClr val="FFFFFF"/>
+                    </a:solidFill>
+                  </a:tcPr>
+                </a:tc>
+                <a:tc>
+                  <a:txBody>
+                    <a:bodyPr/>
+                    <a:lstStyle/>
+                    <a:p>
+                      <a:pPr algn="r"/>
+                      <a:r>
+                        <a:rPr sz="1100" b="0" i="0">
+                          <a:solidFill>
+                            <a:srgbClr val="2B2F36"/>
+                          </a:solidFill>
+                          <a:latin typeface="Calibri"/>
+                        </a:rPr>
+                        <a:t>6,488</a:t>
+                      </a:r>
+                    </a:p>
+                  </a:txBody>
+                  <a:tcPr anchor="ctr">
+                    <a:solidFill>
+                      <a:srgbClr val="FFFFFF"/>
+                    </a:solidFill>
+                  </a:tcPr>
+                </a:tc>
+                <a:tc>
+                  <a:txBody>
+                    <a:bodyPr/>
+                    <a:lstStyle/>
+                    <a:p>
+                      <a:pPr algn="r"/>
+                      <a:r>
+                        <a:rPr sz="1100" b="0" i="0">
+                          <a:solidFill>
+                            <a:srgbClr val="2B2F36"/>
+                          </a:solidFill>
+                          <a:latin typeface="Calibri"/>
+                        </a:rPr>
+                        <a:t>7.2</a:t>
+                      </a:r>
+                    </a:p>
+                  </a:txBody>
+                  <a:tcPr anchor="ctr">
+                    <a:solidFill>
+                      <a:srgbClr val="FFFFFF"/>
+                    </a:solidFill>
+                  </a:tcPr>
+                </a:tc>
+              </a:tr>
+              <a:tr h="301752">
+                <a:tc>
+                  <a:txBody>
+                    <a:bodyPr/>
+                    <a:lstStyle/>
+                    <a:p>
+                      <a:pPr algn="l"/>
+                      <a:r>
+                        <a:rPr sz="1100" b="0" i="0">
+                          <a:solidFill>
+                            <a:srgbClr val="2B2F36"/>
+                          </a:solidFill>
+                          <a:latin typeface="Calibri"/>
+                        </a:rPr>
+                        <a:t>rain pants</a:t>
+                      </a:r>
+                    </a:p>
+                  </a:txBody>
+                  <a:tcPr anchor="ctr">
+                    <a:solidFill>
+                      <a:srgbClr val="F1F4F7"/>
+                    </a:solidFill>
+                  </a:tcPr>
+                </a:tc>
+                <a:tc>
+                  <a:txBody>
+                    <a:bodyPr/>
+                    <a:lstStyle/>
+                    <a:p>
+                      <a:pPr algn="r"/>
+                      <a:r>
+                        <a:rPr sz="1100" b="0" i="0">
+                          <a:solidFill>
+                            <a:srgbClr val="2B2F36"/>
+                          </a:solidFill>
+                          <a:latin typeface="Calibri"/>
+                        </a:rPr>
+                        <a:t>250</a:t>
+                      </a:r>
+                    </a:p>
+                  </a:txBody>
+                  <a:tcPr anchor="ctr">
+                    <a:solidFill>
+                      <a:srgbClr val="F1F4F7"/>
+                    </a:solidFill>
+                  </a:tcPr>
+                </a:tc>
+                <a:tc>
+                  <a:txBody>
+                    <a:bodyPr/>
+                    <a:lstStyle/>
+                    <a:p>
+                      <a:pPr algn="r"/>
+                      <a:r>
+                        <a:rPr sz="1100" b="0" i="0">
+                          <a:solidFill>
+                            <a:srgbClr val="2B2F36"/>
+                          </a:solidFill>
+                          <a:latin typeface="Calibri"/>
+                        </a:rPr>
+                        <a:t>6,136</a:t>
+                      </a:r>
+                    </a:p>
+                  </a:txBody>
+                  <a:tcPr anchor="ctr">
+                    <a:solidFill>
+                      <a:srgbClr val="F1F4F7"/>
+                    </a:solidFill>
+                  </a:tcPr>
+                </a:tc>
+                <a:tc>
+                  <a:txBody>
+                    <a:bodyPr/>
+                    <a:lstStyle/>
+                    <a:p>
+                      <a:pPr algn="r"/>
+                      <a:r>
+                        <a:rPr sz="1100" b="0" i="0">
+                          <a:solidFill>
+                            <a:srgbClr val="2B2F36"/>
+                          </a:solidFill>
+                          <a:latin typeface="Calibri"/>
+                        </a:rPr>
+                        <a:t>8.2</a:t>
+                      </a:r>
+                    </a:p>
+                  </a:txBody>
+                  <a:tcPr anchor="ctr">
+                    <a:solidFill>
+                      <a:srgbClr val="F1F4F7"/>
+                    </a:solidFill>
+                  </a:tcPr>
+                </a:tc>
+              </a:tr>
+              <a:tr h="301752">
+                <a:tc>
+                  <a:txBody>
+                    <a:bodyPr/>
+                    <a:lstStyle/>
+                    <a:p>
+                      <a:pPr algn="l"/>
+                      <a:r>
+                        <a:rPr sz="1100" b="0" i="0">
+                          <a:solidFill>
+                            <a:srgbClr val="2B2F36"/>
+                          </a:solidFill>
+                          <a:latin typeface="Calibri"/>
+                        </a:rPr>
+                        <a:t>hiking backpack 40l</a:t>
+                      </a:r>
+                    </a:p>
+                  </a:txBody>
+                  <a:tcPr anchor="ctr">
+                    <a:solidFill>
+                      <a:srgbClr val="FFFFFF"/>
+                    </a:solidFill>
+                  </a:tcPr>
+                </a:tc>
+                <a:tc>
+                  <a:txBody>
+                    <a:bodyPr/>
+                    <a:lstStyle/>
+                    <a:p>
+                      <a:pPr algn="r"/>
+                      <a:r>
+                        <a:rPr sz="1100" b="0" i="0">
+                          <a:solidFill>
+                            <a:srgbClr val="2B2F36"/>
+                          </a:solidFill>
+                          <a:latin typeface="Calibri"/>
+                        </a:rPr>
+                        <a:t>234</a:t>
+                      </a:r>
+                    </a:p>
+                  </a:txBody>
+                  <a:tcPr anchor="ctr">
+                    <a:solidFill>
+                      <a:srgbClr val="FFFFFF"/>
+                    </a:solidFill>
+                  </a:tcPr>
+                </a:tc>
+                <a:tc>
+                  <a:txBody>
+                    <a:bodyPr/>
+                    <a:lstStyle/>
+                    <a:p>
+                      <a:pPr algn="r"/>
+                      <a:r>
+                        <a:rPr sz="1100" b="0" i="0">
+                          <a:solidFill>
+                            <a:srgbClr val="2B2F36"/>
+                          </a:solidFill>
+                          <a:latin typeface="Calibri"/>
+                        </a:rPr>
+                        <a:t>5,990</a:t>
+                      </a:r>
+                    </a:p>
+                  </a:txBody>
+                  <a:tcPr anchor="ctr">
+                    <a:solidFill>
+                      <a:srgbClr val="FFFFFF"/>
+                    </a:solidFill>
+                  </a:tcPr>
+                </a:tc>
+                <a:tc>
+                  <a:txBody>
+                    <a:bodyPr/>
+                    <a:lstStyle/>
+                    <a:p>
+                      <a:pPr algn="r"/>
+                      <a:r>
+                        <a:rPr sz="1100" b="0" i="0">
+                          <a:solidFill>
+                            <a:srgbClr val="2B2F36"/>
+                          </a:solidFill>
+                          <a:latin typeface="Calibri"/>
+                        </a:rPr>
+                        <a:t>8.6</a:t>
+                      </a:r>
+                    </a:p>
+                  </a:txBody>
+                  <a:tcPr anchor="ctr">
+                    <a:solidFill>
+                      <a:srgbClr val="FFFFFF"/>
+                    </a:solidFill>
+                  </a:tcPr>
+                </a:tc>
+              </a:tr>
+            </a:tbl>
+          </a:graphicData>
+        </a:graphic>
+      </p:graphicFrame>
+      <p:sp>
+        <p:nvSpPr>
+          <p:cNvPr id="9" name="TextBox 8"/>
+          <p:cNvSpPr txBox="1"/>
+          <p:nvPr/>
+        </p:nvSpPr>
+        <p:spPr>
+          <a:xfrm>
+            <a:off x="8001000" y="3566160"/>
+            <a:ext cx="3520440" cy="320040"/>
+          </a:xfrm>
+          <a:prstGeom prst="rect">
+            <a:avLst/>
+          </a:prstGeom>
+          <a:noFill/>
+        </p:spPr>
+        <p:txBody>
+          <a:bodyPr wrap="square">
+            <a:spAutoFit/>
+          </a:bodyPr>
+          <a:lstStyle/>
+          <a:p>
+            <a:pPr>
+              <a:spcAft>
+                <a:spcPts val="0"/>
+              </a:spcAft>
+            </a:pPr>
+            <a:r>
+              <a:rPr sz="1500" b="0" i="0">
+                <a:solidFill>
+                  <a:srgbClr val="1F3A5F"/>
+                </a:solidFill>
+                <a:latin typeface="Calibri"/>
+              </a:rPr>
+              <a:t>Top pages</a:t>
+            </a:r>
+          </a:p>
+        </p:txBody>
+      </p:sp>
+      <p:graphicFrame>
+        <p:nvGraphicFramePr>
+          <p:cNvPr id="10" name="Table 9"/>
+          <p:cNvGraphicFramePr>
+            <a:graphicFrameLocks noGrp="1"/>
+          </p:cNvGraphicFramePr>
+          <p:nvPr/>
+        </p:nvGraphicFramePr>
+        <p:xfrm>
+          <a:off x="8001000" y="3886200"/>
+          <a:ext cx="3520439" cy="1810512"/>
+        </p:xfrm>
+        <a:graphic>
+          <a:graphicData uri="http://schemas.openxmlformats.org/drawingml/2006/table">
+            <a:tbl>
+              <a:tblPr firstRow="1" bandRow="1">
+                <a:tableStyleId>{5C22544A-7EE6-4342-B048-85BDC9FD1C3A}</a:tableStyleId>
+              </a:tblPr>
+              <a:tblGrid>
+                <a:gridCol w="1866257"/>
+                <a:gridCol w="508979"/>
+                <a:gridCol w="678639"/>
+                <a:gridCol w="466564"/>
+              </a:tblGrid>
+              <a:tr h="301752">
+                <a:tc>
+                  <a:txBody>
+                    <a:bodyPr/>
+                    <a:lstStyle/>
+                    <a:p>
+                      <a:pPr algn="l"/>
+                      <a:r>
+                        <a:rPr sz="1100" b="1" i="0">
+                          <a:solidFill>
+                            <a:srgbClr val="FFFFFF"/>
+                          </a:solidFill>
+                          <a:latin typeface="Calibri"/>
+                        </a:rPr>
+                        <a:t>Page</a:t>
+                      </a:r>
+                    </a:p>
+                  </a:txBody>
+                  <a:tcPr anchor="ctr">
+                    <a:solidFill>
+                      <a:srgbClr val="1F3A5F"/>
+                    </a:solidFill>
+                  </a:tcPr>
+                </a:tc>
+                <a:tc>
+                  <a:txBody>
+                    <a:bodyPr/>
+                    <a:lstStyle/>
+                    <a:p>
+                      <a:pPr algn="r"/>
+                      <a:r>
+                        <a:rPr sz="1100" b="1" i="0">
+                          <a:solidFill>
+                            <a:srgbClr val="FFFFFF"/>
+                          </a:solidFill>
+                          <a:latin typeface="Calibri"/>
+                        </a:rPr>
+                        <a:t>Clicks</a:t>
+                      </a:r>
+                    </a:p>
+                  </a:txBody>
+                  <a:tcPr anchor="ctr">
+                    <a:solidFill>
+                      <a:srgbClr val="1F3A5F"/>
+                    </a:solidFill>
+                  </a:tcPr>
+                </a:tc>
+                <a:tc>
+                  <a:txBody>
+                    <a:bodyPr/>
+                    <a:lstStyle/>
+                    <a:p>
+                      <a:pPr algn="r"/>
+                      <a:r>
+                        <a:rPr sz="1100" b="1" i="0">
+                          <a:solidFill>
+                            <a:srgbClr val="FFFFFF"/>
+                          </a:solidFill>
+                          <a:latin typeface="Calibri"/>
+                        </a:rPr>
+                        <a:t>Impr.</a:t>
+                      </a:r>
+                    </a:p>
+                  </a:txBody>
+                  <a:tcPr anchor="ctr">
+                    <a:solidFill>
+                      <a:srgbClr val="1F3A5F"/>
+                    </a:solidFill>
+                  </a:tcPr>
+                </a:tc>
+                <a:tc>
+                  <a:txBody>
+                    <a:bodyPr/>
+                    <a:lstStyle/>
+                    <a:p>
+                      <a:pPr algn="r"/>
+                      <a:r>
+                        <a:rPr sz="1100" b="1" i="0">
+                          <a:solidFill>
+                            <a:srgbClr val="FFFFFF"/>
+                          </a:solidFill>
+                          <a:latin typeface="Calibri"/>
+                        </a:rPr>
+                        <a:t>Pos.</a:t>
+                      </a:r>
+                    </a:p>
+                  </a:txBody>
+                  <a:tcPr anchor="ctr">
+                    <a:solidFill>
+                      <a:srgbClr val="1F3A5F"/>
+                    </a:solidFill>
+                  </a:tcPr>
+                </a:tc>
+              </a:tr>
+              <a:tr h="301752">
+                <a:tc>
+                  <a:txBody>
+                    <a:bodyPr/>
+                    <a:lstStyle/>
+                    <a:p>
+                      <a:pPr algn="l"/>
+                      <a:r>
+                        <a:rPr sz="1100" b="0" i="0">
+                          <a:solidFill>
+                            <a:srgbClr val="2B2F36"/>
+                          </a:solidFill>
+                          <a:latin typeface="Calibri"/>
+                        </a:rPr>
+                        <a:t>/</a:t>
+                      </a:r>
+                    </a:p>
+                  </a:txBody>
+                  <a:tcPr anchor="ctr">
+                    <a:solidFill>
+                      <a:srgbClr val="FFFFFF"/>
+                    </a:solidFill>
+                  </a:tcPr>
+                </a:tc>
+                <a:tc>
+                  <a:txBody>
+                    <a:bodyPr/>
+                    <a:lstStyle/>
+                    <a:p>
+                      <a:pPr algn="r"/>
+                      <a:r>
+                        <a:rPr sz="1100" b="0" i="0">
+                          <a:solidFill>
+                            <a:srgbClr val="2B2F36"/>
+                          </a:solidFill>
+                          <a:latin typeface="Calibri"/>
+                        </a:rPr>
+                        <a:t>632</a:t>
+                      </a:r>
+                    </a:p>
+                  </a:txBody>
+                  <a:tcPr anchor="ctr">
+                    <a:solidFill>
+                      <a:srgbClr val="FFFFFF"/>
+                    </a:solidFill>
+                  </a:tcPr>
+                </a:tc>
+                <a:tc>
+                  <a:txBody>
+                    <a:bodyPr/>
+                    <a:lstStyle/>
+                    <a:p>
+                      <a:pPr algn="r"/>
+                      <a:r>
+                        <a:rPr sz="1100" b="0" i="0">
+                          <a:solidFill>
+                            <a:srgbClr val="2B2F36"/>
+                          </a:solidFill>
+                          <a:latin typeface="Calibri"/>
+                        </a:rPr>
+                        <a:t>15,379</a:t>
+                      </a:r>
+                    </a:p>
+                  </a:txBody>
+                  <a:tcPr anchor="ctr">
+                    <a:solidFill>
+                      <a:srgbClr val="FFFFFF"/>
+                    </a:solidFill>
+                  </a:tcPr>
+                </a:tc>
+                <a:tc>
+                  <a:txBody>
+                    <a:bodyPr/>
+                    <a:lstStyle/>
+                    <a:p>
+                      <a:pPr algn="r"/>
+                      <a:r>
+                        <a:rPr sz="1100" b="0" i="0">
+                          <a:solidFill>
+                            <a:srgbClr val="2B2F36"/>
+                          </a:solidFill>
+                          <a:latin typeface="Calibri"/>
+                        </a:rPr>
+                        <a:t>7.0</a:t>
+                      </a:r>
+                    </a:p>
+                  </a:txBody>
+                  <a:tcPr anchor="ctr">
+                    <a:solidFill>
+                      <a:srgbClr val="FFFFFF"/>
+                    </a:solidFill>
+                  </a:tcPr>
+                </a:tc>
+              </a:tr>
+              <a:tr h="301752">
+                <a:tc>
+                  <a:txBody>
+                    <a:bodyPr/>
+                    <a:lstStyle/>
+                    <a:p>
+                      <a:pPr algn="l"/>
+                      <a:r>
+                        <a:rPr sz="1100" b="0" i="0">
+                          <a:solidFill>
+                            <a:srgbClr val="2B2F36"/>
+                          </a:solidFill>
+                          <a:latin typeface="Calibri"/>
+                        </a:rPr>
+                        <a:t>/sale</a:t>
+                      </a:r>
+                    </a:p>
+                  </a:txBody>
+                  <a:tcPr anchor="ctr">
+                    <a:solidFill>
+                      <a:srgbClr val="F1F4F7"/>
+                    </a:solidFill>
+                  </a:tcPr>
+                </a:tc>
+                <a:tc>
+                  <a:txBody>
+                    <a:bodyPr/>
+                    <a:lstStyle/>
+                    <a:p>
+                      <a:pPr algn="r"/>
+                      <a:r>
+                        <a:rPr sz="1100" b="0" i="0">
+                          <a:solidFill>
+                            <a:srgbClr val="2B2F36"/>
+                          </a:solidFill>
+                          <a:latin typeface="Calibri"/>
+                        </a:rPr>
+                        <a:t>483</a:t>
+                      </a:r>
+                    </a:p>
+                  </a:txBody>
+                  <a:tcPr anchor="ctr">
+                    <a:solidFill>
+                      <a:srgbClr val="F1F4F7"/>
+                    </a:solidFill>
+                  </a:tcPr>
+                </a:tc>
+                <a:tc>
+                  <a:txBody>
+                    <a:bodyPr/>
+                    <a:lstStyle/>
+                    <a:p>
+                      <a:pPr algn="r"/>
+                      <a:r>
+                        <a:rPr sz="1100" b="0" i="0">
+                          <a:solidFill>
+                            <a:srgbClr val="2B2F36"/>
+                          </a:solidFill>
+                          <a:latin typeface="Calibri"/>
+                        </a:rPr>
+                        <a:t>11,305</a:t>
+                      </a:r>
+                    </a:p>
+                  </a:txBody>
+                  <a:tcPr anchor="ctr">
+                    <a:solidFill>
+                      <a:srgbClr val="F1F4F7"/>
+                    </a:solidFill>
+                  </a:tcPr>
+                </a:tc>
+                <a:tc>
+                  <a:txBody>
+                    <a:bodyPr/>
+                    <a:lstStyle/>
+                    <a:p>
+                      <a:pPr algn="r"/>
+                      <a:r>
+                        <a:rPr sz="1100" b="0" i="0">
+                          <a:solidFill>
+                            <a:srgbClr val="2B2F36"/>
+                          </a:solidFill>
+                          <a:latin typeface="Calibri"/>
+                        </a:rPr>
+                        <a:t>9.2</a:t>
+                      </a:r>
+                    </a:p>
+                  </a:txBody>
+                  <a:tcPr anchor="ctr">
+                    <a:solidFill>
+                      <a:srgbClr val="F1F4F7"/>
+                    </a:solidFill>
+                  </a:tcPr>
+                </a:tc>
+              </a:tr>
+              <a:tr h="301752">
+                <a:tc>
+                  <a:txBody>
+                    <a:bodyPr/>
+                    <a:lstStyle/>
+                    <a:p>
+                      <a:pPr algn="l"/>
+                      <a:r>
+                        <a:rPr sz="1100" b="0" i="0">
+                          <a:solidFill>
+                            <a:srgbClr val="2B2F36"/>
+                          </a:solidFill>
+                          <a:latin typeface="Calibri"/>
+                        </a:rPr>
+                        <a:t>/socks</a:t>
+                      </a:r>
+                    </a:p>
+                  </a:txBody>
+                  <a:tcPr anchor="ctr">
+                    <a:solidFill>
+                      <a:srgbClr val="FFFFFF"/>
+                    </a:solidFill>
+                  </a:tcPr>
+                </a:tc>
+                <a:tc>
+                  <a:txBody>
+                    <a:bodyPr/>
+                    <a:lstStyle/>
+                    <a:p>
+                      <a:pPr algn="r"/>
+                      <a:r>
+                        <a:rPr sz="1100" b="0" i="0">
+                          <a:solidFill>
+                            <a:srgbClr val="2B2F36"/>
+                          </a:solidFill>
+                          <a:latin typeface="Calibri"/>
+                        </a:rPr>
+                        <a:t>435</a:t>
+                      </a:r>
+                    </a:p>
+                  </a:txBody>
+                  <a:tcPr anchor="ctr">
+                    <a:solidFill>
+                      <a:srgbClr val="FFFFFF"/>
+                    </a:solidFill>
+                  </a:tcPr>
+                </a:tc>
+                <a:tc>
+                  <a:txBody>
+                    <a:bodyPr/>
+                    <a:lstStyle/>
+                    <a:p>
+                      <a:pPr algn="r"/>
+                      <a:r>
+                        <a:rPr sz="1100" b="0" i="0">
+                          <a:solidFill>
+                            <a:srgbClr val="2B2F36"/>
+                          </a:solidFill>
+                          <a:latin typeface="Calibri"/>
+                        </a:rPr>
+                        <a:t>10,585</a:t>
+                      </a:r>
+                    </a:p>
+                  </a:txBody>
+                  <a:tcPr anchor="ctr">
+                    <a:solidFill>
+                      <a:srgbClr val="FFFFFF"/>
+                    </a:solidFill>
+                  </a:tcPr>
+                </a:tc>
+                <a:tc>
+                  <a:txBody>
+                    <a:bodyPr/>
+                    <a:lstStyle/>
+                    <a:p>
+                      <a:pPr algn="r"/>
+                      <a:r>
+                        <a:rPr sz="1100" b="0" i="0">
+                          <a:solidFill>
+                            <a:srgbClr val="2B2F36"/>
+                          </a:solidFill>
+                          <a:latin typeface="Calibri"/>
+                        </a:rPr>
+                        <a:t>8.2</a:t>
+                      </a:r>
+                    </a:p>
+                  </a:txBody>
+                  <a:tcPr anchor="ctr">
+                    <a:solidFill>
+                      <a:srgbClr val="FFFFFF"/>
+                    </a:solidFill>
+                  </a:tcPr>
+                </a:tc>
+              </a:tr>
+              <a:tr h="301752">
+                <a:tc>
+                  <a:txBody>
+                    <a:bodyPr/>
+                    <a:lstStyle/>
+                    <a:p>
+                      <a:pPr algn="l"/>
+                      <a:r>
+                        <a:rPr sz="1100" b="0" i="0">
+                          <a:solidFill>
+                            <a:srgbClr val="2B2F36"/>
+                          </a:solidFill>
+                          <a:latin typeface="Calibri"/>
+                        </a:rPr>
+                        <a:t>/blog/choose-hiking-boots</a:t>
+                      </a:r>
+                    </a:p>
+                  </a:txBody>
+                  <a:tcPr anchor="ctr">
+                    <a:solidFill>
+                      <a:srgbClr val="F1F4F7"/>
+                    </a:solidFill>
+                  </a:tcPr>
+                </a:tc>
+                <a:tc>
+                  <a:txBody>
+                    <a:bodyPr/>
+                    <a:lstStyle/>
+                    <a:p>
+                      <a:pPr algn="r"/>
+                      <a:r>
+                        <a:rPr sz="1100" b="0" i="0">
+                          <a:solidFill>
+                            <a:srgbClr val="2B2F36"/>
+                          </a:solidFill>
+                          <a:latin typeface="Calibri"/>
+                        </a:rPr>
+                        <a:t>369</a:t>
+                      </a:r>
+                    </a:p>
+                  </a:txBody>
+                  <a:tcPr anchor="ctr">
+                    <a:solidFill>
+                      <a:srgbClr val="F1F4F7"/>
+                    </a:solidFill>
+                  </a:tcPr>
+                </a:tc>
+                <a:tc>
+                  <a:txBody>
+                    <a:bodyPr/>
+                    <a:lstStyle/>
+                    <a:p>
+                      <a:pPr algn="r"/>
+                      <a:r>
+                        <a:rPr sz="1100" b="0" i="0">
+                          <a:solidFill>
+                            <a:srgbClr val="2B2F36"/>
+                          </a:solidFill>
+                          <a:latin typeface="Calibri"/>
+                        </a:rPr>
+                        <a:t>8,994</a:t>
+                      </a:r>
+                    </a:p>
+                  </a:txBody>
+                  <a:tcPr anchor="ctr">
+                    <a:solidFill>
+                      <a:srgbClr val="F1F4F7"/>
+                    </a:solidFill>
+                  </a:tcPr>
+                </a:tc>
+                <a:tc>
+                  <a:txBody>
+                    <a:bodyPr/>
+                    <a:lstStyle/>
+                    <a:p>
+                      <a:pPr algn="r"/>
+                      <a:r>
+                        <a:rPr sz="1100" b="0" i="0">
+                          <a:solidFill>
+                            <a:srgbClr val="2B2F36"/>
+                          </a:solidFill>
+                          <a:latin typeface="Calibri"/>
+                        </a:rPr>
+                        <a:t>7.6</a:t>
+                      </a:r>
+                    </a:p>
+                  </a:txBody>
+                  <a:tcPr anchor="ctr">
+                    <a:solidFill>
+                      <a:srgbClr val="F1F4F7"/>
+                    </a:solidFill>
+                  </a:tcPr>
+                </a:tc>
+              </a:tr>
+              <a:tr h="301752">
+                <a:tc>
+                  <a:txBody>
+                    <a:bodyPr/>
+                    <a:lstStyle/>
+                    <a:p>
+                      <a:pPr algn="l"/>
+                      <a:r>
+                        <a:rPr sz="1100" b="0" i="0">
+                          <a:solidFill>
+                            <a:srgbClr val="2B2F36"/>
+                          </a:solidFill>
+                          <a:latin typeface="Calibri"/>
+                        </a:rPr>
+                        <a:t>/stoves</a:t>
+                      </a:r>
+                    </a:p>
+                  </a:txBody>
+                  <a:tcPr anchor="ctr">
+                    <a:solidFill>
+                      <a:srgbClr val="FFFFFF"/>
+                    </a:solidFill>
+                  </a:tcPr>
+                </a:tc>
+                <a:tc>
+                  <a:txBody>
+                    <a:bodyPr/>
+                    <a:lstStyle/>
+                    <a:p>
+                      <a:pPr algn="r"/>
+                      <a:r>
+                        <a:rPr sz="1100" b="0" i="0">
+                          <a:solidFill>
+                            <a:srgbClr val="2B2F36"/>
+                          </a:solidFill>
+                          <a:latin typeface="Calibri"/>
+                        </a:rPr>
+                        <a:t>351</a:t>
+                      </a:r>
+                    </a:p>
+                  </a:txBody>
+                  <a:tcPr anchor="ctr">
+                    <a:solidFill>
+                      <a:srgbClr val="FFFFFF"/>
+                    </a:solidFill>
+                  </a:tcPr>
+                </a:tc>
+                <a:tc>
+                  <a:txBody>
+                    <a:bodyPr/>
+                    <a:lstStyle/>
+                    <a:p>
+                      <a:pPr algn="r"/>
+                      <a:r>
+                        <a:rPr sz="1100" b="0" i="0">
+                          <a:solidFill>
+                            <a:srgbClr val="2B2F36"/>
+                          </a:solidFill>
+                          <a:latin typeface="Calibri"/>
+                        </a:rPr>
+                        <a:t>8,936</a:t>
+                      </a:r>
+                    </a:p>
+                  </a:txBody>
+                  <a:tcPr anchor="ctr">
+                    <a:solidFill>
+                      <a:srgbClr val="FFFFFF"/>
+                    </a:solidFill>
+                  </a:tcPr>
+                </a:tc>
+                <a:tc>
+                  <a:txBody>
+                    <a:bodyPr/>
+                    <a:lstStyle/>
+                    <a:p>
+                      <a:pPr algn="r"/>
+                      <a:r>
+                        <a:rPr sz="1100" b="0" i="0">
+                          <a:solidFill>
+                            <a:srgbClr val="2B2F36"/>
+                          </a:solidFill>
+                          <a:latin typeface="Calibri"/>
+                        </a:rPr>
+                        <a:t>8.6</a:t>
+                      </a:r>
+                    </a:p>
+                  </a:txBody>
+                  <a:tcPr anchor="ctr">
+                    <a:solidFill>
+                      <a:srgbClr val="FFFFFF"/>
+                    </a:solidFill>
+                  </a:tcPr>
+                </a:tc>
+              </a:tr>
+            </a:tbl>
+          </a:graphicData>
+        </a:graphic>
+      </p:graphicFrame>
+      <p:sp>
+        <p:nvSpPr>
+          <p:cNvPr id="11" name="TextBox 10"/>
           <p:cNvSpPr txBox="1"/>
           <p:nvPr/>
         </p:nvSpPr>
@@ -10748,7 +16967,7 @@
                 </a:solidFill>
                 <a:latin typeface="Calibri"/>
               </a:rPr>
-              <a:t>For each source, days with data, days with nothing to report and days with no data add up to the days in the month.</a:t>
+              <a:t>Source: Google Search Console. Search days are Pacific time, store days follow UTC. A lower average position is nearer the top of the results.</a:t>
             </a:r>
           </a:p>
           <a:p>
@@ -10764,7 +16983,376 @@
                 </a:solidFill>
                 <a:latin typeface="Calibri"/>
               </a:rPr>
-              <a:t>A day with nothing to report is one where a data pull ran and found none. A day with no data is one no data pull covered.</a:t>
+              <a:t>Day of the month across. Left: search clicks. Right: search impressions. The grey line is the month before. A dot on the zero line is a day with no search traffic, on either line; a break with an X is a day with no data (Oct 9, Oct 10).</a:t>
+            </a:r>
+          </a:p>
+          <a:p>
+            <a:pPr>
+              <a:spcAft>
+                <a:spcPts val="0"/>
+              </a:spcAft>
+            </a:pPr>
+            <a:r>
+              <a:rPr sz="1100" b="0" i="0">
+                <a:solidFill>
+                  <a:srgbClr val="5B6470"/>
+                </a:solidFill>
+                <a:latin typeface="Calibri"/>
+              </a:rPr>
+              <a:t>Top queries and pages add up each day's top rows over 29 days, so a key outside a day's top rows is not counted: they are lower bounds, not totals.</a:t>
+            </a:r>
+          </a:p>
+          <a:p>
+            <a:pPr>
+              <a:spcAft>
+                <a:spcPts val="0"/>
+              </a:spcAft>
+            </a:pPr>
+            <a:r>
+              <a:rPr sz="1100" b="0" i="0">
+                <a:solidFill>
+                  <a:srgbClr val="5B6470"/>
+                </a:solidFill>
+                <a:latin typeface="Calibri"/>
+              </a:rPr>
+              <a:t>Provisional days (Search Console is still collecting them): Oct 30, Oct 31.</a:t>
+            </a:r>
+          </a:p>
+        </p:txBody>
+      </p:sp>
+    </p:spTree>
+  </p:cSld>
+  <p:clrMapOvr>
+    <a:masterClrMapping/>
+  </p:clrMapOvr>
+</p:sld>
+</file>
+
+<file path=ppt/slides/slide9.xml><?xml version="1.0" encoding="utf-8"?>
+<p:sld xmlns:a="http://schemas.openxmlformats.org/drawingml/2006/main" xmlns:p="http://schemas.openxmlformats.org/presentationml/2006/main" xmlns:r="http://schemas.openxmlformats.org/officeDocument/2006/relationships">
+  <p:cSld>
+    <p:spTree>
+      <p:nvGrpSpPr>
+        <p:cNvPr id="1" name=""/>
+        <p:cNvGrpSpPr/>
+        <p:nvPr/>
+      </p:nvGrpSpPr>
+      <p:grpSpPr/>
+      <p:sp>
+        <p:nvSpPr>
+          <p:cNvPr id="2" name="Title 1"/>
+          <p:cNvSpPr>
+            <a:spLocks noGrp="1"/>
+          </p:cNvSpPr>
+          <p:nvPr>
+            <p:ph type="title"/>
+          </p:nvPr>
+        </p:nvSpPr>
+        <p:spPr>
+          <a:xfrm>
+            <a:off x="548640" y="274320"/>
+            <a:ext cx="11094415" cy="1005840"/>
+          </a:xfrm>
+        </p:spPr>
+        <p:txBody>
+          <a:bodyPr wrap="square" anchor="ctr"/>
+          <a:lstStyle/>
+          <a:p>
+            <a:pPr algn="l"/>
+            <a:r>
+              <a:rPr sz="2400" b="1" i="0">
+                <a:solidFill>
+                  <a:srgbClr val="1F3A5F"/>
+                </a:solidFill>
+                <a:latin typeface="Calibri"/>
+              </a:rPr>
+              <a:t>October refunds total is 27.1% above September, but October is missing 2 days: per reported day it is up 31.5%</a:t>
+            </a:r>
+          </a:p>
+        </p:txBody>
+      </p:sp>
+      <p:sp>
+        <p:nvSpPr>
+          <p:cNvPr id="3" name="TextBox 2"/>
+          <p:cNvSpPr txBox="1"/>
+          <p:nvPr/>
+        </p:nvSpPr>
+        <p:spPr>
+          <a:xfrm>
+            <a:off x="548640" y="1463040"/>
+            <a:ext cx="11094415" cy="4389120"/>
+          </a:xfrm>
+          <a:prstGeom prst="rect">
+            <a:avLst/>
+          </a:prstGeom>
+          <a:noFill/>
+        </p:spPr>
+        <p:txBody>
+          <a:bodyPr wrap="square">
+            <a:spAutoFit/>
+          </a:bodyPr>
+          <a:lstStyle/>
+          <a:p>
+            <a:pPr>
+              <a:spcAft>
+                <a:spcPts val="400"/>
+              </a:spcAft>
+            </a:pPr>
+            <a:r>
+              <a:rPr sz="1200" b="0" i="0">
+                <a:solidFill>
+                  <a:srgbClr val="2B2F36"/>
+                </a:solidFill>
+                <a:latin typeface="Calibri"/>
+              </a:rPr>
+              <a:t>Net sales total was $40,249.02 in October, 1.8% below September ($40,966.11), but October is missing 2 days: per reported day, net sales are up 1.6% ($1,387.90 against $1,365.54).</a:t>
+            </a:r>
+          </a:p>
+          <a:p>
+            <a:pPr>
+              <a:spcAft>
+                <a:spcPts val="400"/>
+              </a:spcAft>
+            </a:pPr>
+            <a:r>
+              <a:rPr sz="1200" b="0" i="0">
+                <a:solidFill>
+                  <a:srgbClr val="2B2F36"/>
+                </a:solidFill>
+                <a:latin typeface="Calibri"/>
+              </a:rPr>
+              <a:t>Orders total was 607 in October, 3.1% above September (589), but October is missing 2 days: per reported day, orders are up 6.6% (20.93 against 19.63).</a:t>
+            </a:r>
+          </a:p>
+          <a:p>
+            <a:pPr>
+              <a:spcAft>
+                <a:spcPts val="400"/>
+              </a:spcAft>
+            </a:pPr>
+            <a:r>
+              <a:rPr sz="1200" b="0" i="0">
+                <a:solidFill>
+                  <a:srgbClr val="2B2F36"/>
+                </a:solidFill>
+                <a:latin typeface="Calibri"/>
+              </a:rPr>
+              <a:t>The biggest move was Refunds, 27.1% above September in total, but October is missing 2 days: per reported day it is up 31.5%.</a:t>
+            </a:r>
+          </a:p>
+          <a:p>
+            <a:pPr>
+              <a:spcAft>
+                <a:spcPts val="400"/>
+              </a:spcAft>
+            </a:pPr>
+            <a:r>
+              <a:rPr sz="1200" b="0" i="0">
+                <a:solidFill>
+                  <a:srgbClr val="2B2F36"/>
+                </a:solidFill>
+                <a:latin typeface="Calibri"/>
+              </a:rPr>
+              <a:t>The best day was Oct 31 with net sales of $2,187.62.</a:t>
+            </a:r>
+          </a:p>
+          <a:p>
+            <a:pPr>
+              <a:spcAft>
+                <a:spcPts val="400"/>
+              </a:spcAft>
+            </a:pPr>
+            <a:r>
+              <a:rPr sz="1200" b="0" i="0">
+                <a:solidFill>
+                  <a:srgbClr val="2B2F36"/>
+                </a:solidFill>
+                <a:latin typeface="Calibri"/>
+              </a:rPr>
+              <a:t>2 days have no data (Oct 14, Oct 15), so the totals are understated.</a:t>
+            </a:r>
+          </a:p>
+          <a:p>
+            <a:pPr>
+              <a:spcAft>
+                <a:spcPts val="400"/>
+              </a:spcAft>
+            </a:pPr>
+            <a:r>
+              <a:rPr sz="1200" b="0" i="0">
+                <a:solidFill>
+                  <a:srgbClr val="2B2F36"/>
+                </a:solidFill>
+                <a:latin typeface="Calibri"/>
+              </a:rPr>
+              <a:t>Sessions total was 21,812 in October, 8.6% below September (23,876), but October is missing 3 days of website data: per reported day, sessions are down 2.1% (779.00 against 795.87).</a:t>
+            </a:r>
+          </a:p>
+          <a:p>
+            <a:pPr>
+              <a:spcAft>
+                <a:spcPts val="400"/>
+              </a:spcAft>
+            </a:pPr>
+            <a:r>
+              <a:rPr sz="1200" b="0" i="0">
+                <a:solidFill>
+                  <a:srgbClr val="2B2F36"/>
+                </a:solidFill>
+                <a:latin typeface="Calibri"/>
+              </a:rPr>
+              <a:t>Order rate was 2.7% in October, up 8.4% from September (2.5%), and October is missing 3 days of website data.</a:t>
+            </a:r>
+          </a:p>
+          <a:p>
+            <a:pPr>
+              <a:spcAft>
+                <a:spcPts val="400"/>
+              </a:spcAft>
+            </a:pPr>
+            <a:r>
+              <a:rPr sz="1200" b="0" i="0">
+                <a:solidFill>
+                  <a:srgbClr val="2B2F36"/>
+                </a:solidFill>
+                <a:latin typeface="Calibri"/>
+              </a:rPr>
+              <a:t>3 days have no website data (Oct 3, Oct 4, Oct 5), so the website totals are understated.</a:t>
+            </a:r>
+          </a:p>
+          <a:p>
+            <a:pPr>
+              <a:spcAft>
+                <a:spcPts val="400"/>
+              </a:spcAft>
+            </a:pPr>
+            <a:r>
+              <a:rPr sz="1200" b="0" i="0">
+                <a:solidFill>
+                  <a:srgbClr val="2B2F36"/>
+                </a:solidFill>
+                <a:latin typeface="Calibri"/>
+              </a:rPr>
+              <a:t>Ad spend total was EUR 6,215.05 in October, 2.1% above September (EUR 6,088.26), but October is missing 2 days of ad data: per reported day, ad spend is up 5.6% (EUR 214.31 against EUR 202.94).</a:t>
+            </a:r>
+          </a:p>
+          <a:p>
+            <a:pPr>
+              <a:spcAft>
+                <a:spcPts val="400"/>
+              </a:spcAft>
+            </a:pPr>
+            <a:r>
+              <a:rPr sz="1200" b="0" i="0">
+                <a:solidFill>
+                  <a:srgbClr val="2B2F36"/>
+                </a:solidFill>
+                <a:latin typeface="Calibri"/>
+              </a:rPr>
+              <a:t>Return on ad spend was 2.89 in October, down 15.1% from September (3.40), and October is missing 2 days of ad data.</a:t>
+            </a:r>
+          </a:p>
+          <a:p>
+            <a:pPr>
+              <a:spcAft>
+                <a:spcPts val="400"/>
+              </a:spcAft>
+            </a:pPr>
+            <a:r>
+              <a:rPr sz="1200" b="0" i="0">
+                <a:solidFill>
+                  <a:srgbClr val="2B2F36"/>
+                </a:solidFill>
+                <a:latin typeface="Calibri"/>
+              </a:rPr>
+              <a:t>2 days have no ad data (Oct 20, Oct 21), so the ad totals are understated.</a:t>
+            </a:r>
+          </a:p>
+          <a:p>
+            <a:pPr>
+              <a:spcAft>
+                <a:spcPts val="400"/>
+              </a:spcAft>
+            </a:pPr>
+            <a:r>
+              <a:rPr sz="1200" b="0" i="0">
+                <a:solidFill>
+                  <a:srgbClr val="2B2F36"/>
+                </a:solidFill>
+                <a:latin typeface="Calibri"/>
+              </a:rPr>
+              <a:t>Search clicks total was 4,103 in October, 19.5% above September (3,433), but October is missing 2 days of search data: per reported day, search clicks are up 23.6% (141.48 against 114.43).</a:t>
+            </a:r>
+          </a:p>
+          <a:p>
+            <a:pPr>
+              <a:spcAft>
+                <a:spcPts val="400"/>
+              </a:spcAft>
+            </a:pPr>
+            <a:r>
+              <a:rPr sz="1200" b="0" i="0">
+                <a:solidFill>
+                  <a:srgbClr val="2B2F36"/>
+                </a:solidFill>
+                <a:latin typeface="Calibri"/>
+              </a:rPr>
+              <a:t>Average position was 8.6 in October, down 8.9% from September (9.4), and October is missing 2 days of search data.</a:t>
+            </a:r>
+          </a:p>
+          <a:p>
+            <a:pPr>
+              <a:spcAft>
+                <a:spcPts val="400"/>
+              </a:spcAft>
+            </a:pPr>
+            <a:r>
+              <a:rPr sz="1200" b="0" i="0">
+                <a:solidFill>
+                  <a:srgbClr val="2B2F36"/>
+                </a:solidFill>
+                <a:latin typeface="Calibri"/>
+              </a:rPr>
+              <a:t>2 days have no search data (Oct 9, Oct 10), so the search totals are understated.</a:t>
+            </a:r>
+          </a:p>
+        </p:txBody>
+      </p:sp>
+      <p:sp>
+        <p:nvSpPr>
+          <p:cNvPr id="4" name="TextBox 3"/>
+          <p:cNvSpPr txBox="1"/>
+          <p:nvPr/>
+        </p:nvSpPr>
+        <p:spPr>
+          <a:xfrm>
+            <a:off x="548640" y="5989320"/>
+            <a:ext cx="11094415" cy="731520"/>
+          </a:xfrm>
+          <a:prstGeom prst="rect">
+            <a:avLst/>
+          </a:prstGeom>
+          <a:noFill/>
+        </p:spPr>
+        <p:txBody>
+          <a:bodyPr wrap="square">
+            <a:spAutoFit/>
+          </a:bodyPr>
+          <a:lstStyle/>
+          <a:p>
+            <a:pPr>
+              <a:spcAft>
+                <a:spcPts val="0"/>
+              </a:spcAft>
+            </a:pPr>
+            <a:r>
+              <a:rPr sz="1100" b="0" i="0">
+                <a:solidFill>
+                  <a:srgbClr val="5B6470"/>
+                </a:solidFill>
+                <a:latin typeface="Calibri"/>
+              </a:rPr>
+              <a:t>Narrative written from the computed figures on the previous slides.</a:t>
             </a:r>
           </a:p>
         </p:txBody>

--- a/docs/monthly-report-sample/report_2026-10.pptx
+++ b/docs/monthly-report-sample/report_2026-10.pptx
@@ -17297,7 +17297,7 @@
                 </a:solidFill>
                 <a:latin typeface="Calibri"/>
               </a:rPr>
-              <a:t>Average position was 8.6 in October, down 8.9% from September (9.4), and October is missing 2 days of search data.</a:t>
+              <a:t>Average position was 8.6 in October, better by 8.9% (nearer the top) from September (9.4), and October is missing 2 days of search data.</a:t>
             </a:r>
           </a:p>
           <a:p>
